--- a/output/wordlabs-brisk-3day.pptx
+++ b/output/wordlabs-brisk-3day.pptx
@@ -4240,7 +4240,7 @@
                 <a:ea typeface="Calibri" pitchFamily="34" charset="-122"/>
                 <a:cs typeface="Calibri" pitchFamily="34" charset="-120"/>
               </a:rPr>
-              <a:t>"lively, quick, and energetic"</a:t>
+              <a:t>"quick, lively, and energetic"</a:t>
             </a:r>
             <a:endParaRPr lang="en-US" sz="2200" dirty="0"/>
           </a:p>
@@ -5288,7 +5288,7 @@
                 <a:ea typeface="Calibri" pitchFamily="34" charset="-122"/>
                 <a:cs typeface="Calibri" pitchFamily="34" charset="-120"/>
               </a:rPr>
-              <a:t>Word Labs  •  wordlabs.app  •  Root: 'brisk' = lively, quick, and energetic</a:t>
+              <a:t>Word Labs  •  wordlabs.app  •  Root: 'brisk' = quick, lively, and energetic</a:t>
             </a:r>
             <a:endParaRPr lang="en-US" sz="800" dirty="0"/>
           </a:p>
@@ -5928,7 +5928,7 @@
                 <a:ea typeface="Calibri" pitchFamily="34" charset="-122"/>
                 <a:cs typeface="Calibri" pitchFamily="34" charset="-120"/>
               </a:rPr>
-              <a:t>Word Labs  •  wordlabs.app  •  Root: 'brisk' = lively, quick, and energetic</a:t>
+              <a:t>Word Labs  •  wordlabs.app  •  Root: 'brisk' = quick, lively, and energetic</a:t>
             </a:r>
             <a:endParaRPr lang="en-US" sz="800" dirty="0"/>
           </a:p>
@@ -6040,7 +6040,7 @@
                 <a:ea typeface="Calibri" pitchFamily="34" charset="-122"/>
                 <a:cs typeface="Calibri" pitchFamily="34" charset="-120"/>
               </a:rPr>
-              <a:t>We walked </a:t>
+              <a:t>He walked </a:t>
             </a:r>
             <a:pPr algn="l" indent="0" marL="0">
               <a:buNone/>
@@ -6071,7 +6071,7 @@
                 <a:ea typeface="Calibri" pitchFamily="34" charset="-122"/>
                 <a:cs typeface="Calibri" pitchFamily="34" charset="-120"/>
               </a:rPr>
-              <a:t> to the park, enjoying the </a:t>
+              <a:t> through the park, enjoying the </a:t>
             </a:r>
             <a:pPr algn="l" indent="0" marL="0">
               <a:buNone/>
@@ -6716,7 +6716,7 @@
                 <a:ea typeface="Calibri" pitchFamily="34" charset="-122"/>
                 <a:cs typeface="Calibri" pitchFamily="34" charset="-120"/>
               </a:rPr>
-              <a:t>Word Labs  •  wordlabs.app  •  Root: 'brisk' = lively, quick, and energetic</a:t>
+              <a:t>Word Labs  •  wordlabs.app  •  Root: 'brisk' = quick, lively, and energetic</a:t>
             </a:r>
             <a:endParaRPr lang="en-US" sz="800" dirty="0"/>
           </a:p>
@@ -7543,7 +7543,7 @@
                 <a:ea typeface="Calibri" pitchFamily="34" charset="-122"/>
                 <a:cs typeface="Calibri" pitchFamily="34" charset="-120"/>
               </a:rPr>
-              <a:t>Word Labs  •  wordlabs.app  •  Root: 'brisk' = lively, quick, and energetic</a:t>
+              <a:t>Word Labs  •  wordlabs.app  •  Root: 'brisk' = quick, lively, and energetic</a:t>
             </a:r>
             <a:endParaRPr lang="en-US" sz="800" dirty="0"/>
           </a:p>
@@ -7972,7 +7972,7 @@
                 <a:ea typeface="Calibri" pitchFamily="34" charset="-122"/>
                 <a:cs typeface="Calibri" pitchFamily="34" charset="-120"/>
               </a:rPr>
-              <a:t>in a certain way (adverb)</a:t>
+              <a:t>in a way that is</a:t>
             </a:r>
             <a:endParaRPr lang="en-US" sz="850" dirty="0"/>
           </a:p>
@@ -8528,7 +8528,7 @@
                 <a:ea typeface="Calibri" pitchFamily="34" charset="-122"/>
                 <a:cs typeface="Calibri" pitchFamily="34" charset="-120"/>
               </a:rPr>
-              <a:t>Word Labs  •  wordlabs.app  •  Root: 'brisk' = lively, quick, and energetic</a:t>
+              <a:t>Word Labs  •  wordlabs.app  •  Root: 'brisk' = quick, lively, and energetic</a:t>
             </a:r>
             <a:endParaRPr lang="en-US" sz="800" dirty="0"/>
           </a:p>
@@ -8957,7 +8957,7 @@
                 <a:ea typeface="Calibri" pitchFamily="34" charset="-122"/>
                 <a:cs typeface="Calibri" pitchFamily="34" charset="-120"/>
               </a:rPr>
-              <a:t>in a certain way (adverb)</a:t>
+              <a:t>in a way that is</a:t>
             </a:r>
             <a:endParaRPr lang="en-US" sz="850" dirty="0"/>
           </a:p>
@@ -9645,7 +9645,7 @@
                 <a:ea typeface="Calibri" pitchFamily="34" charset="-122"/>
                 <a:cs typeface="Calibri" pitchFamily="34" charset="-120"/>
               </a:rPr>
-              <a:t>Word Labs  •  wordlabs.app  •  Root: 'brisk' = lively, quick, and energetic</a:t>
+              <a:t>Word Labs  •  wordlabs.app  •  Root: 'brisk' = quick, lively, and energetic</a:t>
             </a:r>
             <a:endParaRPr lang="en-US" sz="800" dirty="0"/>
           </a:p>
@@ -10074,7 +10074,7 @@
                 <a:ea typeface="Calibri" pitchFamily="34" charset="-122"/>
                 <a:cs typeface="Calibri" pitchFamily="34" charset="-120"/>
               </a:rPr>
-              <a:t>in a certain way (adverb)</a:t>
+              <a:t>in a way that is</a:t>
             </a:r>
             <a:endParaRPr lang="en-US" sz="850" dirty="0"/>
           </a:p>
@@ -11185,7 +11185,7 @@
                 <a:ea typeface="Calibri" pitchFamily="34" charset="-122"/>
                 <a:cs typeface="Calibri" pitchFamily="34" charset="-120"/>
               </a:rPr>
-              <a:t>Word Labs  •  wordlabs.app  •  Root: 'brisk' = lively, quick, and energetic</a:t>
+              <a:t>Word Labs  •  wordlabs.app  •  Root: 'brisk' = quick, lively, and energetic</a:t>
             </a:r>
             <a:endParaRPr lang="en-US" sz="800" dirty="0"/>
           </a:p>
@@ -12012,7 +12012,7 @@
                 <a:ea typeface="Calibri" pitchFamily="34" charset="-122"/>
                 <a:cs typeface="Calibri" pitchFamily="34" charset="-120"/>
               </a:rPr>
-              <a:t>Word Labs  •  wordlabs.app  •  Root: 'brisk' = lively, quick, and energetic</a:t>
+              <a:t>Word Labs  •  wordlabs.app  •  Root: 'brisk' = quick, lively, and energetic</a:t>
             </a:r>
             <a:endParaRPr lang="en-US" sz="800" dirty="0"/>
           </a:p>
@@ -12997,7 +12997,7 @@
                 <a:ea typeface="Calibri" pitchFamily="34" charset="-122"/>
                 <a:cs typeface="Calibri" pitchFamily="34" charset="-120"/>
               </a:rPr>
-              <a:t>Word Labs  •  wordlabs.app  •  Root: 'brisk' = lively, quick, and energetic</a:t>
+              <a:t>Word Labs  •  wordlabs.app  •  Root: 'brisk' = quick, lively, and energetic</a:t>
             </a:r>
             <a:endParaRPr lang="en-US" sz="800" dirty="0"/>
           </a:p>
@@ -14023,7 +14023,7 @@
                 <a:ea typeface="Calibri" pitchFamily="34" charset="-122"/>
                 <a:cs typeface="Calibri" pitchFamily="34" charset="-120"/>
               </a:rPr>
-              <a:t>Root 'brisk' — lively, quick, and energetic</a:t>
+              <a:t>Root 'brisk' — quick, lively, and energetic</a:t>
             </a:r>
             <a:endParaRPr lang="en-US" sz="1600" dirty="0"/>
           </a:p>
@@ -14379,7 +14379,7 @@
                 <a:ea typeface="Calibri" pitchFamily="34" charset="-122"/>
                 <a:cs typeface="Calibri" pitchFamily="34" charset="-120"/>
               </a:rPr>
-              <a:t>Word Labs  •  wordlabs.app  •  Root: 'brisk' = lively, quick, and energetic</a:t>
+              <a:t>Word Labs  •  wordlabs.app  •  Root: 'brisk' = quick, lively, and energetic</a:t>
             </a:r>
             <a:endParaRPr lang="en-US" sz="800" dirty="0"/>
           </a:p>
@@ -16267,7 +16267,7 @@
                 <a:ea typeface="Calibri" pitchFamily="34" charset="-122"/>
                 <a:cs typeface="Calibri" pitchFamily="34" charset="-120"/>
               </a:rPr>
-              <a:t>Word Labs  •  wordlabs.app  •  Root: 'brisk' = lively, quick, and energetic</a:t>
+              <a:t>Word Labs  •  wordlabs.app  •  Root: 'brisk' = quick, lively, and energetic</a:t>
             </a:r>
             <a:endParaRPr lang="en-US" sz="800" dirty="0"/>
           </a:p>
@@ -16601,7 +16601,7 @@
                 <a:ea typeface="Trebuchet MS" pitchFamily="34" charset="-122"/>
                 <a:cs typeface="Trebuchet MS" pitchFamily="34" charset="-120"/>
               </a:rPr>
-              <a:t>1</a:t>
+              <a:t>2</a:t>
             </a:r>
             <a:pPr algn="ctr" indent="0" marL="0">
               <a:buNone/>
@@ -16615,7 +16615,7 @@
                 <a:ea typeface="Trebuchet MS" pitchFamily="34" charset="-122"/>
                 <a:cs typeface="Trebuchet MS" pitchFamily="34" charset="-120"/>
               </a:rPr>
-              <a:t>  punctuation mark</a:t>
+              <a:t>  punctuation marks</a:t>
             </a:r>
             <a:endParaRPr lang="en-US" sz="2800" dirty="0"/>
           </a:p>
@@ -16907,7 +16907,7 @@
                 <a:ea typeface="Calibri" pitchFamily="34" charset="-122"/>
                 <a:cs typeface="Calibri" pitchFamily="34" charset="-120"/>
               </a:rPr>
-              <a:t>Word Labs  •  wordlabs.app  •  Root: 'brisk' = lively, quick, and energetic</a:t>
+              <a:t>Word Labs  •  wordlabs.app  •  Root: 'brisk' = quick, lively, and energetic</a:t>
             </a:r>
             <a:endParaRPr lang="en-US" sz="800" dirty="0"/>
           </a:p>
@@ -17036,7 +17036,7 @@
                 <a:ea typeface="Calibri" pitchFamily="34" charset="-122"/>
                 <a:cs typeface="Calibri" pitchFamily="34" charset="-120"/>
               </a:rPr>
-              <a:t>briskest</a:t>
+              <a:t>brisker</a:t>
             </a:r>
             <a:pPr algn="l" indent="0" marL="0">
               <a:buNone/>
@@ -17050,7 +17050,7 @@
                 <a:ea typeface="Calibri" pitchFamily="34" charset="-122"/>
                 <a:cs typeface="Calibri" pitchFamily="34" charset="-120"/>
               </a:rPr>
-              <a:t> runner moved </a:t>
+              <a:t> wind made the day feel </a:t>
             </a:r>
             <a:pPr algn="l" indent="0" marL="0">
               <a:buNone/>
@@ -17067,7 +17067,7 @@
                 <a:ea typeface="Calibri" pitchFamily="34" charset="-122"/>
                 <a:cs typeface="Calibri" pitchFamily="34" charset="-120"/>
               </a:rPr>
-              <a:t>briskly</a:t>
+              <a:t>brisker</a:t>
             </a:r>
             <a:pPr algn="l" indent="0" marL="0">
               <a:buNone/>
@@ -17081,7 +17081,7 @@
                 <a:ea typeface="Calibri" pitchFamily="34" charset="-122"/>
                 <a:cs typeface="Calibri" pitchFamily="34" charset="-120"/>
               </a:rPr>
-              <a:t> past the others, showing a remarkable </a:t>
+              <a:t>, and even the </a:t>
             </a:r>
             <a:pPr algn="l" indent="0" marL="0">
               <a:buNone/>
@@ -17098,7 +17098,7 @@
                 <a:ea typeface="Calibri" pitchFamily="34" charset="-122"/>
                 <a:cs typeface="Calibri" pitchFamily="34" charset="-120"/>
               </a:rPr>
-              <a:t>briskness</a:t>
+              <a:t>briskest</a:t>
             </a:r>
             <a:pPr algn="l" indent="0" marL="0">
               <a:buNone/>
@@ -17112,7 +17112,7 @@
                 <a:ea typeface="Calibri" pitchFamily="34" charset="-122"/>
                 <a:cs typeface="Calibri" pitchFamily="34" charset="-120"/>
               </a:rPr>
-              <a:t> that impressed everyone!</a:t>
+              <a:t> runners felt the chill.</a:t>
             </a:r>
             <a:endParaRPr lang="en-US" sz="1800" dirty="0"/>
           </a:p>
@@ -17267,7 +17267,7 @@
                 <a:ea typeface="Trebuchet MS" pitchFamily="34" charset="-122"/>
                 <a:cs typeface="Trebuchet MS" pitchFamily="34" charset="-120"/>
               </a:rPr>
-              <a:t>briskest</a:t>
+              <a:t>brisker</a:t>
             </a:r>
             <a:endParaRPr lang="en-US" sz="1400" dirty="0"/>
           </a:p>
@@ -17395,7 +17395,7 @@
                 <a:ea typeface="Trebuchet MS" pitchFamily="34" charset="-122"/>
                 <a:cs typeface="Trebuchet MS" pitchFamily="34" charset="-120"/>
               </a:rPr>
-              <a:t>briskly</a:t>
+              <a:t>brisker</a:t>
             </a:r>
             <a:endParaRPr lang="en-US" sz="1400" dirty="0"/>
           </a:p>
@@ -17523,7 +17523,7 @@
                 <a:ea typeface="Trebuchet MS" pitchFamily="34" charset="-122"/>
                 <a:cs typeface="Trebuchet MS" pitchFamily="34" charset="-120"/>
               </a:rPr>
-              <a:t>briskness</a:t>
+              <a:t>briskest</a:t>
             </a:r>
             <a:endParaRPr lang="en-US" sz="1400" dirty="0"/>
           </a:p>
@@ -17854,7 +17854,7 @@
                 <a:ea typeface="Calibri" pitchFamily="34" charset="-122"/>
                 <a:cs typeface="Calibri" pitchFamily="34" charset="-120"/>
               </a:rPr>
-              <a:t>Word Labs  •  wordlabs.app  •  Root: 'brisk' = lively, quick, and energetic</a:t>
+              <a:t>Word Labs  •  wordlabs.app  •  Root: 'brisk' = quick, lively, and energetic</a:t>
             </a:r>
             <a:endParaRPr lang="en-US" sz="800" dirty="0"/>
           </a:p>
@@ -17993,7 +17993,7 @@
                 <a:ea typeface="Trebuchet MS" pitchFamily="34" charset="-122"/>
                 <a:cs typeface="Trebuchet MS" pitchFamily="34" charset="-120"/>
               </a:rPr>
-              <a:t>briskest</a:t>
+              <a:t>brisker</a:t>
             </a:r>
             <a:endParaRPr lang="en-US" sz="2800" dirty="0"/>
           </a:p>
@@ -18681,7 +18681,7 @@
                 <a:ea typeface="Calibri" pitchFamily="34" charset="-122"/>
                 <a:cs typeface="Calibri" pitchFamily="34" charset="-120"/>
               </a:rPr>
-              <a:t>Word Labs  •  wordlabs.app  •  Root: 'brisk' = lively, quick, and energetic</a:t>
+              <a:t>Word Labs  •  wordlabs.app  •  Root: 'brisk' = quick, lively, and energetic</a:t>
             </a:r>
             <a:endParaRPr lang="en-US" sz="800" dirty="0"/>
           </a:p>
@@ -18820,7 +18820,7 @@
                 <a:ea typeface="Trebuchet MS" pitchFamily="34" charset="-122"/>
                 <a:cs typeface="Trebuchet MS" pitchFamily="34" charset="-120"/>
               </a:rPr>
-              <a:t>briskest</a:t>
+              <a:t>brisker</a:t>
             </a:r>
             <a:endParaRPr lang="en-US" sz="2800" dirty="0"/>
           </a:p>
@@ -19071,7 +19071,7 @@
                 <a:ea typeface="Trebuchet MS" pitchFamily="34" charset="-122"/>
                 <a:cs typeface="Trebuchet MS" pitchFamily="34" charset="-120"/>
               </a:rPr>
-              <a:t>est</a:t>
+              <a:t>er</a:t>
             </a:r>
             <a:endParaRPr lang="en-US" sz="1300" dirty="0"/>
           </a:p>
@@ -19110,7 +19110,7 @@
                 <a:ea typeface="Calibri" pitchFamily="34" charset="-122"/>
                 <a:cs typeface="Calibri" pitchFamily="34" charset="-120"/>
               </a:rPr>
-              <a:t>the most (superlative)</a:t>
+              <a:t>more</a:t>
             </a:r>
             <a:endParaRPr lang="en-US" sz="850" dirty="0"/>
           </a:p>
@@ -19666,7 +19666,7 @@
                 <a:ea typeface="Calibri" pitchFamily="34" charset="-122"/>
                 <a:cs typeface="Calibri" pitchFamily="34" charset="-120"/>
               </a:rPr>
-              <a:t>Word Labs  •  wordlabs.app  •  Root: 'brisk' = lively, quick, and energetic</a:t>
+              <a:t>Word Labs  •  wordlabs.app  •  Root: 'brisk' = quick, lively, and energetic</a:t>
             </a:r>
             <a:endParaRPr lang="en-US" sz="800" dirty="0"/>
           </a:p>
@@ -19805,7 +19805,7 @@
                 <a:ea typeface="Trebuchet MS" pitchFamily="34" charset="-122"/>
                 <a:cs typeface="Trebuchet MS" pitchFamily="34" charset="-120"/>
               </a:rPr>
-              <a:t>briskest</a:t>
+              <a:t>brisker</a:t>
             </a:r>
             <a:endParaRPr lang="en-US" sz="2800" dirty="0"/>
           </a:p>
@@ -20056,7 +20056,7 @@
                 <a:ea typeface="Trebuchet MS" pitchFamily="34" charset="-122"/>
                 <a:cs typeface="Trebuchet MS" pitchFamily="34" charset="-120"/>
               </a:rPr>
-              <a:t>est</a:t>
+              <a:t>er</a:t>
             </a:r>
             <a:endParaRPr lang="en-US" sz="1300" dirty="0"/>
           </a:p>
@@ -20095,7 +20095,7 @@
                 <a:ea typeface="Calibri" pitchFamily="34" charset="-122"/>
                 <a:cs typeface="Calibri" pitchFamily="34" charset="-120"/>
               </a:rPr>
-              <a:t>the most (superlative)</a:t>
+              <a:t>more</a:t>
             </a:r>
             <a:endParaRPr lang="en-US" sz="850" dirty="0"/>
           </a:p>
@@ -20359,7 +20359,7 @@
                 <a:ea typeface="Trebuchet MS" pitchFamily="34" charset="-122"/>
                 <a:cs typeface="Trebuchet MS" pitchFamily="34" charset="-120"/>
               </a:rPr>
-              <a:t>est</a:t>
+              <a:t>er</a:t>
             </a:r>
             <a:endParaRPr lang="en-US" sz="1400" dirty="0"/>
           </a:p>
@@ -20783,7 +20783,7 @@
                 <a:ea typeface="Calibri" pitchFamily="34" charset="-122"/>
                 <a:cs typeface="Calibri" pitchFamily="34" charset="-120"/>
               </a:rPr>
-              <a:t>Word Labs  •  wordlabs.app  •  Root: 'brisk' = lively, quick, and energetic</a:t>
+              <a:t>Word Labs  •  wordlabs.app  •  Root: 'brisk' = quick, lively, and energetic</a:t>
             </a:r>
             <a:endParaRPr lang="en-US" sz="800" dirty="0"/>
           </a:p>
@@ -20922,7 +20922,7 @@
                 <a:ea typeface="Trebuchet MS" pitchFamily="34" charset="-122"/>
                 <a:cs typeface="Trebuchet MS" pitchFamily="34" charset="-120"/>
               </a:rPr>
-              <a:t>briskest</a:t>
+              <a:t>brisker</a:t>
             </a:r>
             <a:endParaRPr lang="en-US" sz="2800" dirty="0"/>
           </a:p>
@@ -21173,7 +21173,7 @@
                 <a:ea typeface="Trebuchet MS" pitchFamily="34" charset="-122"/>
                 <a:cs typeface="Trebuchet MS" pitchFamily="34" charset="-120"/>
               </a:rPr>
-              <a:t>est</a:t>
+              <a:t>er</a:t>
             </a:r>
             <a:endParaRPr lang="en-US" sz="1300" dirty="0"/>
           </a:p>
@@ -21212,7 +21212,7 @@
                 <a:ea typeface="Calibri" pitchFamily="34" charset="-122"/>
                 <a:cs typeface="Calibri" pitchFamily="34" charset="-120"/>
               </a:rPr>
-              <a:t>the most (superlative)</a:t>
+              <a:t>more</a:t>
             </a:r>
             <a:endParaRPr lang="en-US" sz="850" dirty="0"/>
           </a:p>
@@ -21476,7 +21476,7 @@
                 <a:ea typeface="Trebuchet MS" pitchFamily="34" charset="-122"/>
                 <a:cs typeface="Trebuchet MS" pitchFamily="34" charset="-120"/>
               </a:rPr>
-              <a:t>est</a:t>
+              <a:t>er</a:t>
             </a:r>
             <a:endParaRPr lang="en-US" sz="1400" dirty="0"/>
           </a:p>
@@ -21583,7 +21583,7 @@
         </p:nvSpPr>
         <p:spPr>
           <a:xfrm>
-            <a:off x="2023872" y="4169664"/>
+            <a:off x="2254649" y="4169664"/>
             <a:ext cx="685800" cy="475488"/>
           </a:xfrm>
           <a:prstGeom prst="rect">
@@ -21610,7 +21610,7 @@
         </p:nvSpPr>
         <p:spPr>
           <a:xfrm>
-            <a:off x="2023872" y="4169664"/>
+            <a:off x="2254649" y="4169664"/>
             <a:ext cx="685800" cy="475488"/>
           </a:xfrm>
           <a:prstGeom prst="rect">
@@ -21649,7 +21649,7 @@
         </p:nvSpPr>
         <p:spPr>
           <a:xfrm>
-            <a:off x="2831592" y="4169664"/>
+            <a:off x="3293146" y="4169664"/>
             <a:ext cx="685800" cy="475488"/>
           </a:xfrm>
           <a:prstGeom prst="rect">
@@ -21676,7 +21676,7 @@
         </p:nvSpPr>
         <p:spPr>
           <a:xfrm>
-            <a:off x="2831592" y="4169664"/>
+            <a:off x="3293146" y="4169664"/>
             <a:ext cx="685800" cy="475488"/>
           </a:xfrm>
           <a:prstGeom prst="rect">
@@ -21715,7 +21715,7 @@
         </p:nvSpPr>
         <p:spPr>
           <a:xfrm>
-            <a:off x="3639312" y="4169664"/>
+            <a:off x="4331643" y="4169664"/>
             <a:ext cx="685800" cy="475488"/>
           </a:xfrm>
           <a:prstGeom prst="rect">
@@ -21742,7 +21742,7 @@
         </p:nvSpPr>
         <p:spPr>
           <a:xfrm>
-            <a:off x="3639312" y="4169664"/>
+            <a:off x="4331643" y="4169664"/>
             <a:ext cx="685800" cy="475488"/>
           </a:xfrm>
           <a:prstGeom prst="rect">
@@ -21781,7 +21781,7 @@
         </p:nvSpPr>
         <p:spPr>
           <a:xfrm>
-            <a:off x="4447032" y="4169664"/>
+            <a:off x="5370141" y="4169664"/>
             <a:ext cx="685800" cy="475488"/>
           </a:xfrm>
           <a:prstGeom prst="rect">
@@ -21808,7 +21808,7 @@
         </p:nvSpPr>
         <p:spPr>
           <a:xfrm>
-            <a:off x="4447032" y="4169664"/>
+            <a:off x="5370141" y="4169664"/>
             <a:ext cx="685800" cy="475488"/>
           </a:xfrm>
           <a:prstGeom prst="rect">
@@ -21847,7 +21847,7 @@
         </p:nvSpPr>
         <p:spPr>
           <a:xfrm>
-            <a:off x="5254752" y="4169664"/>
+            <a:off x="6408638" y="4169664"/>
             <a:ext cx="685800" cy="475488"/>
           </a:xfrm>
           <a:prstGeom prst="rect">
@@ -21874,7 +21874,7 @@
         </p:nvSpPr>
         <p:spPr>
           <a:xfrm>
-            <a:off x="5254752" y="4169664"/>
+            <a:off x="6408638" y="4169664"/>
             <a:ext cx="685800" cy="475488"/>
           </a:xfrm>
           <a:prstGeom prst="rect">
@@ -21913,7 +21913,7 @@
         </p:nvSpPr>
         <p:spPr>
           <a:xfrm>
-            <a:off x="6062472" y="4169664"/>
+            <a:off x="7447135" y="4169664"/>
             <a:ext cx="685800" cy="475488"/>
           </a:xfrm>
           <a:prstGeom prst="rect">
@@ -21940,7 +21940,7 @@
         </p:nvSpPr>
         <p:spPr>
           <a:xfrm>
-            <a:off x="6062472" y="4169664"/>
+            <a:off x="7447135" y="4169664"/>
             <a:ext cx="685800" cy="475488"/>
           </a:xfrm>
           <a:prstGeom prst="rect">
@@ -21965,139 +21965,7 @@
                 <a:ea typeface="Trebuchet MS" pitchFamily="34" charset="-122"/>
                 <a:cs typeface="Trebuchet MS" pitchFamily="34" charset="-120"/>
               </a:rPr>
-              <a:t>e</a:t>
-            </a:r>
-            <a:endParaRPr lang="en-US" sz="900" dirty="0"/>
-          </a:p>
-        </p:txBody>
-      </p:sp>
-      <p:sp>
-        <p:nvSpPr>
-          <p:cNvPr id="45" name="Shape 43"/>
-          <p:cNvSpPr/>
-          <p:nvPr/>
-        </p:nvSpPr>
-        <p:spPr>
-          <a:xfrm>
-            <a:off x="6870192" y="4169664"/>
-            <a:ext cx="685800" cy="475488"/>
-          </a:xfrm>
-          <a:prstGeom prst="rect">
-            <a:avLst>
-              <a:gd name="adj" fmla="val 7692"/>
-            </a:avLst>
-          </a:prstGeom>
-          <a:solidFill>
-            <a:srgbClr val="FFFFFF"/>
-          </a:solidFill>
-          <a:ln w="12700">
-            <a:solidFill>
-              <a:srgbClr val="DB2777"/>
-            </a:solidFill>
-            <a:prstDash val="solid"/>
-          </a:ln>
-        </p:spPr>
-      </p:sp>
-      <p:sp>
-        <p:nvSpPr>
-          <p:cNvPr id="46" name="Text 44"/>
-          <p:cNvSpPr/>
-          <p:nvPr/>
-        </p:nvSpPr>
-        <p:spPr>
-          <a:xfrm>
-            <a:off x="6870192" y="4169664"/>
-            <a:ext cx="685800" cy="475488"/>
-          </a:xfrm>
-          <a:prstGeom prst="rect">
-            <a:avLst/>
-          </a:prstGeom>
-          <a:noFill/>
-          <a:ln/>
-        </p:spPr>
-        <p:txBody>
-          <a:bodyPr wrap="square" lIns="0" tIns="0" rIns="0" bIns="0" rtlCol="0" anchor="ctr"/>
-          <a:lstStyle/>
-          <a:p>
-            <a:pPr algn="ctr" indent="0" marL="0">
-              <a:buNone/>
-            </a:pPr>
-            <a:r>
-              <a:rPr lang="en-US" sz="900" b="1" dirty="0">
-                <a:solidFill>
-                  <a:srgbClr val="9D174D"/>
-                </a:solidFill>
-                <a:latin typeface="Trebuchet MS" pitchFamily="34" charset="0"/>
-                <a:ea typeface="Trebuchet MS" pitchFamily="34" charset="-122"/>
-                <a:cs typeface="Trebuchet MS" pitchFamily="34" charset="-120"/>
-              </a:rPr>
-              <a:t>s</a:t>
-            </a:r>
-            <a:endParaRPr lang="en-US" sz="900" dirty="0"/>
-          </a:p>
-        </p:txBody>
-      </p:sp>
-      <p:sp>
-        <p:nvSpPr>
-          <p:cNvPr id="47" name="Shape 45"/>
-          <p:cNvSpPr/>
-          <p:nvPr/>
-        </p:nvSpPr>
-        <p:spPr>
-          <a:xfrm>
-            <a:off x="7677912" y="4169664"/>
-            <a:ext cx="685800" cy="475488"/>
-          </a:xfrm>
-          <a:prstGeom prst="rect">
-            <a:avLst>
-              <a:gd name="adj" fmla="val 7692"/>
-            </a:avLst>
-          </a:prstGeom>
-          <a:solidFill>
-            <a:srgbClr val="FFFFFF"/>
-          </a:solidFill>
-          <a:ln w="12700">
-            <a:solidFill>
-              <a:srgbClr val="DB2777"/>
-            </a:solidFill>
-            <a:prstDash val="solid"/>
-          </a:ln>
-        </p:spPr>
-      </p:sp>
-      <p:sp>
-        <p:nvSpPr>
-          <p:cNvPr id="48" name="Text 46"/>
-          <p:cNvSpPr/>
-          <p:nvPr/>
-        </p:nvSpPr>
-        <p:spPr>
-          <a:xfrm>
-            <a:off x="7677912" y="4169664"/>
-            <a:ext cx="685800" cy="475488"/>
-          </a:xfrm>
-          <a:prstGeom prst="rect">
-            <a:avLst/>
-          </a:prstGeom>
-          <a:noFill/>
-          <a:ln/>
-        </p:spPr>
-        <p:txBody>
-          <a:bodyPr wrap="square" lIns="0" tIns="0" rIns="0" bIns="0" rtlCol="0" anchor="ctr"/>
-          <a:lstStyle/>
-          <a:p>
-            <a:pPr algn="ctr" indent="0" marL="0">
-              <a:buNone/>
-            </a:pPr>
-            <a:r>
-              <a:rPr lang="en-US" sz="900" b="1" dirty="0">
-                <a:solidFill>
-                  <a:srgbClr val="9D174D"/>
-                </a:solidFill>
-                <a:latin typeface="Trebuchet MS" pitchFamily="34" charset="0"/>
-                <a:ea typeface="Trebuchet MS" pitchFamily="34" charset="-122"/>
-                <a:cs typeface="Trebuchet MS" pitchFamily="34" charset="-120"/>
-              </a:rPr>
-              <a:t>t</a:t>
+              <a:t>er</a:t>
             </a:r>
             <a:endParaRPr lang="en-US" sz="900" dirty="0"/>
           </a:p>
@@ -22389,7 +22257,7 @@
                 <a:ea typeface="Calibri" pitchFamily="34" charset="-122"/>
                 <a:cs typeface="Calibri" pitchFamily="34" charset="-120"/>
               </a:rPr>
-              <a:t>Word Labs  •  wordlabs.app  •  Root: 'brisk' = lively, quick, and energetic</a:t>
+              <a:t>Word Labs  •  wordlabs.app  •  Root: 'brisk' = quick, lively, and energetic</a:t>
             </a:r>
             <a:endParaRPr lang="en-US" sz="800" dirty="0"/>
           </a:p>
@@ -22528,7 +22396,7 @@
                 <a:ea typeface="Trebuchet MS" pitchFamily="34" charset="-122"/>
                 <a:cs typeface="Trebuchet MS" pitchFamily="34" charset="-120"/>
               </a:rPr>
-              <a:t>briskly</a:t>
+              <a:t>brisker</a:t>
             </a:r>
             <a:endParaRPr lang="en-US" sz="2800" dirty="0"/>
           </a:p>
@@ -23216,7 +23084,7 @@
                 <a:ea typeface="Calibri" pitchFamily="34" charset="-122"/>
                 <a:cs typeface="Calibri" pitchFamily="34" charset="-120"/>
               </a:rPr>
-              <a:t>Word Labs  •  wordlabs.app  •  Root: 'brisk' = lively, quick, and energetic</a:t>
+              <a:t>Word Labs  •  wordlabs.app  •  Root: 'brisk' = quick, lively, and energetic</a:t>
             </a:r>
             <a:endParaRPr lang="en-US" sz="800" dirty="0"/>
           </a:p>
@@ -23355,7 +23223,7 @@
                 <a:ea typeface="Trebuchet MS" pitchFamily="34" charset="-122"/>
                 <a:cs typeface="Trebuchet MS" pitchFamily="34" charset="-120"/>
               </a:rPr>
-              <a:t>briskly</a:t>
+              <a:t>brisker</a:t>
             </a:r>
             <a:endParaRPr lang="en-US" sz="2800" dirty="0"/>
           </a:p>
@@ -23606,7 +23474,7 @@
                 <a:ea typeface="Trebuchet MS" pitchFamily="34" charset="-122"/>
                 <a:cs typeface="Trebuchet MS" pitchFamily="34" charset="-120"/>
               </a:rPr>
-              <a:t>ly</a:t>
+              <a:t>er</a:t>
             </a:r>
             <a:endParaRPr lang="en-US" sz="1300" dirty="0"/>
           </a:p>
@@ -23645,7 +23513,7 @@
                 <a:ea typeface="Calibri" pitchFamily="34" charset="-122"/>
                 <a:cs typeface="Calibri" pitchFamily="34" charset="-120"/>
               </a:rPr>
-              <a:t>in a certain way (adverb)</a:t>
+              <a:t>more</a:t>
             </a:r>
             <a:endParaRPr lang="en-US" sz="850" dirty="0"/>
           </a:p>
@@ -24201,7 +24069,7 @@
                 <a:ea typeface="Calibri" pitchFamily="34" charset="-122"/>
                 <a:cs typeface="Calibri" pitchFamily="34" charset="-120"/>
               </a:rPr>
-              <a:t>Word Labs  •  wordlabs.app  •  Root: 'brisk' = lively, quick, and energetic</a:t>
+              <a:t>Word Labs  •  wordlabs.app  •  Root: 'brisk' = quick, lively, and energetic</a:t>
             </a:r>
             <a:endParaRPr lang="en-US" sz="800" dirty="0"/>
           </a:p>
@@ -24274,7 +24142,7 @@
                 <a:ea typeface="Trebuchet MS" pitchFamily="34" charset="-122"/>
                 <a:cs typeface="Trebuchet MS" pitchFamily="34" charset="-120"/>
               </a:rPr>
-              <a:t>We are learning that the root 'brisk' means 'lively, quick, and energetic'.</a:t>
+              <a:t>We are learning that the root 'brisk' means 'quick, lively, and energetic'.</a:t>
             </a:r>
             <a:endParaRPr lang="en-US" sz="2000" dirty="0"/>
           </a:p>
@@ -24920,7 +24788,7 @@
                 <a:ea typeface="Calibri" pitchFamily="34" charset="-122"/>
                 <a:cs typeface="Calibri" pitchFamily="34" charset="-120"/>
               </a:rPr>
-              <a:t>Word Labs  •  wordlabs.app  •  Root: 'brisk' = lively, quick, and energetic</a:t>
+              <a:t>Word Labs  •  wordlabs.app  •  Root: 'brisk' = quick, lively, and energetic</a:t>
             </a:r>
             <a:endParaRPr lang="en-US" sz="800" dirty="0"/>
           </a:p>
@@ -25059,7 +24927,7 @@
                 <a:ea typeface="Trebuchet MS" pitchFamily="34" charset="-122"/>
                 <a:cs typeface="Trebuchet MS" pitchFamily="34" charset="-120"/>
               </a:rPr>
-              <a:t>briskly</a:t>
+              <a:t>brisker</a:t>
             </a:r>
             <a:endParaRPr lang="en-US" sz="2800" dirty="0"/>
           </a:p>
@@ -25310,7 +25178,7 @@
                 <a:ea typeface="Trebuchet MS" pitchFamily="34" charset="-122"/>
                 <a:cs typeface="Trebuchet MS" pitchFamily="34" charset="-120"/>
               </a:rPr>
-              <a:t>ly</a:t>
+              <a:t>er</a:t>
             </a:r>
             <a:endParaRPr lang="en-US" sz="1300" dirty="0"/>
           </a:p>
@@ -25349,7 +25217,7 @@
                 <a:ea typeface="Calibri" pitchFamily="34" charset="-122"/>
                 <a:cs typeface="Calibri" pitchFamily="34" charset="-120"/>
               </a:rPr>
-              <a:t>in a certain way (adverb)</a:t>
+              <a:t>more</a:t>
             </a:r>
             <a:endParaRPr lang="en-US" sz="850" dirty="0"/>
           </a:p>
@@ -25613,7 +25481,7 @@
                 <a:ea typeface="Trebuchet MS" pitchFamily="34" charset="-122"/>
                 <a:cs typeface="Trebuchet MS" pitchFamily="34" charset="-120"/>
               </a:rPr>
-              <a:t>ly</a:t>
+              <a:t>er</a:t>
             </a:r>
             <a:endParaRPr lang="en-US" sz="1400" dirty="0"/>
           </a:p>
@@ -26037,7 +25905,7 @@
                 <a:ea typeface="Calibri" pitchFamily="34" charset="-122"/>
                 <a:cs typeface="Calibri" pitchFamily="34" charset="-120"/>
               </a:rPr>
-              <a:t>Word Labs  •  wordlabs.app  •  Root: 'brisk' = lively, quick, and energetic</a:t>
+              <a:t>Word Labs  •  wordlabs.app  •  Root: 'brisk' = quick, lively, and energetic</a:t>
             </a:r>
             <a:endParaRPr lang="en-US" sz="800" dirty="0"/>
           </a:p>
@@ -26176,7 +26044,7 @@
                 <a:ea typeface="Trebuchet MS" pitchFamily="34" charset="-122"/>
                 <a:cs typeface="Trebuchet MS" pitchFamily="34" charset="-120"/>
               </a:rPr>
-              <a:t>briskly</a:t>
+              <a:t>brisker</a:t>
             </a:r>
             <a:endParaRPr lang="en-US" sz="2800" dirty="0"/>
           </a:p>
@@ -26427,7 +26295,7 @@
                 <a:ea typeface="Trebuchet MS" pitchFamily="34" charset="-122"/>
                 <a:cs typeface="Trebuchet MS" pitchFamily="34" charset="-120"/>
               </a:rPr>
-              <a:t>ly</a:t>
+              <a:t>er</a:t>
             </a:r>
             <a:endParaRPr lang="en-US" sz="1300" dirty="0"/>
           </a:p>
@@ -26466,7 +26334,7 @@
                 <a:ea typeface="Calibri" pitchFamily="34" charset="-122"/>
                 <a:cs typeface="Calibri" pitchFamily="34" charset="-120"/>
               </a:rPr>
-              <a:t>in a certain way (adverb)</a:t>
+              <a:t>more</a:t>
             </a:r>
             <a:endParaRPr lang="en-US" sz="850" dirty="0"/>
           </a:p>
@@ -26730,7 +26598,7 @@
                 <a:ea typeface="Trebuchet MS" pitchFamily="34" charset="-122"/>
                 <a:cs typeface="Trebuchet MS" pitchFamily="34" charset="-120"/>
               </a:rPr>
-              <a:t>ly</a:t>
+              <a:t>er</a:t>
             </a:r>
             <a:endParaRPr lang="en-US" sz="1400" dirty="0"/>
           </a:p>
@@ -26837,7 +26705,7 @@
         </p:nvSpPr>
         <p:spPr>
           <a:xfrm>
-            <a:off x="2124837" y="4169664"/>
+            <a:off x="2254649" y="4169664"/>
             <a:ext cx="685800" cy="475488"/>
           </a:xfrm>
           <a:prstGeom prst="rect">
@@ -26864,7 +26732,7 @@
         </p:nvSpPr>
         <p:spPr>
           <a:xfrm>
-            <a:off x="2124837" y="4169664"/>
+            <a:off x="2254649" y="4169664"/>
             <a:ext cx="685800" cy="475488"/>
           </a:xfrm>
           <a:prstGeom prst="rect">
@@ -26903,7 +26771,7 @@
         </p:nvSpPr>
         <p:spPr>
           <a:xfrm>
-            <a:off x="3033522" y="4169664"/>
+            <a:off x="3293146" y="4169664"/>
             <a:ext cx="685800" cy="475488"/>
           </a:xfrm>
           <a:prstGeom prst="rect">
@@ -26930,7 +26798,7 @@
         </p:nvSpPr>
         <p:spPr>
           <a:xfrm>
-            <a:off x="3033522" y="4169664"/>
+            <a:off x="3293146" y="4169664"/>
             <a:ext cx="685800" cy="475488"/>
           </a:xfrm>
           <a:prstGeom prst="rect">
@@ -26969,7 +26837,7 @@
         </p:nvSpPr>
         <p:spPr>
           <a:xfrm>
-            <a:off x="3942207" y="4169664"/>
+            <a:off x="4331643" y="4169664"/>
             <a:ext cx="685800" cy="475488"/>
           </a:xfrm>
           <a:prstGeom prst="rect">
@@ -26996,7 +26864,7 @@
         </p:nvSpPr>
         <p:spPr>
           <a:xfrm>
-            <a:off x="3942207" y="4169664"/>
+            <a:off x="4331643" y="4169664"/>
             <a:ext cx="685800" cy="475488"/>
           </a:xfrm>
           <a:prstGeom prst="rect">
@@ -27035,7 +26903,7 @@
         </p:nvSpPr>
         <p:spPr>
           <a:xfrm>
-            <a:off x="4850892" y="4169664"/>
+            <a:off x="5370141" y="4169664"/>
             <a:ext cx="685800" cy="475488"/>
           </a:xfrm>
           <a:prstGeom prst="rect">
@@ -27062,7 +26930,7 @@
         </p:nvSpPr>
         <p:spPr>
           <a:xfrm>
-            <a:off x="4850892" y="4169664"/>
+            <a:off x="5370141" y="4169664"/>
             <a:ext cx="685800" cy="475488"/>
           </a:xfrm>
           <a:prstGeom prst="rect">
@@ -27101,7 +26969,7 @@
         </p:nvSpPr>
         <p:spPr>
           <a:xfrm>
-            <a:off x="5759577" y="4169664"/>
+            <a:off x="6408638" y="4169664"/>
             <a:ext cx="685800" cy="475488"/>
           </a:xfrm>
           <a:prstGeom prst="rect">
@@ -27128,7 +26996,7 @@
         </p:nvSpPr>
         <p:spPr>
           <a:xfrm>
-            <a:off x="5759577" y="4169664"/>
+            <a:off x="6408638" y="4169664"/>
             <a:ext cx="685800" cy="475488"/>
           </a:xfrm>
           <a:prstGeom prst="rect">
@@ -27167,7 +27035,7 @@
         </p:nvSpPr>
         <p:spPr>
           <a:xfrm>
-            <a:off x="6668262" y="4169664"/>
+            <a:off x="7447135" y="4169664"/>
             <a:ext cx="685800" cy="475488"/>
           </a:xfrm>
           <a:prstGeom prst="rect">
@@ -27194,7 +27062,7 @@
         </p:nvSpPr>
         <p:spPr>
           <a:xfrm>
-            <a:off x="6668262" y="4169664"/>
+            <a:off x="7447135" y="4169664"/>
             <a:ext cx="685800" cy="475488"/>
           </a:xfrm>
           <a:prstGeom prst="rect">
@@ -27219,73 +27087,7 @@
                 <a:ea typeface="Trebuchet MS" pitchFamily="34" charset="-122"/>
                 <a:cs typeface="Trebuchet MS" pitchFamily="34" charset="-120"/>
               </a:rPr>
-              <a:t>l</a:t>
-            </a:r>
-            <a:endParaRPr lang="en-US" sz="900" dirty="0"/>
-          </a:p>
-        </p:txBody>
-      </p:sp>
-      <p:sp>
-        <p:nvSpPr>
-          <p:cNvPr id="45" name="Shape 43"/>
-          <p:cNvSpPr/>
-          <p:nvPr/>
-        </p:nvSpPr>
-        <p:spPr>
-          <a:xfrm>
-            <a:off x="7576947" y="4169664"/>
-            <a:ext cx="685800" cy="475488"/>
-          </a:xfrm>
-          <a:prstGeom prst="rect">
-            <a:avLst>
-              <a:gd name="adj" fmla="val 7692"/>
-            </a:avLst>
-          </a:prstGeom>
-          <a:solidFill>
-            <a:srgbClr val="FFFFFF"/>
-          </a:solidFill>
-          <a:ln w="12700">
-            <a:solidFill>
-              <a:srgbClr val="DB2777"/>
-            </a:solidFill>
-            <a:prstDash val="solid"/>
-          </a:ln>
-        </p:spPr>
-      </p:sp>
-      <p:sp>
-        <p:nvSpPr>
-          <p:cNvPr id="46" name="Text 44"/>
-          <p:cNvSpPr/>
-          <p:nvPr/>
-        </p:nvSpPr>
-        <p:spPr>
-          <a:xfrm>
-            <a:off x="7576947" y="4169664"/>
-            <a:ext cx="685800" cy="475488"/>
-          </a:xfrm>
-          <a:prstGeom prst="rect">
-            <a:avLst/>
-          </a:prstGeom>
-          <a:noFill/>
-          <a:ln/>
-        </p:spPr>
-        <p:txBody>
-          <a:bodyPr wrap="square" lIns="0" tIns="0" rIns="0" bIns="0" rtlCol="0" anchor="ctr"/>
-          <a:lstStyle/>
-          <a:p>
-            <a:pPr algn="ctr" indent="0" marL="0">
-              <a:buNone/>
-            </a:pPr>
-            <a:r>
-              <a:rPr lang="en-US" sz="900" b="1" dirty="0">
-                <a:solidFill>
-                  <a:srgbClr val="9D174D"/>
-                </a:solidFill>
-                <a:latin typeface="Trebuchet MS" pitchFamily="34" charset="0"/>
-                <a:ea typeface="Trebuchet MS" pitchFamily="34" charset="-122"/>
-                <a:cs typeface="Trebuchet MS" pitchFamily="34" charset="-120"/>
-              </a:rPr>
-              <a:t>y</a:t>
+              <a:t>er</a:t>
             </a:r>
             <a:endParaRPr lang="en-US" sz="900" dirty="0"/>
           </a:p>
@@ -27577,7 +27379,7 @@
                 <a:ea typeface="Calibri" pitchFamily="34" charset="-122"/>
                 <a:cs typeface="Calibri" pitchFamily="34" charset="-120"/>
               </a:rPr>
-              <a:t>Word Labs  •  wordlabs.app  •  Root: 'brisk' = lively, quick, and energetic</a:t>
+              <a:t>Word Labs  •  wordlabs.app  •  Root: 'brisk' = quick, lively, and energetic</a:t>
             </a:r>
             <a:endParaRPr lang="en-US" sz="800" dirty="0"/>
           </a:p>
@@ -27716,7 +27518,7 @@
                 <a:ea typeface="Trebuchet MS" pitchFamily="34" charset="-122"/>
                 <a:cs typeface="Trebuchet MS" pitchFamily="34" charset="-120"/>
               </a:rPr>
-              <a:t>briskness</a:t>
+              <a:t>briskest</a:t>
             </a:r>
             <a:endParaRPr lang="en-US" sz="2800" dirty="0"/>
           </a:p>
@@ -28404,7 +28206,7 @@
                 <a:ea typeface="Calibri" pitchFamily="34" charset="-122"/>
                 <a:cs typeface="Calibri" pitchFamily="34" charset="-120"/>
               </a:rPr>
-              <a:t>Word Labs  •  wordlabs.app  •  Root: 'brisk' = lively, quick, and energetic</a:t>
+              <a:t>Word Labs  •  wordlabs.app  •  Root: 'brisk' = quick, lively, and energetic</a:t>
             </a:r>
             <a:endParaRPr lang="en-US" sz="800" dirty="0"/>
           </a:p>
@@ -28543,7 +28345,7 @@
                 <a:ea typeface="Trebuchet MS" pitchFamily="34" charset="-122"/>
                 <a:cs typeface="Trebuchet MS" pitchFamily="34" charset="-120"/>
               </a:rPr>
-              <a:t>briskness</a:t>
+              <a:t>briskest</a:t>
             </a:r>
             <a:endParaRPr lang="en-US" sz="2800" dirty="0"/>
           </a:p>
@@ -28794,7 +28596,7 @@
                 <a:ea typeface="Trebuchet MS" pitchFamily="34" charset="-122"/>
                 <a:cs typeface="Trebuchet MS" pitchFamily="34" charset="-120"/>
               </a:rPr>
-              <a:t>ness</a:t>
+              <a:t>est</a:t>
             </a:r>
             <a:endParaRPr lang="en-US" sz="1300" dirty="0"/>
           </a:p>
@@ -28833,7 +28635,7 @@
                 <a:ea typeface="Calibri" pitchFamily="34" charset="-122"/>
                 <a:cs typeface="Calibri" pitchFamily="34" charset="-120"/>
               </a:rPr>
-              <a:t>the quality or state of</a:t>
+              <a:t>the most</a:t>
             </a:r>
             <a:endParaRPr lang="en-US" sz="850" dirty="0"/>
           </a:p>
@@ -29389,7 +29191,7 @@
                 <a:ea typeface="Calibri" pitchFamily="34" charset="-122"/>
                 <a:cs typeface="Calibri" pitchFamily="34" charset="-120"/>
               </a:rPr>
-              <a:t>Word Labs  •  wordlabs.app  •  Root: 'brisk' = lively, quick, and energetic</a:t>
+              <a:t>Word Labs  •  wordlabs.app  •  Root: 'brisk' = quick, lively, and energetic</a:t>
             </a:r>
             <a:endParaRPr lang="en-US" sz="800" dirty="0"/>
           </a:p>
@@ -29528,7 +29330,7 @@
                 <a:ea typeface="Trebuchet MS" pitchFamily="34" charset="-122"/>
                 <a:cs typeface="Trebuchet MS" pitchFamily="34" charset="-120"/>
               </a:rPr>
-              <a:t>briskness</a:t>
+              <a:t>briskest</a:t>
             </a:r>
             <a:endParaRPr lang="en-US" sz="2800" dirty="0"/>
           </a:p>
@@ -29779,7 +29581,7 @@
                 <a:ea typeface="Trebuchet MS" pitchFamily="34" charset="-122"/>
                 <a:cs typeface="Trebuchet MS" pitchFamily="34" charset="-120"/>
               </a:rPr>
-              <a:t>ness</a:t>
+              <a:t>est</a:t>
             </a:r>
             <a:endParaRPr lang="en-US" sz="1300" dirty="0"/>
           </a:p>
@@ -29818,7 +29620,7 @@
                 <a:ea typeface="Calibri" pitchFamily="34" charset="-122"/>
                 <a:cs typeface="Calibri" pitchFamily="34" charset="-120"/>
               </a:rPr>
-              <a:t>the quality or state of</a:t>
+              <a:t>the most</a:t>
             </a:r>
             <a:endParaRPr lang="en-US" sz="850" dirty="0"/>
           </a:p>
@@ -30082,7 +29884,7 @@
                 <a:ea typeface="Trebuchet MS" pitchFamily="34" charset="-122"/>
                 <a:cs typeface="Trebuchet MS" pitchFamily="34" charset="-120"/>
               </a:rPr>
-              <a:t>ness</a:t>
+              <a:t>est</a:t>
             </a:r>
             <a:endParaRPr lang="en-US" sz="1400" dirty="0"/>
           </a:p>
@@ -30506,7 +30308,7 @@
                 <a:ea typeface="Calibri" pitchFamily="34" charset="-122"/>
                 <a:cs typeface="Calibri" pitchFamily="34" charset="-120"/>
               </a:rPr>
-              <a:t>Word Labs  •  wordlabs.app  •  Root: 'brisk' = lively, quick, and energetic</a:t>
+              <a:t>Word Labs  •  wordlabs.app  •  Root: 'brisk' = quick, lively, and energetic</a:t>
             </a:r>
             <a:endParaRPr lang="en-US" sz="800" dirty="0"/>
           </a:p>
@@ -30645,7 +30447,7 @@
                 <a:ea typeface="Trebuchet MS" pitchFamily="34" charset="-122"/>
                 <a:cs typeface="Trebuchet MS" pitchFamily="34" charset="-120"/>
               </a:rPr>
-              <a:t>briskness</a:t>
+              <a:t>briskest</a:t>
             </a:r>
             <a:endParaRPr lang="en-US" sz="2800" dirty="0"/>
           </a:p>
@@ -30896,7 +30698,7 @@
                 <a:ea typeface="Trebuchet MS" pitchFamily="34" charset="-122"/>
                 <a:cs typeface="Trebuchet MS" pitchFamily="34" charset="-120"/>
               </a:rPr>
-              <a:t>ness</a:t>
+              <a:t>est</a:t>
             </a:r>
             <a:endParaRPr lang="en-US" sz="1300" dirty="0"/>
           </a:p>
@@ -30935,7 +30737,7 @@
                 <a:ea typeface="Calibri" pitchFamily="34" charset="-122"/>
                 <a:cs typeface="Calibri" pitchFamily="34" charset="-120"/>
               </a:rPr>
-              <a:t>the quality or state of</a:t>
+              <a:t>the most</a:t>
             </a:r>
             <a:endParaRPr lang="en-US" sz="850" dirty="0"/>
           </a:p>
@@ -31199,7 +31001,7 @@
                 <a:ea typeface="Trebuchet MS" pitchFamily="34" charset="-122"/>
                 <a:cs typeface="Trebuchet MS" pitchFamily="34" charset="-120"/>
               </a:rPr>
-              <a:t>ness</a:t>
+              <a:t>est</a:t>
             </a:r>
             <a:endParaRPr lang="en-US" sz="1400" dirty="0"/>
           </a:p>
@@ -31688,7 +31490,7 @@
                 <a:ea typeface="Trebuchet MS" pitchFamily="34" charset="-122"/>
                 <a:cs typeface="Trebuchet MS" pitchFamily="34" charset="-120"/>
               </a:rPr>
-              <a:t>n</a:t>
+              <a:t>e</a:t>
             </a:r>
             <a:endParaRPr lang="en-US" sz="900" dirty="0"/>
           </a:p>
@@ -31754,7 +31556,7 @@
                 <a:ea typeface="Trebuchet MS" pitchFamily="34" charset="-122"/>
                 <a:cs typeface="Trebuchet MS" pitchFamily="34" charset="-120"/>
               </a:rPr>
-              <a:t>e</a:t>
+              <a:t>s</a:t>
             </a:r>
             <a:endParaRPr lang="en-US" sz="900" dirty="0"/>
           </a:p>
@@ -31820,7 +31622,7 @@
                 <a:ea typeface="Trebuchet MS" pitchFamily="34" charset="-122"/>
                 <a:cs typeface="Trebuchet MS" pitchFamily="34" charset="-120"/>
               </a:rPr>
-              <a:t>ss</a:t>
+              <a:t>t</a:t>
             </a:r>
             <a:endParaRPr lang="en-US" sz="900" dirty="0"/>
           </a:p>
@@ -32112,7 +31914,7 @@
                 <a:ea typeface="Calibri" pitchFamily="34" charset="-122"/>
                 <a:cs typeface="Calibri" pitchFamily="34" charset="-120"/>
               </a:rPr>
-              <a:t>Word Labs  •  wordlabs.app  •  Root: 'brisk' = lively, quick, and energetic</a:t>
+              <a:t>Word Labs  •  wordlabs.app  •  Root: 'brisk' = quick, lively, and energetic</a:t>
             </a:r>
             <a:endParaRPr lang="en-US" sz="800" dirty="0"/>
           </a:p>
@@ -33281,7 +33083,7 @@
                 <a:ea typeface="Calibri" pitchFamily="34" charset="-122"/>
                 <a:cs typeface="Calibri" pitchFamily="34" charset="-120"/>
               </a:rPr>
-              <a:t>Word Labs  •  wordlabs.app  •  Root: 'brisk' = lively, quick, and energetic</a:t>
+              <a:t>Word Labs  •  wordlabs.app  •  Root: 'brisk' = quick, lively, and energetic</a:t>
             </a:r>
             <a:endParaRPr lang="en-US" sz="800" dirty="0"/>
           </a:p>
@@ -33774,7 +33576,7 @@
                 <a:ea typeface="Trebuchet MS" pitchFamily="34" charset="-122"/>
                 <a:cs typeface="Trebuchet MS" pitchFamily="34" charset="-120"/>
               </a:rPr>
-              <a:t>re-</a:t>
+              <a:t>non-</a:t>
             </a:r>
             <a:endParaRPr lang="en-US" sz="1300" dirty="0"/>
           </a:p>
@@ -33927,7 +33729,7 @@
                 <a:ea typeface="Trebuchet MS" pitchFamily="34" charset="-122"/>
                 <a:cs typeface="Trebuchet MS" pitchFamily="34" charset="-120"/>
               </a:rPr>
-              <a:t>over-</a:t>
+              <a:t>semi-</a:t>
             </a:r>
             <a:endParaRPr lang="en-US" sz="1300" dirty="0"/>
           </a:p>
@@ -34080,7 +33882,7 @@
                 <a:ea typeface="Trebuchet MS" pitchFamily="34" charset="-122"/>
                 <a:cs typeface="Trebuchet MS" pitchFamily="34" charset="-120"/>
               </a:rPr>
-              <a:t>non-</a:t>
+              <a:t>over-</a:t>
             </a:r>
             <a:endParaRPr lang="en-US" sz="1300" dirty="0"/>
           </a:p>
@@ -34233,7 +34035,7 @@
                 <a:ea typeface="Trebuchet MS" pitchFamily="34" charset="-122"/>
                 <a:cs typeface="Trebuchet MS" pitchFamily="34" charset="-120"/>
               </a:rPr>
-              <a:t>semi-</a:t>
+              <a:t>re-</a:t>
             </a:r>
             <a:endParaRPr lang="en-US" sz="1300" dirty="0"/>
           </a:p>
@@ -34889,7 +34691,7 @@
                 <a:ea typeface="Trebuchet MS" pitchFamily="34" charset="-122"/>
                 <a:cs typeface="Trebuchet MS" pitchFamily="34" charset="-120"/>
               </a:rPr>
-              <a:t>semibrisk</a:t>
+              <a:t>briskening</a:t>
             </a:r>
             <a:endParaRPr lang="en-US" sz="1200" dirty="0"/>
           </a:p>
@@ -35181,7 +34983,7 @@
                 <a:ea typeface="Calibri" pitchFamily="34" charset="-122"/>
                 <a:cs typeface="Calibri" pitchFamily="34" charset="-120"/>
               </a:rPr>
-              <a:t>Word Labs  •  wordlabs.app  •  Root: 'brisk' = lively, quick, and energetic</a:t>
+              <a:t>Word Labs  •  wordlabs.app  •  Root: 'brisk' = quick, lively, and energetic</a:t>
             </a:r>
             <a:endParaRPr lang="en-US" sz="800" dirty="0"/>
           </a:p>
@@ -35345,7 +35147,7 @@
                 <a:ea typeface="Calibri" pitchFamily="34" charset="-122"/>
                 <a:cs typeface="Calibri" pitchFamily="34" charset="-120"/>
               </a:rPr>
-              <a:t>The core part of a word carrying its basic meaning. For example, 'brisk' means 'lively, quick, and energetic'.</a:t>
+              <a:t>The core part of a word carrying its basic meaning. For example, 'brisk' means 'quick, lively, and energetic'.</a:t>
             </a:r>
             <a:endParaRPr lang="en-US" sz="1350" dirty="0"/>
           </a:p>
@@ -35965,7 +35767,7 @@
                 <a:ea typeface="Calibri" pitchFamily="34" charset="-122"/>
                 <a:cs typeface="Calibri" pitchFamily="34" charset="-120"/>
               </a:rPr>
-              <a:t>Word Labs  •  wordlabs.app  •  Root: 'brisk' = lively, quick, and energetic</a:t>
+              <a:t>Word Labs  •  wordlabs.app  •  Root: 'brisk' = quick, lively, and energetic</a:t>
             </a:r>
             <a:endParaRPr lang="en-US" sz="800" dirty="0"/>
           </a:p>
@@ -36077,7 +35879,7 @@
                 <a:ea typeface="Calibri" pitchFamily="34" charset="-122"/>
                 <a:cs typeface="Calibri" pitchFamily="34" charset="-120"/>
               </a:rPr>
-              <a:t>1.  The word 'briskly' contains the root 'brisk' and the suffix '-ly'.</a:t>
+              <a:t>1.  The suffix '-est' in 'briskest' means 'without'.</a:t>
             </a:r>
             <a:endParaRPr lang="en-US" sz="1300" dirty="0"/>
           </a:p>
@@ -36100,11 +35902,11 @@
             </a:avLst>
           </a:prstGeom>
           <a:solidFill>
-            <a:srgbClr val="DCFCE7"/>
-          </a:solidFill>
-          <a:ln w="12700">
-            <a:solidFill>
-              <a:srgbClr val="16A34A"/>
+            <a:srgbClr val="FEE2E2"/>
+          </a:solidFill>
+          <a:ln w="12700">
+            <a:solidFill>
+              <a:srgbClr val="DC2626"/>
             </a:solidFill>
             <a:prstDash val="solid"/>
           </a:ln>
@@ -36137,13 +35939,13 @@
             <a:r>
               <a:rPr lang="en-US" sz="1100" b="1" dirty="0">
                 <a:solidFill>
-                  <a:srgbClr val="16A34A"/>
+                  <a:srgbClr val="DC2626"/>
                 </a:solidFill>
                 <a:latin typeface="Trebuchet MS" pitchFamily="34" charset="0"/>
                 <a:ea typeface="Trebuchet MS" pitchFamily="34" charset="-122"/>
                 <a:cs typeface="Trebuchet MS" pitchFamily="34" charset="-120"/>
               </a:rPr>
-              <a:t>TRUE</a:t>
+              <a:t>FALSE</a:t>
             </a:r>
             <a:endParaRPr lang="en-US" sz="1100" dirty="0"/>
           </a:p>
@@ -36216,7 +36018,7 @@
                 <a:ea typeface="Calibri" pitchFamily="34" charset="-122"/>
                 <a:cs typeface="Calibri" pitchFamily="34" charset="-120"/>
               </a:rPr>
-              <a:t>2.  The root 'brisk' means slow and tired.</a:t>
+              <a:t>2.  A brisk walk is a fast, energetic walk.</a:t>
             </a:r>
             <a:endParaRPr lang="en-US" sz="1300" dirty="0"/>
           </a:p>
@@ -36239,11 +36041,11 @@
             </a:avLst>
           </a:prstGeom>
           <a:solidFill>
-            <a:srgbClr val="FEE2E2"/>
-          </a:solidFill>
-          <a:ln w="12700">
-            <a:solidFill>
-              <a:srgbClr val="DC2626"/>
+            <a:srgbClr val="DCFCE7"/>
+          </a:solidFill>
+          <a:ln w="12700">
+            <a:solidFill>
+              <a:srgbClr val="16A34A"/>
             </a:solidFill>
             <a:prstDash val="solid"/>
           </a:ln>
@@ -36276,13 +36078,13 @@
             <a:r>
               <a:rPr lang="en-US" sz="1100" b="1" dirty="0">
                 <a:solidFill>
-                  <a:srgbClr val="DC2626"/>
+                  <a:srgbClr val="16A34A"/>
                 </a:solidFill>
                 <a:latin typeface="Trebuchet MS" pitchFamily="34" charset="0"/>
                 <a:ea typeface="Trebuchet MS" pitchFamily="34" charset="-122"/>
                 <a:cs typeface="Trebuchet MS" pitchFamily="34" charset="-120"/>
               </a:rPr>
-              <a:t>FALSE</a:t>
+              <a:t>TRUE</a:t>
             </a:r>
             <a:endParaRPr lang="en-US" sz="1100" dirty="0"/>
           </a:p>
@@ -36355,7 +36157,7 @@
                 <a:ea typeface="Calibri" pitchFamily="34" charset="-122"/>
                 <a:cs typeface="Calibri" pitchFamily="34" charset="-120"/>
               </a:rPr>
-              <a:t>3.  Adding '-ness' to 'brisk' makes a noun that means the quality of being quick and lively.</a:t>
+              <a:t>3.  'Briskness' describes the quality of being quick and lively.</a:t>
             </a:r>
             <a:endParaRPr lang="en-US" sz="1300" dirty="0"/>
           </a:p>
@@ -36494,7 +36296,7 @@
                 <a:ea typeface="Calibri" pitchFamily="34" charset="-122"/>
                 <a:cs typeface="Calibri" pitchFamily="34" charset="-120"/>
               </a:rPr>
-              <a:t>4.  The word 'briskest' means the most lively and quick of all.</a:t>
+              <a:t>4.  The root 'brisk' comes from ancient Greek.</a:t>
             </a:r>
             <a:endParaRPr lang="en-US" sz="1300" dirty="0"/>
           </a:p>
@@ -36517,11 +36319,11 @@
             </a:avLst>
           </a:prstGeom>
           <a:solidFill>
-            <a:srgbClr val="DCFCE7"/>
-          </a:solidFill>
-          <a:ln w="12700">
-            <a:solidFill>
-              <a:srgbClr val="16A34A"/>
+            <a:srgbClr val="FEE2E2"/>
+          </a:solidFill>
+          <a:ln w="12700">
+            <a:solidFill>
+              <a:srgbClr val="DC2626"/>
             </a:solidFill>
             <a:prstDash val="solid"/>
           </a:ln>
@@ -36554,13 +36356,13 @@
             <a:r>
               <a:rPr lang="en-US" sz="1100" b="1" dirty="0">
                 <a:solidFill>
-                  <a:srgbClr val="16A34A"/>
+                  <a:srgbClr val="DC2626"/>
                 </a:solidFill>
                 <a:latin typeface="Trebuchet MS" pitchFamily="34" charset="0"/>
                 <a:ea typeface="Trebuchet MS" pitchFamily="34" charset="-122"/>
                 <a:cs typeface="Trebuchet MS" pitchFamily="34" charset="-120"/>
               </a:rPr>
-              <a:t>TRUE</a:t>
+              <a:t>FALSE</a:t>
             </a:r>
             <a:endParaRPr lang="en-US" sz="1100" dirty="0"/>
           </a:p>
@@ -36633,7 +36435,7 @@
                 <a:ea typeface="Calibri" pitchFamily="34" charset="-122"/>
                 <a:cs typeface="Calibri" pitchFamily="34" charset="-120"/>
               </a:rPr>
-              <a:t>5.  The prefix 're-' in 'rebrisk' means 'not'.</a:t>
+              <a:t>5.  The word 'briskly' contains the suffix '-ly'.</a:t>
             </a:r>
             <a:endParaRPr lang="en-US" sz="1300" dirty="0"/>
           </a:p>
@@ -36656,11 +36458,11 @@
             </a:avLst>
           </a:prstGeom>
           <a:solidFill>
-            <a:srgbClr val="FEE2E2"/>
-          </a:solidFill>
-          <a:ln w="12700">
-            <a:solidFill>
-              <a:srgbClr val="DC2626"/>
+            <a:srgbClr val="DCFCE7"/>
+          </a:solidFill>
+          <a:ln w="12700">
+            <a:solidFill>
+              <a:srgbClr val="16A34A"/>
             </a:solidFill>
             <a:prstDash val="solid"/>
           </a:ln>
@@ -36693,13 +36495,13 @@
             <a:r>
               <a:rPr lang="en-US" sz="1100" b="1" dirty="0">
                 <a:solidFill>
-                  <a:srgbClr val="DC2626"/>
+                  <a:srgbClr val="16A34A"/>
                 </a:solidFill>
                 <a:latin typeface="Trebuchet MS" pitchFamily="34" charset="0"/>
                 <a:ea typeface="Trebuchet MS" pitchFamily="34" charset="-122"/>
                 <a:cs typeface="Trebuchet MS" pitchFamily="34" charset="-120"/>
               </a:rPr>
-              <a:t>FALSE</a:t>
+              <a:t>TRUE</a:t>
             </a:r>
             <a:endParaRPr lang="en-US" sz="1100" dirty="0"/>
           </a:p>
@@ -36991,7 +36793,7 @@
                 <a:ea typeface="Calibri" pitchFamily="34" charset="-122"/>
                 <a:cs typeface="Calibri" pitchFamily="34" charset="-120"/>
               </a:rPr>
-              <a:t>Word Labs  •  wordlabs.app  •  Root: 'brisk' = lively, quick, and energetic</a:t>
+              <a:t>Word Labs  •  wordlabs.app  •  Root: 'brisk' = quick, lively, and energetic</a:t>
             </a:r>
             <a:endParaRPr lang="en-US" sz="800" dirty="0"/>
           </a:p>
@@ -37128,7 +36930,7 @@
                 <a:ea typeface="Trebuchet MS" pitchFamily="34" charset="-122"/>
                 <a:cs typeface="Trebuchet MS" pitchFamily="34" charset="-120"/>
               </a:rPr>
-              <a:t>lively, quick, and energetic</a:t>
+              <a:t>quick, lively, and energetic</a:t>
             </a:r>
             <a:endParaRPr lang="en-US" sz="2000" dirty="0"/>
           </a:p>
@@ -37960,7 +37762,7 @@
                 <a:ea typeface="Calibri" pitchFamily="34" charset="-122"/>
                 <a:cs typeface="Calibri" pitchFamily="34" charset="-120"/>
               </a:rPr>
-              <a:t>Word Labs  •  wordlabs.app  •  Root: 'brisk' = lively, quick, and energetic</a:t>
+              <a:t>Word Labs  •  wordlabs.app  •  Root: 'brisk' = quick, lively, and energetic</a:t>
             </a:r>
             <a:endParaRPr lang="en-US" sz="800" dirty="0"/>
           </a:p>
@@ -38453,7 +38255,7 @@
                 <a:ea typeface="Trebuchet MS" pitchFamily="34" charset="-122"/>
                 <a:cs typeface="Trebuchet MS" pitchFamily="34" charset="-120"/>
               </a:rPr>
-              <a:t>re-</a:t>
+              <a:t>non-</a:t>
             </a:r>
             <a:endParaRPr lang="en-US" sz="1300" dirty="0"/>
           </a:p>
@@ -38606,7 +38408,7 @@
                 <a:ea typeface="Trebuchet MS" pitchFamily="34" charset="-122"/>
                 <a:cs typeface="Trebuchet MS" pitchFamily="34" charset="-120"/>
               </a:rPr>
-              <a:t>over-</a:t>
+              <a:t>semi-</a:t>
             </a:r>
             <a:endParaRPr lang="en-US" sz="1300" dirty="0"/>
           </a:p>
@@ -38759,7 +38561,7 @@
                 <a:ea typeface="Trebuchet MS" pitchFamily="34" charset="-122"/>
                 <a:cs typeface="Trebuchet MS" pitchFamily="34" charset="-120"/>
               </a:rPr>
-              <a:t>non-</a:t>
+              <a:t>over-</a:t>
             </a:r>
             <a:endParaRPr lang="en-US" sz="1300" dirty="0"/>
           </a:p>
@@ -38912,7 +38714,7 @@
                 <a:ea typeface="Trebuchet MS" pitchFamily="34" charset="-122"/>
                 <a:cs typeface="Trebuchet MS" pitchFamily="34" charset="-120"/>
               </a:rPr>
-              <a:t>semi-</a:t>
+              <a:t>re-</a:t>
             </a:r>
             <a:endParaRPr lang="en-US" sz="1300" dirty="0"/>
           </a:p>
@@ -39734,7 +39536,7 @@
                 <a:ea typeface="Calibri" pitchFamily="34" charset="-122"/>
                 <a:cs typeface="Calibri" pitchFamily="34" charset="-120"/>
               </a:rPr>
-              <a:t>Word Labs  •  wordlabs.app  •  Root: 'brisk' = lively, quick, and energetic</a:t>
+              <a:t>Word Labs  •  wordlabs.app  •  Root: 'brisk' = quick, lively, and energetic</a:t>
             </a:r>
             <a:endParaRPr lang="en-US" sz="800" dirty="0"/>
           </a:p>
@@ -39912,7 +39714,7 @@
                 <a:ea typeface="Calibri" pitchFamily="34" charset="-122"/>
                 <a:cs typeface="Calibri" pitchFamily="34" charset="-120"/>
               </a:rPr>
-              <a:t>Moving or acting quickly and with energy, like a fast walk on a cool morning.</a:t>
+              <a:t>Moving or doing something quickly and with lots of energy.</a:t>
             </a:r>
             <a:endParaRPr lang="en-US" sz="1200" dirty="0"/>
           </a:p>
@@ -40190,7 +39992,7 @@
                 <a:ea typeface="Calibri" pitchFamily="34" charset="-122"/>
                 <a:cs typeface="Calibri" pitchFamily="34" charset="-120"/>
               </a:rPr>
-              <a:t>The most lively and quick of all — the highest level of briskness.</a:t>
+              <a:t>The most quick and lively of all.</a:t>
             </a:r>
             <a:endParaRPr lang="en-US" sz="1200" dirty="0"/>
           </a:p>
@@ -40329,7 +40131,7 @@
                 <a:ea typeface="Calibri" pitchFamily="34" charset="-122"/>
                 <a:cs typeface="Calibri" pitchFamily="34" charset="-120"/>
               </a:rPr>
-              <a:t>Moved or acted in a quick and energetic way (used in past tense).</a:t>
+              <a:t>Made something move or happen more quickly and energetically.</a:t>
             </a:r>
             <a:endParaRPr lang="en-US" sz="1200" dirty="0"/>
           </a:p>
@@ -40468,7 +40270,7 @@
                 <a:ea typeface="Calibri" pitchFamily="34" charset="-122"/>
                 <a:cs typeface="Calibri" pitchFamily="34" charset="-120"/>
               </a:rPr>
-              <a:t>More lively and quick than something else — comparing two things.</a:t>
+              <a:t>More quick and lively than something else.</a:t>
             </a:r>
             <a:endParaRPr lang="en-US" sz="1200" dirty="0"/>
           </a:p>
@@ -40607,7 +40409,7 @@
                 <a:ea typeface="Calibri" pitchFamily="34" charset="-122"/>
                 <a:cs typeface="Calibri" pitchFamily="34" charset="-120"/>
               </a:rPr>
-              <a:t>Not lively or quick; lacking energy and speed.</a:t>
+              <a:t>Not quick or lively; slow and without much energy.</a:t>
             </a:r>
             <a:endParaRPr lang="en-US" sz="1200" dirty="0"/>
           </a:p>
@@ -40746,7 +40548,7 @@
                 <a:ea typeface="Calibri" pitchFamily="34" charset="-122"/>
                 <a:cs typeface="Calibri" pitchFamily="34" charset="-120"/>
               </a:rPr>
-              <a:t>Doing something in a quick and lively way, such as walking briskly to school.</a:t>
+              <a:t>Doing something in a quick, lively way — like walking briskly to school.</a:t>
             </a:r>
             <a:endParaRPr lang="en-US" sz="1200" dirty="0"/>
           </a:p>
@@ -41038,7 +40840,7 @@
                 <a:ea typeface="Calibri" pitchFamily="34" charset="-122"/>
                 <a:cs typeface="Calibri" pitchFamily="34" charset="-120"/>
               </a:rPr>
-              <a:t>Word Labs  •  wordlabs.app  •  Root: 'brisk' = lively, quick, and energetic</a:t>
+              <a:t>Word Labs  •  wordlabs.app  •  Root: 'brisk' = quick, lively, and energetic</a:t>
             </a:r>
             <a:endParaRPr lang="en-US" sz="800" dirty="0"/>
           </a:p>
@@ -41241,7 +41043,7 @@
                 <a:ea typeface="Calibri" pitchFamily="34" charset="-122"/>
                 <a:cs typeface="Calibri" pitchFamily="34" charset="-120"/>
               </a:rPr>
-              <a:t>The coach told us to walk briskly around the oval to warm up before the game.</a:t>
+              <a:t>The coach asked us to walk briskly around the oval to warm up before the game.</a:t>
             </a:r>
             <a:endParaRPr lang="en-US" sz="1500" dirty="0"/>
           </a:p>
@@ -41405,7 +41207,7 @@
                 <a:ea typeface="Calibri" pitchFamily="34" charset="-122"/>
                 <a:cs typeface="Calibri" pitchFamily="34" charset="-120"/>
               </a:rPr>
-              <a:t>There was a briskness in the winter air that made everyone walk faster and pull their jackets tight.</a:t>
+              <a:t>There was a briskness in the winter air that made everyone pull their jackets tighter.</a:t>
             </a:r>
             <a:endParaRPr lang="en-US" sz="1500" dirty="0"/>
           </a:p>
@@ -41569,7 +41371,7 @@
                 <a:ea typeface="Calibri" pitchFamily="34" charset="-122"/>
                 <a:cs typeface="Calibri" pitchFamily="34" charset="-120"/>
               </a:rPr>
-              <a:t>She moved briskly through the busy market, picking up fruit and vegetables without stopping.</a:t>
+              <a:t>She was the briskest walker in the whole class, always arriving at the next spot first.</a:t>
             </a:r>
             <a:endParaRPr lang="en-US" sz="1500" dirty="0"/>
           </a:p>

--- a/output/wordlabs-brisk-3day.pptx
+++ b/output/wordlabs-brisk-3day.pptx
@@ -4240,7 +4240,7 @@
                 <a:ea typeface="Calibri" pitchFamily="34" charset="-122"/>
                 <a:cs typeface="Calibri" pitchFamily="34" charset="-120"/>
               </a:rPr>
-              <a:t>"quick, lively, and energetic"</a:t>
+              <a:t>"quick and energetic"</a:t>
             </a:r>
             <a:endParaRPr lang="en-US" sz="2200" dirty="0"/>
           </a:p>
@@ -4279,7 +4279,7 @@
                 <a:ea typeface="Calibri" pitchFamily="34" charset="-122"/>
                 <a:cs typeface="Calibri" pitchFamily="34" charset="-120"/>
               </a:rPr>
-              <a:t>Origin: Latin: bruscare</a:t>
+              <a:t>Origin: Anglo-Saxon (Old English) root</a:t>
             </a:r>
             <a:endParaRPr lang="en-US" sz="1300" dirty="0"/>
           </a:p>
@@ -5288,7 +5288,7 @@
                 <a:ea typeface="Calibri" pitchFamily="34" charset="-122"/>
                 <a:cs typeface="Calibri" pitchFamily="34" charset="-120"/>
               </a:rPr>
-              <a:t>Word Labs  •  wordlabs.app  •  Root: 'brisk' = quick, lively, and energetic</a:t>
+              <a:t>Word Labs  •  wordlabs.app  •  Root: 'brisk' = quick and energetic</a:t>
             </a:r>
             <a:endParaRPr lang="en-US" sz="800" dirty="0"/>
           </a:p>
@@ -5622,7 +5622,7 @@
                 <a:ea typeface="Trebuchet MS" pitchFamily="34" charset="-122"/>
                 <a:cs typeface="Trebuchet MS" pitchFamily="34" charset="-120"/>
               </a:rPr>
-              <a:t>1</a:t>
+              <a:t>0</a:t>
             </a:r>
             <a:pPr algn="ctr" indent="0" marL="0">
               <a:buNone/>
@@ -5928,7 +5928,7 @@
                 <a:ea typeface="Calibri" pitchFamily="34" charset="-122"/>
                 <a:cs typeface="Calibri" pitchFamily="34" charset="-120"/>
               </a:rPr>
-              <a:t>Word Labs  •  wordlabs.app  •  Root: 'brisk' = quick, lively, and energetic</a:t>
+              <a:t>Word Labs  •  wordlabs.app  •  Root: 'brisk' = quick and energetic</a:t>
             </a:r>
             <a:endParaRPr lang="en-US" sz="800" dirty="0"/>
           </a:p>
@@ -6040,7 +6040,7 @@
                 <a:ea typeface="Calibri" pitchFamily="34" charset="-122"/>
                 <a:cs typeface="Calibri" pitchFamily="34" charset="-120"/>
               </a:rPr>
-              <a:t>He walked </a:t>
+              <a:t>They went for a </a:t>
             </a:r>
             <a:pPr algn="l" indent="0" marL="0">
               <a:buNone/>
@@ -6057,7 +6057,7 @@
                 <a:ea typeface="Calibri" pitchFamily="34" charset="-122"/>
                 <a:cs typeface="Calibri" pitchFamily="34" charset="-120"/>
               </a:rPr>
-              <a:t>briskly</a:t>
+              <a:t>brisk</a:t>
             </a:r>
             <a:pPr algn="l" indent="0" marL="0">
               <a:buNone/>
@@ -6071,7 +6071,7 @@
                 <a:ea typeface="Calibri" pitchFamily="34" charset="-122"/>
                 <a:cs typeface="Calibri" pitchFamily="34" charset="-120"/>
               </a:rPr>
-              <a:t> through the park, enjoying the </a:t>
+              <a:t> walk before breakfast. Today's walk was </a:t>
             </a:r>
             <a:pPr algn="l" indent="0" marL="0">
               <a:buNone/>
@@ -6088,7 +6088,7 @@
                 <a:ea typeface="Calibri" pitchFamily="34" charset="-122"/>
                 <a:cs typeface="Calibri" pitchFamily="34" charset="-120"/>
               </a:rPr>
-              <a:t>briskness</a:t>
+              <a:t>brisker</a:t>
             </a:r>
             <a:pPr algn="l" indent="0" marL="0">
               <a:buNone/>
@@ -6102,7 +6102,7 @@
                 <a:ea typeface="Calibri" pitchFamily="34" charset="-122"/>
                 <a:cs typeface="Calibri" pitchFamily="34" charset="-120"/>
               </a:rPr>
-              <a:t> of the cool morning air.</a:t>
+              <a:t> than yesterday's stroll.</a:t>
             </a:r>
             <a:endParaRPr lang="en-US" sz="1800" dirty="0"/>
           </a:p>
@@ -6257,7 +6257,7 @@
                 <a:ea typeface="Trebuchet MS" pitchFamily="34" charset="-122"/>
                 <a:cs typeface="Trebuchet MS" pitchFamily="34" charset="-120"/>
               </a:rPr>
-              <a:t>briskly</a:t>
+              <a:t>brisk</a:t>
             </a:r>
             <a:endParaRPr lang="en-US" sz="1400" dirty="0"/>
           </a:p>
@@ -6385,7 +6385,7 @@
                 <a:ea typeface="Trebuchet MS" pitchFamily="34" charset="-122"/>
                 <a:cs typeface="Trebuchet MS" pitchFamily="34" charset="-120"/>
               </a:rPr>
-              <a:t>briskness</a:t>
+              <a:t>brisker</a:t>
             </a:r>
             <a:endParaRPr lang="en-US" sz="1400" dirty="0"/>
           </a:p>
@@ -6716,7 +6716,7 @@
                 <a:ea typeface="Calibri" pitchFamily="34" charset="-122"/>
                 <a:cs typeface="Calibri" pitchFamily="34" charset="-120"/>
               </a:rPr>
-              <a:t>Word Labs  •  wordlabs.app  •  Root: 'brisk' = quick, lively, and energetic</a:t>
+              <a:t>Word Labs  •  wordlabs.app  •  Root: 'brisk' = quick and energetic</a:t>
             </a:r>
             <a:endParaRPr lang="en-US" sz="800" dirty="0"/>
           </a:p>
@@ -6855,7 +6855,7 @@
                 <a:ea typeface="Trebuchet MS" pitchFamily="34" charset="-122"/>
                 <a:cs typeface="Trebuchet MS" pitchFamily="34" charset="-120"/>
               </a:rPr>
-              <a:t>briskly</a:t>
+              <a:t>brisk</a:t>
             </a:r>
             <a:endParaRPr lang="en-US" sz="2800" dirty="0"/>
           </a:p>
@@ -7543,7 +7543,7 @@
                 <a:ea typeface="Calibri" pitchFamily="34" charset="-122"/>
                 <a:cs typeface="Calibri" pitchFamily="34" charset="-120"/>
               </a:rPr>
-              <a:t>Word Labs  •  wordlabs.app  •  Root: 'brisk' = quick, lively, and energetic</a:t>
+              <a:t>Word Labs  •  wordlabs.app  •  Root: 'brisk' = quick and energetic</a:t>
             </a:r>
             <a:endParaRPr lang="en-US" sz="800" dirty="0"/>
           </a:p>
@@ -7682,7 +7682,7 @@
                 <a:ea typeface="Trebuchet MS" pitchFamily="34" charset="-122"/>
                 <a:cs typeface="Trebuchet MS" pitchFamily="34" charset="-120"/>
               </a:rPr>
-              <a:t>briskly</a:t>
+              <a:t>brisk</a:t>
             </a:r>
             <a:endParaRPr lang="en-US" sz="2800" dirty="0"/>
           </a:p>
@@ -7762,7 +7762,7 @@
         </p:nvSpPr>
         <p:spPr>
           <a:xfrm>
-            <a:off x="2938272" y="2258568"/>
+            <a:off x="4370832" y="2258568"/>
             <a:ext cx="1828800" cy="292608"/>
           </a:xfrm>
           <a:prstGeom prst="rect">
@@ -7796,7 +7796,7 @@
         </p:nvSpPr>
         <p:spPr>
           <a:xfrm>
-            <a:off x="2938272" y="2258568"/>
+            <a:off x="4370832" y="2258568"/>
             <a:ext cx="1828800" cy="292608"/>
           </a:xfrm>
           <a:prstGeom prst="rect">
@@ -7835,7 +7835,7 @@
         </p:nvSpPr>
         <p:spPr>
           <a:xfrm>
-            <a:off x="2938272" y="2569464"/>
+            <a:off x="4370832" y="2569464"/>
             <a:ext cx="1828800" cy="201168"/>
           </a:xfrm>
           <a:prstGeom prst="rect">
@@ -7860,7 +7860,7 @@
                 <a:ea typeface="Calibri" pitchFamily="34" charset="-122"/>
                 <a:cs typeface="Calibri" pitchFamily="34" charset="-120"/>
               </a:rPr>
-              <a:t>quick and lively</a:t>
+              <a:t>quick and energetic</a:t>
             </a:r>
             <a:endParaRPr lang="en-US" sz="850" dirty="0"/>
           </a:p>
@@ -7874,30 +7874,23 @@
         </p:nvSpPr>
         <p:spPr>
           <a:xfrm>
-            <a:off x="5803392" y="2258568"/>
-            <a:ext cx="1828800" cy="292608"/>
+            <a:off x="365760" y="3273552"/>
+            <a:ext cx="1371600" cy="658368"/>
           </a:xfrm>
           <a:prstGeom prst="rect">
             <a:avLst>
-              <a:gd name="adj" fmla="val 25000"/>
+              <a:gd name="adj" fmla="val 8333"/>
             </a:avLst>
           </a:prstGeom>
           <a:solidFill>
-            <a:srgbClr val="FCE7F3"/>
-          </a:solidFill>
-          <a:ln w="19050">
-            <a:solidFill>
-              <a:srgbClr val="DB2777"/>
-            </a:solidFill>
-            <a:prstDash val="solid"/>
-          </a:ln>
-          <a:effectLst>
-            <a:outerShdw sx="100000" sy="100000" kx="0" ky="0" algn="bl" rotWithShape="0" blurRad="101600" dist="38100" dir="8100000">
-              <a:srgbClr val="000000">
-                <a:alpha val="12000"/>
-              </a:srgbClr>
-            </a:outerShdw>
-          </a:effectLst>
+            <a:srgbClr val="E2E8F0"/>
+          </a:solidFill>
+          <a:ln w="12700">
+            <a:solidFill>
+              <a:srgbClr val="E2E8F0"/>
+            </a:solidFill>
+            <a:prstDash val="solid"/>
+          </a:ln>
         </p:spPr>
       </p:sp>
       <p:sp>
@@ -7908,8 +7901,8 @@
         </p:nvSpPr>
         <p:spPr>
           <a:xfrm>
-            <a:off x="5803392" y="2258568"/>
-            <a:ext cx="1828800" cy="292608"/>
+            <a:off x="365760" y="3273552"/>
+            <a:ext cx="1371600" cy="658368"/>
           </a:xfrm>
           <a:prstGeom prst="rect">
             <a:avLst/>
@@ -7925,73 +7918,100 @@
               <a:buNone/>
             </a:pPr>
             <a:r>
-              <a:rPr lang="en-US" sz="1300" b="1" dirty="0">
-                <a:solidFill>
-                  <a:srgbClr val="9D174D"/>
+              <a:rPr lang="en-US" sz="1100" b="1" dirty="0">
+                <a:solidFill>
+                  <a:srgbClr val="475569"/>
                 </a:solidFill>
                 <a:latin typeface="Trebuchet MS" pitchFamily="34" charset="0"/>
                 <a:ea typeface="Trebuchet MS" pitchFamily="34" charset="-122"/>
                 <a:cs typeface="Trebuchet MS" pitchFamily="34" charset="-120"/>
               </a:rPr>
-              <a:t>ly</a:t>
-            </a:r>
-            <a:endParaRPr lang="en-US" sz="1300" dirty="0"/>
-          </a:p>
-        </p:txBody>
-      </p:sp>
-      <p:sp>
-        <p:nvSpPr>
-          <p:cNvPr id="21" name="Text 19"/>
-          <p:cNvSpPr/>
-          <p:nvPr/>
-        </p:nvSpPr>
-        <p:spPr>
-          <a:xfrm>
-            <a:off x="5803392" y="2569464"/>
-            <a:ext cx="1828800" cy="201168"/>
-          </a:xfrm>
-          <a:prstGeom prst="rect">
-            <a:avLst/>
-          </a:prstGeom>
-          <a:noFill/>
-          <a:ln/>
-        </p:spPr>
-        <p:txBody>
-          <a:bodyPr wrap="square" lIns="0" tIns="0" rIns="0" bIns="0" rtlCol="0" anchor="t"/>
-          <a:lstStyle/>
-          <a:p>
-            <a:pPr algn="ctr" indent="0" marL="0">
-              <a:buNone/>
-            </a:pPr>
-            <a:r>
-              <a:rPr lang="en-US" sz="850" dirty="0">
-                <a:solidFill>
-                  <a:srgbClr val="475569"/>
+              <a:t>Syllables</a:t>
+            </a:r>
+            <a:endParaRPr lang="en-US" sz="1100" dirty="0"/>
+          </a:p>
+        </p:txBody>
+      </p:sp>
+      <p:sp>
+        <p:nvSpPr>
+          <p:cNvPr id="21" name="Shape 19"/>
+          <p:cNvSpPr/>
+          <p:nvPr/>
+        </p:nvSpPr>
+        <p:spPr>
+          <a:xfrm>
+            <a:off x="1874520" y="3273552"/>
+            <a:ext cx="6903720" cy="658368"/>
+          </a:xfrm>
+          <a:prstGeom prst="rect">
+            <a:avLst>
+              <a:gd name="adj" fmla="val 8333"/>
+            </a:avLst>
+          </a:prstGeom>
+          <a:solidFill>
+            <a:srgbClr val="F8FAFC"/>
+          </a:solidFill>
+          <a:ln w="12700">
+            <a:solidFill>
+              <a:srgbClr val="E2E8F0"/>
+            </a:solidFill>
+            <a:prstDash val="dash"/>
+          </a:ln>
+        </p:spPr>
+      </p:sp>
+      <p:sp>
+        <p:nvSpPr>
+          <p:cNvPr id="22" name="Text 20"/>
+          <p:cNvSpPr/>
+          <p:nvPr/>
+        </p:nvSpPr>
+        <p:spPr>
+          <a:xfrm>
+            <a:off x="1874520" y="3273552"/>
+            <a:ext cx="6903720" cy="658368"/>
+          </a:xfrm>
+          <a:prstGeom prst="rect">
+            <a:avLst/>
+          </a:prstGeom>
+          <a:noFill/>
+          <a:ln/>
+        </p:spPr>
+        <p:txBody>
+          <a:bodyPr wrap="square" rtlCol="0" anchor="ctr"/>
+          <a:lstStyle/>
+          <a:p>
+            <a:pPr algn="ctr" indent="0" marL="0">
+              <a:buNone/>
+            </a:pPr>
+            <a:r>
+              <a:rPr lang="en-US" sz="1100" i="1" dirty="0">
+                <a:solidFill>
+                  <a:srgbClr val="CBD5E1"/>
                 </a:solidFill>
                 <a:latin typeface="Calibri" pitchFamily="34" charset="0"/>
                 <a:ea typeface="Calibri" pitchFamily="34" charset="-122"/>
                 <a:cs typeface="Calibri" pitchFamily="34" charset="-120"/>
               </a:rPr>
-              <a:t>in a way that is</a:t>
-            </a:r>
-            <a:endParaRPr lang="en-US" sz="850" dirty="0"/>
-          </a:p>
-        </p:txBody>
-      </p:sp>
-      <p:sp>
-        <p:nvSpPr>
-          <p:cNvPr id="22" name="Shape 20"/>
-          <p:cNvSpPr/>
-          <p:nvPr/>
-        </p:nvSpPr>
-        <p:spPr>
-          <a:xfrm>
-            <a:off x="365760" y="3273552"/>
-            <a:ext cx="1371600" cy="658368"/>
+              <a:t>Write here...</a:t>
+            </a:r>
+            <a:endParaRPr lang="en-US" sz="1100" dirty="0"/>
+          </a:p>
+        </p:txBody>
+      </p:sp>
+      <p:sp>
+        <p:nvSpPr>
+          <p:cNvPr id="23" name="Shape 21"/>
+          <p:cNvSpPr/>
+          <p:nvPr/>
+        </p:nvSpPr>
+        <p:spPr>
+          <a:xfrm>
+            <a:off x="365760" y="4096512"/>
+            <a:ext cx="1371600" cy="804672"/>
           </a:xfrm>
           <a:prstGeom prst="rect">
             <a:avLst>
-              <a:gd name="adj" fmla="val 8333"/>
+              <a:gd name="adj" fmla="val 6818"/>
             </a:avLst>
           </a:prstGeom>
           <a:solidFill>
@@ -8007,14 +8027,14 @@
       </p:sp>
       <p:sp>
         <p:nvSpPr>
-          <p:cNvPr id="23" name="Text 21"/>
-          <p:cNvSpPr/>
-          <p:nvPr/>
-        </p:nvSpPr>
-        <p:spPr>
-          <a:xfrm>
-            <a:off x="365760" y="3273552"/>
-            <a:ext cx="1371600" cy="658368"/>
+          <p:cNvPr id="24" name="Text 22"/>
+          <p:cNvSpPr/>
+          <p:nvPr/>
+        </p:nvSpPr>
+        <p:spPr>
+          <a:xfrm>
+            <a:off x="365760" y="4096512"/>
+            <a:ext cx="1371600" cy="804672"/>
           </a:xfrm>
           <a:prstGeom prst="rect">
             <a:avLst/>
@@ -8038,7 +8058,7 @@
                 <a:ea typeface="Trebuchet MS" pitchFamily="34" charset="-122"/>
                 <a:cs typeface="Trebuchet MS" pitchFamily="34" charset="-120"/>
               </a:rPr>
-              <a:t>Syllables</a:t>
+              <a:t>Phonemes</a:t>
             </a:r>
             <a:endParaRPr lang="en-US" sz="1100" dirty="0"/>
           </a:p>
@@ -8046,80 +8066,14 @@
       </p:sp>
       <p:sp>
         <p:nvSpPr>
-          <p:cNvPr id="24" name="Shape 22"/>
-          <p:cNvSpPr/>
-          <p:nvPr/>
-        </p:nvSpPr>
-        <p:spPr>
-          <a:xfrm>
-            <a:off x="1874520" y="3273552"/>
-            <a:ext cx="6903720" cy="658368"/>
-          </a:xfrm>
-          <a:prstGeom prst="rect">
-            <a:avLst>
-              <a:gd name="adj" fmla="val 8333"/>
-            </a:avLst>
-          </a:prstGeom>
-          <a:solidFill>
-            <a:srgbClr val="F8FAFC"/>
-          </a:solidFill>
-          <a:ln w="12700">
-            <a:solidFill>
-              <a:srgbClr val="E2E8F0"/>
-            </a:solidFill>
-            <a:prstDash val="dash"/>
-          </a:ln>
-        </p:spPr>
-      </p:sp>
-      <p:sp>
-        <p:nvSpPr>
-          <p:cNvPr id="25" name="Text 23"/>
-          <p:cNvSpPr/>
-          <p:nvPr/>
-        </p:nvSpPr>
-        <p:spPr>
-          <a:xfrm>
-            <a:off x="1874520" y="3273552"/>
-            <a:ext cx="6903720" cy="658368"/>
-          </a:xfrm>
-          <a:prstGeom prst="rect">
-            <a:avLst/>
-          </a:prstGeom>
-          <a:noFill/>
-          <a:ln/>
-        </p:spPr>
-        <p:txBody>
-          <a:bodyPr wrap="square" rtlCol="0" anchor="ctr"/>
-          <a:lstStyle/>
-          <a:p>
-            <a:pPr algn="ctr" indent="0" marL="0">
-              <a:buNone/>
-            </a:pPr>
-            <a:r>
-              <a:rPr lang="en-US" sz="1100" i="1" dirty="0">
-                <a:solidFill>
-                  <a:srgbClr val="CBD5E1"/>
-                </a:solidFill>
-                <a:latin typeface="Calibri" pitchFamily="34" charset="0"/>
-                <a:ea typeface="Calibri" pitchFamily="34" charset="-122"/>
-                <a:cs typeface="Calibri" pitchFamily="34" charset="-120"/>
-              </a:rPr>
-              <a:t>Write here...</a:t>
-            </a:r>
-            <a:endParaRPr lang="en-US" sz="1100" dirty="0"/>
-          </a:p>
-        </p:txBody>
-      </p:sp>
-      <p:sp>
-        <p:nvSpPr>
-          <p:cNvPr id="26" name="Shape 24"/>
-          <p:cNvSpPr/>
-          <p:nvPr/>
-        </p:nvSpPr>
-        <p:spPr>
-          <a:xfrm>
-            <a:off x="365760" y="4096512"/>
-            <a:ext cx="1371600" cy="804672"/>
+          <p:cNvPr id="25" name="Shape 23"/>
+          <p:cNvSpPr/>
+          <p:nvPr/>
+        </p:nvSpPr>
+        <p:spPr>
+          <a:xfrm>
+            <a:off x="1874520" y="4096512"/>
+            <a:ext cx="6903720" cy="804672"/>
           </a:xfrm>
           <a:prstGeom prst="rect">
             <a:avLst>
@@ -8127,85 +8081,19 @@
             </a:avLst>
           </a:prstGeom>
           <a:solidFill>
-            <a:srgbClr val="E2E8F0"/>
+            <a:srgbClr val="F8FAFC"/>
           </a:solidFill>
           <a:ln w="12700">
             <a:solidFill>
               <a:srgbClr val="E2E8F0"/>
             </a:solidFill>
-            <a:prstDash val="solid"/>
-          </a:ln>
-        </p:spPr>
-      </p:sp>
-      <p:sp>
-        <p:nvSpPr>
-          <p:cNvPr id="27" name="Text 25"/>
-          <p:cNvSpPr/>
-          <p:nvPr/>
-        </p:nvSpPr>
-        <p:spPr>
-          <a:xfrm>
-            <a:off x="365760" y="4096512"/>
-            <a:ext cx="1371600" cy="804672"/>
-          </a:xfrm>
-          <a:prstGeom prst="rect">
-            <a:avLst/>
-          </a:prstGeom>
-          <a:noFill/>
-          <a:ln/>
-        </p:spPr>
-        <p:txBody>
-          <a:bodyPr wrap="square" lIns="0" tIns="0" rIns="0" bIns="0" rtlCol="0" anchor="ctr"/>
-          <a:lstStyle/>
-          <a:p>
-            <a:pPr algn="ctr" indent="0" marL="0">
-              <a:buNone/>
-            </a:pPr>
-            <a:r>
-              <a:rPr lang="en-US" sz="1100" b="1" dirty="0">
-                <a:solidFill>
-                  <a:srgbClr val="475569"/>
-                </a:solidFill>
-                <a:latin typeface="Trebuchet MS" pitchFamily="34" charset="0"/>
-                <a:ea typeface="Trebuchet MS" pitchFamily="34" charset="-122"/>
-                <a:cs typeface="Trebuchet MS" pitchFamily="34" charset="-120"/>
-              </a:rPr>
-              <a:t>Phonemes</a:t>
-            </a:r>
-            <a:endParaRPr lang="en-US" sz="1100" dirty="0"/>
-          </a:p>
-        </p:txBody>
-      </p:sp>
-      <p:sp>
-        <p:nvSpPr>
-          <p:cNvPr id="28" name="Shape 26"/>
-          <p:cNvSpPr/>
-          <p:nvPr/>
-        </p:nvSpPr>
-        <p:spPr>
-          <a:xfrm>
-            <a:off x="1874520" y="4096512"/>
-            <a:ext cx="6903720" cy="804672"/>
-          </a:xfrm>
-          <a:prstGeom prst="rect">
-            <a:avLst>
-              <a:gd name="adj" fmla="val 6818"/>
-            </a:avLst>
-          </a:prstGeom>
-          <a:solidFill>
-            <a:srgbClr val="F8FAFC"/>
-          </a:solidFill>
-          <a:ln w="12700">
-            <a:solidFill>
-              <a:srgbClr val="E2E8F0"/>
-            </a:solidFill>
             <a:prstDash val="dash"/>
           </a:ln>
         </p:spPr>
       </p:sp>
       <p:sp>
         <p:nvSpPr>
-          <p:cNvPr id="29" name="Text 27"/>
+          <p:cNvPr id="26" name="Text 24"/>
           <p:cNvSpPr/>
           <p:nvPr/>
         </p:nvSpPr>
@@ -8528,7 +8416,7 @@
                 <a:ea typeface="Calibri" pitchFamily="34" charset="-122"/>
                 <a:cs typeface="Calibri" pitchFamily="34" charset="-120"/>
               </a:rPr>
-              <a:t>Word Labs  •  wordlabs.app  •  Root: 'brisk' = quick, lively, and energetic</a:t>
+              <a:t>Word Labs  •  wordlabs.app  •  Root: 'brisk' = quick and energetic</a:t>
             </a:r>
             <a:endParaRPr lang="en-US" sz="800" dirty="0"/>
           </a:p>
@@ -8667,7 +8555,7 @@
                 <a:ea typeface="Trebuchet MS" pitchFamily="34" charset="-122"/>
                 <a:cs typeface="Trebuchet MS" pitchFamily="34" charset="-120"/>
               </a:rPr>
-              <a:t>briskly</a:t>
+              <a:t>brisk</a:t>
             </a:r>
             <a:endParaRPr lang="en-US" sz="2800" dirty="0"/>
           </a:p>
@@ -8747,7 +8635,7 @@
         </p:nvSpPr>
         <p:spPr>
           <a:xfrm>
-            <a:off x="2938272" y="2258568"/>
+            <a:off x="4370832" y="2258568"/>
             <a:ext cx="1828800" cy="292608"/>
           </a:xfrm>
           <a:prstGeom prst="rect">
@@ -8781,7 +8669,7 @@
         </p:nvSpPr>
         <p:spPr>
           <a:xfrm>
-            <a:off x="2938272" y="2258568"/>
+            <a:off x="4370832" y="2258568"/>
             <a:ext cx="1828800" cy="292608"/>
           </a:xfrm>
           <a:prstGeom prst="rect">
@@ -8820,7 +8708,7 @@
         </p:nvSpPr>
         <p:spPr>
           <a:xfrm>
-            <a:off x="2938272" y="2569464"/>
+            <a:off x="4370832" y="2569464"/>
             <a:ext cx="1828800" cy="201168"/>
           </a:xfrm>
           <a:prstGeom prst="rect">
@@ -8845,7 +8733,7 @@
                 <a:ea typeface="Calibri" pitchFamily="34" charset="-122"/>
                 <a:cs typeface="Calibri" pitchFamily="34" charset="-120"/>
               </a:rPr>
-              <a:t>quick and lively</a:t>
+              <a:t>quick and energetic</a:t>
             </a:r>
             <a:endParaRPr lang="en-US" sz="850" dirty="0"/>
           </a:p>
@@ -8859,30 +8747,23 @@
         </p:nvSpPr>
         <p:spPr>
           <a:xfrm>
-            <a:off x="5803392" y="2258568"/>
-            <a:ext cx="1828800" cy="292608"/>
+            <a:off x="365760" y="3273552"/>
+            <a:ext cx="1371600" cy="658368"/>
           </a:xfrm>
           <a:prstGeom prst="rect">
             <a:avLst>
-              <a:gd name="adj" fmla="val 25000"/>
+              <a:gd name="adj" fmla="val 8333"/>
             </a:avLst>
           </a:prstGeom>
           <a:solidFill>
-            <a:srgbClr val="FCE7F3"/>
-          </a:solidFill>
-          <a:ln w="19050">
-            <a:solidFill>
-              <a:srgbClr val="DB2777"/>
-            </a:solidFill>
-            <a:prstDash val="solid"/>
-          </a:ln>
-          <a:effectLst>
-            <a:outerShdw sx="100000" sy="100000" kx="0" ky="0" algn="bl" rotWithShape="0" blurRad="101600" dist="38100" dir="8100000">
-              <a:srgbClr val="000000">
-                <a:alpha val="12000"/>
-              </a:srgbClr>
-            </a:outerShdw>
-          </a:effectLst>
+            <a:srgbClr val="E2E8F0"/>
+          </a:solidFill>
+          <a:ln w="12700">
+            <a:solidFill>
+              <a:srgbClr val="E2E8F0"/>
+            </a:solidFill>
+            <a:prstDash val="solid"/>
+          </a:ln>
         </p:spPr>
       </p:sp>
       <p:sp>
@@ -8893,8 +8774,8 @@
         </p:nvSpPr>
         <p:spPr>
           <a:xfrm>
-            <a:off x="5803392" y="2258568"/>
-            <a:ext cx="1828800" cy="292608"/>
+            <a:off x="365760" y="3273552"/>
+            <a:ext cx="1371600" cy="658368"/>
           </a:xfrm>
           <a:prstGeom prst="rect">
             <a:avLst/>
@@ -8910,69 +8791,30 @@
               <a:buNone/>
             </a:pPr>
             <a:r>
-              <a:rPr lang="en-US" sz="1300" b="1" dirty="0">
-                <a:solidFill>
-                  <a:srgbClr val="9D174D"/>
+              <a:rPr lang="en-US" sz="1100" b="1" dirty="0">
+                <a:solidFill>
+                  <a:srgbClr val="475569"/>
                 </a:solidFill>
                 <a:latin typeface="Trebuchet MS" pitchFamily="34" charset="0"/>
                 <a:ea typeface="Trebuchet MS" pitchFamily="34" charset="-122"/>
                 <a:cs typeface="Trebuchet MS" pitchFamily="34" charset="-120"/>
               </a:rPr>
-              <a:t>ly</a:t>
-            </a:r>
-            <a:endParaRPr lang="en-US" sz="1300" dirty="0"/>
-          </a:p>
-        </p:txBody>
-      </p:sp>
-      <p:sp>
-        <p:nvSpPr>
-          <p:cNvPr id="21" name="Text 19"/>
-          <p:cNvSpPr/>
-          <p:nvPr/>
-        </p:nvSpPr>
-        <p:spPr>
-          <a:xfrm>
-            <a:off x="5803392" y="2569464"/>
-            <a:ext cx="1828800" cy="201168"/>
-          </a:xfrm>
-          <a:prstGeom prst="rect">
-            <a:avLst/>
-          </a:prstGeom>
-          <a:noFill/>
-          <a:ln/>
-        </p:spPr>
-        <p:txBody>
-          <a:bodyPr wrap="square" lIns="0" tIns="0" rIns="0" bIns="0" rtlCol="0" anchor="t"/>
-          <a:lstStyle/>
-          <a:p>
-            <a:pPr algn="ctr" indent="0" marL="0">
-              <a:buNone/>
-            </a:pPr>
-            <a:r>
-              <a:rPr lang="en-US" sz="850" dirty="0">
-                <a:solidFill>
-                  <a:srgbClr val="475569"/>
-                </a:solidFill>
-                <a:latin typeface="Calibri" pitchFamily="34" charset="0"/>
-                <a:ea typeface="Calibri" pitchFamily="34" charset="-122"/>
-                <a:cs typeface="Calibri" pitchFamily="34" charset="-120"/>
-              </a:rPr>
-              <a:t>in a way that is</a:t>
-            </a:r>
-            <a:endParaRPr lang="en-US" sz="850" dirty="0"/>
-          </a:p>
-        </p:txBody>
-      </p:sp>
-      <p:sp>
-        <p:nvSpPr>
-          <p:cNvPr id="22" name="Shape 20"/>
-          <p:cNvSpPr/>
-          <p:nvPr/>
-        </p:nvSpPr>
-        <p:spPr>
-          <a:xfrm>
-            <a:off x="365760" y="3273552"/>
-            <a:ext cx="1371600" cy="658368"/>
+              <a:t>Syllables</a:t>
+            </a:r>
+            <a:endParaRPr lang="en-US" sz="1100" dirty="0"/>
+          </a:p>
+        </p:txBody>
+      </p:sp>
+      <p:sp>
+        <p:nvSpPr>
+          <p:cNvPr id="21" name="Shape 19"/>
+          <p:cNvSpPr/>
+          <p:nvPr/>
+        </p:nvSpPr>
+        <p:spPr>
+          <a:xfrm>
+            <a:off x="1874520" y="3273552"/>
+            <a:ext cx="6903720" cy="658368"/>
           </a:xfrm>
           <a:prstGeom prst="rect">
             <a:avLst>
@@ -8980,11 +8822,38 @@
             </a:avLst>
           </a:prstGeom>
           <a:solidFill>
-            <a:srgbClr val="E2E8F0"/>
-          </a:solidFill>
-          <a:ln w="12700">
-            <a:solidFill>
-              <a:srgbClr val="E2E8F0"/>
+            <a:srgbClr val="CCFBF1"/>
+          </a:solidFill>
+          <a:ln w="12700">
+            <a:solidFill>
+              <a:srgbClr val="0D9488"/>
+            </a:solidFill>
+            <a:prstDash val="solid"/>
+          </a:ln>
+        </p:spPr>
+      </p:sp>
+      <p:sp>
+        <p:nvSpPr>
+          <p:cNvPr id="22" name="Shape 20"/>
+          <p:cNvSpPr/>
+          <p:nvPr/>
+        </p:nvSpPr>
+        <p:spPr>
+          <a:xfrm>
+            <a:off x="4370832" y="3364992"/>
+            <a:ext cx="1645920" cy="475488"/>
+          </a:xfrm>
+          <a:prstGeom prst="rect">
+            <a:avLst>
+              <a:gd name="adj" fmla="val 9615"/>
+            </a:avLst>
+          </a:prstGeom>
+          <a:solidFill>
+            <a:srgbClr val="FFFFFF"/>
+          </a:solidFill>
+          <a:ln w="12700">
+            <a:solidFill>
+              <a:srgbClr val="0D9488"/>
             </a:solidFill>
             <a:prstDash val="solid"/>
           </a:ln>
@@ -8998,8 +8867,8 @@
         </p:nvSpPr>
         <p:spPr>
           <a:xfrm>
-            <a:off x="365760" y="3273552"/>
-            <a:ext cx="1371600" cy="658368"/>
+            <a:off x="4370832" y="3364992"/>
+            <a:ext cx="1645920" cy="475488"/>
           </a:xfrm>
           <a:prstGeom prst="rect">
             <a:avLst/>
@@ -9015,17 +8884,17 @@
               <a:buNone/>
             </a:pPr>
             <a:r>
-              <a:rPr lang="en-US" sz="1100" b="1" dirty="0">
-                <a:solidFill>
-                  <a:srgbClr val="475569"/>
+              <a:rPr lang="en-US" sz="1400" b="1" dirty="0">
+                <a:solidFill>
+                  <a:srgbClr val="0D9488"/>
                 </a:solidFill>
                 <a:latin typeface="Trebuchet MS" pitchFamily="34" charset="0"/>
                 <a:ea typeface="Trebuchet MS" pitchFamily="34" charset="-122"/>
                 <a:cs typeface="Trebuchet MS" pitchFamily="34" charset="-120"/>
               </a:rPr>
-              <a:t>Syllables</a:t>
-            </a:r>
-            <a:endParaRPr lang="en-US" sz="1100" dirty="0"/>
+              <a:t>brisk</a:t>
+            </a:r>
+            <a:endParaRPr lang="en-US" sz="1400" dirty="0"/>
           </a:p>
         </p:txBody>
       </p:sp>
@@ -9037,62 +8906,35 @@
         </p:nvSpPr>
         <p:spPr>
           <a:xfrm>
-            <a:off x="1874520" y="3273552"/>
-            <a:ext cx="6903720" cy="658368"/>
+            <a:off x="365760" y="4096512"/>
+            <a:ext cx="1371600" cy="804672"/>
           </a:xfrm>
           <a:prstGeom prst="rect">
             <a:avLst>
-              <a:gd name="adj" fmla="val 8333"/>
+              <a:gd name="adj" fmla="val 6818"/>
             </a:avLst>
           </a:prstGeom>
           <a:solidFill>
-            <a:srgbClr val="CCFBF1"/>
-          </a:solidFill>
-          <a:ln w="12700">
-            <a:solidFill>
-              <a:srgbClr val="0D9488"/>
-            </a:solidFill>
-            <a:prstDash val="solid"/>
-          </a:ln>
-        </p:spPr>
-      </p:sp>
-      <p:sp>
-        <p:nvSpPr>
-          <p:cNvPr id="25" name="Shape 23"/>
-          <p:cNvSpPr/>
-          <p:nvPr/>
-        </p:nvSpPr>
-        <p:spPr>
-          <a:xfrm>
-            <a:off x="2999232" y="3364992"/>
-            <a:ext cx="1645920" cy="475488"/>
-          </a:xfrm>
-          <a:prstGeom prst="rect">
-            <a:avLst>
-              <a:gd name="adj" fmla="val 9615"/>
-            </a:avLst>
-          </a:prstGeom>
-          <a:solidFill>
-            <a:srgbClr val="FFFFFF"/>
-          </a:solidFill>
-          <a:ln w="12700">
-            <a:solidFill>
-              <a:srgbClr val="0D9488"/>
-            </a:solidFill>
-            <a:prstDash val="solid"/>
-          </a:ln>
-        </p:spPr>
-      </p:sp>
-      <p:sp>
-        <p:nvSpPr>
-          <p:cNvPr id="26" name="Text 24"/>
-          <p:cNvSpPr/>
-          <p:nvPr/>
-        </p:nvSpPr>
-        <p:spPr>
-          <a:xfrm>
-            <a:off x="2999232" y="3364992"/>
-            <a:ext cx="1645920" cy="475488"/>
+            <a:srgbClr val="E2E8F0"/>
+          </a:solidFill>
+          <a:ln w="12700">
+            <a:solidFill>
+              <a:srgbClr val="E2E8F0"/>
+            </a:solidFill>
+            <a:prstDash val="solid"/>
+          </a:ln>
+        </p:spPr>
+      </p:sp>
+      <p:sp>
+        <p:nvSpPr>
+          <p:cNvPr id="25" name="Text 23"/>
+          <p:cNvSpPr/>
+          <p:nvPr/>
+        </p:nvSpPr>
+        <p:spPr>
+          <a:xfrm>
+            <a:off x="365760" y="4096512"/>
+            <a:ext cx="1371600" cy="804672"/>
           </a:xfrm>
           <a:prstGeom prst="rect">
             <a:avLst/>
@@ -9108,135 +8950,30 @@
               <a:buNone/>
             </a:pPr>
             <a:r>
-              <a:rPr lang="en-US" sz="1400" b="1" dirty="0">
-                <a:solidFill>
-                  <a:srgbClr val="0D9488"/>
+              <a:rPr lang="en-US" sz="1100" b="1" dirty="0">
+                <a:solidFill>
+                  <a:srgbClr val="475569"/>
                 </a:solidFill>
                 <a:latin typeface="Trebuchet MS" pitchFamily="34" charset="0"/>
                 <a:ea typeface="Trebuchet MS" pitchFamily="34" charset="-122"/>
                 <a:cs typeface="Trebuchet MS" pitchFamily="34" charset="-120"/>
               </a:rPr>
-              <a:t>brisk</a:t>
-            </a:r>
-            <a:endParaRPr lang="en-US" sz="1400" dirty="0"/>
-          </a:p>
-        </p:txBody>
-      </p:sp>
-      <p:sp>
-        <p:nvSpPr>
-          <p:cNvPr id="27" name="Text 25"/>
-          <p:cNvSpPr/>
-          <p:nvPr/>
-        </p:nvSpPr>
-        <p:spPr>
-          <a:xfrm>
-            <a:off x="4645152" y="3364992"/>
-            <a:ext cx="1097280" cy="475488"/>
-          </a:xfrm>
-          <a:prstGeom prst="rect">
-            <a:avLst/>
-          </a:prstGeom>
-          <a:noFill/>
-          <a:ln/>
-        </p:spPr>
-        <p:txBody>
-          <a:bodyPr wrap="square" lIns="0" tIns="0" rIns="0" bIns="0" rtlCol="0" anchor="ctr"/>
-          <a:lstStyle/>
-          <a:p>
-            <a:pPr algn="ctr" indent="0" marL="0">
-              <a:buNone/>
-            </a:pPr>
-            <a:r>
-              <a:rPr lang="en-US" sz="1600" b="1" dirty="0">
-                <a:solidFill>
-                  <a:srgbClr val="0D9488"/>
-                </a:solidFill>
-                <a:latin typeface="Trebuchet MS" pitchFamily="34" charset="0"/>
-                <a:ea typeface="Trebuchet MS" pitchFamily="34" charset="-122"/>
-                <a:cs typeface="Trebuchet MS" pitchFamily="34" charset="-120"/>
-              </a:rPr>
-              <a:t>·</a:t>
-            </a:r>
-            <a:endParaRPr lang="en-US" sz="1600" dirty="0"/>
-          </a:p>
-        </p:txBody>
-      </p:sp>
-      <p:sp>
-        <p:nvSpPr>
-          <p:cNvPr id="28" name="Shape 26"/>
-          <p:cNvSpPr/>
-          <p:nvPr/>
-        </p:nvSpPr>
-        <p:spPr>
-          <a:xfrm>
-            <a:off x="5742432" y="3364992"/>
-            <a:ext cx="1645920" cy="475488"/>
-          </a:xfrm>
-          <a:prstGeom prst="rect">
-            <a:avLst>
-              <a:gd name="adj" fmla="val 9615"/>
-            </a:avLst>
-          </a:prstGeom>
-          <a:solidFill>
-            <a:srgbClr val="FFFFFF"/>
-          </a:solidFill>
-          <a:ln w="12700">
-            <a:solidFill>
-              <a:srgbClr val="0D9488"/>
-            </a:solidFill>
-            <a:prstDash val="solid"/>
-          </a:ln>
-        </p:spPr>
-      </p:sp>
-      <p:sp>
-        <p:nvSpPr>
-          <p:cNvPr id="29" name="Text 27"/>
-          <p:cNvSpPr/>
-          <p:nvPr/>
-        </p:nvSpPr>
-        <p:spPr>
-          <a:xfrm>
-            <a:off x="5742432" y="3364992"/>
-            <a:ext cx="1645920" cy="475488"/>
-          </a:xfrm>
-          <a:prstGeom prst="rect">
-            <a:avLst/>
-          </a:prstGeom>
-          <a:noFill/>
-          <a:ln/>
-        </p:spPr>
-        <p:txBody>
-          <a:bodyPr wrap="square" lIns="0" tIns="0" rIns="0" bIns="0" rtlCol="0" anchor="ctr"/>
-          <a:lstStyle/>
-          <a:p>
-            <a:pPr algn="ctr" indent="0" marL="0">
-              <a:buNone/>
-            </a:pPr>
-            <a:r>
-              <a:rPr lang="en-US" sz="1400" b="1" dirty="0">
-                <a:solidFill>
-                  <a:srgbClr val="0D9488"/>
-                </a:solidFill>
-                <a:latin typeface="Trebuchet MS" pitchFamily="34" charset="0"/>
-                <a:ea typeface="Trebuchet MS" pitchFamily="34" charset="-122"/>
-                <a:cs typeface="Trebuchet MS" pitchFamily="34" charset="-120"/>
-              </a:rPr>
-              <a:t>ly</a:t>
-            </a:r>
-            <a:endParaRPr lang="en-US" sz="1400" dirty="0"/>
-          </a:p>
-        </p:txBody>
-      </p:sp>
-      <p:sp>
-        <p:nvSpPr>
-          <p:cNvPr id="30" name="Shape 28"/>
-          <p:cNvSpPr/>
-          <p:nvPr/>
-        </p:nvSpPr>
-        <p:spPr>
-          <a:xfrm>
-            <a:off x="365760" y="4096512"/>
-            <a:ext cx="1371600" cy="804672"/>
+              <a:t>Phonemes</a:t>
+            </a:r>
+            <a:endParaRPr lang="en-US" sz="1100" dirty="0"/>
+          </a:p>
+        </p:txBody>
+      </p:sp>
+      <p:sp>
+        <p:nvSpPr>
+          <p:cNvPr id="26" name="Shape 24"/>
+          <p:cNvSpPr/>
+          <p:nvPr/>
+        </p:nvSpPr>
+        <p:spPr>
+          <a:xfrm>
+            <a:off x="1874520" y="4096512"/>
+            <a:ext cx="6903720" cy="804672"/>
           </a:xfrm>
           <a:prstGeom prst="rect">
             <a:avLst>
@@ -9244,85 +8981,19 @@
             </a:avLst>
           </a:prstGeom>
           <a:solidFill>
-            <a:srgbClr val="E2E8F0"/>
+            <a:srgbClr val="F8FAFC"/>
           </a:solidFill>
           <a:ln w="12700">
             <a:solidFill>
               <a:srgbClr val="E2E8F0"/>
             </a:solidFill>
-            <a:prstDash val="solid"/>
-          </a:ln>
-        </p:spPr>
-      </p:sp>
-      <p:sp>
-        <p:nvSpPr>
-          <p:cNvPr id="31" name="Text 29"/>
-          <p:cNvSpPr/>
-          <p:nvPr/>
-        </p:nvSpPr>
-        <p:spPr>
-          <a:xfrm>
-            <a:off x="365760" y="4096512"/>
-            <a:ext cx="1371600" cy="804672"/>
-          </a:xfrm>
-          <a:prstGeom prst="rect">
-            <a:avLst/>
-          </a:prstGeom>
-          <a:noFill/>
-          <a:ln/>
-        </p:spPr>
-        <p:txBody>
-          <a:bodyPr wrap="square" lIns="0" tIns="0" rIns="0" bIns="0" rtlCol="0" anchor="ctr"/>
-          <a:lstStyle/>
-          <a:p>
-            <a:pPr algn="ctr" indent="0" marL="0">
-              <a:buNone/>
-            </a:pPr>
-            <a:r>
-              <a:rPr lang="en-US" sz="1100" b="1" dirty="0">
-                <a:solidFill>
-                  <a:srgbClr val="475569"/>
-                </a:solidFill>
-                <a:latin typeface="Trebuchet MS" pitchFamily="34" charset="0"/>
-                <a:ea typeface="Trebuchet MS" pitchFamily="34" charset="-122"/>
-                <a:cs typeface="Trebuchet MS" pitchFamily="34" charset="-120"/>
-              </a:rPr>
-              <a:t>Phonemes</a:t>
-            </a:r>
-            <a:endParaRPr lang="en-US" sz="1100" dirty="0"/>
-          </a:p>
-        </p:txBody>
-      </p:sp>
-      <p:sp>
-        <p:nvSpPr>
-          <p:cNvPr id="32" name="Shape 30"/>
-          <p:cNvSpPr/>
-          <p:nvPr/>
-        </p:nvSpPr>
-        <p:spPr>
-          <a:xfrm>
-            <a:off x="1874520" y="4096512"/>
-            <a:ext cx="6903720" cy="804672"/>
-          </a:xfrm>
-          <a:prstGeom prst="rect">
-            <a:avLst>
-              <a:gd name="adj" fmla="val 6818"/>
-            </a:avLst>
-          </a:prstGeom>
-          <a:solidFill>
-            <a:srgbClr val="F8FAFC"/>
-          </a:solidFill>
-          <a:ln w="12700">
-            <a:solidFill>
-              <a:srgbClr val="E2E8F0"/>
-            </a:solidFill>
             <a:prstDash val="dash"/>
           </a:ln>
         </p:spPr>
       </p:sp>
       <p:sp>
         <p:nvSpPr>
-          <p:cNvPr id="33" name="Text 31"/>
+          <p:cNvPr id="27" name="Text 25"/>
           <p:cNvSpPr/>
           <p:nvPr/>
         </p:nvSpPr>
@@ -9645,7 +9316,7 @@
                 <a:ea typeface="Calibri" pitchFamily="34" charset="-122"/>
                 <a:cs typeface="Calibri" pitchFamily="34" charset="-120"/>
               </a:rPr>
-              <a:t>Word Labs  •  wordlabs.app  •  Root: 'brisk' = quick, lively, and energetic</a:t>
+              <a:t>Word Labs  •  wordlabs.app  •  Root: 'brisk' = quick and energetic</a:t>
             </a:r>
             <a:endParaRPr lang="en-US" sz="800" dirty="0"/>
           </a:p>
@@ -9784,7 +9455,7 @@
                 <a:ea typeface="Trebuchet MS" pitchFamily="34" charset="-122"/>
                 <a:cs typeface="Trebuchet MS" pitchFamily="34" charset="-120"/>
               </a:rPr>
-              <a:t>briskly</a:t>
+              <a:t>brisk</a:t>
             </a:r>
             <a:endParaRPr lang="en-US" sz="2800" dirty="0"/>
           </a:p>
@@ -9864,7 +9535,7 @@
         </p:nvSpPr>
         <p:spPr>
           <a:xfrm>
-            <a:off x="2938272" y="2258568"/>
+            <a:off x="4370832" y="2258568"/>
             <a:ext cx="1828800" cy="292608"/>
           </a:xfrm>
           <a:prstGeom prst="rect">
@@ -9898,7 +9569,7 @@
         </p:nvSpPr>
         <p:spPr>
           <a:xfrm>
-            <a:off x="2938272" y="2258568"/>
+            <a:off x="4370832" y="2258568"/>
             <a:ext cx="1828800" cy="292608"/>
           </a:xfrm>
           <a:prstGeom prst="rect">
@@ -9937,7 +9608,7 @@
         </p:nvSpPr>
         <p:spPr>
           <a:xfrm>
-            <a:off x="2938272" y="2569464"/>
+            <a:off x="4370832" y="2569464"/>
             <a:ext cx="1828800" cy="201168"/>
           </a:xfrm>
           <a:prstGeom prst="rect">
@@ -9962,7 +9633,7 @@
                 <a:ea typeface="Calibri" pitchFamily="34" charset="-122"/>
                 <a:cs typeface="Calibri" pitchFamily="34" charset="-120"/>
               </a:rPr>
-              <a:t>quick and lively</a:t>
+              <a:t>quick and energetic</a:t>
             </a:r>
             <a:endParaRPr lang="en-US" sz="850" dirty="0"/>
           </a:p>
@@ -9976,30 +9647,23 @@
         </p:nvSpPr>
         <p:spPr>
           <a:xfrm>
-            <a:off x="5803392" y="2258568"/>
-            <a:ext cx="1828800" cy="292608"/>
+            <a:off x="365760" y="3273552"/>
+            <a:ext cx="1371600" cy="658368"/>
           </a:xfrm>
           <a:prstGeom prst="rect">
             <a:avLst>
-              <a:gd name="adj" fmla="val 25000"/>
+              <a:gd name="adj" fmla="val 8333"/>
             </a:avLst>
           </a:prstGeom>
           <a:solidFill>
-            <a:srgbClr val="FCE7F3"/>
-          </a:solidFill>
-          <a:ln w="19050">
-            <a:solidFill>
-              <a:srgbClr val="DB2777"/>
-            </a:solidFill>
-            <a:prstDash val="solid"/>
-          </a:ln>
-          <a:effectLst>
-            <a:outerShdw sx="100000" sy="100000" kx="0" ky="0" algn="bl" rotWithShape="0" blurRad="101600" dist="38100" dir="8100000">
-              <a:srgbClr val="000000">
-                <a:alpha val="12000"/>
-              </a:srgbClr>
-            </a:outerShdw>
-          </a:effectLst>
+            <a:srgbClr val="E2E8F0"/>
+          </a:solidFill>
+          <a:ln w="12700">
+            <a:solidFill>
+              <a:srgbClr val="E2E8F0"/>
+            </a:solidFill>
+            <a:prstDash val="solid"/>
+          </a:ln>
         </p:spPr>
       </p:sp>
       <p:sp>
@@ -10010,8 +9674,8 @@
         </p:nvSpPr>
         <p:spPr>
           <a:xfrm>
-            <a:off x="5803392" y="2258568"/>
-            <a:ext cx="1828800" cy="292608"/>
+            <a:off x="365760" y="3273552"/>
+            <a:ext cx="1371600" cy="658368"/>
           </a:xfrm>
           <a:prstGeom prst="rect">
             <a:avLst/>
@@ -10027,69 +9691,30 @@
               <a:buNone/>
             </a:pPr>
             <a:r>
-              <a:rPr lang="en-US" sz="1300" b="1" dirty="0">
-                <a:solidFill>
-                  <a:srgbClr val="9D174D"/>
+              <a:rPr lang="en-US" sz="1100" b="1" dirty="0">
+                <a:solidFill>
+                  <a:srgbClr val="475569"/>
                 </a:solidFill>
                 <a:latin typeface="Trebuchet MS" pitchFamily="34" charset="0"/>
                 <a:ea typeface="Trebuchet MS" pitchFamily="34" charset="-122"/>
                 <a:cs typeface="Trebuchet MS" pitchFamily="34" charset="-120"/>
               </a:rPr>
-              <a:t>ly</a:t>
-            </a:r>
-            <a:endParaRPr lang="en-US" sz="1300" dirty="0"/>
-          </a:p>
-        </p:txBody>
-      </p:sp>
-      <p:sp>
-        <p:nvSpPr>
-          <p:cNvPr id="21" name="Text 19"/>
-          <p:cNvSpPr/>
-          <p:nvPr/>
-        </p:nvSpPr>
-        <p:spPr>
-          <a:xfrm>
-            <a:off x="5803392" y="2569464"/>
-            <a:ext cx="1828800" cy="201168"/>
-          </a:xfrm>
-          <a:prstGeom prst="rect">
-            <a:avLst/>
-          </a:prstGeom>
-          <a:noFill/>
-          <a:ln/>
-        </p:spPr>
-        <p:txBody>
-          <a:bodyPr wrap="square" lIns="0" tIns="0" rIns="0" bIns="0" rtlCol="0" anchor="t"/>
-          <a:lstStyle/>
-          <a:p>
-            <a:pPr algn="ctr" indent="0" marL="0">
-              <a:buNone/>
-            </a:pPr>
-            <a:r>
-              <a:rPr lang="en-US" sz="850" dirty="0">
-                <a:solidFill>
-                  <a:srgbClr val="475569"/>
-                </a:solidFill>
-                <a:latin typeface="Calibri" pitchFamily="34" charset="0"/>
-                <a:ea typeface="Calibri" pitchFamily="34" charset="-122"/>
-                <a:cs typeface="Calibri" pitchFamily="34" charset="-120"/>
-              </a:rPr>
-              <a:t>in a way that is</a:t>
-            </a:r>
-            <a:endParaRPr lang="en-US" sz="850" dirty="0"/>
-          </a:p>
-        </p:txBody>
-      </p:sp>
-      <p:sp>
-        <p:nvSpPr>
-          <p:cNvPr id="22" name="Shape 20"/>
-          <p:cNvSpPr/>
-          <p:nvPr/>
-        </p:nvSpPr>
-        <p:spPr>
-          <a:xfrm>
-            <a:off x="365760" y="3273552"/>
-            <a:ext cx="1371600" cy="658368"/>
+              <a:t>Syllables</a:t>
+            </a:r>
+            <a:endParaRPr lang="en-US" sz="1100" dirty="0"/>
+          </a:p>
+        </p:txBody>
+      </p:sp>
+      <p:sp>
+        <p:nvSpPr>
+          <p:cNvPr id="21" name="Shape 19"/>
+          <p:cNvSpPr/>
+          <p:nvPr/>
+        </p:nvSpPr>
+        <p:spPr>
+          <a:xfrm>
+            <a:off x="1874520" y="3273552"/>
+            <a:ext cx="6903720" cy="658368"/>
           </a:xfrm>
           <a:prstGeom prst="rect">
             <a:avLst>
@@ -10097,11 +9722,38 @@
             </a:avLst>
           </a:prstGeom>
           <a:solidFill>
-            <a:srgbClr val="E2E8F0"/>
-          </a:solidFill>
-          <a:ln w="12700">
-            <a:solidFill>
-              <a:srgbClr val="E2E8F0"/>
+            <a:srgbClr val="CCFBF1"/>
+          </a:solidFill>
+          <a:ln w="12700">
+            <a:solidFill>
+              <a:srgbClr val="0D9488"/>
+            </a:solidFill>
+            <a:prstDash val="solid"/>
+          </a:ln>
+        </p:spPr>
+      </p:sp>
+      <p:sp>
+        <p:nvSpPr>
+          <p:cNvPr id="22" name="Shape 20"/>
+          <p:cNvSpPr/>
+          <p:nvPr/>
+        </p:nvSpPr>
+        <p:spPr>
+          <a:xfrm>
+            <a:off x="4370832" y="3364992"/>
+            <a:ext cx="1645920" cy="475488"/>
+          </a:xfrm>
+          <a:prstGeom prst="rect">
+            <a:avLst>
+              <a:gd name="adj" fmla="val 9615"/>
+            </a:avLst>
+          </a:prstGeom>
+          <a:solidFill>
+            <a:srgbClr val="FFFFFF"/>
+          </a:solidFill>
+          <a:ln w="12700">
+            <a:solidFill>
+              <a:srgbClr val="0D9488"/>
             </a:solidFill>
             <a:prstDash val="solid"/>
           </a:ln>
@@ -10115,8 +9767,8 @@
         </p:nvSpPr>
         <p:spPr>
           <a:xfrm>
-            <a:off x="365760" y="3273552"/>
-            <a:ext cx="1371600" cy="658368"/>
+            <a:off x="4370832" y="3364992"/>
+            <a:ext cx="1645920" cy="475488"/>
           </a:xfrm>
           <a:prstGeom prst="rect">
             <a:avLst/>
@@ -10132,15 +9784,81 @@
               <a:buNone/>
             </a:pPr>
             <a:r>
-              <a:rPr lang="en-US" sz="1100" b="1" dirty="0">
-                <a:solidFill>
-                  <a:srgbClr val="475569"/>
+              <a:rPr lang="en-US" sz="1400" b="1" dirty="0">
+                <a:solidFill>
+                  <a:srgbClr val="0D9488"/>
                 </a:solidFill>
                 <a:latin typeface="Trebuchet MS" pitchFamily="34" charset="0"/>
                 <a:ea typeface="Trebuchet MS" pitchFamily="34" charset="-122"/>
                 <a:cs typeface="Trebuchet MS" pitchFamily="34" charset="-120"/>
               </a:rPr>
-              <a:t>Syllables</a:t>
+              <a:t>brisk</a:t>
+            </a:r>
+            <a:endParaRPr lang="en-US" sz="1400" dirty="0"/>
+          </a:p>
+        </p:txBody>
+      </p:sp>
+      <p:sp>
+        <p:nvSpPr>
+          <p:cNvPr id="24" name="Shape 22"/>
+          <p:cNvSpPr/>
+          <p:nvPr/>
+        </p:nvSpPr>
+        <p:spPr>
+          <a:xfrm>
+            <a:off x="365760" y="4096512"/>
+            <a:ext cx="1371600" cy="804672"/>
+          </a:xfrm>
+          <a:prstGeom prst="rect">
+            <a:avLst>
+              <a:gd name="adj" fmla="val 6818"/>
+            </a:avLst>
+          </a:prstGeom>
+          <a:solidFill>
+            <a:srgbClr val="E2E8F0"/>
+          </a:solidFill>
+          <a:ln w="12700">
+            <a:solidFill>
+              <a:srgbClr val="E2E8F0"/>
+            </a:solidFill>
+            <a:prstDash val="solid"/>
+          </a:ln>
+        </p:spPr>
+      </p:sp>
+      <p:sp>
+        <p:nvSpPr>
+          <p:cNvPr id="25" name="Text 23"/>
+          <p:cNvSpPr/>
+          <p:nvPr/>
+        </p:nvSpPr>
+        <p:spPr>
+          <a:xfrm>
+            <a:off x="365760" y="4096512"/>
+            <a:ext cx="1371600" cy="804672"/>
+          </a:xfrm>
+          <a:prstGeom prst="rect">
+            <a:avLst/>
+          </a:prstGeom>
+          <a:noFill/>
+          <a:ln/>
+        </p:spPr>
+        <p:txBody>
+          <a:bodyPr wrap="square" lIns="0" tIns="0" rIns="0" bIns="0" rtlCol="0" anchor="ctr"/>
+          <a:lstStyle/>
+          <a:p>
+            <a:pPr algn="ctr" indent="0" marL="0">
+              <a:buNone/>
+            </a:pPr>
+            <a:r>
+              <a:rPr lang="en-US" sz="1100" b="1" dirty="0">
+                <a:solidFill>
+                  <a:srgbClr val="475569"/>
+                </a:solidFill>
+                <a:latin typeface="Trebuchet MS" pitchFamily="34" charset="0"/>
+                <a:ea typeface="Trebuchet MS" pitchFamily="34" charset="-122"/>
+                <a:cs typeface="Trebuchet MS" pitchFamily="34" charset="-120"/>
+              </a:rPr>
+              <a:t>Phonemes</a:t>
             </a:r>
             <a:endParaRPr lang="en-US" sz="1100" dirty="0"/>
           </a:p>
@@ -10148,13 +9866,13 @@
       </p:sp>
       <p:sp>
         <p:nvSpPr>
-          <p:cNvPr id="24" name="Shape 22"/>
-          <p:cNvSpPr/>
-          <p:nvPr/>
-        </p:nvSpPr>
-        <p:spPr>
-          <a:xfrm>
-            <a:off x="1874520" y="3273552"/>
+          <p:cNvPr id="26" name="Shape 24"/>
+          <p:cNvSpPr/>
+          <p:nvPr/>
+        </p:nvSpPr>
+        <p:spPr>
+          <a:xfrm>
+            <a:off x="1874520" y="4096512"/>
             <a:ext cx="6903720" cy="658368"/>
           </a:xfrm>
           <a:prstGeom prst="rect">
@@ -10163,30 +9881,30 @@
             </a:avLst>
           </a:prstGeom>
           <a:solidFill>
-            <a:srgbClr val="CCFBF1"/>
-          </a:solidFill>
-          <a:ln w="12700">
-            <a:solidFill>
-              <a:srgbClr val="0D9488"/>
-            </a:solidFill>
-            <a:prstDash val="solid"/>
-          </a:ln>
-        </p:spPr>
-      </p:sp>
-      <p:sp>
-        <p:nvSpPr>
-          <p:cNvPr id="25" name="Shape 23"/>
-          <p:cNvSpPr/>
-          <p:nvPr/>
-        </p:nvSpPr>
-        <p:spPr>
-          <a:xfrm>
-            <a:off x="2999232" y="3364992"/>
-            <a:ext cx="1645920" cy="475488"/>
+            <a:srgbClr val="FCE7F3"/>
+          </a:solidFill>
+          <a:ln w="12700">
+            <a:solidFill>
+              <a:srgbClr val="DB2777"/>
+            </a:solidFill>
+            <a:prstDash val="solid"/>
+          </a:ln>
+        </p:spPr>
+      </p:sp>
+      <p:sp>
+        <p:nvSpPr>
+          <p:cNvPr id="27" name="Shape 25"/>
+          <p:cNvSpPr/>
+          <p:nvPr/>
+        </p:nvSpPr>
+        <p:spPr>
+          <a:xfrm>
+            <a:off x="2427732" y="4169664"/>
+            <a:ext cx="685800" cy="475488"/>
           </a:xfrm>
           <a:prstGeom prst="rect">
             <a:avLst>
-              <a:gd name="adj" fmla="val 9615"/>
+              <a:gd name="adj" fmla="val 7692"/>
             </a:avLst>
           </a:prstGeom>
           <a:solidFill>
@@ -10194,22 +9912,22 @@
           </a:solidFill>
           <a:ln w="12700">
             <a:solidFill>
-              <a:srgbClr val="0D9488"/>
-            </a:solidFill>
-            <a:prstDash val="solid"/>
-          </a:ln>
-        </p:spPr>
-      </p:sp>
-      <p:sp>
-        <p:nvSpPr>
-          <p:cNvPr id="26" name="Text 24"/>
-          <p:cNvSpPr/>
-          <p:nvPr/>
-        </p:nvSpPr>
-        <p:spPr>
-          <a:xfrm>
-            <a:off x="2999232" y="3364992"/>
-            <a:ext cx="1645920" cy="475488"/>
+              <a:srgbClr val="DB2777"/>
+            </a:solidFill>
+            <a:prstDash val="solid"/>
+          </a:ln>
+        </p:spPr>
+      </p:sp>
+      <p:sp>
+        <p:nvSpPr>
+          <p:cNvPr id="28" name="Text 26"/>
+          <p:cNvSpPr/>
+          <p:nvPr/>
+        </p:nvSpPr>
+        <p:spPr>
+          <a:xfrm>
+            <a:off x="2427732" y="4169664"/>
+            <a:ext cx="685800" cy="475488"/>
           </a:xfrm>
           <a:prstGeom prst="rect">
             <a:avLst/>
@@ -10225,30 +9943,57 @@
               <a:buNone/>
             </a:pPr>
             <a:r>
-              <a:rPr lang="en-US" sz="1400" b="1" dirty="0">
-                <a:solidFill>
-                  <a:srgbClr val="0D9488"/>
+              <a:rPr lang="en-US" sz="900" b="1" dirty="0">
+                <a:solidFill>
+                  <a:srgbClr val="9D174D"/>
                 </a:solidFill>
                 <a:latin typeface="Trebuchet MS" pitchFamily="34" charset="0"/>
                 <a:ea typeface="Trebuchet MS" pitchFamily="34" charset="-122"/>
                 <a:cs typeface="Trebuchet MS" pitchFamily="34" charset="-120"/>
               </a:rPr>
-              <a:t>brisk</a:t>
-            </a:r>
-            <a:endParaRPr lang="en-US" sz="1400" dirty="0"/>
-          </a:p>
-        </p:txBody>
-      </p:sp>
-      <p:sp>
-        <p:nvSpPr>
-          <p:cNvPr id="27" name="Text 25"/>
-          <p:cNvSpPr/>
-          <p:nvPr/>
-        </p:nvSpPr>
-        <p:spPr>
-          <a:xfrm>
-            <a:off x="4645152" y="3364992"/>
-            <a:ext cx="1097280" cy="475488"/>
+              <a:t>b</a:t>
+            </a:r>
+            <a:endParaRPr lang="en-US" sz="900" dirty="0"/>
+          </a:p>
+        </p:txBody>
+      </p:sp>
+      <p:sp>
+        <p:nvSpPr>
+          <p:cNvPr id="29" name="Shape 27"/>
+          <p:cNvSpPr/>
+          <p:nvPr/>
+        </p:nvSpPr>
+        <p:spPr>
+          <a:xfrm>
+            <a:off x="3639312" y="4169664"/>
+            <a:ext cx="685800" cy="475488"/>
+          </a:xfrm>
+          <a:prstGeom prst="rect">
+            <a:avLst>
+              <a:gd name="adj" fmla="val 7692"/>
+            </a:avLst>
+          </a:prstGeom>
+          <a:solidFill>
+            <a:srgbClr val="FFFFFF"/>
+          </a:solidFill>
+          <a:ln w="12700">
+            <a:solidFill>
+              <a:srgbClr val="DB2777"/>
+            </a:solidFill>
+            <a:prstDash val="solid"/>
+          </a:ln>
+        </p:spPr>
+      </p:sp>
+      <p:sp>
+        <p:nvSpPr>
+          <p:cNvPr id="30" name="Text 28"/>
+          <p:cNvSpPr/>
+          <p:nvPr/>
+        </p:nvSpPr>
+        <p:spPr>
+          <a:xfrm>
+            <a:off x="3639312" y="4169664"/>
+            <a:ext cx="685800" cy="475488"/>
           </a:xfrm>
           <a:prstGeom prst="rect">
             <a:avLst/>
@@ -10264,34 +10009,34 @@
               <a:buNone/>
             </a:pPr>
             <a:r>
-              <a:rPr lang="en-US" sz="1600" b="1" dirty="0">
-                <a:solidFill>
-                  <a:srgbClr val="0D9488"/>
+              <a:rPr lang="en-US" sz="900" b="1" dirty="0">
+                <a:solidFill>
+                  <a:srgbClr val="9D174D"/>
                 </a:solidFill>
                 <a:latin typeface="Trebuchet MS" pitchFamily="34" charset="0"/>
                 <a:ea typeface="Trebuchet MS" pitchFamily="34" charset="-122"/>
                 <a:cs typeface="Trebuchet MS" pitchFamily="34" charset="-120"/>
               </a:rPr>
-              <a:t>·</a:t>
-            </a:r>
-            <a:endParaRPr lang="en-US" sz="1600" dirty="0"/>
-          </a:p>
-        </p:txBody>
-      </p:sp>
-      <p:sp>
-        <p:nvSpPr>
-          <p:cNvPr id="28" name="Shape 26"/>
-          <p:cNvSpPr/>
-          <p:nvPr/>
-        </p:nvSpPr>
-        <p:spPr>
-          <a:xfrm>
-            <a:off x="5742432" y="3364992"/>
-            <a:ext cx="1645920" cy="475488"/>
+              <a:t>r</a:t>
+            </a:r>
+            <a:endParaRPr lang="en-US" sz="900" dirty="0"/>
+          </a:p>
+        </p:txBody>
+      </p:sp>
+      <p:sp>
+        <p:nvSpPr>
+          <p:cNvPr id="31" name="Shape 29"/>
+          <p:cNvSpPr/>
+          <p:nvPr/>
+        </p:nvSpPr>
+        <p:spPr>
+          <a:xfrm>
+            <a:off x="4850892" y="4169664"/>
+            <a:ext cx="685800" cy="475488"/>
           </a:xfrm>
           <a:prstGeom prst="rect">
             <a:avLst>
-              <a:gd name="adj" fmla="val 9615"/>
+              <a:gd name="adj" fmla="val 7692"/>
             </a:avLst>
           </a:prstGeom>
           <a:solidFill>
@@ -10299,22 +10044,22 @@
           </a:solidFill>
           <a:ln w="12700">
             <a:solidFill>
-              <a:srgbClr val="0D9488"/>
-            </a:solidFill>
-            <a:prstDash val="solid"/>
-          </a:ln>
-        </p:spPr>
-      </p:sp>
-      <p:sp>
-        <p:nvSpPr>
-          <p:cNvPr id="29" name="Text 27"/>
-          <p:cNvSpPr/>
-          <p:nvPr/>
-        </p:nvSpPr>
-        <p:spPr>
-          <a:xfrm>
-            <a:off x="5742432" y="3364992"/>
-            <a:ext cx="1645920" cy="475488"/>
+              <a:srgbClr val="DB2777"/>
+            </a:solidFill>
+            <a:prstDash val="solid"/>
+          </a:ln>
+        </p:spPr>
+      </p:sp>
+      <p:sp>
+        <p:nvSpPr>
+          <p:cNvPr id="32" name="Text 30"/>
+          <p:cNvSpPr/>
+          <p:nvPr/>
+        </p:nvSpPr>
+        <p:spPr>
+          <a:xfrm>
+            <a:off x="4850892" y="4169664"/>
+            <a:ext cx="685800" cy="475488"/>
           </a:xfrm>
           <a:prstGeom prst="rect">
             <a:avLst/>
@@ -10330,57 +10075,57 @@
               <a:buNone/>
             </a:pPr>
             <a:r>
-              <a:rPr lang="en-US" sz="1400" b="1" dirty="0">
-                <a:solidFill>
-                  <a:srgbClr val="0D9488"/>
+              <a:rPr lang="en-US" sz="900" b="1" dirty="0">
+                <a:solidFill>
+                  <a:srgbClr val="9D174D"/>
                 </a:solidFill>
                 <a:latin typeface="Trebuchet MS" pitchFamily="34" charset="0"/>
                 <a:ea typeface="Trebuchet MS" pitchFamily="34" charset="-122"/>
                 <a:cs typeface="Trebuchet MS" pitchFamily="34" charset="-120"/>
               </a:rPr>
-              <a:t>ly</a:t>
-            </a:r>
-            <a:endParaRPr lang="en-US" sz="1400" dirty="0"/>
-          </a:p>
-        </p:txBody>
-      </p:sp>
-      <p:sp>
-        <p:nvSpPr>
-          <p:cNvPr id="30" name="Shape 28"/>
-          <p:cNvSpPr/>
-          <p:nvPr/>
-        </p:nvSpPr>
-        <p:spPr>
-          <a:xfrm>
-            <a:off x="365760" y="4096512"/>
-            <a:ext cx="1371600" cy="804672"/>
+              <a:t>i</a:t>
+            </a:r>
+            <a:endParaRPr lang="en-US" sz="900" dirty="0"/>
+          </a:p>
+        </p:txBody>
+      </p:sp>
+      <p:sp>
+        <p:nvSpPr>
+          <p:cNvPr id="33" name="Shape 31"/>
+          <p:cNvSpPr/>
+          <p:nvPr/>
+        </p:nvSpPr>
+        <p:spPr>
+          <a:xfrm>
+            <a:off x="6062472" y="4169664"/>
+            <a:ext cx="685800" cy="475488"/>
           </a:xfrm>
           <a:prstGeom prst="rect">
             <a:avLst>
-              <a:gd name="adj" fmla="val 6818"/>
+              <a:gd name="adj" fmla="val 7692"/>
             </a:avLst>
           </a:prstGeom>
           <a:solidFill>
-            <a:srgbClr val="E2E8F0"/>
-          </a:solidFill>
-          <a:ln w="12700">
-            <a:solidFill>
-              <a:srgbClr val="E2E8F0"/>
-            </a:solidFill>
-            <a:prstDash val="solid"/>
-          </a:ln>
-        </p:spPr>
-      </p:sp>
-      <p:sp>
-        <p:nvSpPr>
-          <p:cNvPr id="31" name="Text 29"/>
-          <p:cNvSpPr/>
-          <p:nvPr/>
-        </p:nvSpPr>
-        <p:spPr>
-          <a:xfrm>
-            <a:off x="365760" y="4096512"/>
-            <a:ext cx="1371600" cy="804672"/>
+            <a:srgbClr val="FFFFFF"/>
+          </a:solidFill>
+          <a:ln w="12700">
+            <a:solidFill>
+              <a:srgbClr val="DB2777"/>
+            </a:solidFill>
+            <a:prstDash val="solid"/>
+          </a:ln>
+        </p:spPr>
+      </p:sp>
+      <p:sp>
+        <p:nvSpPr>
+          <p:cNvPr id="34" name="Text 32"/>
+          <p:cNvSpPr/>
+          <p:nvPr/>
+        </p:nvSpPr>
+        <p:spPr>
+          <a:xfrm>
+            <a:off x="6062472" y="4169664"/>
+            <a:ext cx="685800" cy="475488"/>
           </a:xfrm>
           <a:prstGeom prst="rect">
             <a:avLst/>
@@ -10396,56 +10141,29 @@
               <a:buNone/>
             </a:pPr>
             <a:r>
-              <a:rPr lang="en-US" sz="1100" b="1" dirty="0">
-                <a:solidFill>
-                  <a:srgbClr val="475569"/>
+              <a:rPr lang="en-US" sz="900" b="1" dirty="0">
+                <a:solidFill>
+                  <a:srgbClr val="9D174D"/>
                 </a:solidFill>
                 <a:latin typeface="Trebuchet MS" pitchFamily="34" charset="0"/>
                 <a:ea typeface="Trebuchet MS" pitchFamily="34" charset="-122"/>
                 <a:cs typeface="Trebuchet MS" pitchFamily="34" charset="-120"/>
               </a:rPr>
-              <a:t>Phonemes</a:t>
-            </a:r>
-            <a:endParaRPr lang="en-US" sz="1100" dirty="0"/>
-          </a:p>
-        </p:txBody>
-      </p:sp>
-      <p:sp>
-        <p:nvSpPr>
-          <p:cNvPr id="32" name="Shape 30"/>
-          <p:cNvSpPr/>
-          <p:nvPr/>
-        </p:nvSpPr>
-        <p:spPr>
-          <a:xfrm>
-            <a:off x="1874520" y="4096512"/>
-            <a:ext cx="6903720" cy="658368"/>
-          </a:xfrm>
-          <a:prstGeom prst="rect">
-            <a:avLst>
-              <a:gd name="adj" fmla="val 8333"/>
-            </a:avLst>
-          </a:prstGeom>
-          <a:solidFill>
-            <a:srgbClr val="FCE7F3"/>
-          </a:solidFill>
-          <a:ln w="12700">
-            <a:solidFill>
-              <a:srgbClr val="DB2777"/>
-            </a:solidFill>
-            <a:prstDash val="solid"/>
-          </a:ln>
-        </p:spPr>
-      </p:sp>
-      <p:sp>
-        <p:nvSpPr>
-          <p:cNvPr id="33" name="Shape 31"/>
-          <p:cNvSpPr/>
-          <p:nvPr/>
-        </p:nvSpPr>
-        <p:spPr>
-          <a:xfrm>
-            <a:off x="2124837" y="4169664"/>
+              <a:t>s</a:t>
+            </a:r>
+            <a:endParaRPr lang="en-US" sz="900" dirty="0"/>
+          </a:p>
+        </p:txBody>
+      </p:sp>
+      <p:sp>
+        <p:nvSpPr>
+          <p:cNvPr id="35" name="Shape 33"/>
+          <p:cNvSpPr/>
+          <p:nvPr/>
+        </p:nvSpPr>
+        <p:spPr>
+          <a:xfrm>
+            <a:off x="7274052" y="4169664"/>
             <a:ext cx="685800" cy="475488"/>
           </a:xfrm>
           <a:prstGeom prst="rect">
@@ -10466,13 +10184,13 @@
       </p:sp>
       <p:sp>
         <p:nvSpPr>
-          <p:cNvPr id="34" name="Text 32"/>
-          <p:cNvSpPr/>
-          <p:nvPr/>
-        </p:nvSpPr>
-        <p:spPr>
-          <a:xfrm>
-            <a:off x="2124837" y="4169664"/>
+          <p:cNvPr id="36" name="Text 34"/>
+          <p:cNvSpPr/>
+          <p:nvPr/>
+        </p:nvSpPr>
+        <p:spPr>
+          <a:xfrm>
+            <a:off x="7274052" y="4169664"/>
             <a:ext cx="685800" cy="475488"/>
           </a:xfrm>
           <a:prstGeom prst="rect">
@@ -10497,403 +10215,7 @@
                 <a:ea typeface="Trebuchet MS" pitchFamily="34" charset="-122"/>
                 <a:cs typeface="Trebuchet MS" pitchFamily="34" charset="-120"/>
               </a:rPr>
-              <a:t>b</a:t>
-            </a:r>
-            <a:endParaRPr lang="en-US" sz="900" dirty="0"/>
-          </a:p>
-        </p:txBody>
-      </p:sp>
-      <p:sp>
-        <p:nvSpPr>
-          <p:cNvPr id="35" name="Shape 33"/>
-          <p:cNvSpPr/>
-          <p:nvPr/>
-        </p:nvSpPr>
-        <p:spPr>
-          <a:xfrm>
-            <a:off x="3033522" y="4169664"/>
-            <a:ext cx="685800" cy="475488"/>
-          </a:xfrm>
-          <a:prstGeom prst="rect">
-            <a:avLst>
-              <a:gd name="adj" fmla="val 7692"/>
-            </a:avLst>
-          </a:prstGeom>
-          <a:solidFill>
-            <a:srgbClr val="FFFFFF"/>
-          </a:solidFill>
-          <a:ln w="12700">
-            <a:solidFill>
-              <a:srgbClr val="DB2777"/>
-            </a:solidFill>
-            <a:prstDash val="solid"/>
-          </a:ln>
-        </p:spPr>
-      </p:sp>
-      <p:sp>
-        <p:nvSpPr>
-          <p:cNvPr id="36" name="Text 34"/>
-          <p:cNvSpPr/>
-          <p:nvPr/>
-        </p:nvSpPr>
-        <p:spPr>
-          <a:xfrm>
-            <a:off x="3033522" y="4169664"/>
-            <a:ext cx="685800" cy="475488"/>
-          </a:xfrm>
-          <a:prstGeom prst="rect">
-            <a:avLst/>
-          </a:prstGeom>
-          <a:noFill/>
-          <a:ln/>
-        </p:spPr>
-        <p:txBody>
-          <a:bodyPr wrap="square" lIns="0" tIns="0" rIns="0" bIns="0" rtlCol="0" anchor="ctr"/>
-          <a:lstStyle/>
-          <a:p>
-            <a:pPr algn="ctr" indent="0" marL="0">
-              <a:buNone/>
-            </a:pPr>
-            <a:r>
-              <a:rPr lang="en-US" sz="900" b="1" dirty="0">
-                <a:solidFill>
-                  <a:srgbClr val="9D174D"/>
-                </a:solidFill>
-                <a:latin typeface="Trebuchet MS" pitchFamily="34" charset="0"/>
-                <a:ea typeface="Trebuchet MS" pitchFamily="34" charset="-122"/>
-                <a:cs typeface="Trebuchet MS" pitchFamily="34" charset="-120"/>
-              </a:rPr>
-              <a:t>r</a:t>
-            </a:r>
-            <a:endParaRPr lang="en-US" sz="900" dirty="0"/>
-          </a:p>
-        </p:txBody>
-      </p:sp>
-      <p:sp>
-        <p:nvSpPr>
-          <p:cNvPr id="37" name="Shape 35"/>
-          <p:cNvSpPr/>
-          <p:nvPr/>
-        </p:nvSpPr>
-        <p:spPr>
-          <a:xfrm>
-            <a:off x="3942207" y="4169664"/>
-            <a:ext cx="685800" cy="475488"/>
-          </a:xfrm>
-          <a:prstGeom prst="rect">
-            <a:avLst>
-              <a:gd name="adj" fmla="val 7692"/>
-            </a:avLst>
-          </a:prstGeom>
-          <a:solidFill>
-            <a:srgbClr val="FFFFFF"/>
-          </a:solidFill>
-          <a:ln w="12700">
-            <a:solidFill>
-              <a:srgbClr val="DB2777"/>
-            </a:solidFill>
-            <a:prstDash val="solid"/>
-          </a:ln>
-        </p:spPr>
-      </p:sp>
-      <p:sp>
-        <p:nvSpPr>
-          <p:cNvPr id="38" name="Text 36"/>
-          <p:cNvSpPr/>
-          <p:nvPr/>
-        </p:nvSpPr>
-        <p:spPr>
-          <a:xfrm>
-            <a:off x="3942207" y="4169664"/>
-            <a:ext cx="685800" cy="475488"/>
-          </a:xfrm>
-          <a:prstGeom prst="rect">
-            <a:avLst/>
-          </a:prstGeom>
-          <a:noFill/>
-          <a:ln/>
-        </p:spPr>
-        <p:txBody>
-          <a:bodyPr wrap="square" lIns="0" tIns="0" rIns="0" bIns="0" rtlCol="0" anchor="ctr"/>
-          <a:lstStyle/>
-          <a:p>
-            <a:pPr algn="ctr" indent="0" marL="0">
-              <a:buNone/>
-            </a:pPr>
-            <a:r>
-              <a:rPr lang="en-US" sz="900" b="1" dirty="0">
-                <a:solidFill>
-                  <a:srgbClr val="9D174D"/>
-                </a:solidFill>
-                <a:latin typeface="Trebuchet MS" pitchFamily="34" charset="0"/>
-                <a:ea typeface="Trebuchet MS" pitchFamily="34" charset="-122"/>
-                <a:cs typeface="Trebuchet MS" pitchFamily="34" charset="-120"/>
-              </a:rPr>
-              <a:t>i</a:t>
-            </a:r>
-            <a:endParaRPr lang="en-US" sz="900" dirty="0"/>
-          </a:p>
-        </p:txBody>
-      </p:sp>
-      <p:sp>
-        <p:nvSpPr>
-          <p:cNvPr id="39" name="Shape 37"/>
-          <p:cNvSpPr/>
-          <p:nvPr/>
-        </p:nvSpPr>
-        <p:spPr>
-          <a:xfrm>
-            <a:off x="4850892" y="4169664"/>
-            <a:ext cx="685800" cy="475488"/>
-          </a:xfrm>
-          <a:prstGeom prst="rect">
-            <a:avLst>
-              <a:gd name="adj" fmla="val 7692"/>
-            </a:avLst>
-          </a:prstGeom>
-          <a:solidFill>
-            <a:srgbClr val="FFFFFF"/>
-          </a:solidFill>
-          <a:ln w="12700">
-            <a:solidFill>
-              <a:srgbClr val="DB2777"/>
-            </a:solidFill>
-            <a:prstDash val="solid"/>
-          </a:ln>
-        </p:spPr>
-      </p:sp>
-      <p:sp>
-        <p:nvSpPr>
-          <p:cNvPr id="40" name="Text 38"/>
-          <p:cNvSpPr/>
-          <p:nvPr/>
-        </p:nvSpPr>
-        <p:spPr>
-          <a:xfrm>
-            <a:off x="4850892" y="4169664"/>
-            <a:ext cx="685800" cy="475488"/>
-          </a:xfrm>
-          <a:prstGeom prst="rect">
-            <a:avLst/>
-          </a:prstGeom>
-          <a:noFill/>
-          <a:ln/>
-        </p:spPr>
-        <p:txBody>
-          <a:bodyPr wrap="square" lIns="0" tIns="0" rIns="0" bIns="0" rtlCol="0" anchor="ctr"/>
-          <a:lstStyle/>
-          <a:p>
-            <a:pPr algn="ctr" indent="0" marL="0">
-              <a:buNone/>
-            </a:pPr>
-            <a:r>
-              <a:rPr lang="en-US" sz="900" b="1" dirty="0">
-                <a:solidFill>
-                  <a:srgbClr val="9D174D"/>
-                </a:solidFill>
-                <a:latin typeface="Trebuchet MS" pitchFamily="34" charset="0"/>
-                <a:ea typeface="Trebuchet MS" pitchFamily="34" charset="-122"/>
-                <a:cs typeface="Trebuchet MS" pitchFamily="34" charset="-120"/>
-              </a:rPr>
-              <a:t>s</a:t>
-            </a:r>
-            <a:endParaRPr lang="en-US" sz="900" dirty="0"/>
-          </a:p>
-        </p:txBody>
-      </p:sp>
-      <p:sp>
-        <p:nvSpPr>
-          <p:cNvPr id="41" name="Shape 39"/>
-          <p:cNvSpPr/>
-          <p:nvPr/>
-        </p:nvSpPr>
-        <p:spPr>
-          <a:xfrm>
-            <a:off x="5759577" y="4169664"/>
-            <a:ext cx="685800" cy="475488"/>
-          </a:xfrm>
-          <a:prstGeom prst="rect">
-            <a:avLst>
-              <a:gd name="adj" fmla="val 7692"/>
-            </a:avLst>
-          </a:prstGeom>
-          <a:solidFill>
-            <a:srgbClr val="FFFFFF"/>
-          </a:solidFill>
-          <a:ln w="12700">
-            <a:solidFill>
-              <a:srgbClr val="DB2777"/>
-            </a:solidFill>
-            <a:prstDash val="solid"/>
-          </a:ln>
-        </p:spPr>
-      </p:sp>
-      <p:sp>
-        <p:nvSpPr>
-          <p:cNvPr id="42" name="Text 40"/>
-          <p:cNvSpPr/>
-          <p:nvPr/>
-        </p:nvSpPr>
-        <p:spPr>
-          <a:xfrm>
-            <a:off x="5759577" y="4169664"/>
-            <a:ext cx="685800" cy="475488"/>
-          </a:xfrm>
-          <a:prstGeom prst="rect">
-            <a:avLst/>
-          </a:prstGeom>
-          <a:noFill/>
-          <a:ln/>
-        </p:spPr>
-        <p:txBody>
-          <a:bodyPr wrap="square" lIns="0" tIns="0" rIns="0" bIns="0" rtlCol="0" anchor="ctr"/>
-          <a:lstStyle/>
-          <a:p>
-            <a:pPr algn="ctr" indent="0" marL="0">
-              <a:buNone/>
-            </a:pPr>
-            <a:r>
-              <a:rPr lang="en-US" sz="900" b="1" dirty="0">
-                <a:solidFill>
-                  <a:srgbClr val="9D174D"/>
-                </a:solidFill>
-                <a:latin typeface="Trebuchet MS" pitchFamily="34" charset="0"/>
-                <a:ea typeface="Trebuchet MS" pitchFamily="34" charset="-122"/>
-                <a:cs typeface="Trebuchet MS" pitchFamily="34" charset="-120"/>
-              </a:rPr>
               <a:t>k</a:t>
-            </a:r>
-            <a:endParaRPr lang="en-US" sz="900" dirty="0"/>
-          </a:p>
-        </p:txBody>
-      </p:sp>
-      <p:sp>
-        <p:nvSpPr>
-          <p:cNvPr id="43" name="Shape 41"/>
-          <p:cNvSpPr/>
-          <p:nvPr/>
-        </p:nvSpPr>
-        <p:spPr>
-          <a:xfrm>
-            <a:off x="6668262" y="4169664"/>
-            <a:ext cx="685800" cy="475488"/>
-          </a:xfrm>
-          <a:prstGeom prst="rect">
-            <a:avLst>
-              <a:gd name="adj" fmla="val 7692"/>
-            </a:avLst>
-          </a:prstGeom>
-          <a:solidFill>
-            <a:srgbClr val="FFFFFF"/>
-          </a:solidFill>
-          <a:ln w="12700">
-            <a:solidFill>
-              <a:srgbClr val="DB2777"/>
-            </a:solidFill>
-            <a:prstDash val="solid"/>
-          </a:ln>
-        </p:spPr>
-      </p:sp>
-      <p:sp>
-        <p:nvSpPr>
-          <p:cNvPr id="44" name="Text 42"/>
-          <p:cNvSpPr/>
-          <p:nvPr/>
-        </p:nvSpPr>
-        <p:spPr>
-          <a:xfrm>
-            <a:off x="6668262" y="4169664"/>
-            <a:ext cx="685800" cy="475488"/>
-          </a:xfrm>
-          <a:prstGeom prst="rect">
-            <a:avLst/>
-          </a:prstGeom>
-          <a:noFill/>
-          <a:ln/>
-        </p:spPr>
-        <p:txBody>
-          <a:bodyPr wrap="square" lIns="0" tIns="0" rIns="0" bIns="0" rtlCol="0" anchor="ctr"/>
-          <a:lstStyle/>
-          <a:p>
-            <a:pPr algn="ctr" indent="0" marL="0">
-              <a:buNone/>
-            </a:pPr>
-            <a:r>
-              <a:rPr lang="en-US" sz="900" b="1" dirty="0">
-                <a:solidFill>
-                  <a:srgbClr val="9D174D"/>
-                </a:solidFill>
-                <a:latin typeface="Trebuchet MS" pitchFamily="34" charset="0"/>
-                <a:ea typeface="Trebuchet MS" pitchFamily="34" charset="-122"/>
-                <a:cs typeface="Trebuchet MS" pitchFamily="34" charset="-120"/>
-              </a:rPr>
-              <a:t>l</a:t>
-            </a:r>
-            <a:endParaRPr lang="en-US" sz="900" dirty="0"/>
-          </a:p>
-        </p:txBody>
-      </p:sp>
-      <p:sp>
-        <p:nvSpPr>
-          <p:cNvPr id="45" name="Shape 43"/>
-          <p:cNvSpPr/>
-          <p:nvPr/>
-        </p:nvSpPr>
-        <p:spPr>
-          <a:xfrm>
-            <a:off x="7576947" y="4169664"/>
-            <a:ext cx="685800" cy="475488"/>
-          </a:xfrm>
-          <a:prstGeom prst="rect">
-            <a:avLst>
-              <a:gd name="adj" fmla="val 7692"/>
-            </a:avLst>
-          </a:prstGeom>
-          <a:solidFill>
-            <a:srgbClr val="FFFFFF"/>
-          </a:solidFill>
-          <a:ln w="12700">
-            <a:solidFill>
-              <a:srgbClr val="DB2777"/>
-            </a:solidFill>
-            <a:prstDash val="solid"/>
-          </a:ln>
-        </p:spPr>
-      </p:sp>
-      <p:sp>
-        <p:nvSpPr>
-          <p:cNvPr id="46" name="Text 44"/>
-          <p:cNvSpPr/>
-          <p:nvPr/>
-        </p:nvSpPr>
-        <p:spPr>
-          <a:xfrm>
-            <a:off x="7576947" y="4169664"/>
-            <a:ext cx="685800" cy="475488"/>
-          </a:xfrm>
-          <a:prstGeom prst="rect">
-            <a:avLst/>
-          </a:prstGeom>
-          <a:noFill/>
-          <a:ln/>
-        </p:spPr>
-        <p:txBody>
-          <a:bodyPr wrap="square" lIns="0" tIns="0" rIns="0" bIns="0" rtlCol="0" anchor="ctr"/>
-          <a:lstStyle/>
-          <a:p>
-            <a:pPr algn="ctr" indent="0" marL="0">
-              <a:buNone/>
-            </a:pPr>
-            <a:r>
-              <a:rPr lang="en-US" sz="900" b="1" dirty="0">
-                <a:solidFill>
-                  <a:srgbClr val="9D174D"/>
-                </a:solidFill>
-                <a:latin typeface="Trebuchet MS" pitchFamily="34" charset="0"/>
-                <a:ea typeface="Trebuchet MS" pitchFamily="34" charset="-122"/>
-                <a:cs typeface="Trebuchet MS" pitchFamily="34" charset="-120"/>
-              </a:rPr>
-              <a:t>y</a:t>
             </a:r>
             <a:endParaRPr lang="en-US" sz="900" dirty="0"/>
           </a:p>
@@ -11185,7 +10507,7 @@
                 <a:ea typeface="Calibri" pitchFamily="34" charset="-122"/>
                 <a:cs typeface="Calibri" pitchFamily="34" charset="-120"/>
               </a:rPr>
-              <a:t>Word Labs  •  wordlabs.app  •  Root: 'brisk' = quick, lively, and energetic</a:t>
+              <a:t>Word Labs  •  wordlabs.app  •  Root: 'brisk' = quick and energetic</a:t>
             </a:r>
             <a:endParaRPr lang="en-US" sz="800" dirty="0"/>
           </a:p>
@@ -11324,7 +10646,7 @@
                 <a:ea typeface="Trebuchet MS" pitchFamily="34" charset="-122"/>
                 <a:cs typeface="Trebuchet MS" pitchFamily="34" charset="-120"/>
               </a:rPr>
-              <a:t>briskness</a:t>
+              <a:t>brisker</a:t>
             </a:r>
             <a:endParaRPr lang="en-US" sz="2800" dirty="0"/>
           </a:p>
@@ -12012,7 +11334,7 @@
                 <a:ea typeface="Calibri" pitchFamily="34" charset="-122"/>
                 <a:cs typeface="Calibri" pitchFamily="34" charset="-120"/>
               </a:rPr>
-              <a:t>Word Labs  •  wordlabs.app  •  Root: 'brisk' = quick, lively, and energetic</a:t>
+              <a:t>Word Labs  •  wordlabs.app  •  Root: 'brisk' = quick and energetic</a:t>
             </a:r>
             <a:endParaRPr lang="en-US" sz="800" dirty="0"/>
           </a:p>
@@ -12151,7 +11473,7 @@
                 <a:ea typeface="Trebuchet MS" pitchFamily="34" charset="-122"/>
                 <a:cs typeface="Trebuchet MS" pitchFamily="34" charset="-120"/>
               </a:rPr>
-              <a:t>briskness</a:t>
+              <a:t>brisker</a:t>
             </a:r>
             <a:endParaRPr lang="en-US" sz="2800" dirty="0"/>
           </a:p>
@@ -12329,7 +11651,7 @@
                 <a:ea typeface="Calibri" pitchFamily="34" charset="-122"/>
                 <a:cs typeface="Calibri" pitchFamily="34" charset="-120"/>
               </a:rPr>
-              <a:t>quick and lively</a:t>
+              <a:t>quick and energetic</a:t>
             </a:r>
             <a:endParaRPr lang="en-US" sz="850" dirty="0"/>
           </a:p>
@@ -12402,7 +11724,7 @@
                 <a:ea typeface="Trebuchet MS" pitchFamily="34" charset="-122"/>
                 <a:cs typeface="Trebuchet MS" pitchFamily="34" charset="-120"/>
               </a:rPr>
-              <a:t>ness</a:t>
+              <a:t>er</a:t>
             </a:r>
             <a:endParaRPr lang="en-US" sz="1300" dirty="0"/>
           </a:p>
@@ -12441,7 +11763,7 @@
                 <a:ea typeface="Calibri" pitchFamily="34" charset="-122"/>
                 <a:cs typeface="Calibri" pitchFamily="34" charset="-120"/>
               </a:rPr>
-              <a:t>the quality or state of</a:t>
+              <a:t>person who; more</a:t>
             </a:r>
             <a:endParaRPr lang="en-US" sz="850" dirty="0"/>
           </a:p>
@@ -12997,7 +12319,7 @@
                 <a:ea typeface="Calibri" pitchFamily="34" charset="-122"/>
                 <a:cs typeface="Calibri" pitchFamily="34" charset="-120"/>
               </a:rPr>
-              <a:t>Word Labs  •  wordlabs.app  •  Root: 'brisk' = quick, lively, and energetic</a:t>
+              <a:t>Word Labs  •  wordlabs.app  •  Root: 'brisk' = quick and energetic</a:t>
             </a:r>
             <a:endParaRPr lang="en-US" sz="800" dirty="0"/>
           </a:p>
@@ -13136,7 +12458,7 @@
                 <a:ea typeface="Trebuchet MS" pitchFamily="34" charset="-122"/>
                 <a:cs typeface="Trebuchet MS" pitchFamily="34" charset="-120"/>
               </a:rPr>
-              <a:t>briskness</a:t>
+              <a:t>brisker</a:t>
             </a:r>
             <a:endParaRPr lang="en-US" sz="2800" dirty="0"/>
           </a:p>
@@ -13314,7 +12636,7 @@
                 <a:ea typeface="Calibri" pitchFamily="34" charset="-122"/>
                 <a:cs typeface="Calibri" pitchFamily="34" charset="-120"/>
               </a:rPr>
-              <a:t>quick and lively</a:t>
+              <a:t>quick and energetic</a:t>
             </a:r>
             <a:endParaRPr lang="en-US" sz="850" dirty="0"/>
           </a:p>
@@ -13387,7 +12709,7 @@
                 <a:ea typeface="Trebuchet MS" pitchFamily="34" charset="-122"/>
                 <a:cs typeface="Trebuchet MS" pitchFamily="34" charset="-120"/>
               </a:rPr>
-              <a:t>ness</a:t>
+              <a:t>er</a:t>
             </a:r>
             <a:endParaRPr lang="en-US" sz="1300" dirty="0"/>
           </a:p>
@@ -13426,7 +12748,7 @@
                 <a:ea typeface="Calibri" pitchFamily="34" charset="-122"/>
                 <a:cs typeface="Calibri" pitchFamily="34" charset="-120"/>
               </a:rPr>
-              <a:t>the quality or state of</a:t>
+              <a:t>person who; more</a:t>
             </a:r>
             <a:endParaRPr lang="en-US" sz="850" dirty="0"/>
           </a:p>
@@ -13690,7 +13012,7 @@
                 <a:ea typeface="Trebuchet MS" pitchFamily="34" charset="-122"/>
                 <a:cs typeface="Trebuchet MS" pitchFamily="34" charset="-120"/>
               </a:rPr>
-              <a:t>ness</a:t>
+              <a:t>er</a:t>
             </a:r>
             <a:endParaRPr lang="en-US" sz="1400" dirty="0"/>
           </a:p>
@@ -14023,7 +13345,7 @@
                 <a:ea typeface="Calibri" pitchFamily="34" charset="-122"/>
                 <a:cs typeface="Calibri" pitchFamily="34" charset="-120"/>
               </a:rPr>
-              <a:t>Root 'brisk' — quick, lively, and energetic</a:t>
+              <a:t>Root 'brisk' — quick and energetic</a:t>
             </a:r>
             <a:endParaRPr lang="en-US" sz="1600" dirty="0"/>
           </a:p>
@@ -14379,7 +13701,7 @@
                 <a:ea typeface="Calibri" pitchFamily="34" charset="-122"/>
                 <a:cs typeface="Calibri" pitchFamily="34" charset="-120"/>
               </a:rPr>
-              <a:t>Word Labs  •  wordlabs.app  •  Root: 'brisk' = quick, lively, and energetic</a:t>
+              <a:t>Word Labs  •  wordlabs.app  •  Root: 'brisk' = quick and energetic</a:t>
             </a:r>
             <a:endParaRPr lang="en-US" sz="800" dirty="0"/>
           </a:p>
@@ -14518,7 +13840,7 @@
                 <a:ea typeface="Trebuchet MS" pitchFamily="34" charset="-122"/>
                 <a:cs typeface="Trebuchet MS" pitchFamily="34" charset="-120"/>
               </a:rPr>
-              <a:t>briskness</a:t>
+              <a:t>brisker</a:t>
             </a:r>
             <a:endParaRPr lang="en-US" sz="2800" dirty="0"/>
           </a:p>
@@ -14696,7 +14018,7 @@
                 <a:ea typeface="Calibri" pitchFamily="34" charset="-122"/>
                 <a:cs typeface="Calibri" pitchFamily="34" charset="-120"/>
               </a:rPr>
-              <a:t>quick and lively</a:t>
+              <a:t>quick and energetic</a:t>
             </a:r>
             <a:endParaRPr lang="en-US" sz="850" dirty="0"/>
           </a:p>
@@ -14769,7 +14091,7 @@
                 <a:ea typeface="Trebuchet MS" pitchFamily="34" charset="-122"/>
                 <a:cs typeface="Trebuchet MS" pitchFamily="34" charset="-120"/>
               </a:rPr>
-              <a:t>ness</a:t>
+              <a:t>er</a:t>
             </a:r>
             <a:endParaRPr lang="en-US" sz="1300" dirty="0"/>
           </a:p>
@@ -14808,7 +14130,7 @@
                 <a:ea typeface="Calibri" pitchFamily="34" charset="-122"/>
                 <a:cs typeface="Calibri" pitchFamily="34" charset="-120"/>
               </a:rPr>
-              <a:t>the quality or state of</a:t>
+              <a:t>person who; more</a:t>
             </a:r>
             <a:endParaRPr lang="en-US" sz="850" dirty="0"/>
           </a:p>
@@ -15072,7 +14394,7 @@
                 <a:ea typeface="Trebuchet MS" pitchFamily="34" charset="-122"/>
                 <a:cs typeface="Trebuchet MS" pitchFamily="34" charset="-120"/>
               </a:rPr>
-              <a:t>ness</a:t>
+              <a:t>er</a:t>
             </a:r>
             <a:endParaRPr lang="en-US" sz="1400" dirty="0"/>
           </a:p>
@@ -15179,7 +14501,7 @@
         </p:nvSpPr>
         <p:spPr>
           <a:xfrm>
-            <a:off x="2023872" y="4169664"/>
+            <a:off x="2254649" y="4169664"/>
             <a:ext cx="685800" cy="475488"/>
           </a:xfrm>
           <a:prstGeom prst="rect">
@@ -15206,7 +14528,7 @@
         </p:nvSpPr>
         <p:spPr>
           <a:xfrm>
-            <a:off x="2023872" y="4169664"/>
+            <a:off x="2254649" y="4169664"/>
             <a:ext cx="685800" cy="475488"/>
           </a:xfrm>
           <a:prstGeom prst="rect">
@@ -15245,7 +14567,7 @@
         </p:nvSpPr>
         <p:spPr>
           <a:xfrm>
-            <a:off x="2831592" y="4169664"/>
+            <a:off x="3293146" y="4169664"/>
             <a:ext cx="685800" cy="475488"/>
           </a:xfrm>
           <a:prstGeom prst="rect">
@@ -15272,7 +14594,7 @@
         </p:nvSpPr>
         <p:spPr>
           <a:xfrm>
-            <a:off x="2831592" y="4169664"/>
+            <a:off x="3293146" y="4169664"/>
             <a:ext cx="685800" cy="475488"/>
           </a:xfrm>
           <a:prstGeom prst="rect">
@@ -15311,7 +14633,7 @@
         </p:nvSpPr>
         <p:spPr>
           <a:xfrm>
-            <a:off x="3639312" y="4169664"/>
+            <a:off x="4331643" y="4169664"/>
             <a:ext cx="685800" cy="475488"/>
           </a:xfrm>
           <a:prstGeom prst="rect">
@@ -15338,7 +14660,7 @@
         </p:nvSpPr>
         <p:spPr>
           <a:xfrm>
-            <a:off x="3639312" y="4169664"/>
+            <a:off x="4331643" y="4169664"/>
             <a:ext cx="685800" cy="475488"/>
           </a:xfrm>
           <a:prstGeom prst="rect">
@@ -15377,7 +14699,7 @@
         </p:nvSpPr>
         <p:spPr>
           <a:xfrm>
-            <a:off x="4447032" y="4169664"/>
+            <a:off x="5370141" y="4169664"/>
             <a:ext cx="685800" cy="475488"/>
           </a:xfrm>
           <a:prstGeom prst="rect">
@@ -15404,7 +14726,7 @@
         </p:nvSpPr>
         <p:spPr>
           <a:xfrm>
-            <a:off x="4447032" y="4169664"/>
+            <a:off x="5370141" y="4169664"/>
             <a:ext cx="685800" cy="475488"/>
           </a:xfrm>
           <a:prstGeom prst="rect">
@@ -15443,7 +14765,7 @@
         </p:nvSpPr>
         <p:spPr>
           <a:xfrm>
-            <a:off x="5254752" y="4169664"/>
+            <a:off x="6408638" y="4169664"/>
             <a:ext cx="685800" cy="475488"/>
           </a:xfrm>
           <a:prstGeom prst="rect">
@@ -15470,7 +14792,7 @@
         </p:nvSpPr>
         <p:spPr>
           <a:xfrm>
-            <a:off x="5254752" y="4169664"/>
+            <a:off x="6408638" y="4169664"/>
             <a:ext cx="685800" cy="475488"/>
           </a:xfrm>
           <a:prstGeom prst="rect">
@@ -15509,7 +14831,7 @@
         </p:nvSpPr>
         <p:spPr>
           <a:xfrm>
-            <a:off x="6062472" y="4169664"/>
+            <a:off x="7447135" y="4169664"/>
             <a:ext cx="685800" cy="475488"/>
           </a:xfrm>
           <a:prstGeom prst="rect">
@@ -15536,7 +14858,7 @@
         </p:nvSpPr>
         <p:spPr>
           <a:xfrm>
-            <a:off x="6062472" y="4169664"/>
+            <a:off x="7447135" y="4169664"/>
             <a:ext cx="685800" cy="475488"/>
           </a:xfrm>
           <a:prstGeom prst="rect">
@@ -15561,139 +14883,7 @@
                 <a:ea typeface="Trebuchet MS" pitchFamily="34" charset="-122"/>
                 <a:cs typeface="Trebuchet MS" pitchFamily="34" charset="-120"/>
               </a:rPr>
-              <a:t>n</a:t>
-            </a:r>
-            <a:endParaRPr lang="en-US" sz="900" dirty="0"/>
-          </a:p>
-        </p:txBody>
-      </p:sp>
-      <p:sp>
-        <p:nvSpPr>
-          <p:cNvPr id="45" name="Shape 43"/>
-          <p:cNvSpPr/>
-          <p:nvPr/>
-        </p:nvSpPr>
-        <p:spPr>
-          <a:xfrm>
-            <a:off x="6870192" y="4169664"/>
-            <a:ext cx="685800" cy="475488"/>
-          </a:xfrm>
-          <a:prstGeom prst="rect">
-            <a:avLst>
-              <a:gd name="adj" fmla="val 7692"/>
-            </a:avLst>
-          </a:prstGeom>
-          <a:solidFill>
-            <a:srgbClr val="FFFFFF"/>
-          </a:solidFill>
-          <a:ln w="12700">
-            <a:solidFill>
-              <a:srgbClr val="DB2777"/>
-            </a:solidFill>
-            <a:prstDash val="solid"/>
-          </a:ln>
-        </p:spPr>
-      </p:sp>
-      <p:sp>
-        <p:nvSpPr>
-          <p:cNvPr id="46" name="Text 44"/>
-          <p:cNvSpPr/>
-          <p:nvPr/>
-        </p:nvSpPr>
-        <p:spPr>
-          <a:xfrm>
-            <a:off x="6870192" y="4169664"/>
-            <a:ext cx="685800" cy="475488"/>
-          </a:xfrm>
-          <a:prstGeom prst="rect">
-            <a:avLst/>
-          </a:prstGeom>
-          <a:noFill/>
-          <a:ln/>
-        </p:spPr>
-        <p:txBody>
-          <a:bodyPr wrap="square" lIns="0" tIns="0" rIns="0" bIns="0" rtlCol="0" anchor="ctr"/>
-          <a:lstStyle/>
-          <a:p>
-            <a:pPr algn="ctr" indent="0" marL="0">
-              <a:buNone/>
-            </a:pPr>
-            <a:r>
-              <a:rPr lang="en-US" sz="900" b="1" dirty="0">
-                <a:solidFill>
-                  <a:srgbClr val="9D174D"/>
-                </a:solidFill>
-                <a:latin typeface="Trebuchet MS" pitchFamily="34" charset="0"/>
-                <a:ea typeface="Trebuchet MS" pitchFamily="34" charset="-122"/>
-                <a:cs typeface="Trebuchet MS" pitchFamily="34" charset="-120"/>
-              </a:rPr>
-              <a:t>e</a:t>
-            </a:r>
-            <a:endParaRPr lang="en-US" sz="900" dirty="0"/>
-          </a:p>
-        </p:txBody>
-      </p:sp>
-      <p:sp>
-        <p:nvSpPr>
-          <p:cNvPr id="47" name="Shape 45"/>
-          <p:cNvSpPr/>
-          <p:nvPr/>
-        </p:nvSpPr>
-        <p:spPr>
-          <a:xfrm>
-            <a:off x="7677912" y="4169664"/>
-            <a:ext cx="685800" cy="475488"/>
-          </a:xfrm>
-          <a:prstGeom prst="rect">
-            <a:avLst>
-              <a:gd name="adj" fmla="val 7692"/>
-            </a:avLst>
-          </a:prstGeom>
-          <a:solidFill>
-            <a:srgbClr val="FFFFFF"/>
-          </a:solidFill>
-          <a:ln w="12700">
-            <a:solidFill>
-              <a:srgbClr val="DB2777"/>
-            </a:solidFill>
-            <a:prstDash val="solid"/>
-          </a:ln>
-        </p:spPr>
-      </p:sp>
-      <p:sp>
-        <p:nvSpPr>
-          <p:cNvPr id="48" name="Text 46"/>
-          <p:cNvSpPr/>
-          <p:nvPr/>
-        </p:nvSpPr>
-        <p:spPr>
-          <a:xfrm>
-            <a:off x="7677912" y="4169664"/>
-            <a:ext cx="685800" cy="475488"/>
-          </a:xfrm>
-          <a:prstGeom prst="rect">
-            <a:avLst/>
-          </a:prstGeom>
-          <a:noFill/>
-          <a:ln/>
-        </p:spPr>
-        <p:txBody>
-          <a:bodyPr wrap="square" lIns="0" tIns="0" rIns="0" bIns="0" rtlCol="0" anchor="ctr"/>
-          <a:lstStyle/>
-          <a:p>
-            <a:pPr algn="ctr" indent="0" marL="0">
-              <a:buNone/>
-            </a:pPr>
-            <a:r>
-              <a:rPr lang="en-US" sz="900" b="1" dirty="0">
-                <a:solidFill>
-                  <a:srgbClr val="9D174D"/>
-                </a:solidFill>
-                <a:latin typeface="Trebuchet MS" pitchFamily="34" charset="0"/>
-                <a:ea typeface="Trebuchet MS" pitchFamily="34" charset="-122"/>
-                <a:cs typeface="Trebuchet MS" pitchFamily="34" charset="-120"/>
-              </a:rPr>
-              <a:t>ss</a:t>
+              <a:t>er</a:t>
             </a:r>
             <a:endParaRPr lang="en-US" sz="900" dirty="0"/>
           </a:p>
@@ -16267,7 +15457,7 @@
                 <a:ea typeface="Calibri" pitchFamily="34" charset="-122"/>
                 <a:cs typeface="Calibri" pitchFamily="34" charset="-120"/>
               </a:rPr>
-              <a:t>Word Labs  •  wordlabs.app  •  Root: 'brisk' = quick, lively, and energetic</a:t>
+              <a:t>Word Labs  •  wordlabs.app  •  Root: 'brisk' = quick and energetic</a:t>
             </a:r>
             <a:endParaRPr lang="en-US" sz="800" dirty="0"/>
           </a:p>
@@ -16601,7 +15791,7 @@
                 <a:ea typeface="Trebuchet MS" pitchFamily="34" charset="-122"/>
                 <a:cs typeface="Trebuchet MS" pitchFamily="34" charset="-120"/>
               </a:rPr>
-              <a:t>2</a:t>
+              <a:t>0</a:t>
             </a:r>
             <a:pPr algn="ctr" indent="0" marL="0">
               <a:buNone/>
@@ -16615,7 +15805,7 @@
                 <a:ea typeface="Trebuchet MS" pitchFamily="34" charset="-122"/>
                 <a:cs typeface="Trebuchet MS" pitchFamily="34" charset="-120"/>
               </a:rPr>
-              <a:t>  punctuation marks</a:t>
+              <a:t>  punctuation mark</a:t>
             </a:r>
             <a:endParaRPr lang="en-US" sz="2800" dirty="0"/>
           </a:p>
@@ -16907,7 +16097,7 @@
                 <a:ea typeface="Calibri" pitchFamily="34" charset="-122"/>
                 <a:cs typeface="Calibri" pitchFamily="34" charset="-120"/>
               </a:rPr>
-              <a:t>Word Labs  •  wordlabs.app  •  Root: 'brisk' = quick, lively, and energetic</a:t>
+              <a:t>Word Labs  •  wordlabs.app  •  Root: 'brisk' = quick and energetic</a:t>
             </a:r>
             <a:endParaRPr lang="en-US" sz="800" dirty="0"/>
           </a:p>
@@ -17019,7 +16209,7 @@
                 <a:ea typeface="Calibri" pitchFamily="34" charset="-122"/>
                 <a:cs typeface="Calibri" pitchFamily="34" charset="-120"/>
               </a:rPr>
-              <a:t>The </a:t>
+              <a:t>She walked </a:t>
             </a:r>
             <a:pPr algn="l" indent="0" marL="0">
               <a:buNone/>
@@ -17036,7 +16226,7 @@
                 <a:ea typeface="Calibri" pitchFamily="34" charset="-122"/>
                 <a:cs typeface="Calibri" pitchFamily="34" charset="-120"/>
               </a:rPr>
-              <a:t>brisker</a:t>
+              <a:t>briskly</a:t>
             </a:r>
             <a:pPr algn="l" indent="0" marL="0">
               <a:buNone/>
@@ -17050,7 +16240,7 @@
                 <a:ea typeface="Calibri" pitchFamily="34" charset="-122"/>
                 <a:cs typeface="Calibri" pitchFamily="34" charset="-120"/>
               </a:rPr>
-              <a:t> wind made the day feel </a:t>
+              <a:t> to catch the bus on time. That was the </a:t>
             </a:r>
             <a:pPr algn="l" indent="0" marL="0">
               <a:buNone/>
@@ -17067,7 +16257,7 @@
                 <a:ea typeface="Calibri" pitchFamily="34" charset="-122"/>
                 <a:cs typeface="Calibri" pitchFamily="34" charset="-120"/>
               </a:rPr>
-              <a:t>brisker</a:t>
+              <a:t>briskest</a:t>
             </a:r>
             <a:pPr algn="l" indent="0" marL="0">
               <a:buNone/>
@@ -17081,7 +16271,7 @@
                 <a:ea typeface="Calibri" pitchFamily="34" charset="-122"/>
                 <a:cs typeface="Calibri" pitchFamily="34" charset="-120"/>
               </a:rPr>
-              <a:t>, and even the </a:t>
+              <a:t> pace we've walked all week. The </a:t>
             </a:r>
             <a:pPr algn="l" indent="0" marL="0">
               <a:buNone/>
@@ -17098,7 +16288,7 @@
                 <a:ea typeface="Calibri" pitchFamily="34" charset="-122"/>
                 <a:cs typeface="Calibri" pitchFamily="34" charset="-120"/>
               </a:rPr>
-              <a:t>briskest</a:t>
+              <a:t>briskness</a:t>
             </a:r>
             <a:pPr algn="l" indent="0" marL="0">
               <a:buNone/>
@@ -17112,7 +16302,7 @@
                 <a:ea typeface="Calibri" pitchFamily="34" charset="-122"/>
                 <a:cs typeface="Calibri" pitchFamily="34" charset="-120"/>
               </a:rPr>
-              <a:t> runners felt the chill.</a:t>
+              <a:t> of her stride showed she was in a hurry.</a:t>
             </a:r>
             <a:endParaRPr lang="en-US" sz="1800" dirty="0"/>
           </a:p>
@@ -17267,7 +16457,7 @@
                 <a:ea typeface="Trebuchet MS" pitchFamily="34" charset="-122"/>
                 <a:cs typeface="Trebuchet MS" pitchFamily="34" charset="-120"/>
               </a:rPr>
-              <a:t>brisker</a:t>
+              <a:t>briskly</a:t>
             </a:r>
             <a:endParaRPr lang="en-US" sz="1400" dirty="0"/>
           </a:p>
@@ -17395,7 +16585,7 @@
                 <a:ea typeface="Trebuchet MS" pitchFamily="34" charset="-122"/>
                 <a:cs typeface="Trebuchet MS" pitchFamily="34" charset="-120"/>
               </a:rPr>
-              <a:t>brisker</a:t>
+              <a:t>briskest</a:t>
             </a:r>
             <a:endParaRPr lang="en-US" sz="1400" dirty="0"/>
           </a:p>
@@ -17523,7 +16713,7 @@
                 <a:ea typeface="Trebuchet MS" pitchFamily="34" charset="-122"/>
                 <a:cs typeface="Trebuchet MS" pitchFamily="34" charset="-120"/>
               </a:rPr>
-              <a:t>briskest</a:t>
+              <a:t>briskness</a:t>
             </a:r>
             <a:endParaRPr lang="en-US" sz="1400" dirty="0"/>
           </a:p>
@@ -17854,7 +17044,7 @@
                 <a:ea typeface="Calibri" pitchFamily="34" charset="-122"/>
                 <a:cs typeface="Calibri" pitchFamily="34" charset="-120"/>
               </a:rPr>
-              <a:t>Word Labs  •  wordlabs.app  •  Root: 'brisk' = quick, lively, and energetic</a:t>
+              <a:t>Word Labs  •  wordlabs.app  •  Root: 'brisk' = quick and energetic</a:t>
             </a:r>
             <a:endParaRPr lang="en-US" sz="800" dirty="0"/>
           </a:p>
@@ -17993,7 +17183,7 @@
                 <a:ea typeface="Trebuchet MS" pitchFamily="34" charset="-122"/>
                 <a:cs typeface="Trebuchet MS" pitchFamily="34" charset="-120"/>
               </a:rPr>
-              <a:t>brisker</a:t>
+              <a:t>briskly</a:t>
             </a:r>
             <a:endParaRPr lang="en-US" sz="2800" dirty="0"/>
           </a:p>
@@ -18681,7 +17871,7 @@
                 <a:ea typeface="Calibri" pitchFamily="34" charset="-122"/>
                 <a:cs typeface="Calibri" pitchFamily="34" charset="-120"/>
               </a:rPr>
-              <a:t>Word Labs  •  wordlabs.app  •  Root: 'brisk' = quick, lively, and energetic</a:t>
+              <a:t>Word Labs  •  wordlabs.app  •  Root: 'brisk' = quick and energetic</a:t>
             </a:r>
             <a:endParaRPr lang="en-US" sz="800" dirty="0"/>
           </a:p>
@@ -18820,7 +18010,7 @@
                 <a:ea typeface="Trebuchet MS" pitchFamily="34" charset="-122"/>
                 <a:cs typeface="Trebuchet MS" pitchFamily="34" charset="-120"/>
               </a:rPr>
-              <a:t>brisker</a:t>
+              <a:t>briskly</a:t>
             </a:r>
             <a:endParaRPr lang="en-US" sz="2800" dirty="0"/>
           </a:p>
@@ -18998,7 +18188,7 @@
                 <a:ea typeface="Calibri" pitchFamily="34" charset="-122"/>
                 <a:cs typeface="Calibri" pitchFamily="34" charset="-120"/>
               </a:rPr>
-              <a:t>quick and lively</a:t>
+              <a:t>quick and energetic</a:t>
             </a:r>
             <a:endParaRPr lang="en-US" sz="850" dirty="0"/>
           </a:p>
@@ -19071,7 +18261,7 @@
                 <a:ea typeface="Trebuchet MS" pitchFamily="34" charset="-122"/>
                 <a:cs typeface="Trebuchet MS" pitchFamily="34" charset="-120"/>
               </a:rPr>
-              <a:t>er</a:t>
+              <a:t>ly</a:t>
             </a:r>
             <a:endParaRPr lang="en-US" sz="1300" dirty="0"/>
           </a:p>
@@ -19110,7 +18300,7 @@
                 <a:ea typeface="Calibri" pitchFamily="34" charset="-122"/>
                 <a:cs typeface="Calibri" pitchFamily="34" charset="-120"/>
               </a:rPr>
-              <a:t>more</a:t>
+              <a:t>in a way</a:t>
             </a:r>
             <a:endParaRPr lang="en-US" sz="850" dirty="0"/>
           </a:p>
@@ -19666,7 +18856,7 @@
                 <a:ea typeface="Calibri" pitchFamily="34" charset="-122"/>
                 <a:cs typeface="Calibri" pitchFamily="34" charset="-120"/>
               </a:rPr>
-              <a:t>Word Labs  •  wordlabs.app  •  Root: 'brisk' = quick, lively, and energetic</a:t>
+              <a:t>Word Labs  •  wordlabs.app  •  Root: 'brisk' = quick and energetic</a:t>
             </a:r>
             <a:endParaRPr lang="en-US" sz="800" dirty="0"/>
           </a:p>
@@ -19805,7 +18995,7 @@
                 <a:ea typeface="Trebuchet MS" pitchFamily="34" charset="-122"/>
                 <a:cs typeface="Trebuchet MS" pitchFamily="34" charset="-120"/>
               </a:rPr>
-              <a:t>brisker</a:t>
+              <a:t>briskly</a:t>
             </a:r>
             <a:endParaRPr lang="en-US" sz="2800" dirty="0"/>
           </a:p>
@@ -19983,7 +19173,7 @@
                 <a:ea typeface="Calibri" pitchFamily="34" charset="-122"/>
                 <a:cs typeface="Calibri" pitchFamily="34" charset="-120"/>
               </a:rPr>
-              <a:t>quick and lively</a:t>
+              <a:t>quick and energetic</a:t>
             </a:r>
             <a:endParaRPr lang="en-US" sz="850" dirty="0"/>
           </a:p>
@@ -20056,7 +19246,7 @@
                 <a:ea typeface="Trebuchet MS" pitchFamily="34" charset="-122"/>
                 <a:cs typeface="Trebuchet MS" pitchFamily="34" charset="-120"/>
               </a:rPr>
-              <a:t>er</a:t>
+              <a:t>ly</a:t>
             </a:r>
             <a:endParaRPr lang="en-US" sz="1300" dirty="0"/>
           </a:p>
@@ -20095,7 +19285,7 @@
                 <a:ea typeface="Calibri" pitchFamily="34" charset="-122"/>
                 <a:cs typeface="Calibri" pitchFamily="34" charset="-120"/>
               </a:rPr>
-              <a:t>more</a:t>
+              <a:t>in a way</a:t>
             </a:r>
             <a:endParaRPr lang="en-US" sz="850" dirty="0"/>
           </a:p>
@@ -20359,7 +19549,7 @@
                 <a:ea typeface="Trebuchet MS" pitchFamily="34" charset="-122"/>
                 <a:cs typeface="Trebuchet MS" pitchFamily="34" charset="-120"/>
               </a:rPr>
-              <a:t>er</a:t>
+              <a:t>ly</a:t>
             </a:r>
             <a:endParaRPr lang="en-US" sz="1400" dirty="0"/>
           </a:p>
@@ -20783,7 +19973,7 @@
                 <a:ea typeface="Calibri" pitchFamily="34" charset="-122"/>
                 <a:cs typeface="Calibri" pitchFamily="34" charset="-120"/>
               </a:rPr>
-              <a:t>Word Labs  •  wordlabs.app  •  Root: 'brisk' = quick, lively, and energetic</a:t>
+              <a:t>Word Labs  •  wordlabs.app  •  Root: 'brisk' = quick and energetic</a:t>
             </a:r>
             <a:endParaRPr lang="en-US" sz="800" dirty="0"/>
           </a:p>
@@ -20922,7 +20112,7 @@
                 <a:ea typeface="Trebuchet MS" pitchFamily="34" charset="-122"/>
                 <a:cs typeface="Trebuchet MS" pitchFamily="34" charset="-120"/>
               </a:rPr>
-              <a:t>brisker</a:t>
+              <a:t>briskly</a:t>
             </a:r>
             <a:endParaRPr lang="en-US" sz="2800" dirty="0"/>
           </a:p>
@@ -21100,7 +20290,7 @@
                 <a:ea typeface="Calibri" pitchFamily="34" charset="-122"/>
                 <a:cs typeface="Calibri" pitchFamily="34" charset="-120"/>
               </a:rPr>
-              <a:t>quick and lively</a:t>
+              <a:t>quick and energetic</a:t>
             </a:r>
             <a:endParaRPr lang="en-US" sz="850" dirty="0"/>
           </a:p>
@@ -21173,7 +20363,7 @@
                 <a:ea typeface="Trebuchet MS" pitchFamily="34" charset="-122"/>
                 <a:cs typeface="Trebuchet MS" pitchFamily="34" charset="-120"/>
               </a:rPr>
-              <a:t>er</a:t>
+              <a:t>ly</a:t>
             </a:r>
             <a:endParaRPr lang="en-US" sz="1300" dirty="0"/>
           </a:p>
@@ -21212,7 +20402,7 @@
                 <a:ea typeface="Calibri" pitchFamily="34" charset="-122"/>
                 <a:cs typeface="Calibri" pitchFamily="34" charset="-120"/>
               </a:rPr>
-              <a:t>more</a:t>
+              <a:t>in a way</a:t>
             </a:r>
             <a:endParaRPr lang="en-US" sz="850" dirty="0"/>
           </a:p>
@@ -21476,7 +20666,7 @@
                 <a:ea typeface="Trebuchet MS" pitchFamily="34" charset="-122"/>
                 <a:cs typeface="Trebuchet MS" pitchFamily="34" charset="-120"/>
               </a:rPr>
-              <a:t>er</a:t>
+              <a:t>ly</a:t>
             </a:r>
             <a:endParaRPr lang="en-US" sz="1400" dirty="0"/>
           </a:p>
@@ -21583,7 +20773,7 @@
         </p:nvSpPr>
         <p:spPr>
           <a:xfrm>
-            <a:off x="2254649" y="4169664"/>
+            <a:off x="2124837" y="4169664"/>
             <a:ext cx="685800" cy="475488"/>
           </a:xfrm>
           <a:prstGeom prst="rect">
@@ -21610,7 +20800,7 @@
         </p:nvSpPr>
         <p:spPr>
           <a:xfrm>
-            <a:off x="2254649" y="4169664"/>
+            <a:off x="2124837" y="4169664"/>
             <a:ext cx="685800" cy="475488"/>
           </a:xfrm>
           <a:prstGeom prst="rect">
@@ -21649,7 +20839,7 @@
         </p:nvSpPr>
         <p:spPr>
           <a:xfrm>
-            <a:off x="3293146" y="4169664"/>
+            <a:off x="3033522" y="4169664"/>
             <a:ext cx="685800" cy="475488"/>
           </a:xfrm>
           <a:prstGeom prst="rect">
@@ -21676,7 +20866,7 @@
         </p:nvSpPr>
         <p:spPr>
           <a:xfrm>
-            <a:off x="3293146" y="4169664"/>
+            <a:off x="3033522" y="4169664"/>
             <a:ext cx="685800" cy="475488"/>
           </a:xfrm>
           <a:prstGeom prst="rect">
@@ -21715,7 +20905,7 @@
         </p:nvSpPr>
         <p:spPr>
           <a:xfrm>
-            <a:off x="4331643" y="4169664"/>
+            <a:off x="3942207" y="4169664"/>
             <a:ext cx="685800" cy="475488"/>
           </a:xfrm>
           <a:prstGeom prst="rect">
@@ -21742,7 +20932,7 @@
         </p:nvSpPr>
         <p:spPr>
           <a:xfrm>
-            <a:off x="4331643" y="4169664"/>
+            <a:off x="3942207" y="4169664"/>
             <a:ext cx="685800" cy="475488"/>
           </a:xfrm>
           <a:prstGeom prst="rect">
@@ -21781,7 +20971,7 @@
         </p:nvSpPr>
         <p:spPr>
           <a:xfrm>
-            <a:off x="5370141" y="4169664"/>
+            <a:off x="4850892" y="4169664"/>
             <a:ext cx="685800" cy="475488"/>
           </a:xfrm>
           <a:prstGeom prst="rect">
@@ -21808,7 +20998,7 @@
         </p:nvSpPr>
         <p:spPr>
           <a:xfrm>
-            <a:off x="5370141" y="4169664"/>
+            <a:off x="4850892" y="4169664"/>
             <a:ext cx="685800" cy="475488"/>
           </a:xfrm>
           <a:prstGeom prst="rect">
@@ -21847,7 +21037,7 @@
         </p:nvSpPr>
         <p:spPr>
           <a:xfrm>
-            <a:off x="6408638" y="4169664"/>
+            <a:off x="5759577" y="4169664"/>
             <a:ext cx="685800" cy="475488"/>
           </a:xfrm>
           <a:prstGeom prst="rect">
@@ -21874,7 +21064,7 @@
         </p:nvSpPr>
         <p:spPr>
           <a:xfrm>
-            <a:off x="6408638" y="4169664"/>
+            <a:off x="5759577" y="4169664"/>
             <a:ext cx="685800" cy="475488"/>
           </a:xfrm>
           <a:prstGeom prst="rect">
@@ -21913,7 +21103,7 @@
         </p:nvSpPr>
         <p:spPr>
           <a:xfrm>
-            <a:off x="7447135" y="4169664"/>
+            <a:off x="6668262" y="4169664"/>
             <a:ext cx="685800" cy="475488"/>
           </a:xfrm>
           <a:prstGeom prst="rect">
@@ -21940,7 +21130,7 @@
         </p:nvSpPr>
         <p:spPr>
           <a:xfrm>
-            <a:off x="7447135" y="4169664"/>
+            <a:off x="6668262" y="4169664"/>
             <a:ext cx="685800" cy="475488"/>
           </a:xfrm>
           <a:prstGeom prst="rect">
@@ -21965,7 +21155,73 @@
                 <a:ea typeface="Trebuchet MS" pitchFamily="34" charset="-122"/>
                 <a:cs typeface="Trebuchet MS" pitchFamily="34" charset="-120"/>
               </a:rPr>
-              <a:t>er</a:t>
+              <a:t>l</a:t>
+            </a:r>
+            <a:endParaRPr lang="en-US" sz="900" dirty="0"/>
+          </a:p>
+        </p:txBody>
+      </p:sp>
+      <p:sp>
+        <p:nvSpPr>
+          <p:cNvPr id="45" name="Shape 43"/>
+          <p:cNvSpPr/>
+          <p:nvPr/>
+        </p:nvSpPr>
+        <p:spPr>
+          <a:xfrm>
+            <a:off x="7576947" y="4169664"/>
+            <a:ext cx="685800" cy="475488"/>
+          </a:xfrm>
+          <a:prstGeom prst="rect">
+            <a:avLst>
+              <a:gd name="adj" fmla="val 7692"/>
+            </a:avLst>
+          </a:prstGeom>
+          <a:solidFill>
+            <a:srgbClr val="FFFFFF"/>
+          </a:solidFill>
+          <a:ln w="12700">
+            <a:solidFill>
+              <a:srgbClr val="DB2777"/>
+            </a:solidFill>
+            <a:prstDash val="solid"/>
+          </a:ln>
+        </p:spPr>
+      </p:sp>
+      <p:sp>
+        <p:nvSpPr>
+          <p:cNvPr id="46" name="Text 44"/>
+          <p:cNvSpPr/>
+          <p:nvPr/>
+        </p:nvSpPr>
+        <p:spPr>
+          <a:xfrm>
+            <a:off x="7576947" y="4169664"/>
+            <a:ext cx="685800" cy="475488"/>
+          </a:xfrm>
+          <a:prstGeom prst="rect">
+            <a:avLst/>
+          </a:prstGeom>
+          <a:noFill/>
+          <a:ln/>
+        </p:spPr>
+        <p:txBody>
+          <a:bodyPr wrap="square" lIns="0" tIns="0" rIns="0" bIns="0" rtlCol="0" anchor="ctr"/>
+          <a:lstStyle/>
+          <a:p>
+            <a:pPr algn="ctr" indent="0" marL="0">
+              <a:buNone/>
+            </a:pPr>
+            <a:r>
+              <a:rPr lang="en-US" sz="900" b="1" dirty="0">
+                <a:solidFill>
+                  <a:srgbClr val="9D174D"/>
+                </a:solidFill>
+                <a:latin typeface="Trebuchet MS" pitchFamily="34" charset="0"/>
+                <a:ea typeface="Trebuchet MS" pitchFamily="34" charset="-122"/>
+                <a:cs typeface="Trebuchet MS" pitchFamily="34" charset="-120"/>
+              </a:rPr>
+              <a:t>y</a:t>
             </a:r>
             <a:endParaRPr lang="en-US" sz="900" dirty="0"/>
           </a:p>
@@ -22257,7 +21513,7 @@
                 <a:ea typeface="Calibri" pitchFamily="34" charset="-122"/>
                 <a:cs typeface="Calibri" pitchFamily="34" charset="-120"/>
               </a:rPr>
-              <a:t>Word Labs  •  wordlabs.app  •  Root: 'brisk' = quick, lively, and energetic</a:t>
+              <a:t>Word Labs  •  wordlabs.app  •  Root: 'brisk' = quick and energetic</a:t>
             </a:r>
             <a:endParaRPr lang="en-US" sz="800" dirty="0"/>
           </a:p>
@@ -22396,7 +21652,7 @@
                 <a:ea typeface="Trebuchet MS" pitchFamily="34" charset="-122"/>
                 <a:cs typeface="Trebuchet MS" pitchFamily="34" charset="-120"/>
               </a:rPr>
-              <a:t>brisker</a:t>
+              <a:t>briskest</a:t>
             </a:r>
             <a:endParaRPr lang="en-US" sz="2800" dirty="0"/>
           </a:p>
@@ -23084,7 +22340,7 @@
                 <a:ea typeface="Calibri" pitchFamily="34" charset="-122"/>
                 <a:cs typeface="Calibri" pitchFamily="34" charset="-120"/>
               </a:rPr>
-              <a:t>Word Labs  •  wordlabs.app  •  Root: 'brisk' = quick, lively, and energetic</a:t>
+              <a:t>Word Labs  •  wordlabs.app  •  Root: 'brisk' = quick and energetic</a:t>
             </a:r>
             <a:endParaRPr lang="en-US" sz="800" dirty="0"/>
           </a:p>
@@ -23223,7 +22479,7 @@
                 <a:ea typeface="Trebuchet MS" pitchFamily="34" charset="-122"/>
                 <a:cs typeface="Trebuchet MS" pitchFamily="34" charset="-120"/>
               </a:rPr>
-              <a:t>brisker</a:t>
+              <a:t>briskest</a:t>
             </a:r>
             <a:endParaRPr lang="en-US" sz="2800" dirty="0"/>
           </a:p>
@@ -23401,7 +22657,7 @@
                 <a:ea typeface="Calibri" pitchFamily="34" charset="-122"/>
                 <a:cs typeface="Calibri" pitchFamily="34" charset="-120"/>
               </a:rPr>
-              <a:t>quick and lively</a:t>
+              <a:t>quick and energetic</a:t>
             </a:r>
             <a:endParaRPr lang="en-US" sz="850" dirty="0"/>
           </a:p>
@@ -23474,7 +22730,7 @@
                 <a:ea typeface="Trebuchet MS" pitchFamily="34" charset="-122"/>
                 <a:cs typeface="Trebuchet MS" pitchFamily="34" charset="-120"/>
               </a:rPr>
-              <a:t>er</a:t>
+              <a:t>est</a:t>
             </a:r>
             <a:endParaRPr lang="en-US" sz="1300" dirty="0"/>
           </a:p>
@@ -23513,7 +22769,7 @@
                 <a:ea typeface="Calibri" pitchFamily="34" charset="-122"/>
                 <a:cs typeface="Calibri" pitchFamily="34" charset="-120"/>
               </a:rPr>
-              <a:t>more</a:t>
+              <a:t>most</a:t>
             </a:r>
             <a:endParaRPr lang="en-US" sz="850" dirty="0"/>
           </a:p>
@@ -24069,7 +23325,7 @@
                 <a:ea typeface="Calibri" pitchFamily="34" charset="-122"/>
                 <a:cs typeface="Calibri" pitchFamily="34" charset="-120"/>
               </a:rPr>
-              <a:t>Word Labs  •  wordlabs.app  •  Root: 'brisk' = quick, lively, and energetic</a:t>
+              <a:t>Word Labs  •  wordlabs.app  •  Root: 'brisk' = quick and energetic</a:t>
             </a:r>
             <a:endParaRPr lang="en-US" sz="800" dirty="0"/>
           </a:p>
@@ -24142,7 +23398,7 @@
                 <a:ea typeface="Trebuchet MS" pitchFamily="34" charset="-122"/>
                 <a:cs typeface="Trebuchet MS" pitchFamily="34" charset="-120"/>
               </a:rPr>
-              <a:t>We are learning that the root 'brisk' means 'quick, lively, and energetic'.</a:t>
+              <a:t>We are learning that the root 'brisk' means 'quick and energetic'.</a:t>
             </a:r>
             <a:endParaRPr lang="en-US" sz="2000" dirty="0"/>
           </a:p>
@@ -24788,7 +24044,7 @@
                 <a:ea typeface="Calibri" pitchFamily="34" charset="-122"/>
                 <a:cs typeface="Calibri" pitchFamily="34" charset="-120"/>
               </a:rPr>
-              <a:t>Word Labs  •  wordlabs.app  •  Root: 'brisk' = quick, lively, and energetic</a:t>
+              <a:t>Word Labs  •  wordlabs.app  •  Root: 'brisk' = quick and energetic</a:t>
             </a:r>
             <a:endParaRPr lang="en-US" sz="800" dirty="0"/>
           </a:p>
@@ -24927,7 +24183,7 @@
                 <a:ea typeface="Trebuchet MS" pitchFamily="34" charset="-122"/>
                 <a:cs typeface="Trebuchet MS" pitchFamily="34" charset="-120"/>
               </a:rPr>
-              <a:t>brisker</a:t>
+              <a:t>briskest</a:t>
             </a:r>
             <a:endParaRPr lang="en-US" sz="2800" dirty="0"/>
           </a:p>
@@ -25105,7 +24361,7 @@
                 <a:ea typeface="Calibri" pitchFamily="34" charset="-122"/>
                 <a:cs typeface="Calibri" pitchFamily="34" charset="-120"/>
               </a:rPr>
-              <a:t>quick and lively</a:t>
+              <a:t>quick and energetic</a:t>
             </a:r>
             <a:endParaRPr lang="en-US" sz="850" dirty="0"/>
           </a:p>
@@ -25178,7 +24434,7 @@
                 <a:ea typeface="Trebuchet MS" pitchFamily="34" charset="-122"/>
                 <a:cs typeface="Trebuchet MS" pitchFamily="34" charset="-120"/>
               </a:rPr>
-              <a:t>er</a:t>
+              <a:t>est</a:t>
             </a:r>
             <a:endParaRPr lang="en-US" sz="1300" dirty="0"/>
           </a:p>
@@ -25217,7 +24473,7 @@
                 <a:ea typeface="Calibri" pitchFamily="34" charset="-122"/>
                 <a:cs typeface="Calibri" pitchFamily="34" charset="-120"/>
               </a:rPr>
-              <a:t>more</a:t>
+              <a:t>most</a:t>
             </a:r>
             <a:endParaRPr lang="en-US" sz="850" dirty="0"/>
           </a:p>
@@ -25481,7 +24737,7 @@
                 <a:ea typeface="Trebuchet MS" pitchFamily="34" charset="-122"/>
                 <a:cs typeface="Trebuchet MS" pitchFamily="34" charset="-120"/>
               </a:rPr>
-              <a:t>er</a:t>
+              <a:t>est</a:t>
             </a:r>
             <a:endParaRPr lang="en-US" sz="1400" dirty="0"/>
           </a:p>
@@ -25905,7 +25161,7 @@
                 <a:ea typeface="Calibri" pitchFamily="34" charset="-122"/>
                 <a:cs typeface="Calibri" pitchFamily="34" charset="-120"/>
               </a:rPr>
-              <a:t>Word Labs  •  wordlabs.app  •  Root: 'brisk' = quick, lively, and energetic</a:t>
+              <a:t>Word Labs  •  wordlabs.app  •  Root: 'brisk' = quick and energetic</a:t>
             </a:r>
             <a:endParaRPr lang="en-US" sz="800" dirty="0"/>
           </a:p>
@@ -26044,7 +25300,7 @@
                 <a:ea typeface="Trebuchet MS" pitchFamily="34" charset="-122"/>
                 <a:cs typeface="Trebuchet MS" pitchFamily="34" charset="-120"/>
               </a:rPr>
-              <a:t>brisker</a:t>
+              <a:t>briskest</a:t>
             </a:r>
             <a:endParaRPr lang="en-US" sz="2800" dirty="0"/>
           </a:p>
@@ -26222,7 +25478,7 @@
                 <a:ea typeface="Calibri" pitchFamily="34" charset="-122"/>
                 <a:cs typeface="Calibri" pitchFamily="34" charset="-120"/>
               </a:rPr>
-              <a:t>quick and lively</a:t>
+              <a:t>quick and energetic</a:t>
             </a:r>
             <a:endParaRPr lang="en-US" sz="850" dirty="0"/>
           </a:p>
@@ -26295,7 +25551,7 @@
                 <a:ea typeface="Trebuchet MS" pitchFamily="34" charset="-122"/>
                 <a:cs typeface="Trebuchet MS" pitchFamily="34" charset="-120"/>
               </a:rPr>
-              <a:t>er</a:t>
+              <a:t>est</a:t>
             </a:r>
             <a:endParaRPr lang="en-US" sz="1300" dirty="0"/>
           </a:p>
@@ -26334,7 +25590,7 @@
                 <a:ea typeface="Calibri" pitchFamily="34" charset="-122"/>
                 <a:cs typeface="Calibri" pitchFamily="34" charset="-120"/>
               </a:rPr>
-              <a:t>more</a:t>
+              <a:t>most</a:t>
             </a:r>
             <a:endParaRPr lang="en-US" sz="850" dirty="0"/>
           </a:p>
@@ -26598,7 +25854,7 @@
                 <a:ea typeface="Trebuchet MS" pitchFamily="34" charset="-122"/>
                 <a:cs typeface="Trebuchet MS" pitchFamily="34" charset="-120"/>
               </a:rPr>
-              <a:t>er</a:t>
+              <a:t>est</a:t>
             </a:r>
             <a:endParaRPr lang="en-US" sz="1400" dirty="0"/>
           </a:p>
@@ -26705,7 +25961,7 @@
         </p:nvSpPr>
         <p:spPr>
           <a:xfrm>
-            <a:off x="2254649" y="4169664"/>
+            <a:off x="2023872" y="4169664"/>
             <a:ext cx="685800" cy="475488"/>
           </a:xfrm>
           <a:prstGeom prst="rect">
@@ -26732,7 +25988,7 @@
         </p:nvSpPr>
         <p:spPr>
           <a:xfrm>
-            <a:off x="2254649" y="4169664"/>
+            <a:off x="2023872" y="4169664"/>
             <a:ext cx="685800" cy="475488"/>
           </a:xfrm>
           <a:prstGeom prst="rect">
@@ -26771,7 +26027,7 @@
         </p:nvSpPr>
         <p:spPr>
           <a:xfrm>
-            <a:off x="3293146" y="4169664"/>
+            <a:off x="2831592" y="4169664"/>
             <a:ext cx="685800" cy="475488"/>
           </a:xfrm>
           <a:prstGeom prst="rect">
@@ -26798,7 +26054,7 @@
         </p:nvSpPr>
         <p:spPr>
           <a:xfrm>
-            <a:off x="3293146" y="4169664"/>
+            <a:off x="2831592" y="4169664"/>
             <a:ext cx="685800" cy="475488"/>
           </a:xfrm>
           <a:prstGeom prst="rect">
@@ -26837,7 +26093,7 @@
         </p:nvSpPr>
         <p:spPr>
           <a:xfrm>
-            <a:off x="4331643" y="4169664"/>
+            <a:off x="3639312" y="4169664"/>
             <a:ext cx="685800" cy="475488"/>
           </a:xfrm>
           <a:prstGeom prst="rect">
@@ -26864,7 +26120,7 @@
         </p:nvSpPr>
         <p:spPr>
           <a:xfrm>
-            <a:off x="4331643" y="4169664"/>
+            <a:off x="3639312" y="4169664"/>
             <a:ext cx="685800" cy="475488"/>
           </a:xfrm>
           <a:prstGeom prst="rect">
@@ -26903,7 +26159,7 @@
         </p:nvSpPr>
         <p:spPr>
           <a:xfrm>
-            <a:off x="5370141" y="4169664"/>
+            <a:off x="4447032" y="4169664"/>
             <a:ext cx="685800" cy="475488"/>
           </a:xfrm>
           <a:prstGeom prst="rect">
@@ -26930,7 +26186,7 @@
         </p:nvSpPr>
         <p:spPr>
           <a:xfrm>
-            <a:off x="5370141" y="4169664"/>
+            <a:off x="4447032" y="4169664"/>
             <a:ext cx="685800" cy="475488"/>
           </a:xfrm>
           <a:prstGeom prst="rect">
@@ -26969,7 +26225,7 @@
         </p:nvSpPr>
         <p:spPr>
           <a:xfrm>
-            <a:off x="6408638" y="4169664"/>
+            <a:off x="5254752" y="4169664"/>
             <a:ext cx="685800" cy="475488"/>
           </a:xfrm>
           <a:prstGeom prst="rect">
@@ -26996,7 +26252,7 @@
         </p:nvSpPr>
         <p:spPr>
           <a:xfrm>
-            <a:off x="6408638" y="4169664"/>
+            <a:off x="5254752" y="4169664"/>
             <a:ext cx="685800" cy="475488"/>
           </a:xfrm>
           <a:prstGeom prst="rect">
@@ -27035,7 +26291,7 @@
         </p:nvSpPr>
         <p:spPr>
           <a:xfrm>
-            <a:off x="7447135" y="4169664"/>
+            <a:off x="6062472" y="4169664"/>
             <a:ext cx="685800" cy="475488"/>
           </a:xfrm>
           <a:prstGeom prst="rect">
@@ -27062,7 +26318,7 @@
         </p:nvSpPr>
         <p:spPr>
           <a:xfrm>
-            <a:off x="7447135" y="4169664"/>
+            <a:off x="6062472" y="4169664"/>
             <a:ext cx="685800" cy="475488"/>
           </a:xfrm>
           <a:prstGeom prst="rect">
@@ -27087,7 +26343,139 @@
                 <a:ea typeface="Trebuchet MS" pitchFamily="34" charset="-122"/>
                 <a:cs typeface="Trebuchet MS" pitchFamily="34" charset="-120"/>
               </a:rPr>
-              <a:t>er</a:t>
+              <a:t>e</a:t>
+            </a:r>
+            <a:endParaRPr lang="en-US" sz="900" dirty="0"/>
+          </a:p>
+        </p:txBody>
+      </p:sp>
+      <p:sp>
+        <p:nvSpPr>
+          <p:cNvPr id="45" name="Shape 43"/>
+          <p:cNvSpPr/>
+          <p:nvPr/>
+        </p:nvSpPr>
+        <p:spPr>
+          <a:xfrm>
+            <a:off x="6870192" y="4169664"/>
+            <a:ext cx="685800" cy="475488"/>
+          </a:xfrm>
+          <a:prstGeom prst="rect">
+            <a:avLst>
+              <a:gd name="adj" fmla="val 7692"/>
+            </a:avLst>
+          </a:prstGeom>
+          <a:solidFill>
+            <a:srgbClr val="FFFFFF"/>
+          </a:solidFill>
+          <a:ln w="12700">
+            <a:solidFill>
+              <a:srgbClr val="DB2777"/>
+            </a:solidFill>
+            <a:prstDash val="solid"/>
+          </a:ln>
+        </p:spPr>
+      </p:sp>
+      <p:sp>
+        <p:nvSpPr>
+          <p:cNvPr id="46" name="Text 44"/>
+          <p:cNvSpPr/>
+          <p:nvPr/>
+        </p:nvSpPr>
+        <p:spPr>
+          <a:xfrm>
+            <a:off x="6870192" y="4169664"/>
+            <a:ext cx="685800" cy="475488"/>
+          </a:xfrm>
+          <a:prstGeom prst="rect">
+            <a:avLst/>
+          </a:prstGeom>
+          <a:noFill/>
+          <a:ln/>
+        </p:spPr>
+        <p:txBody>
+          <a:bodyPr wrap="square" lIns="0" tIns="0" rIns="0" bIns="0" rtlCol="0" anchor="ctr"/>
+          <a:lstStyle/>
+          <a:p>
+            <a:pPr algn="ctr" indent="0" marL="0">
+              <a:buNone/>
+            </a:pPr>
+            <a:r>
+              <a:rPr lang="en-US" sz="900" b="1" dirty="0">
+                <a:solidFill>
+                  <a:srgbClr val="9D174D"/>
+                </a:solidFill>
+                <a:latin typeface="Trebuchet MS" pitchFamily="34" charset="0"/>
+                <a:ea typeface="Trebuchet MS" pitchFamily="34" charset="-122"/>
+                <a:cs typeface="Trebuchet MS" pitchFamily="34" charset="-120"/>
+              </a:rPr>
+              <a:t>s</a:t>
+            </a:r>
+            <a:endParaRPr lang="en-US" sz="900" dirty="0"/>
+          </a:p>
+        </p:txBody>
+      </p:sp>
+      <p:sp>
+        <p:nvSpPr>
+          <p:cNvPr id="47" name="Shape 45"/>
+          <p:cNvSpPr/>
+          <p:nvPr/>
+        </p:nvSpPr>
+        <p:spPr>
+          <a:xfrm>
+            <a:off x="7677912" y="4169664"/>
+            <a:ext cx="685800" cy="475488"/>
+          </a:xfrm>
+          <a:prstGeom prst="rect">
+            <a:avLst>
+              <a:gd name="adj" fmla="val 7692"/>
+            </a:avLst>
+          </a:prstGeom>
+          <a:solidFill>
+            <a:srgbClr val="FFFFFF"/>
+          </a:solidFill>
+          <a:ln w="12700">
+            <a:solidFill>
+              <a:srgbClr val="DB2777"/>
+            </a:solidFill>
+            <a:prstDash val="solid"/>
+          </a:ln>
+        </p:spPr>
+      </p:sp>
+      <p:sp>
+        <p:nvSpPr>
+          <p:cNvPr id="48" name="Text 46"/>
+          <p:cNvSpPr/>
+          <p:nvPr/>
+        </p:nvSpPr>
+        <p:spPr>
+          <a:xfrm>
+            <a:off x="7677912" y="4169664"/>
+            <a:ext cx="685800" cy="475488"/>
+          </a:xfrm>
+          <a:prstGeom prst="rect">
+            <a:avLst/>
+          </a:prstGeom>
+          <a:noFill/>
+          <a:ln/>
+        </p:spPr>
+        <p:txBody>
+          <a:bodyPr wrap="square" lIns="0" tIns="0" rIns="0" bIns="0" rtlCol="0" anchor="ctr"/>
+          <a:lstStyle/>
+          <a:p>
+            <a:pPr algn="ctr" indent="0" marL="0">
+              <a:buNone/>
+            </a:pPr>
+            <a:r>
+              <a:rPr lang="en-US" sz="900" b="1" dirty="0">
+                <a:solidFill>
+                  <a:srgbClr val="9D174D"/>
+                </a:solidFill>
+                <a:latin typeface="Trebuchet MS" pitchFamily="34" charset="0"/>
+                <a:ea typeface="Trebuchet MS" pitchFamily="34" charset="-122"/>
+                <a:cs typeface="Trebuchet MS" pitchFamily="34" charset="-120"/>
+              </a:rPr>
+              <a:t>t</a:t>
             </a:r>
             <a:endParaRPr lang="en-US" sz="900" dirty="0"/>
           </a:p>
@@ -27379,7 +26767,7 @@
                 <a:ea typeface="Calibri" pitchFamily="34" charset="-122"/>
                 <a:cs typeface="Calibri" pitchFamily="34" charset="-120"/>
               </a:rPr>
-              <a:t>Word Labs  •  wordlabs.app  •  Root: 'brisk' = quick, lively, and energetic</a:t>
+              <a:t>Word Labs  •  wordlabs.app  •  Root: 'brisk' = quick and energetic</a:t>
             </a:r>
             <a:endParaRPr lang="en-US" sz="800" dirty="0"/>
           </a:p>
@@ -27518,7 +26906,7 @@
                 <a:ea typeface="Trebuchet MS" pitchFamily="34" charset="-122"/>
                 <a:cs typeface="Trebuchet MS" pitchFamily="34" charset="-120"/>
               </a:rPr>
-              <a:t>briskest</a:t>
+              <a:t>briskness</a:t>
             </a:r>
             <a:endParaRPr lang="en-US" sz="2800" dirty="0"/>
           </a:p>
@@ -28206,7 +27594,7 @@
                 <a:ea typeface="Calibri" pitchFamily="34" charset="-122"/>
                 <a:cs typeface="Calibri" pitchFamily="34" charset="-120"/>
               </a:rPr>
-              <a:t>Word Labs  •  wordlabs.app  •  Root: 'brisk' = quick, lively, and energetic</a:t>
+              <a:t>Word Labs  •  wordlabs.app  •  Root: 'brisk' = quick and energetic</a:t>
             </a:r>
             <a:endParaRPr lang="en-US" sz="800" dirty="0"/>
           </a:p>
@@ -28345,7 +27733,7 @@
                 <a:ea typeface="Trebuchet MS" pitchFamily="34" charset="-122"/>
                 <a:cs typeface="Trebuchet MS" pitchFamily="34" charset="-120"/>
               </a:rPr>
-              <a:t>briskest</a:t>
+              <a:t>briskness</a:t>
             </a:r>
             <a:endParaRPr lang="en-US" sz="2800" dirty="0"/>
           </a:p>
@@ -28523,7 +27911,7 @@
                 <a:ea typeface="Calibri" pitchFamily="34" charset="-122"/>
                 <a:cs typeface="Calibri" pitchFamily="34" charset="-120"/>
               </a:rPr>
-              <a:t>quick and lively</a:t>
+              <a:t>quick and energetic</a:t>
             </a:r>
             <a:endParaRPr lang="en-US" sz="850" dirty="0"/>
           </a:p>
@@ -28596,7 +27984,7 @@
                 <a:ea typeface="Trebuchet MS" pitchFamily="34" charset="-122"/>
                 <a:cs typeface="Trebuchet MS" pitchFamily="34" charset="-120"/>
               </a:rPr>
-              <a:t>est</a:t>
+              <a:t>ness</a:t>
             </a:r>
             <a:endParaRPr lang="en-US" sz="1300" dirty="0"/>
           </a:p>
@@ -28635,7 +28023,7 @@
                 <a:ea typeface="Calibri" pitchFamily="34" charset="-122"/>
                 <a:cs typeface="Calibri" pitchFamily="34" charset="-120"/>
               </a:rPr>
-              <a:t>the most</a:t>
+              <a:t>state of</a:t>
             </a:r>
             <a:endParaRPr lang="en-US" sz="850" dirty="0"/>
           </a:p>
@@ -29191,7 +28579,7 @@
                 <a:ea typeface="Calibri" pitchFamily="34" charset="-122"/>
                 <a:cs typeface="Calibri" pitchFamily="34" charset="-120"/>
               </a:rPr>
-              <a:t>Word Labs  •  wordlabs.app  •  Root: 'brisk' = quick, lively, and energetic</a:t>
+              <a:t>Word Labs  •  wordlabs.app  •  Root: 'brisk' = quick and energetic</a:t>
             </a:r>
             <a:endParaRPr lang="en-US" sz="800" dirty="0"/>
           </a:p>
@@ -29330,7 +28718,7 @@
                 <a:ea typeface="Trebuchet MS" pitchFamily="34" charset="-122"/>
                 <a:cs typeface="Trebuchet MS" pitchFamily="34" charset="-120"/>
               </a:rPr>
-              <a:t>briskest</a:t>
+              <a:t>briskness</a:t>
             </a:r>
             <a:endParaRPr lang="en-US" sz="2800" dirty="0"/>
           </a:p>
@@ -29508,7 +28896,7 @@
                 <a:ea typeface="Calibri" pitchFamily="34" charset="-122"/>
                 <a:cs typeface="Calibri" pitchFamily="34" charset="-120"/>
               </a:rPr>
-              <a:t>quick and lively</a:t>
+              <a:t>quick and energetic</a:t>
             </a:r>
             <a:endParaRPr lang="en-US" sz="850" dirty="0"/>
           </a:p>
@@ -29581,7 +28969,7 @@
                 <a:ea typeface="Trebuchet MS" pitchFamily="34" charset="-122"/>
                 <a:cs typeface="Trebuchet MS" pitchFamily="34" charset="-120"/>
               </a:rPr>
-              <a:t>est</a:t>
+              <a:t>ness</a:t>
             </a:r>
             <a:endParaRPr lang="en-US" sz="1300" dirty="0"/>
           </a:p>
@@ -29620,7 +29008,7 @@
                 <a:ea typeface="Calibri" pitchFamily="34" charset="-122"/>
                 <a:cs typeface="Calibri" pitchFamily="34" charset="-120"/>
               </a:rPr>
-              <a:t>the most</a:t>
+              <a:t>state of</a:t>
             </a:r>
             <a:endParaRPr lang="en-US" sz="850" dirty="0"/>
           </a:p>
@@ -29884,7 +29272,7 @@
                 <a:ea typeface="Trebuchet MS" pitchFamily="34" charset="-122"/>
                 <a:cs typeface="Trebuchet MS" pitchFamily="34" charset="-120"/>
               </a:rPr>
-              <a:t>est</a:t>
+              <a:t>ness</a:t>
             </a:r>
             <a:endParaRPr lang="en-US" sz="1400" dirty="0"/>
           </a:p>
@@ -30308,7 +29696,7 @@
                 <a:ea typeface="Calibri" pitchFamily="34" charset="-122"/>
                 <a:cs typeface="Calibri" pitchFamily="34" charset="-120"/>
               </a:rPr>
-              <a:t>Word Labs  •  wordlabs.app  •  Root: 'brisk' = quick, lively, and energetic</a:t>
+              <a:t>Word Labs  •  wordlabs.app  •  Root: 'brisk' = quick and energetic</a:t>
             </a:r>
             <a:endParaRPr lang="en-US" sz="800" dirty="0"/>
           </a:p>
@@ -30447,7 +29835,7 @@
                 <a:ea typeface="Trebuchet MS" pitchFamily="34" charset="-122"/>
                 <a:cs typeface="Trebuchet MS" pitchFamily="34" charset="-120"/>
               </a:rPr>
-              <a:t>briskest</a:t>
+              <a:t>briskness</a:t>
             </a:r>
             <a:endParaRPr lang="en-US" sz="2800" dirty="0"/>
           </a:p>
@@ -30625,7 +30013,7 @@
                 <a:ea typeface="Calibri" pitchFamily="34" charset="-122"/>
                 <a:cs typeface="Calibri" pitchFamily="34" charset="-120"/>
               </a:rPr>
-              <a:t>quick and lively</a:t>
+              <a:t>quick and energetic</a:t>
             </a:r>
             <a:endParaRPr lang="en-US" sz="850" dirty="0"/>
           </a:p>
@@ -30698,7 +30086,7 @@
                 <a:ea typeface="Trebuchet MS" pitchFamily="34" charset="-122"/>
                 <a:cs typeface="Trebuchet MS" pitchFamily="34" charset="-120"/>
               </a:rPr>
-              <a:t>est</a:t>
+              <a:t>ness</a:t>
             </a:r>
             <a:endParaRPr lang="en-US" sz="1300" dirty="0"/>
           </a:p>
@@ -30737,7 +30125,7 @@
                 <a:ea typeface="Calibri" pitchFamily="34" charset="-122"/>
                 <a:cs typeface="Calibri" pitchFamily="34" charset="-120"/>
               </a:rPr>
-              <a:t>the most</a:t>
+              <a:t>state of</a:t>
             </a:r>
             <a:endParaRPr lang="en-US" sz="850" dirty="0"/>
           </a:p>
@@ -31001,7 +30389,7 @@
                 <a:ea typeface="Trebuchet MS" pitchFamily="34" charset="-122"/>
                 <a:cs typeface="Trebuchet MS" pitchFamily="34" charset="-120"/>
               </a:rPr>
-              <a:t>est</a:t>
+              <a:t>ness</a:t>
             </a:r>
             <a:endParaRPr lang="en-US" sz="1400" dirty="0"/>
           </a:p>
@@ -31108,8 +30496,8 @@
         </p:nvSpPr>
         <p:spPr>
           <a:xfrm>
-            <a:off x="2023872" y="4169664"/>
-            <a:ext cx="685800" cy="475488"/>
+            <a:off x="1951330" y="4169664"/>
+            <a:ext cx="676656" cy="475488"/>
           </a:xfrm>
           <a:prstGeom prst="rect">
             <a:avLst>
@@ -31135,8 +30523,8 @@
         </p:nvSpPr>
         <p:spPr>
           <a:xfrm>
-            <a:off x="2023872" y="4169664"/>
-            <a:ext cx="685800" cy="475488"/>
+            <a:off x="1951330" y="4169664"/>
+            <a:ext cx="676656" cy="475488"/>
           </a:xfrm>
           <a:prstGeom prst="rect">
             <a:avLst/>
@@ -31174,8 +30562,8 @@
         </p:nvSpPr>
         <p:spPr>
           <a:xfrm>
-            <a:off x="2831592" y="4169664"/>
-            <a:ext cx="685800" cy="475488"/>
+            <a:off x="2677363" y="4169664"/>
+            <a:ext cx="676656" cy="475488"/>
           </a:xfrm>
           <a:prstGeom prst="rect">
             <a:avLst>
@@ -31201,8 +30589,8 @@
         </p:nvSpPr>
         <p:spPr>
           <a:xfrm>
-            <a:off x="2831592" y="4169664"/>
-            <a:ext cx="685800" cy="475488"/>
+            <a:off x="2677363" y="4169664"/>
+            <a:ext cx="676656" cy="475488"/>
           </a:xfrm>
           <a:prstGeom prst="rect">
             <a:avLst/>
@@ -31240,8 +30628,8 @@
         </p:nvSpPr>
         <p:spPr>
           <a:xfrm>
-            <a:off x="3639312" y="4169664"/>
-            <a:ext cx="685800" cy="475488"/>
+            <a:off x="3403397" y="4169664"/>
+            <a:ext cx="676656" cy="475488"/>
           </a:xfrm>
           <a:prstGeom prst="rect">
             <a:avLst>
@@ -31267,8 +30655,8 @@
         </p:nvSpPr>
         <p:spPr>
           <a:xfrm>
-            <a:off x="3639312" y="4169664"/>
-            <a:ext cx="685800" cy="475488"/>
+            <a:off x="3403397" y="4169664"/>
+            <a:ext cx="676656" cy="475488"/>
           </a:xfrm>
           <a:prstGeom prst="rect">
             <a:avLst/>
@@ -31306,8 +30694,8 @@
         </p:nvSpPr>
         <p:spPr>
           <a:xfrm>
-            <a:off x="4447032" y="4169664"/>
-            <a:ext cx="685800" cy="475488"/>
+            <a:off x="4129430" y="4169664"/>
+            <a:ext cx="676656" cy="475488"/>
           </a:xfrm>
           <a:prstGeom prst="rect">
             <a:avLst>
@@ -31333,8 +30721,8 @@
         </p:nvSpPr>
         <p:spPr>
           <a:xfrm>
-            <a:off x="4447032" y="4169664"/>
-            <a:ext cx="685800" cy="475488"/>
+            <a:off x="4129430" y="4169664"/>
+            <a:ext cx="676656" cy="475488"/>
           </a:xfrm>
           <a:prstGeom prst="rect">
             <a:avLst/>
@@ -31372,8 +30760,8 @@
         </p:nvSpPr>
         <p:spPr>
           <a:xfrm>
-            <a:off x="5254752" y="4169664"/>
-            <a:ext cx="685800" cy="475488"/>
+            <a:off x="4855464" y="4169664"/>
+            <a:ext cx="676656" cy="475488"/>
           </a:xfrm>
           <a:prstGeom prst="rect">
             <a:avLst>
@@ -31399,8 +30787,8 @@
         </p:nvSpPr>
         <p:spPr>
           <a:xfrm>
-            <a:off x="5254752" y="4169664"/>
-            <a:ext cx="685800" cy="475488"/>
+            <a:off x="4855464" y="4169664"/>
+            <a:ext cx="676656" cy="475488"/>
           </a:xfrm>
           <a:prstGeom prst="rect">
             <a:avLst/>
@@ -31438,8 +30826,8 @@
         </p:nvSpPr>
         <p:spPr>
           <a:xfrm>
-            <a:off x="6062472" y="4169664"/>
-            <a:ext cx="685800" cy="475488"/>
+            <a:off x="5581498" y="4169664"/>
+            <a:ext cx="676656" cy="475488"/>
           </a:xfrm>
           <a:prstGeom prst="rect">
             <a:avLst>
@@ -31465,8 +30853,8 @@
         </p:nvSpPr>
         <p:spPr>
           <a:xfrm>
-            <a:off x="6062472" y="4169664"/>
-            <a:ext cx="685800" cy="475488"/>
+            <a:off x="5581498" y="4169664"/>
+            <a:ext cx="676656" cy="475488"/>
           </a:xfrm>
           <a:prstGeom prst="rect">
             <a:avLst/>
@@ -31490,7 +30878,7 @@
                 <a:ea typeface="Trebuchet MS" pitchFamily="34" charset="-122"/>
                 <a:cs typeface="Trebuchet MS" pitchFamily="34" charset="-120"/>
               </a:rPr>
-              <a:t>e</a:t>
+              <a:t>n</a:t>
             </a:r>
             <a:endParaRPr lang="en-US" sz="900" dirty="0"/>
           </a:p>
@@ -31504,8 +30892,8 @@
         </p:nvSpPr>
         <p:spPr>
           <a:xfrm>
-            <a:off x="6870192" y="4169664"/>
-            <a:ext cx="685800" cy="475488"/>
+            <a:off x="6307531" y="4169664"/>
+            <a:ext cx="676656" cy="475488"/>
           </a:xfrm>
           <a:prstGeom prst="rect">
             <a:avLst>
@@ -31531,8 +30919,8 @@
         </p:nvSpPr>
         <p:spPr>
           <a:xfrm>
-            <a:off x="6870192" y="4169664"/>
-            <a:ext cx="685800" cy="475488"/>
+            <a:off x="6307531" y="4169664"/>
+            <a:ext cx="676656" cy="475488"/>
           </a:xfrm>
           <a:prstGeom prst="rect">
             <a:avLst/>
@@ -31556,7 +30944,7 @@
                 <a:ea typeface="Trebuchet MS" pitchFamily="34" charset="-122"/>
                 <a:cs typeface="Trebuchet MS" pitchFamily="34" charset="-120"/>
               </a:rPr>
-              <a:t>s</a:t>
+              <a:t>e</a:t>
             </a:r>
             <a:endParaRPr lang="en-US" sz="900" dirty="0"/>
           </a:p>
@@ -31570,8 +30958,8 @@
         </p:nvSpPr>
         <p:spPr>
           <a:xfrm>
-            <a:off x="7677912" y="4169664"/>
-            <a:ext cx="685800" cy="475488"/>
+            <a:off x="7033565" y="4169664"/>
+            <a:ext cx="676656" cy="475488"/>
           </a:xfrm>
           <a:prstGeom prst="rect">
             <a:avLst>
@@ -31597,8 +30985,8 @@
         </p:nvSpPr>
         <p:spPr>
           <a:xfrm>
-            <a:off x="7677912" y="4169664"/>
-            <a:ext cx="685800" cy="475488"/>
+            <a:off x="7033565" y="4169664"/>
+            <a:ext cx="676656" cy="475488"/>
           </a:xfrm>
           <a:prstGeom prst="rect">
             <a:avLst/>
@@ -31622,7 +31010,73 @@
                 <a:ea typeface="Trebuchet MS" pitchFamily="34" charset="-122"/>
                 <a:cs typeface="Trebuchet MS" pitchFamily="34" charset="-120"/>
               </a:rPr>
-              <a:t>t</a:t>
+              <a:t>s</a:t>
+            </a:r>
+            <a:endParaRPr lang="en-US" sz="900" dirty="0"/>
+          </a:p>
+        </p:txBody>
+      </p:sp>
+      <p:sp>
+        <p:nvSpPr>
+          <p:cNvPr id="49" name="Shape 47"/>
+          <p:cNvSpPr/>
+          <p:nvPr/>
+        </p:nvSpPr>
+        <p:spPr>
+          <a:xfrm>
+            <a:off x="7759598" y="4169664"/>
+            <a:ext cx="676656" cy="475488"/>
+          </a:xfrm>
+          <a:prstGeom prst="rect">
+            <a:avLst>
+              <a:gd name="adj" fmla="val 7692"/>
+            </a:avLst>
+          </a:prstGeom>
+          <a:solidFill>
+            <a:srgbClr val="FFFFFF"/>
+          </a:solidFill>
+          <a:ln w="12700">
+            <a:solidFill>
+              <a:srgbClr val="DB2777"/>
+            </a:solidFill>
+            <a:prstDash val="solid"/>
+          </a:ln>
+        </p:spPr>
+      </p:sp>
+      <p:sp>
+        <p:nvSpPr>
+          <p:cNvPr id="50" name="Text 48"/>
+          <p:cNvSpPr/>
+          <p:nvPr/>
+        </p:nvSpPr>
+        <p:spPr>
+          <a:xfrm>
+            <a:off x="7759598" y="4169664"/>
+            <a:ext cx="676656" cy="475488"/>
+          </a:xfrm>
+          <a:prstGeom prst="rect">
+            <a:avLst/>
+          </a:prstGeom>
+          <a:noFill/>
+          <a:ln/>
+        </p:spPr>
+        <p:txBody>
+          <a:bodyPr wrap="square" lIns="0" tIns="0" rIns="0" bIns="0" rtlCol="0" anchor="ctr"/>
+          <a:lstStyle/>
+          <a:p>
+            <a:pPr algn="ctr" indent="0" marL="0">
+              <a:buNone/>
+            </a:pPr>
+            <a:r>
+              <a:rPr lang="en-US" sz="900" b="1" dirty="0">
+                <a:solidFill>
+                  <a:srgbClr val="9D174D"/>
+                </a:solidFill>
+                <a:latin typeface="Trebuchet MS" pitchFamily="34" charset="0"/>
+                <a:ea typeface="Trebuchet MS" pitchFamily="34" charset="-122"/>
+                <a:cs typeface="Trebuchet MS" pitchFamily="34" charset="-120"/>
+              </a:rPr>
+              <a:t>s</a:t>
             </a:r>
             <a:endParaRPr lang="en-US" sz="900" dirty="0"/>
           </a:p>
@@ -31914,7 +31368,7 @@
                 <a:ea typeface="Calibri" pitchFamily="34" charset="-122"/>
                 <a:cs typeface="Calibri" pitchFamily="34" charset="-120"/>
               </a:rPr>
-              <a:t>Word Labs  •  wordlabs.app  •  Root: 'brisk' = quick, lively, and energetic</a:t>
+              <a:t>Word Labs  •  wordlabs.app  •  Root: 'brisk' = quick and energetic</a:t>
             </a:r>
             <a:endParaRPr lang="en-US" sz="800" dirty="0"/>
           </a:p>
@@ -33083,7 +32537,7 @@
                 <a:ea typeface="Calibri" pitchFamily="34" charset="-122"/>
                 <a:cs typeface="Calibri" pitchFamily="34" charset="-120"/>
               </a:rPr>
-              <a:t>Word Labs  •  wordlabs.app  •  Root: 'brisk' = quick, lively, and energetic</a:t>
+              <a:t>Word Labs  •  wordlabs.app  •  Root: 'brisk' = quick and energetic</a:t>
             </a:r>
             <a:endParaRPr lang="en-US" sz="800" dirty="0"/>
           </a:p>
@@ -33341,7 +32795,7 @@
             <a:avLst/>
           </a:prstGeom>
           <a:solidFill>
-            <a:srgbClr val="DDD6FE"/>
+            <a:srgbClr val="F8FAFC"/>
           </a:solidFill>
           <a:ln w="12700">
             <a:solidFill>
@@ -33353,14 +32807,39 @@
       </p:sp>
       <p:sp>
         <p:nvSpPr>
-          <p:cNvPr id="18" name="Text 16"/>
-          <p:cNvSpPr/>
-          <p:nvPr/>
-        </p:nvSpPr>
-        <p:spPr>
-          <a:xfrm>
-            <a:off x="365760" y="1563624"/>
-            <a:ext cx="2468880" cy="402336"/>
+          <p:cNvPr id="18" name="Shape 16"/>
+          <p:cNvSpPr/>
+          <p:nvPr/>
+        </p:nvSpPr>
+        <p:spPr>
+          <a:xfrm>
+            <a:off x="2971800" y="1563624"/>
+            <a:ext cx="2834640" cy="402336"/>
+          </a:xfrm>
+          <a:prstGeom prst="rect">
+            <a:avLst/>
+          </a:prstGeom>
+          <a:solidFill>
+            <a:srgbClr val="CCFBF1"/>
+          </a:solidFill>
+          <a:ln w="12700">
+            <a:solidFill>
+              <a:srgbClr val="E2E8F0"/>
+            </a:solidFill>
+            <a:prstDash val="solid"/>
+          </a:ln>
+        </p:spPr>
+      </p:sp>
+      <p:sp>
+        <p:nvSpPr>
+          <p:cNvPr id="19" name="Text 17"/>
+          <p:cNvSpPr/>
+          <p:nvPr/>
+        </p:nvSpPr>
+        <p:spPr>
+          <a:xfrm>
+            <a:off x="2971800" y="1563624"/>
+            <a:ext cx="2834640" cy="402336"/>
           </a:xfrm>
           <a:prstGeom prst="rect">
             <a:avLst/>
@@ -33378,13 +32857,13 @@
             <a:r>
               <a:rPr lang="en-US" sz="1300" b="1" dirty="0">
                 <a:solidFill>
-                  <a:srgbClr val="4C1D95"/>
+                  <a:srgbClr val="0F766E"/>
                 </a:solidFill>
                 <a:latin typeface="Trebuchet MS" pitchFamily="34" charset="0"/>
                 <a:ea typeface="Trebuchet MS" pitchFamily="34" charset="-122"/>
                 <a:cs typeface="Trebuchet MS" pitchFamily="34" charset="-120"/>
               </a:rPr>
-              <a:t>un-</a:t>
+              <a:t>brisk</a:t>
             </a:r>
             <a:endParaRPr lang="en-US" sz="1300" dirty="0"/>
           </a:p>
@@ -33392,20 +32871,20 @@
       </p:sp>
       <p:sp>
         <p:nvSpPr>
-          <p:cNvPr id="19" name="Shape 17"/>
-          <p:cNvSpPr/>
-          <p:nvPr/>
-        </p:nvSpPr>
-        <p:spPr>
-          <a:xfrm>
-            <a:off x="2971800" y="1563624"/>
+          <p:cNvPr id="20" name="Shape 18"/>
+          <p:cNvSpPr/>
+          <p:nvPr/>
+        </p:nvSpPr>
+        <p:spPr>
+          <a:xfrm>
+            <a:off x="5943600" y="1563624"/>
             <a:ext cx="2834640" cy="402336"/>
           </a:xfrm>
           <a:prstGeom prst="rect">
             <a:avLst/>
           </a:prstGeom>
           <a:solidFill>
-            <a:srgbClr val="CCFBF1"/>
+            <a:srgbClr val="FCE7F3"/>
           </a:solidFill>
           <a:ln w="12700">
             <a:solidFill>
@@ -33417,13 +32896,13 @@
       </p:sp>
       <p:sp>
         <p:nvSpPr>
-          <p:cNvPr id="20" name="Text 18"/>
-          <p:cNvSpPr/>
-          <p:nvPr/>
-        </p:nvSpPr>
-        <p:spPr>
-          <a:xfrm>
-            <a:off x="2971800" y="1563624"/>
+          <p:cNvPr id="21" name="Text 19"/>
+          <p:cNvSpPr/>
+          <p:nvPr/>
+        </p:nvSpPr>
+        <p:spPr>
+          <a:xfrm>
+            <a:off x="5943600" y="1563624"/>
             <a:ext cx="2834640" cy="402336"/>
           </a:xfrm>
           <a:prstGeom prst="rect">
@@ -33442,13 +32921,13 @@
             <a:r>
               <a:rPr lang="en-US" sz="1300" b="1" dirty="0">
                 <a:solidFill>
-                  <a:srgbClr val="0F766E"/>
+                  <a:srgbClr val="9D174D"/>
                 </a:solidFill>
                 <a:latin typeface="Trebuchet MS" pitchFamily="34" charset="0"/>
                 <a:ea typeface="Trebuchet MS" pitchFamily="34" charset="-122"/>
                 <a:cs typeface="Trebuchet MS" pitchFamily="34" charset="-120"/>
               </a:rPr>
-              <a:t>brisk</a:t>
+              <a:t>-er</a:t>
             </a:r>
             <a:endParaRPr lang="en-US" sz="1300" dirty="0"/>
           </a:p>
@@ -33456,19 +32935,69 @@
       </p:sp>
       <p:sp>
         <p:nvSpPr>
-          <p:cNvPr id="21" name="Shape 19"/>
-          <p:cNvSpPr/>
-          <p:nvPr/>
-        </p:nvSpPr>
-        <p:spPr>
-          <a:xfrm>
-            <a:off x="5943600" y="1563624"/>
+          <p:cNvPr id="22" name="Shape 20"/>
+          <p:cNvSpPr/>
+          <p:nvPr/>
+        </p:nvSpPr>
+        <p:spPr>
+          <a:xfrm>
+            <a:off x="365760" y="1984248"/>
+            <a:ext cx="2468880" cy="402336"/>
+          </a:xfrm>
+          <a:prstGeom prst="rect">
+            <a:avLst/>
+          </a:prstGeom>
+          <a:solidFill>
+            <a:srgbClr val="F1F5F9"/>
+          </a:solidFill>
+          <a:ln w="12700">
+            <a:solidFill>
+              <a:srgbClr val="E2E8F0"/>
+            </a:solidFill>
+            <a:prstDash val="solid"/>
+          </a:ln>
+        </p:spPr>
+      </p:sp>
+      <p:sp>
+        <p:nvSpPr>
+          <p:cNvPr id="23" name="Shape 21"/>
+          <p:cNvSpPr/>
+          <p:nvPr/>
+        </p:nvSpPr>
+        <p:spPr>
+          <a:xfrm>
+            <a:off x="2971800" y="1984248"/>
             <a:ext cx="2834640" cy="402336"/>
           </a:xfrm>
           <a:prstGeom prst="rect">
             <a:avLst/>
           </a:prstGeom>
           <a:solidFill>
+            <a:srgbClr val="F1F5F9"/>
+          </a:solidFill>
+          <a:ln w="12700">
+            <a:solidFill>
+              <a:srgbClr val="E2E8F0"/>
+            </a:solidFill>
+            <a:prstDash val="solid"/>
+          </a:ln>
+        </p:spPr>
+      </p:sp>
+      <p:sp>
+        <p:nvSpPr>
+          <p:cNvPr id="24" name="Shape 22"/>
+          <p:cNvSpPr/>
+          <p:nvPr/>
+        </p:nvSpPr>
+        <p:spPr>
+          <a:xfrm>
+            <a:off x="5943600" y="1984248"/>
+            <a:ext cx="2834640" cy="402336"/>
+          </a:xfrm>
+          <a:prstGeom prst="rect">
+            <a:avLst/>
+          </a:prstGeom>
+          <a:solidFill>
             <a:srgbClr val="FCE7F3"/>
           </a:solidFill>
           <a:ln w="12700">
@@ -33481,13 +33010,13 @@
       </p:sp>
       <p:sp>
         <p:nvSpPr>
-          <p:cNvPr id="22" name="Text 20"/>
-          <p:cNvSpPr/>
-          <p:nvPr/>
-        </p:nvSpPr>
-        <p:spPr>
-          <a:xfrm>
-            <a:off x="5943600" y="1563624"/>
+          <p:cNvPr id="25" name="Text 23"/>
+          <p:cNvSpPr/>
+          <p:nvPr/>
+        </p:nvSpPr>
+        <p:spPr>
+          <a:xfrm>
+            <a:off x="5943600" y="1984248"/>
             <a:ext cx="2834640" cy="402336"/>
           </a:xfrm>
           <a:prstGeom prst="rect">
@@ -33512,7 +33041,7 @@
                 <a:ea typeface="Trebuchet MS" pitchFamily="34" charset="-122"/>
                 <a:cs typeface="Trebuchet MS" pitchFamily="34" charset="-120"/>
               </a:rPr>
-              <a:t>-ly</a:t>
+              <a:t>-est</a:t>
             </a:r>
             <a:endParaRPr lang="en-US" sz="1300" dirty="0"/>
           </a:p>
@@ -33520,20 +33049,20 @@
       </p:sp>
       <p:sp>
         <p:nvSpPr>
-          <p:cNvPr id="23" name="Shape 21"/>
-          <p:cNvSpPr/>
-          <p:nvPr/>
-        </p:nvSpPr>
-        <p:spPr>
-          <a:xfrm>
-            <a:off x="365760" y="1984248"/>
+          <p:cNvPr id="26" name="Shape 24"/>
+          <p:cNvSpPr/>
+          <p:nvPr/>
+        </p:nvSpPr>
+        <p:spPr>
+          <a:xfrm>
+            <a:off x="365760" y="2404872"/>
             <a:ext cx="2468880" cy="402336"/>
           </a:xfrm>
           <a:prstGeom prst="rect">
             <a:avLst/>
           </a:prstGeom>
           <a:solidFill>
-            <a:srgbClr val="DDD6FE"/>
+            <a:srgbClr val="F8FAFC"/>
           </a:solidFill>
           <a:ln w="12700">
             <a:solidFill>
@@ -33545,14 +33074,64 @@
       </p:sp>
       <p:sp>
         <p:nvSpPr>
-          <p:cNvPr id="24" name="Text 22"/>
-          <p:cNvSpPr/>
-          <p:nvPr/>
-        </p:nvSpPr>
-        <p:spPr>
-          <a:xfrm>
-            <a:off x="365760" y="1984248"/>
-            <a:ext cx="2468880" cy="402336"/>
+          <p:cNvPr id="27" name="Shape 25"/>
+          <p:cNvSpPr/>
+          <p:nvPr/>
+        </p:nvSpPr>
+        <p:spPr>
+          <a:xfrm>
+            <a:off x="2971800" y="2404872"/>
+            <a:ext cx="2834640" cy="402336"/>
+          </a:xfrm>
+          <a:prstGeom prst="rect">
+            <a:avLst/>
+          </a:prstGeom>
+          <a:solidFill>
+            <a:srgbClr val="F8FAFC"/>
+          </a:solidFill>
+          <a:ln w="12700">
+            <a:solidFill>
+              <a:srgbClr val="E2E8F0"/>
+            </a:solidFill>
+            <a:prstDash val="solid"/>
+          </a:ln>
+        </p:spPr>
+      </p:sp>
+      <p:sp>
+        <p:nvSpPr>
+          <p:cNvPr id="28" name="Shape 26"/>
+          <p:cNvSpPr/>
+          <p:nvPr/>
+        </p:nvSpPr>
+        <p:spPr>
+          <a:xfrm>
+            <a:off x="5943600" y="2404872"/>
+            <a:ext cx="2834640" cy="402336"/>
+          </a:xfrm>
+          <a:prstGeom prst="rect">
+            <a:avLst/>
+          </a:prstGeom>
+          <a:solidFill>
+            <a:srgbClr val="FCE7F3"/>
+          </a:solidFill>
+          <a:ln w="12700">
+            <a:solidFill>
+              <a:srgbClr val="E2E8F0"/>
+            </a:solidFill>
+            <a:prstDash val="solid"/>
+          </a:ln>
+        </p:spPr>
+      </p:sp>
+      <p:sp>
+        <p:nvSpPr>
+          <p:cNvPr id="29" name="Text 27"/>
+          <p:cNvSpPr/>
+          <p:nvPr/>
+        </p:nvSpPr>
+        <p:spPr>
+          <a:xfrm>
+            <a:off x="5943600" y="2404872"/>
+            <a:ext cx="2834640" cy="402336"/>
           </a:xfrm>
           <a:prstGeom prst="rect">
             <a:avLst/>
@@ -33570,13 +33149,13 @@
             <a:r>
               <a:rPr lang="en-US" sz="1300" b="1" dirty="0">
                 <a:solidFill>
-                  <a:srgbClr val="4C1D95"/>
+                  <a:srgbClr val="9D174D"/>
                 </a:solidFill>
                 <a:latin typeface="Trebuchet MS" pitchFamily="34" charset="0"/>
                 <a:ea typeface="Trebuchet MS" pitchFamily="34" charset="-122"/>
                 <a:cs typeface="Trebuchet MS" pitchFamily="34" charset="-120"/>
               </a:rPr>
-              <a:t>non-</a:t>
+              <a:t>-ly</a:t>
             </a:r>
             <a:endParaRPr lang="en-US" sz="1300" dirty="0"/>
           </a:p>
@@ -33584,13 +33163,38 @@
       </p:sp>
       <p:sp>
         <p:nvSpPr>
-          <p:cNvPr id="25" name="Shape 23"/>
-          <p:cNvSpPr/>
-          <p:nvPr/>
-        </p:nvSpPr>
-        <p:spPr>
-          <a:xfrm>
-            <a:off x="2971800" y="1984248"/>
+          <p:cNvPr id="30" name="Shape 28"/>
+          <p:cNvSpPr/>
+          <p:nvPr/>
+        </p:nvSpPr>
+        <p:spPr>
+          <a:xfrm>
+            <a:off x="365760" y="2825496"/>
+            <a:ext cx="2468880" cy="402336"/>
+          </a:xfrm>
+          <a:prstGeom prst="rect">
+            <a:avLst/>
+          </a:prstGeom>
+          <a:solidFill>
+            <a:srgbClr val="F1F5F9"/>
+          </a:solidFill>
+          <a:ln w="12700">
+            <a:solidFill>
+              <a:srgbClr val="E2E8F0"/>
+            </a:solidFill>
+            <a:prstDash val="solid"/>
+          </a:ln>
+        </p:spPr>
+      </p:sp>
+      <p:sp>
+        <p:nvSpPr>
+          <p:cNvPr id="31" name="Shape 29"/>
+          <p:cNvSpPr/>
+          <p:nvPr/>
+        </p:nvSpPr>
+        <p:spPr>
+          <a:xfrm>
+            <a:off x="2971800" y="2825496"/>
             <a:ext cx="2834640" cy="402336"/>
           </a:xfrm>
           <a:prstGeom prst="rect">
@@ -33609,13 +33213,13 @@
       </p:sp>
       <p:sp>
         <p:nvSpPr>
-          <p:cNvPr id="26" name="Shape 24"/>
-          <p:cNvSpPr/>
-          <p:nvPr/>
-        </p:nvSpPr>
-        <p:spPr>
-          <a:xfrm>
-            <a:off x="5943600" y="1984248"/>
+          <p:cNvPr id="32" name="Shape 30"/>
+          <p:cNvSpPr/>
+          <p:nvPr/>
+        </p:nvSpPr>
+        <p:spPr>
+          <a:xfrm>
+            <a:off x="5943600" y="2825496"/>
             <a:ext cx="2834640" cy="402336"/>
           </a:xfrm>
           <a:prstGeom prst="rect">
@@ -33634,13 +33238,13 @@
       </p:sp>
       <p:sp>
         <p:nvSpPr>
-          <p:cNvPr id="27" name="Text 25"/>
-          <p:cNvSpPr/>
-          <p:nvPr/>
-        </p:nvSpPr>
-        <p:spPr>
-          <a:xfrm>
-            <a:off x="5943600" y="1984248"/>
+          <p:cNvPr id="33" name="Text 31"/>
+          <p:cNvSpPr/>
+          <p:nvPr/>
+        </p:nvSpPr>
+        <p:spPr>
+          <a:xfrm>
+            <a:off x="5943600" y="2825496"/>
             <a:ext cx="2834640" cy="402336"/>
           </a:xfrm>
           <a:prstGeom prst="rect">
@@ -33673,39 +33277,14 @@
       </p:sp>
       <p:sp>
         <p:nvSpPr>
-          <p:cNvPr id="28" name="Shape 26"/>
-          <p:cNvSpPr/>
-          <p:nvPr/>
-        </p:nvSpPr>
-        <p:spPr>
-          <a:xfrm>
-            <a:off x="365760" y="2404872"/>
-            <a:ext cx="2468880" cy="402336"/>
-          </a:xfrm>
-          <a:prstGeom prst="rect">
-            <a:avLst/>
-          </a:prstGeom>
-          <a:solidFill>
-            <a:srgbClr val="DDD6FE"/>
-          </a:solidFill>
-          <a:ln w="12700">
-            <a:solidFill>
-              <a:srgbClr val="E2E8F0"/>
-            </a:solidFill>
-            <a:prstDash val="solid"/>
-          </a:ln>
-        </p:spPr>
-      </p:sp>
-      <p:sp>
-        <p:nvSpPr>
-          <p:cNvPr id="29" name="Text 27"/>
-          <p:cNvSpPr/>
-          <p:nvPr/>
-        </p:nvSpPr>
-        <p:spPr>
-          <a:xfrm>
-            <a:off x="365760" y="2404872"/>
-            <a:ext cx="2468880" cy="402336"/>
+          <p:cNvPr id="34" name="Text 32"/>
+          <p:cNvSpPr/>
+          <p:nvPr/>
+        </p:nvSpPr>
+        <p:spPr>
+          <a:xfrm>
+            <a:off x="365760" y="3611880"/>
+            <a:ext cx="1828800" cy="347472"/>
           </a:xfrm>
           <a:prstGeom prst="rect">
             <a:avLst/>
@@ -33717,981 +33296,19 @@
           <a:bodyPr wrap="square" lIns="0" tIns="0" rIns="0" bIns="0" rtlCol="0" anchor="ctr"/>
           <a:lstStyle/>
           <a:p>
-            <a:pPr algn="ctr" indent="0" marL="0">
-              <a:buNone/>
-            </a:pPr>
-            <a:r>
-              <a:rPr lang="en-US" sz="1300" b="1" dirty="0">
-                <a:solidFill>
-                  <a:srgbClr val="4C1D95"/>
+            <a:pPr algn="l" indent="0" marL="0">
+              <a:buNone/>
+            </a:pPr>
+            <a:r>
+              <a:rPr lang="en-US" sz="1200" b="1" dirty="0">
+                <a:solidFill>
+                  <a:srgbClr val="0F172A"/>
                 </a:solidFill>
                 <a:latin typeface="Trebuchet MS" pitchFamily="34" charset="0"/>
                 <a:ea typeface="Trebuchet MS" pitchFamily="34" charset="-122"/>
                 <a:cs typeface="Trebuchet MS" pitchFamily="34" charset="-120"/>
               </a:rPr>
-              <a:t>semi-</a:t>
-            </a:r>
-            <a:endParaRPr lang="en-US" sz="1300" dirty="0"/>
-          </a:p>
-        </p:txBody>
-      </p:sp>
-      <p:sp>
-        <p:nvSpPr>
-          <p:cNvPr id="30" name="Shape 28"/>
-          <p:cNvSpPr/>
-          <p:nvPr/>
-        </p:nvSpPr>
-        <p:spPr>
-          <a:xfrm>
-            <a:off x="2971800" y="2404872"/>
-            <a:ext cx="2834640" cy="402336"/>
-          </a:xfrm>
-          <a:prstGeom prst="rect">
-            <a:avLst/>
-          </a:prstGeom>
-          <a:solidFill>
-            <a:srgbClr val="F8FAFC"/>
-          </a:solidFill>
-          <a:ln w="12700">
-            <a:solidFill>
-              <a:srgbClr val="E2E8F0"/>
-            </a:solidFill>
-            <a:prstDash val="solid"/>
-          </a:ln>
-        </p:spPr>
-      </p:sp>
-      <p:sp>
-        <p:nvSpPr>
-          <p:cNvPr id="31" name="Shape 29"/>
-          <p:cNvSpPr/>
-          <p:nvPr/>
-        </p:nvSpPr>
-        <p:spPr>
-          <a:xfrm>
-            <a:off x="5943600" y="2404872"/>
-            <a:ext cx="2834640" cy="402336"/>
-          </a:xfrm>
-          <a:prstGeom prst="rect">
-            <a:avLst/>
-          </a:prstGeom>
-          <a:solidFill>
-            <a:srgbClr val="FCE7F3"/>
-          </a:solidFill>
-          <a:ln w="12700">
-            <a:solidFill>
-              <a:srgbClr val="E2E8F0"/>
-            </a:solidFill>
-            <a:prstDash val="solid"/>
-          </a:ln>
-        </p:spPr>
-      </p:sp>
-      <p:sp>
-        <p:nvSpPr>
-          <p:cNvPr id="32" name="Text 30"/>
-          <p:cNvSpPr/>
-          <p:nvPr/>
-        </p:nvSpPr>
-        <p:spPr>
-          <a:xfrm>
-            <a:off x="5943600" y="2404872"/>
-            <a:ext cx="2834640" cy="402336"/>
-          </a:xfrm>
-          <a:prstGeom prst="rect">
-            <a:avLst/>
-          </a:prstGeom>
-          <a:noFill/>
-          <a:ln/>
-        </p:spPr>
-        <p:txBody>
-          <a:bodyPr wrap="square" lIns="0" tIns="0" rIns="0" bIns="0" rtlCol="0" anchor="ctr"/>
-          <a:lstStyle/>
-          <a:p>
-            <a:pPr algn="ctr" indent="0" marL="0">
-              <a:buNone/>
-            </a:pPr>
-            <a:r>
-              <a:rPr lang="en-US" sz="1300" b="1" dirty="0">
-                <a:solidFill>
-                  <a:srgbClr val="9D174D"/>
-                </a:solidFill>
-                <a:latin typeface="Trebuchet MS" pitchFamily="34" charset="0"/>
-                <a:ea typeface="Trebuchet MS" pitchFamily="34" charset="-122"/>
-                <a:cs typeface="Trebuchet MS" pitchFamily="34" charset="-120"/>
-              </a:rPr>
-              <a:t>-er</a:t>
-            </a:r>
-            <a:endParaRPr lang="en-US" sz="1300" dirty="0"/>
-          </a:p>
-        </p:txBody>
-      </p:sp>
-      <p:sp>
-        <p:nvSpPr>
-          <p:cNvPr id="33" name="Shape 31"/>
-          <p:cNvSpPr/>
-          <p:nvPr/>
-        </p:nvSpPr>
-        <p:spPr>
-          <a:xfrm>
-            <a:off x="365760" y="2825496"/>
-            <a:ext cx="2468880" cy="402336"/>
-          </a:xfrm>
-          <a:prstGeom prst="rect">
-            <a:avLst/>
-          </a:prstGeom>
-          <a:solidFill>
-            <a:srgbClr val="DDD6FE"/>
-          </a:solidFill>
-          <a:ln w="12700">
-            <a:solidFill>
-              <a:srgbClr val="E2E8F0"/>
-            </a:solidFill>
-            <a:prstDash val="solid"/>
-          </a:ln>
-        </p:spPr>
-      </p:sp>
-      <p:sp>
-        <p:nvSpPr>
-          <p:cNvPr id="34" name="Text 32"/>
-          <p:cNvSpPr/>
-          <p:nvPr/>
-        </p:nvSpPr>
-        <p:spPr>
-          <a:xfrm>
-            <a:off x="365760" y="2825496"/>
-            <a:ext cx="2468880" cy="402336"/>
-          </a:xfrm>
-          <a:prstGeom prst="rect">
-            <a:avLst/>
-          </a:prstGeom>
-          <a:noFill/>
-          <a:ln/>
-        </p:spPr>
-        <p:txBody>
-          <a:bodyPr wrap="square" lIns="0" tIns="0" rIns="0" bIns="0" rtlCol="0" anchor="ctr"/>
-          <a:lstStyle/>
-          <a:p>
-            <a:pPr algn="ctr" indent="0" marL="0">
-              <a:buNone/>
-            </a:pPr>
-            <a:r>
-              <a:rPr lang="en-US" sz="1300" b="1" dirty="0">
-                <a:solidFill>
-                  <a:srgbClr val="4C1D95"/>
-                </a:solidFill>
-                <a:latin typeface="Trebuchet MS" pitchFamily="34" charset="0"/>
-                <a:ea typeface="Trebuchet MS" pitchFamily="34" charset="-122"/>
-                <a:cs typeface="Trebuchet MS" pitchFamily="34" charset="-120"/>
-              </a:rPr>
-              <a:t>over-</a:t>
-            </a:r>
-            <a:endParaRPr lang="en-US" sz="1300" dirty="0"/>
-          </a:p>
-        </p:txBody>
-      </p:sp>
-      <p:sp>
-        <p:nvSpPr>
-          <p:cNvPr id="35" name="Shape 33"/>
-          <p:cNvSpPr/>
-          <p:nvPr/>
-        </p:nvSpPr>
-        <p:spPr>
-          <a:xfrm>
-            <a:off x="2971800" y="2825496"/>
-            <a:ext cx="2834640" cy="402336"/>
-          </a:xfrm>
-          <a:prstGeom prst="rect">
-            <a:avLst/>
-          </a:prstGeom>
-          <a:solidFill>
-            <a:srgbClr val="F1F5F9"/>
-          </a:solidFill>
-          <a:ln w="12700">
-            <a:solidFill>
-              <a:srgbClr val="E2E8F0"/>
-            </a:solidFill>
-            <a:prstDash val="solid"/>
-          </a:ln>
-        </p:spPr>
-      </p:sp>
-      <p:sp>
-        <p:nvSpPr>
-          <p:cNvPr id="36" name="Shape 34"/>
-          <p:cNvSpPr/>
-          <p:nvPr/>
-        </p:nvSpPr>
-        <p:spPr>
-          <a:xfrm>
-            <a:off x="5943600" y="2825496"/>
-            <a:ext cx="2834640" cy="402336"/>
-          </a:xfrm>
-          <a:prstGeom prst="rect">
-            <a:avLst/>
-          </a:prstGeom>
-          <a:solidFill>
-            <a:srgbClr val="FCE7F3"/>
-          </a:solidFill>
-          <a:ln w="12700">
-            <a:solidFill>
-              <a:srgbClr val="E2E8F0"/>
-            </a:solidFill>
-            <a:prstDash val="solid"/>
-          </a:ln>
-        </p:spPr>
-      </p:sp>
-      <p:sp>
-        <p:nvSpPr>
-          <p:cNvPr id="37" name="Text 35"/>
-          <p:cNvSpPr/>
-          <p:nvPr/>
-        </p:nvSpPr>
-        <p:spPr>
-          <a:xfrm>
-            <a:off x="5943600" y="2825496"/>
-            <a:ext cx="2834640" cy="402336"/>
-          </a:xfrm>
-          <a:prstGeom prst="rect">
-            <a:avLst/>
-          </a:prstGeom>
-          <a:noFill/>
-          <a:ln/>
-        </p:spPr>
-        <p:txBody>
-          <a:bodyPr wrap="square" lIns="0" tIns="0" rIns="0" bIns="0" rtlCol="0" anchor="ctr"/>
-          <a:lstStyle/>
-          <a:p>
-            <a:pPr algn="ctr" indent="0" marL="0">
-              <a:buNone/>
-            </a:pPr>
-            <a:r>
-              <a:rPr lang="en-US" sz="1300" b="1" dirty="0">
-                <a:solidFill>
-                  <a:srgbClr val="9D174D"/>
-                </a:solidFill>
-                <a:latin typeface="Trebuchet MS" pitchFamily="34" charset="0"/>
-                <a:ea typeface="Trebuchet MS" pitchFamily="34" charset="-122"/>
-                <a:cs typeface="Trebuchet MS" pitchFamily="34" charset="-120"/>
-              </a:rPr>
-              <a:t>-est</a:t>
-            </a:r>
-            <a:endParaRPr lang="en-US" sz="1300" dirty="0"/>
-          </a:p>
-        </p:txBody>
-      </p:sp>
-      <p:sp>
-        <p:nvSpPr>
-          <p:cNvPr id="38" name="Shape 36"/>
-          <p:cNvSpPr/>
-          <p:nvPr/>
-        </p:nvSpPr>
-        <p:spPr>
-          <a:xfrm>
-            <a:off x="365760" y="3246120"/>
-            <a:ext cx="2468880" cy="402336"/>
-          </a:xfrm>
-          <a:prstGeom prst="rect">
-            <a:avLst/>
-          </a:prstGeom>
-          <a:solidFill>
-            <a:srgbClr val="DDD6FE"/>
-          </a:solidFill>
-          <a:ln w="12700">
-            <a:solidFill>
-              <a:srgbClr val="E2E8F0"/>
-            </a:solidFill>
-            <a:prstDash val="solid"/>
-          </a:ln>
-        </p:spPr>
-      </p:sp>
-      <p:sp>
-        <p:nvSpPr>
-          <p:cNvPr id="39" name="Text 37"/>
-          <p:cNvSpPr/>
-          <p:nvPr/>
-        </p:nvSpPr>
-        <p:spPr>
-          <a:xfrm>
-            <a:off x="365760" y="3246120"/>
-            <a:ext cx="2468880" cy="402336"/>
-          </a:xfrm>
-          <a:prstGeom prst="rect">
-            <a:avLst/>
-          </a:prstGeom>
-          <a:noFill/>
-          <a:ln/>
-        </p:spPr>
-        <p:txBody>
-          <a:bodyPr wrap="square" lIns="0" tIns="0" rIns="0" bIns="0" rtlCol="0" anchor="ctr"/>
-          <a:lstStyle/>
-          <a:p>
-            <a:pPr algn="ctr" indent="0" marL="0">
-              <a:buNone/>
-            </a:pPr>
-            <a:r>
-              <a:rPr lang="en-US" sz="1300" b="1" dirty="0">
-                <a:solidFill>
-                  <a:srgbClr val="4C1D95"/>
-                </a:solidFill>
-                <a:latin typeface="Trebuchet MS" pitchFamily="34" charset="0"/>
-                <a:ea typeface="Trebuchet MS" pitchFamily="34" charset="-122"/>
-                <a:cs typeface="Trebuchet MS" pitchFamily="34" charset="-120"/>
-              </a:rPr>
-              <a:t>re-</a:t>
-            </a:r>
-            <a:endParaRPr lang="en-US" sz="1300" dirty="0"/>
-          </a:p>
-        </p:txBody>
-      </p:sp>
-      <p:sp>
-        <p:nvSpPr>
-          <p:cNvPr id="40" name="Shape 38"/>
-          <p:cNvSpPr/>
-          <p:nvPr/>
-        </p:nvSpPr>
-        <p:spPr>
-          <a:xfrm>
-            <a:off x="2971800" y="3246120"/>
-            <a:ext cx="2834640" cy="402336"/>
-          </a:xfrm>
-          <a:prstGeom prst="rect">
-            <a:avLst/>
-          </a:prstGeom>
-          <a:solidFill>
-            <a:srgbClr val="F8FAFC"/>
-          </a:solidFill>
-          <a:ln w="12700">
-            <a:solidFill>
-              <a:srgbClr val="E2E8F0"/>
-            </a:solidFill>
-            <a:prstDash val="solid"/>
-          </a:ln>
-        </p:spPr>
-      </p:sp>
-      <p:sp>
-        <p:nvSpPr>
-          <p:cNvPr id="41" name="Shape 39"/>
-          <p:cNvSpPr/>
-          <p:nvPr/>
-        </p:nvSpPr>
-        <p:spPr>
-          <a:xfrm>
-            <a:off x="5943600" y="3246120"/>
-            <a:ext cx="2834640" cy="402336"/>
-          </a:xfrm>
-          <a:prstGeom prst="rect">
-            <a:avLst/>
-          </a:prstGeom>
-          <a:solidFill>
-            <a:srgbClr val="FCE7F3"/>
-          </a:solidFill>
-          <a:ln w="12700">
-            <a:solidFill>
-              <a:srgbClr val="E2E8F0"/>
-            </a:solidFill>
-            <a:prstDash val="solid"/>
-          </a:ln>
-        </p:spPr>
-      </p:sp>
-      <p:sp>
-        <p:nvSpPr>
-          <p:cNvPr id="42" name="Text 40"/>
-          <p:cNvSpPr/>
-          <p:nvPr/>
-        </p:nvSpPr>
-        <p:spPr>
-          <a:xfrm>
-            <a:off x="5943600" y="3246120"/>
-            <a:ext cx="2834640" cy="402336"/>
-          </a:xfrm>
-          <a:prstGeom prst="rect">
-            <a:avLst/>
-          </a:prstGeom>
-          <a:noFill/>
-          <a:ln/>
-        </p:spPr>
-        <p:txBody>
-          <a:bodyPr wrap="square" lIns="0" tIns="0" rIns="0" bIns="0" rtlCol="0" anchor="ctr"/>
-          <a:lstStyle/>
-          <a:p>
-            <a:pPr algn="ctr" indent="0" marL="0">
-              <a:buNone/>
-            </a:pPr>
-            <a:r>
-              <a:rPr lang="en-US" sz="1300" b="1" dirty="0">
-                <a:solidFill>
-                  <a:srgbClr val="9D174D"/>
-                </a:solidFill>
-                <a:latin typeface="Trebuchet MS" pitchFamily="34" charset="0"/>
-                <a:ea typeface="Trebuchet MS" pitchFamily="34" charset="-122"/>
-                <a:cs typeface="Trebuchet MS" pitchFamily="34" charset="-120"/>
-              </a:rPr>
-              <a:t>-ed</a:t>
-            </a:r>
-            <a:endParaRPr lang="en-US" sz="1300" dirty="0"/>
-          </a:p>
-        </p:txBody>
-      </p:sp>
-      <p:sp>
-        <p:nvSpPr>
-          <p:cNvPr id="43" name="Text 41"/>
-          <p:cNvSpPr/>
-          <p:nvPr/>
-        </p:nvSpPr>
-        <p:spPr>
-          <a:xfrm>
-            <a:off x="365760" y="3611880"/>
-            <a:ext cx="1828800" cy="347472"/>
-          </a:xfrm>
-          <a:prstGeom prst="rect">
-            <a:avLst/>
-          </a:prstGeom>
-          <a:noFill/>
-          <a:ln/>
-        </p:spPr>
-        <p:txBody>
-          <a:bodyPr wrap="square" lIns="0" tIns="0" rIns="0" bIns="0" rtlCol="0" anchor="ctr"/>
-          <a:lstStyle/>
-          <a:p>
-            <a:pPr algn="l" indent="0" marL="0">
-              <a:buNone/>
-            </a:pPr>
-            <a:r>
-              <a:rPr lang="en-US" sz="1200" b="1" dirty="0">
-                <a:solidFill>
-                  <a:srgbClr val="0F172A"/>
-                </a:solidFill>
-                <a:latin typeface="Trebuchet MS" pitchFamily="34" charset="0"/>
-                <a:ea typeface="Trebuchet MS" pitchFamily="34" charset="-122"/>
-                <a:cs typeface="Trebuchet MS" pitchFamily="34" charset="-120"/>
-              </a:rPr>
               <a:t>Sample words:</a:t>
-            </a:r>
-            <a:endParaRPr lang="en-US" sz="1200" dirty="0"/>
-          </a:p>
-        </p:txBody>
-      </p:sp>
-      <p:sp>
-        <p:nvSpPr>
-          <p:cNvPr id="44" name="Shape 42"/>
-          <p:cNvSpPr/>
-          <p:nvPr/>
-        </p:nvSpPr>
-        <p:spPr>
-          <a:xfrm>
-            <a:off x="365760" y="4023360"/>
-            <a:ext cx="2011680" cy="402336"/>
-          </a:xfrm>
-          <a:prstGeom prst="rect">
-            <a:avLst>
-              <a:gd name="adj" fmla="val 13636"/>
-            </a:avLst>
-          </a:prstGeom>
-          <a:solidFill>
-            <a:srgbClr val="EEF2FF"/>
-          </a:solidFill>
-          <a:ln w="12700">
-            <a:solidFill>
-              <a:srgbClr val="6366F1"/>
-            </a:solidFill>
-            <a:prstDash val="solid"/>
-          </a:ln>
-        </p:spPr>
-      </p:sp>
-      <p:sp>
-        <p:nvSpPr>
-          <p:cNvPr id="45" name="Text 43"/>
-          <p:cNvSpPr/>
-          <p:nvPr/>
-        </p:nvSpPr>
-        <p:spPr>
-          <a:xfrm>
-            <a:off x="365760" y="4023360"/>
-            <a:ext cx="2011680" cy="402336"/>
-          </a:xfrm>
-          <a:prstGeom prst="rect">
-            <a:avLst/>
-          </a:prstGeom>
-          <a:noFill/>
-          <a:ln/>
-        </p:spPr>
-        <p:txBody>
-          <a:bodyPr wrap="square" lIns="0" tIns="0" rIns="0" bIns="0" rtlCol="0" anchor="ctr"/>
-          <a:lstStyle/>
-          <a:p>
-            <a:pPr algn="ctr" indent="0" marL="0">
-              <a:buNone/>
-            </a:pPr>
-            <a:r>
-              <a:rPr lang="en-US" sz="1200" b="1" dirty="0">
-                <a:solidFill>
-                  <a:srgbClr val="4338CA"/>
-                </a:solidFill>
-                <a:latin typeface="Trebuchet MS" pitchFamily="34" charset="0"/>
-                <a:ea typeface="Trebuchet MS" pitchFamily="34" charset="-122"/>
-                <a:cs typeface="Trebuchet MS" pitchFamily="34" charset="-120"/>
-              </a:rPr>
-              <a:t>brisk</a:t>
-            </a:r>
-            <a:endParaRPr lang="en-US" sz="1200" dirty="0"/>
-          </a:p>
-        </p:txBody>
-      </p:sp>
-      <p:sp>
-        <p:nvSpPr>
-          <p:cNvPr id="46" name="Shape 44"/>
-          <p:cNvSpPr/>
-          <p:nvPr/>
-        </p:nvSpPr>
-        <p:spPr>
-          <a:xfrm>
-            <a:off x="2542032" y="4023360"/>
-            <a:ext cx="2011680" cy="402336"/>
-          </a:xfrm>
-          <a:prstGeom prst="rect">
-            <a:avLst>
-              <a:gd name="adj" fmla="val 13636"/>
-            </a:avLst>
-          </a:prstGeom>
-          <a:solidFill>
-            <a:srgbClr val="EEF2FF"/>
-          </a:solidFill>
-          <a:ln w="12700">
-            <a:solidFill>
-              <a:srgbClr val="6366F1"/>
-            </a:solidFill>
-            <a:prstDash val="solid"/>
-          </a:ln>
-        </p:spPr>
-      </p:sp>
-      <p:sp>
-        <p:nvSpPr>
-          <p:cNvPr id="47" name="Text 45"/>
-          <p:cNvSpPr/>
-          <p:nvPr/>
-        </p:nvSpPr>
-        <p:spPr>
-          <a:xfrm>
-            <a:off x="2542032" y="4023360"/>
-            <a:ext cx="2011680" cy="402336"/>
-          </a:xfrm>
-          <a:prstGeom prst="rect">
-            <a:avLst/>
-          </a:prstGeom>
-          <a:noFill/>
-          <a:ln/>
-        </p:spPr>
-        <p:txBody>
-          <a:bodyPr wrap="square" lIns="0" tIns="0" rIns="0" bIns="0" rtlCol="0" anchor="ctr"/>
-          <a:lstStyle/>
-          <a:p>
-            <a:pPr algn="ctr" indent="0" marL="0">
-              <a:buNone/>
-            </a:pPr>
-            <a:r>
-              <a:rPr lang="en-US" sz="1200" b="1" dirty="0">
-                <a:solidFill>
-                  <a:srgbClr val="4338CA"/>
-                </a:solidFill>
-                <a:latin typeface="Trebuchet MS" pitchFamily="34" charset="0"/>
-                <a:ea typeface="Trebuchet MS" pitchFamily="34" charset="-122"/>
-                <a:cs typeface="Trebuchet MS" pitchFamily="34" charset="-120"/>
-              </a:rPr>
-              <a:t>briskly</a:t>
-            </a:r>
-            <a:endParaRPr lang="en-US" sz="1200" dirty="0"/>
-          </a:p>
-        </p:txBody>
-      </p:sp>
-      <p:sp>
-        <p:nvSpPr>
-          <p:cNvPr id="48" name="Shape 46"/>
-          <p:cNvSpPr/>
-          <p:nvPr/>
-        </p:nvSpPr>
-        <p:spPr>
-          <a:xfrm>
-            <a:off x="4718304" y="4023360"/>
-            <a:ext cx="2011680" cy="402336"/>
-          </a:xfrm>
-          <a:prstGeom prst="rect">
-            <a:avLst>
-              <a:gd name="adj" fmla="val 13636"/>
-            </a:avLst>
-          </a:prstGeom>
-          <a:solidFill>
-            <a:srgbClr val="EEF2FF"/>
-          </a:solidFill>
-          <a:ln w="12700">
-            <a:solidFill>
-              <a:srgbClr val="6366F1"/>
-            </a:solidFill>
-            <a:prstDash val="solid"/>
-          </a:ln>
-        </p:spPr>
-      </p:sp>
-      <p:sp>
-        <p:nvSpPr>
-          <p:cNvPr id="49" name="Text 47"/>
-          <p:cNvSpPr/>
-          <p:nvPr/>
-        </p:nvSpPr>
-        <p:spPr>
-          <a:xfrm>
-            <a:off x="4718304" y="4023360"/>
-            <a:ext cx="2011680" cy="402336"/>
-          </a:xfrm>
-          <a:prstGeom prst="rect">
-            <a:avLst/>
-          </a:prstGeom>
-          <a:noFill/>
-          <a:ln/>
-        </p:spPr>
-        <p:txBody>
-          <a:bodyPr wrap="square" lIns="0" tIns="0" rIns="0" bIns="0" rtlCol="0" anchor="ctr"/>
-          <a:lstStyle/>
-          <a:p>
-            <a:pPr algn="ctr" indent="0" marL="0">
-              <a:buNone/>
-            </a:pPr>
-            <a:r>
-              <a:rPr lang="en-US" sz="1200" b="1" dirty="0">
-                <a:solidFill>
-                  <a:srgbClr val="4338CA"/>
-                </a:solidFill>
-                <a:latin typeface="Trebuchet MS" pitchFamily="34" charset="0"/>
-                <a:ea typeface="Trebuchet MS" pitchFamily="34" charset="-122"/>
-                <a:cs typeface="Trebuchet MS" pitchFamily="34" charset="-120"/>
-              </a:rPr>
-              <a:t>briskness</a:t>
-            </a:r>
-            <a:endParaRPr lang="en-US" sz="1200" dirty="0"/>
-          </a:p>
-        </p:txBody>
-      </p:sp>
-      <p:sp>
-        <p:nvSpPr>
-          <p:cNvPr id="50" name="Shape 48"/>
-          <p:cNvSpPr/>
-          <p:nvPr/>
-        </p:nvSpPr>
-        <p:spPr>
-          <a:xfrm>
-            <a:off x="6894576" y="4023360"/>
-            <a:ext cx="2011680" cy="402336"/>
-          </a:xfrm>
-          <a:prstGeom prst="rect">
-            <a:avLst>
-              <a:gd name="adj" fmla="val 13636"/>
-            </a:avLst>
-          </a:prstGeom>
-          <a:solidFill>
-            <a:srgbClr val="EEF2FF"/>
-          </a:solidFill>
-          <a:ln w="12700">
-            <a:solidFill>
-              <a:srgbClr val="6366F1"/>
-            </a:solidFill>
-            <a:prstDash val="solid"/>
-          </a:ln>
-        </p:spPr>
-      </p:sp>
-      <p:sp>
-        <p:nvSpPr>
-          <p:cNvPr id="51" name="Text 49"/>
-          <p:cNvSpPr/>
-          <p:nvPr/>
-        </p:nvSpPr>
-        <p:spPr>
-          <a:xfrm>
-            <a:off x="6894576" y="4023360"/>
-            <a:ext cx="2011680" cy="402336"/>
-          </a:xfrm>
-          <a:prstGeom prst="rect">
-            <a:avLst/>
-          </a:prstGeom>
-          <a:noFill/>
-          <a:ln/>
-        </p:spPr>
-        <p:txBody>
-          <a:bodyPr wrap="square" lIns="0" tIns="0" rIns="0" bIns="0" rtlCol="0" anchor="ctr"/>
-          <a:lstStyle/>
-          <a:p>
-            <a:pPr algn="ctr" indent="0" marL="0">
-              <a:buNone/>
-            </a:pPr>
-            <a:r>
-              <a:rPr lang="en-US" sz="1200" b="1" dirty="0">
-                <a:solidFill>
-                  <a:srgbClr val="4338CA"/>
-                </a:solidFill>
-                <a:latin typeface="Trebuchet MS" pitchFamily="34" charset="0"/>
-                <a:ea typeface="Trebuchet MS" pitchFamily="34" charset="-122"/>
-                <a:cs typeface="Trebuchet MS" pitchFamily="34" charset="-120"/>
-              </a:rPr>
-              <a:t>brisker</a:t>
-            </a:r>
-            <a:endParaRPr lang="en-US" sz="1200" dirty="0"/>
-          </a:p>
-        </p:txBody>
-      </p:sp>
-      <p:sp>
-        <p:nvSpPr>
-          <p:cNvPr id="52" name="Shape 50"/>
-          <p:cNvSpPr/>
-          <p:nvPr/>
-        </p:nvSpPr>
-        <p:spPr>
-          <a:xfrm>
-            <a:off x="365760" y="4498848"/>
-            <a:ext cx="2011680" cy="402336"/>
-          </a:xfrm>
-          <a:prstGeom prst="rect">
-            <a:avLst>
-              <a:gd name="adj" fmla="val 13636"/>
-            </a:avLst>
-          </a:prstGeom>
-          <a:solidFill>
-            <a:srgbClr val="EEF2FF"/>
-          </a:solidFill>
-          <a:ln w="12700">
-            <a:solidFill>
-              <a:srgbClr val="6366F1"/>
-            </a:solidFill>
-            <a:prstDash val="solid"/>
-          </a:ln>
-        </p:spPr>
-      </p:sp>
-      <p:sp>
-        <p:nvSpPr>
-          <p:cNvPr id="53" name="Text 51"/>
-          <p:cNvSpPr/>
-          <p:nvPr/>
-        </p:nvSpPr>
-        <p:spPr>
-          <a:xfrm>
-            <a:off x="365760" y="4498848"/>
-            <a:ext cx="2011680" cy="402336"/>
-          </a:xfrm>
-          <a:prstGeom prst="rect">
-            <a:avLst/>
-          </a:prstGeom>
-          <a:noFill/>
-          <a:ln/>
-        </p:spPr>
-        <p:txBody>
-          <a:bodyPr wrap="square" lIns="0" tIns="0" rIns="0" bIns="0" rtlCol="0" anchor="ctr"/>
-          <a:lstStyle/>
-          <a:p>
-            <a:pPr algn="ctr" indent="0" marL="0">
-              <a:buNone/>
-            </a:pPr>
-            <a:r>
-              <a:rPr lang="en-US" sz="1200" b="1" dirty="0">
-                <a:solidFill>
-                  <a:srgbClr val="4338CA"/>
-                </a:solidFill>
-                <a:latin typeface="Trebuchet MS" pitchFamily="34" charset="0"/>
-                <a:ea typeface="Trebuchet MS" pitchFamily="34" charset="-122"/>
-                <a:cs typeface="Trebuchet MS" pitchFamily="34" charset="-120"/>
-              </a:rPr>
-              <a:t>briskest</a:t>
-            </a:r>
-            <a:endParaRPr lang="en-US" sz="1200" dirty="0"/>
-          </a:p>
-        </p:txBody>
-      </p:sp>
-      <p:sp>
-        <p:nvSpPr>
-          <p:cNvPr id="54" name="Shape 52"/>
-          <p:cNvSpPr/>
-          <p:nvPr/>
-        </p:nvSpPr>
-        <p:spPr>
-          <a:xfrm>
-            <a:off x="2542032" y="4498848"/>
-            <a:ext cx="2011680" cy="402336"/>
-          </a:xfrm>
-          <a:prstGeom prst="rect">
-            <a:avLst>
-              <a:gd name="adj" fmla="val 13636"/>
-            </a:avLst>
-          </a:prstGeom>
-          <a:solidFill>
-            <a:srgbClr val="EEF2FF"/>
-          </a:solidFill>
-          <a:ln w="12700">
-            <a:solidFill>
-              <a:srgbClr val="6366F1"/>
-            </a:solidFill>
-            <a:prstDash val="solid"/>
-          </a:ln>
-        </p:spPr>
-      </p:sp>
-      <p:sp>
-        <p:nvSpPr>
-          <p:cNvPr id="55" name="Text 53"/>
-          <p:cNvSpPr/>
-          <p:nvPr/>
-        </p:nvSpPr>
-        <p:spPr>
-          <a:xfrm>
-            <a:off x="2542032" y="4498848"/>
-            <a:ext cx="2011680" cy="402336"/>
-          </a:xfrm>
-          <a:prstGeom prst="rect">
-            <a:avLst/>
-          </a:prstGeom>
-          <a:noFill/>
-          <a:ln/>
-        </p:spPr>
-        <p:txBody>
-          <a:bodyPr wrap="square" lIns="0" tIns="0" rIns="0" bIns="0" rtlCol="0" anchor="ctr"/>
-          <a:lstStyle/>
-          <a:p>
-            <a:pPr algn="ctr" indent="0" marL="0">
-              <a:buNone/>
-            </a:pPr>
-            <a:r>
-              <a:rPr lang="en-US" sz="1200" b="1" dirty="0">
-                <a:solidFill>
-                  <a:srgbClr val="4338CA"/>
-                </a:solidFill>
-                <a:latin typeface="Trebuchet MS" pitchFamily="34" charset="0"/>
-                <a:ea typeface="Trebuchet MS" pitchFamily="34" charset="-122"/>
-                <a:cs typeface="Trebuchet MS" pitchFamily="34" charset="-120"/>
-              </a:rPr>
-              <a:t>brisked</a:t>
-            </a:r>
-            <a:endParaRPr lang="en-US" sz="1200" dirty="0"/>
-          </a:p>
-        </p:txBody>
-      </p:sp>
-      <p:sp>
-        <p:nvSpPr>
-          <p:cNvPr id="56" name="Shape 54"/>
-          <p:cNvSpPr/>
-          <p:nvPr/>
-        </p:nvSpPr>
-        <p:spPr>
-          <a:xfrm>
-            <a:off x="4718304" y="4498848"/>
-            <a:ext cx="2011680" cy="402336"/>
-          </a:xfrm>
-          <a:prstGeom prst="rect">
-            <a:avLst>
-              <a:gd name="adj" fmla="val 13636"/>
-            </a:avLst>
-          </a:prstGeom>
-          <a:solidFill>
-            <a:srgbClr val="EEF2FF"/>
-          </a:solidFill>
-          <a:ln w="12700">
-            <a:solidFill>
-              <a:srgbClr val="6366F1"/>
-            </a:solidFill>
-            <a:prstDash val="solid"/>
-          </a:ln>
-        </p:spPr>
-      </p:sp>
-      <p:sp>
-        <p:nvSpPr>
-          <p:cNvPr id="57" name="Text 55"/>
-          <p:cNvSpPr/>
-          <p:nvPr/>
-        </p:nvSpPr>
-        <p:spPr>
-          <a:xfrm>
-            <a:off x="4718304" y="4498848"/>
-            <a:ext cx="2011680" cy="402336"/>
-          </a:xfrm>
-          <a:prstGeom prst="rect">
-            <a:avLst/>
-          </a:prstGeom>
-          <a:noFill/>
-          <a:ln/>
-        </p:spPr>
-        <p:txBody>
-          <a:bodyPr wrap="square" lIns="0" tIns="0" rIns="0" bIns="0" rtlCol="0" anchor="ctr"/>
-          <a:lstStyle/>
-          <a:p>
-            <a:pPr algn="ctr" indent="0" marL="0">
-              <a:buNone/>
-            </a:pPr>
-            <a:r>
-              <a:rPr lang="en-US" sz="1200" b="1" dirty="0">
-                <a:solidFill>
-                  <a:srgbClr val="4338CA"/>
-                </a:solidFill>
-                <a:latin typeface="Trebuchet MS" pitchFamily="34" charset="0"/>
-                <a:ea typeface="Trebuchet MS" pitchFamily="34" charset="-122"/>
-                <a:cs typeface="Trebuchet MS" pitchFamily="34" charset="-120"/>
-              </a:rPr>
-              <a:t>unbrisk</a:t>
-            </a:r>
-            <a:endParaRPr lang="en-US" sz="1200" dirty="0"/>
-          </a:p>
-        </p:txBody>
-      </p:sp>
-      <p:sp>
-        <p:nvSpPr>
-          <p:cNvPr id="58" name="Shape 56"/>
-          <p:cNvSpPr/>
-          <p:nvPr/>
-        </p:nvSpPr>
-        <p:spPr>
-          <a:xfrm>
-            <a:off x="6894576" y="4498848"/>
-            <a:ext cx="2011680" cy="402336"/>
-          </a:xfrm>
-          <a:prstGeom prst="rect">
-            <a:avLst>
-              <a:gd name="adj" fmla="val 13636"/>
-            </a:avLst>
-          </a:prstGeom>
-          <a:solidFill>
-            <a:srgbClr val="EEF2FF"/>
-          </a:solidFill>
-          <a:ln w="12700">
-            <a:solidFill>
-              <a:srgbClr val="6366F1"/>
-            </a:solidFill>
-            <a:prstDash val="solid"/>
-          </a:ln>
-        </p:spPr>
-      </p:sp>
-      <p:sp>
-        <p:nvSpPr>
-          <p:cNvPr id="59" name="Text 57"/>
-          <p:cNvSpPr/>
-          <p:nvPr/>
-        </p:nvSpPr>
-        <p:spPr>
-          <a:xfrm>
-            <a:off x="6894576" y="4498848"/>
-            <a:ext cx="2011680" cy="402336"/>
-          </a:xfrm>
-          <a:prstGeom prst="rect">
-            <a:avLst/>
-          </a:prstGeom>
-          <a:noFill/>
-          <a:ln/>
-        </p:spPr>
-        <p:txBody>
-          <a:bodyPr wrap="square" lIns="0" tIns="0" rIns="0" bIns="0" rtlCol="0" anchor="ctr"/>
-          <a:lstStyle/>
-          <a:p>
-            <a:pPr algn="ctr" indent="0" marL="0">
-              <a:buNone/>
-            </a:pPr>
-            <a:r>
-              <a:rPr lang="en-US" sz="1200" b="1" dirty="0">
-                <a:solidFill>
-                  <a:srgbClr val="4338CA"/>
-                </a:solidFill>
-                <a:latin typeface="Trebuchet MS" pitchFamily="34" charset="0"/>
-                <a:ea typeface="Trebuchet MS" pitchFamily="34" charset="-122"/>
-                <a:cs typeface="Trebuchet MS" pitchFamily="34" charset="-120"/>
-              </a:rPr>
-              <a:t>briskening</a:t>
             </a:r>
             <a:endParaRPr lang="en-US" sz="1200" dirty="0"/>
           </a:p>
@@ -34983,7 +33600,7 @@
                 <a:ea typeface="Calibri" pitchFamily="34" charset="-122"/>
                 <a:cs typeface="Calibri" pitchFamily="34" charset="-120"/>
               </a:rPr>
-              <a:t>Word Labs  •  wordlabs.app  •  Root: 'brisk' = quick, lively, and energetic</a:t>
+              <a:t>Word Labs  •  wordlabs.app  •  Root: 'brisk' = quick and energetic</a:t>
             </a:r>
             <a:endParaRPr lang="en-US" sz="800" dirty="0"/>
           </a:p>
@@ -35147,7 +33764,7 @@
                 <a:ea typeface="Calibri" pitchFamily="34" charset="-122"/>
                 <a:cs typeface="Calibri" pitchFamily="34" charset="-120"/>
               </a:rPr>
-              <a:t>The core part of a word carrying its basic meaning. For example, 'brisk' means 'quick, lively, and energetic'.</a:t>
+              <a:t>The core part of a word carrying its basic meaning. For example, 'brisk' means 'quick and energetic'.</a:t>
             </a:r>
             <a:endParaRPr lang="en-US" sz="1350" dirty="0"/>
           </a:p>
@@ -35767,7 +34384,7 @@
                 <a:ea typeface="Calibri" pitchFamily="34" charset="-122"/>
                 <a:cs typeface="Calibri" pitchFamily="34" charset="-120"/>
               </a:rPr>
-              <a:t>Word Labs  •  wordlabs.app  •  Root: 'brisk' = quick, lively, and energetic</a:t>
+              <a:t>Word Labs  •  wordlabs.app  •  Root: 'brisk' = quick and energetic</a:t>
             </a:r>
             <a:endParaRPr lang="en-US" sz="800" dirty="0"/>
           </a:p>
@@ -35879,7 +34496,7 @@
                 <a:ea typeface="Calibri" pitchFamily="34" charset="-122"/>
                 <a:cs typeface="Calibri" pitchFamily="34" charset="-120"/>
               </a:rPr>
-              <a:t>1.  The suffix '-est' in 'briskest' means 'without'.</a:t>
+              <a:t>1.  'brisk' means 'slow and lazy'.</a:t>
             </a:r>
             <a:endParaRPr lang="en-US" sz="1300" dirty="0"/>
           </a:p>
@@ -36018,7 +34635,7 @@
                 <a:ea typeface="Calibri" pitchFamily="34" charset="-122"/>
                 <a:cs typeface="Calibri" pitchFamily="34" charset="-120"/>
               </a:rPr>
-              <a:t>2.  A brisk walk is a fast, energetic walk.</a:t>
+              <a:t>2.  'brisk' means 'quick and energetic'.</a:t>
             </a:r>
             <a:endParaRPr lang="en-US" sz="1300" dirty="0"/>
           </a:p>
@@ -36157,7 +34774,7 @@
                 <a:ea typeface="Calibri" pitchFamily="34" charset="-122"/>
                 <a:cs typeface="Calibri" pitchFamily="34" charset="-120"/>
               </a:rPr>
-              <a:t>3.  'Briskness' describes the quality of being quick and lively.</a:t>
+              <a:t>3.  'brisk' means 'quick and energetic'.</a:t>
             </a:r>
             <a:endParaRPr lang="en-US" sz="1300" dirty="0"/>
           </a:p>
@@ -36296,7 +34913,7 @@
                 <a:ea typeface="Calibri" pitchFamily="34" charset="-122"/>
                 <a:cs typeface="Calibri" pitchFamily="34" charset="-120"/>
               </a:rPr>
-              <a:t>4.  The root 'brisk' comes from ancient Greek.</a:t>
+              <a:t>4.  'brisker' means 'quicker and more energetic than something else'.</a:t>
             </a:r>
             <a:endParaRPr lang="en-US" sz="1300" dirty="0"/>
           </a:p>
@@ -36319,11 +34936,11 @@
             </a:avLst>
           </a:prstGeom>
           <a:solidFill>
-            <a:srgbClr val="FEE2E2"/>
-          </a:solidFill>
-          <a:ln w="12700">
-            <a:solidFill>
-              <a:srgbClr val="DC2626"/>
+            <a:srgbClr val="DCFCE7"/>
+          </a:solidFill>
+          <a:ln w="12700">
+            <a:solidFill>
+              <a:srgbClr val="16A34A"/>
             </a:solidFill>
             <a:prstDash val="solid"/>
           </a:ln>
@@ -36356,13 +34973,13 @@
             <a:r>
               <a:rPr lang="en-US" sz="1100" b="1" dirty="0">
                 <a:solidFill>
-                  <a:srgbClr val="DC2626"/>
+                  <a:srgbClr val="16A34A"/>
                 </a:solidFill>
                 <a:latin typeface="Trebuchet MS" pitchFamily="34" charset="0"/>
                 <a:ea typeface="Trebuchet MS" pitchFamily="34" charset="-122"/>
                 <a:cs typeface="Trebuchet MS" pitchFamily="34" charset="-120"/>
               </a:rPr>
-              <a:t>FALSE</a:t>
+              <a:t>TRUE</a:t>
             </a:r>
             <a:endParaRPr lang="en-US" sz="1100" dirty="0"/>
           </a:p>
@@ -36435,7 +35052,7 @@
                 <a:ea typeface="Calibri" pitchFamily="34" charset="-122"/>
                 <a:cs typeface="Calibri" pitchFamily="34" charset="-120"/>
               </a:rPr>
-              <a:t>5.  The word 'briskly' contains the suffix '-ly'.</a:t>
+              <a:t>5.  'brisker' means 'slower and lazier than something else'.</a:t>
             </a:r>
             <a:endParaRPr lang="en-US" sz="1300" dirty="0"/>
           </a:p>
@@ -36458,11 +35075,11 @@
             </a:avLst>
           </a:prstGeom>
           <a:solidFill>
-            <a:srgbClr val="DCFCE7"/>
-          </a:solidFill>
-          <a:ln w="12700">
-            <a:solidFill>
-              <a:srgbClr val="16A34A"/>
+            <a:srgbClr val="FEE2E2"/>
+          </a:solidFill>
+          <a:ln w="12700">
+            <a:solidFill>
+              <a:srgbClr val="DC2626"/>
             </a:solidFill>
             <a:prstDash val="solid"/>
           </a:ln>
@@ -36495,13 +35112,13 @@
             <a:r>
               <a:rPr lang="en-US" sz="1100" b="1" dirty="0">
                 <a:solidFill>
-                  <a:srgbClr val="16A34A"/>
+                  <a:srgbClr val="DC2626"/>
                 </a:solidFill>
                 <a:latin typeface="Trebuchet MS" pitchFamily="34" charset="0"/>
                 <a:ea typeface="Trebuchet MS" pitchFamily="34" charset="-122"/>
                 <a:cs typeface="Trebuchet MS" pitchFamily="34" charset="-120"/>
               </a:rPr>
-              <a:t>TRUE</a:t>
+              <a:t>FALSE</a:t>
             </a:r>
             <a:endParaRPr lang="en-US" sz="1100" dirty="0"/>
           </a:p>
@@ -36793,7 +35410,7 @@
                 <a:ea typeface="Calibri" pitchFamily="34" charset="-122"/>
                 <a:cs typeface="Calibri" pitchFamily="34" charset="-120"/>
               </a:rPr>
-              <a:t>Word Labs  •  wordlabs.app  •  Root: 'brisk' = quick, lively, and energetic</a:t>
+              <a:t>Word Labs  •  wordlabs.app  •  Root: 'brisk' = quick and energetic</a:t>
             </a:r>
             <a:endParaRPr lang="en-US" sz="800" dirty="0"/>
           </a:p>
@@ -36930,7 +35547,7 @@
                 <a:ea typeface="Trebuchet MS" pitchFamily="34" charset="-122"/>
                 <a:cs typeface="Trebuchet MS" pitchFamily="34" charset="-120"/>
               </a:rPr>
-              <a:t>quick, lively, and energetic</a:t>
+              <a:t>quick and energetic</a:t>
             </a:r>
             <a:endParaRPr lang="en-US" sz="2000" dirty="0"/>
           </a:p>
@@ -36969,7 +35586,7 @@
                 <a:ea typeface="Calibri" pitchFamily="34" charset="-122"/>
                 <a:cs typeface="Calibri" pitchFamily="34" charset="-120"/>
               </a:rPr>
-              <a:t>Origin: Latin: bruscare</a:t>
+              <a:t>Origin: Anglo-Saxon (Old English) root</a:t>
             </a:r>
             <a:endParaRPr lang="en-US" sz="1100" dirty="0"/>
           </a:p>
@@ -37009,468 +35626,6 @@
                 <a:cs typeface="Trebuchet MS" pitchFamily="34" charset="-120"/>
               </a:rPr>
               <a:t>Words using this root:</a:t>
-            </a:r>
-            <a:endParaRPr lang="en-US" sz="1300" dirty="0"/>
-          </a:p>
-        </p:txBody>
-      </p:sp>
-      <p:sp>
-        <p:nvSpPr>
-          <p:cNvPr id="16" name="Shape 14"/>
-          <p:cNvSpPr/>
-          <p:nvPr/>
-        </p:nvSpPr>
-        <p:spPr>
-          <a:xfrm>
-            <a:off x="365760" y="2743200"/>
-            <a:ext cx="2011680" cy="502920"/>
-          </a:xfrm>
-          <a:prstGeom prst="rect">
-            <a:avLst>
-              <a:gd name="adj" fmla="val 14545"/>
-            </a:avLst>
-          </a:prstGeom>
-          <a:solidFill>
-            <a:srgbClr val="EEF2FF"/>
-          </a:solidFill>
-          <a:ln w="12700">
-            <a:solidFill>
-              <a:srgbClr val="6366F1"/>
-            </a:solidFill>
-            <a:prstDash val="solid"/>
-          </a:ln>
-        </p:spPr>
-      </p:sp>
-      <p:sp>
-        <p:nvSpPr>
-          <p:cNvPr id="17" name="Text 15"/>
-          <p:cNvSpPr/>
-          <p:nvPr/>
-        </p:nvSpPr>
-        <p:spPr>
-          <a:xfrm>
-            <a:off x="365760" y="2743200"/>
-            <a:ext cx="2011680" cy="502920"/>
-          </a:xfrm>
-          <a:prstGeom prst="rect">
-            <a:avLst/>
-          </a:prstGeom>
-          <a:noFill/>
-          <a:ln/>
-        </p:spPr>
-        <p:txBody>
-          <a:bodyPr wrap="square" lIns="0" tIns="0" rIns="0" bIns="0" rtlCol="0" anchor="ctr"/>
-          <a:lstStyle/>
-          <a:p>
-            <a:pPr algn="ctr" indent="0" marL="0">
-              <a:buNone/>
-            </a:pPr>
-            <a:r>
-              <a:rPr lang="en-US" sz="1300" b="1" dirty="0">
-                <a:solidFill>
-                  <a:srgbClr val="4338CA"/>
-                </a:solidFill>
-                <a:latin typeface="Trebuchet MS" pitchFamily="34" charset="0"/>
-                <a:ea typeface="Trebuchet MS" pitchFamily="34" charset="-122"/>
-                <a:cs typeface="Trebuchet MS" pitchFamily="34" charset="-120"/>
-              </a:rPr>
-              <a:t>brisk</a:t>
-            </a:r>
-            <a:endParaRPr lang="en-US" sz="1300" dirty="0"/>
-          </a:p>
-        </p:txBody>
-      </p:sp>
-      <p:sp>
-        <p:nvSpPr>
-          <p:cNvPr id="18" name="Shape 16"/>
-          <p:cNvSpPr/>
-          <p:nvPr/>
-        </p:nvSpPr>
-        <p:spPr>
-          <a:xfrm>
-            <a:off x="2514600" y="2743200"/>
-            <a:ext cx="2011680" cy="502920"/>
-          </a:xfrm>
-          <a:prstGeom prst="rect">
-            <a:avLst>
-              <a:gd name="adj" fmla="val 14545"/>
-            </a:avLst>
-          </a:prstGeom>
-          <a:solidFill>
-            <a:srgbClr val="EEF2FF"/>
-          </a:solidFill>
-          <a:ln w="12700">
-            <a:solidFill>
-              <a:srgbClr val="6366F1"/>
-            </a:solidFill>
-            <a:prstDash val="solid"/>
-          </a:ln>
-        </p:spPr>
-      </p:sp>
-      <p:sp>
-        <p:nvSpPr>
-          <p:cNvPr id="19" name="Text 17"/>
-          <p:cNvSpPr/>
-          <p:nvPr/>
-        </p:nvSpPr>
-        <p:spPr>
-          <a:xfrm>
-            <a:off x="2514600" y="2743200"/>
-            <a:ext cx="2011680" cy="502920"/>
-          </a:xfrm>
-          <a:prstGeom prst="rect">
-            <a:avLst/>
-          </a:prstGeom>
-          <a:noFill/>
-          <a:ln/>
-        </p:spPr>
-        <p:txBody>
-          <a:bodyPr wrap="square" lIns="0" tIns="0" rIns="0" bIns="0" rtlCol="0" anchor="ctr"/>
-          <a:lstStyle/>
-          <a:p>
-            <a:pPr algn="ctr" indent="0" marL="0">
-              <a:buNone/>
-            </a:pPr>
-            <a:r>
-              <a:rPr lang="en-US" sz="1300" b="1" dirty="0">
-                <a:solidFill>
-                  <a:srgbClr val="4338CA"/>
-                </a:solidFill>
-                <a:latin typeface="Trebuchet MS" pitchFamily="34" charset="0"/>
-                <a:ea typeface="Trebuchet MS" pitchFamily="34" charset="-122"/>
-                <a:cs typeface="Trebuchet MS" pitchFamily="34" charset="-120"/>
-              </a:rPr>
-              <a:t>briskly</a:t>
-            </a:r>
-            <a:endParaRPr lang="en-US" sz="1300" dirty="0"/>
-          </a:p>
-        </p:txBody>
-      </p:sp>
-      <p:sp>
-        <p:nvSpPr>
-          <p:cNvPr id="20" name="Shape 18"/>
-          <p:cNvSpPr/>
-          <p:nvPr/>
-        </p:nvSpPr>
-        <p:spPr>
-          <a:xfrm>
-            <a:off x="4663440" y="2743200"/>
-            <a:ext cx="2011680" cy="502920"/>
-          </a:xfrm>
-          <a:prstGeom prst="rect">
-            <a:avLst>
-              <a:gd name="adj" fmla="val 14545"/>
-            </a:avLst>
-          </a:prstGeom>
-          <a:solidFill>
-            <a:srgbClr val="EEF2FF"/>
-          </a:solidFill>
-          <a:ln w="12700">
-            <a:solidFill>
-              <a:srgbClr val="6366F1"/>
-            </a:solidFill>
-            <a:prstDash val="solid"/>
-          </a:ln>
-        </p:spPr>
-      </p:sp>
-      <p:sp>
-        <p:nvSpPr>
-          <p:cNvPr id="21" name="Text 19"/>
-          <p:cNvSpPr/>
-          <p:nvPr/>
-        </p:nvSpPr>
-        <p:spPr>
-          <a:xfrm>
-            <a:off x="4663440" y="2743200"/>
-            <a:ext cx="2011680" cy="502920"/>
-          </a:xfrm>
-          <a:prstGeom prst="rect">
-            <a:avLst/>
-          </a:prstGeom>
-          <a:noFill/>
-          <a:ln/>
-        </p:spPr>
-        <p:txBody>
-          <a:bodyPr wrap="square" lIns="0" tIns="0" rIns="0" bIns="0" rtlCol="0" anchor="ctr"/>
-          <a:lstStyle/>
-          <a:p>
-            <a:pPr algn="ctr" indent="0" marL="0">
-              <a:buNone/>
-            </a:pPr>
-            <a:r>
-              <a:rPr lang="en-US" sz="1300" b="1" dirty="0">
-                <a:solidFill>
-                  <a:srgbClr val="4338CA"/>
-                </a:solidFill>
-                <a:latin typeface="Trebuchet MS" pitchFamily="34" charset="0"/>
-                <a:ea typeface="Trebuchet MS" pitchFamily="34" charset="-122"/>
-                <a:cs typeface="Trebuchet MS" pitchFamily="34" charset="-120"/>
-              </a:rPr>
-              <a:t>briskness</a:t>
-            </a:r>
-            <a:endParaRPr lang="en-US" sz="1300" dirty="0"/>
-          </a:p>
-        </p:txBody>
-      </p:sp>
-      <p:sp>
-        <p:nvSpPr>
-          <p:cNvPr id="22" name="Shape 20"/>
-          <p:cNvSpPr/>
-          <p:nvPr/>
-        </p:nvSpPr>
-        <p:spPr>
-          <a:xfrm>
-            <a:off x="6812280" y="2743200"/>
-            <a:ext cx="2011680" cy="502920"/>
-          </a:xfrm>
-          <a:prstGeom prst="rect">
-            <a:avLst>
-              <a:gd name="adj" fmla="val 14545"/>
-            </a:avLst>
-          </a:prstGeom>
-          <a:solidFill>
-            <a:srgbClr val="EEF2FF"/>
-          </a:solidFill>
-          <a:ln w="12700">
-            <a:solidFill>
-              <a:srgbClr val="6366F1"/>
-            </a:solidFill>
-            <a:prstDash val="solid"/>
-          </a:ln>
-        </p:spPr>
-      </p:sp>
-      <p:sp>
-        <p:nvSpPr>
-          <p:cNvPr id="23" name="Text 21"/>
-          <p:cNvSpPr/>
-          <p:nvPr/>
-        </p:nvSpPr>
-        <p:spPr>
-          <a:xfrm>
-            <a:off x="6812280" y="2743200"/>
-            <a:ext cx="2011680" cy="502920"/>
-          </a:xfrm>
-          <a:prstGeom prst="rect">
-            <a:avLst/>
-          </a:prstGeom>
-          <a:noFill/>
-          <a:ln/>
-        </p:spPr>
-        <p:txBody>
-          <a:bodyPr wrap="square" lIns="0" tIns="0" rIns="0" bIns="0" rtlCol="0" anchor="ctr"/>
-          <a:lstStyle/>
-          <a:p>
-            <a:pPr algn="ctr" indent="0" marL="0">
-              <a:buNone/>
-            </a:pPr>
-            <a:r>
-              <a:rPr lang="en-US" sz="1300" b="1" dirty="0">
-                <a:solidFill>
-                  <a:srgbClr val="4338CA"/>
-                </a:solidFill>
-                <a:latin typeface="Trebuchet MS" pitchFamily="34" charset="0"/>
-                <a:ea typeface="Trebuchet MS" pitchFamily="34" charset="-122"/>
-                <a:cs typeface="Trebuchet MS" pitchFamily="34" charset="-120"/>
-              </a:rPr>
-              <a:t>brisker</a:t>
-            </a:r>
-            <a:endParaRPr lang="en-US" sz="1300" dirty="0"/>
-          </a:p>
-        </p:txBody>
-      </p:sp>
-      <p:sp>
-        <p:nvSpPr>
-          <p:cNvPr id="24" name="Shape 22"/>
-          <p:cNvSpPr/>
-          <p:nvPr/>
-        </p:nvSpPr>
-        <p:spPr>
-          <a:xfrm>
-            <a:off x="365760" y="3401568"/>
-            <a:ext cx="2011680" cy="502920"/>
-          </a:xfrm>
-          <a:prstGeom prst="rect">
-            <a:avLst>
-              <a:gd name="adj" fmla="val 14545"/>
-            </a:avLst>
-          </a:prstGeom>
-          <a:solidFill>
-            <a:srgbClr val="EEF2FF"/>
-          </a:solidFill>
-          <a:ln w="12700">
-            <a:solidFill>
-              <a:srgbClr val="6366F1"/>
-            </a:solidFill>
-            <a:prstDash val="solid"/>
-          </a:ln>
-        </p:spPr>
-      </p:sp>
-      <p:sp>
-        <p:nvSpPr>
-          <p:cNvPr id="25" name="Text 23"/>
-          <p:cNvSpPr/>
-          <p:nvPr/>
-        </p:nvSpPr>
-        <p:spPr>
-          <a:xfrm>
-            <a:off x="365760" y="3401568"/>
-            <a:ext cx="2011680" cy="502920"/>
-          </a:xfrm>
-          <a:prstGeom prst="rect">
-            <a:avLst/>
-          </a:prstGeom>
-          <a:noFill/>
-          <a:ln/>
-        </p:spPr>
-        <p:txBody>
-          <a:bodyPr wrap="square" lIns="0" tIns="0" rIns="0" bIns="0" rtlCol="0" anchor="ctr"/>
-          <a:lstStyle/>
-          <a:p>
-            <a:pPr algn="ctr" indent="0" marL="0">
-              <a:buNone/>
-            </a:pPr>
-            <a:r>
-              <a:rPr lang="en-US" sz="1300" b="1" dirty="0">
-                <a:solidFill>
-                  <a:srgbClr val="4338CA"/>
-                </a:solidFill>
-                <a:latin typeface="Trebuchet MS" pitchFamily="34" charset="0"/>
-                <a:ea typeface="Trebuchet MS" pitchFamily="34" charset="-122"/>
-                <a:cs typeface="Trebuchet MS" pitchFamily="34" charset="-120"/>
-              </a:rPr>
-              <a:t>briskest</a:t>
-            </a:r>
-            <a:endParaRPr lang="en-US" sz="1300" dirty="0"/>
-          </a:p>
-        </p:txBody>
-      </p:sp>
-      <p:sp>
-        <p:nvSpPr>
-          <p:cNvPr id="26" name="Shape 24"/>
-          <p:cNvSpPr/>
-          <p:nvPr/>
-        </p:nvSpPr>
-        <p:spPr>
-          <a:xfrm>
-            <a:off x="2514600" y="3401568"/>
-            <a:ext cx="2011680" cy="502920"/>
-          </a:xfrm>
-          <a:prstGeom prst="rect">
-            <a:avLst>
-              <a:gd name="adj" fmla="val 14545"/>
-            </a:avLst>
-          </a:prstGeom>
-          <a:solidFill>
-            <a:srgbClr val="EEF2FF"/>
-          </a:solidFill>
-          <a:ln w="12700">
-            <a:solidFill>
-              <a:srgbClr val="6366F1"/>
-            </a:solidFill>
-            <a:prstDash val="solid"/>
-          </a:ln>
-        </p:spPr>
-      </p:sp>
-      <p:sp>
-        <p:nvSpPr>
-          <p:cNvPr id="27" name="Text 25"/>
-          <p:cNvSpPr/>
-          <p:nvPr/>
-        </p:nvSpPr>
-        <p:spPr>
-          <a:xfrm>
-            <a:off x="2514600" y="3401568"/>
-            <a:ext cx="2011680" cy="502920"/>
-          </a:xfrm>
-          <a:prstGeom prst="rect">
-            <a:avLst/>
-          </a:prstGeom>
-          <a:noFill/>
-          <a:ln/>
-        </p:spPr>
-        <p:txBody>
-          <a:bodyPr wrap="square" lIns="0" tIns="0" rIns="0" bIns="0" rtlCol="0" anchor="ctr"/>
-          <a:lstStyle/>
-          <a:p>
-            <a:pPr algn="ctr" indent="0" marL="0">
-              <a:buNone/>
-            </a:pPr>
-            <a:r>
-              <a:rPr lang="en-US" sz="1300" b="1" dirty="0">
-                <a:solidFill>
-                  <a:srgbClr val="4338CA"/>
-                </a:solidFill>
-                <a:latin typeface="Trebuchet MS" pitchFamily="34" charset="0"/>
-                <a:ea typeface="Trebuchet MS" pitchFamily="34" charset="-122"/>
-                <a:cs typeface="Trebuchet MS" pitchFamily="34" charset="-120"/>
-              </a:rPr>
-              <a:t>brisked</a:t>
-            </a:r>
-            <a:endParaRPr lang="en-US" sz="1300" dirty="0"/>
-          </a:p>
-        </p:txBody>
-      </p:sp>
-      <p:sp>
-        <p:nvSpPr>
-          <p:cNvPr id="28" name="Shape 26"/>
-          <p:cNvSpPr/>
-          <p:nvPr/>
-        </p:nvSpPr>
-        <p:spPr>
-          <a:xfrm>
-            <a:off x="4663440" y="3401568"/>
-            <a:ext cx="2011680" cy="502920"/>
-          </a:xfrm>
-          <a:prstGeom prst="rect">
-            <a:avLst>
-              <a:gd name="adj" fmla="val 14545"/>
-            </a:avLst>
-          </a:prstGeom>
-          <a:solidFill>
-            <a:srgbClr val="EEF2FF"/>
-          </a:solidFill>
-          <a:ln w="12700">
-            <a:solidFill>
-              <a:srgbClr val="6366F1"/>
-            </a:solidFill>
-            <a:prstDash val="solid"/>
-          </a:ln>
-        </p:spPr>
-      </p:sp>
-      <p:sp>
-        <p:nvSpPr>
-          <p:cNvPr id="29" name="Text 27"/>
-          <p:cNvSpPr/>
-          <p:nvPr/>
-        </p:nvSpPr>
-        <p:spPr>
-          <a:xfrm>
-            <a:off x="4663440" y="3401568"/>
-            <a:ext cx="2011680" cy="502920"/>
-          </a:xfrm>
-          <a:prstGeom prst="rect">
-            <a:avLst/>
-          </a:prstGeom>
-          <a:noFill/>
-          <a:ln/>
-        </p:spPr>
-        <p:txBody>
-          <a:bodyPr wrap="square" lIns="0" tIns="0" rIns="0" bIns="0" rtlCol="0" anchor="ctr"/>
-          <a:lstStyle/>
-          <a:p>
-            <a:pPr algn="ctr" indent="0" marL="0">
-              <a:buNone/>
-            </a:pPr>
-            <a:r>
-              <a:rPr lang="en-US" sz="1300" b="1" dirty="0">
-                <a:solidFill>
-                  <a:srgbClr val="4338CA"/>
-                </a:solidFill>
-                <a:latin typeface="Trebuchet MS" pitchFamily="34" charset="0"/>
-                <a:ea typeface="Trebuchet MS" pitchFamily="34" charset="-122"/>
-                <a:cs typeface="Trebuchet MS" pitchFamily="34" charset="-120"/>
-              </a:rPr>
-              <a:t>unbrisk</a:t>
             </a:r>
             <a:endParaRPr lang="en-US" sz="1300" dirty="0"/>
           </a:p>
@@ -37762,7 +35917,7 @@
                 <a:ea typeface="Calibri" pitchFamily="34" charset="-122"/>
                 <a:cs typeface="Calibri" pitchFamily="34" charset="-120"/>
               </a:rPr>
-              <a:t>Word Labs  •  wordlabs.app  •  Root: 'brisk' = quick, lively, and energetic</a:t>
+              <a:t>Word Labs  •  wordlabs.app  •  Root: 'brisk' = quick and energetic</a:t>
             </a:r>
             <a:endParaRPr lang="en-US" sz="800" dirty="0"/>
           </a:p>
@@ -38020,7 +36175,7 @@
             <a:avLst/>
           </a:prstGeom>
           <a:solidFill>
-            <a:srgbClr val="DDD6FE"/>
+            <a:srgbClr val="F8FAFC"/>
           </a:solidFill>
           <a:ln w="12700">
             <a:solidFill>
@@ -38032,14 +36187,39 @@
       </p:sp>
       <p:sp>
         <p:nvSpPr>
-          <p:cNvPr id="18" name="Text 16"/>
-          <p:cNvSpPr/>
-          <p:nvPr/>
-        </p:nvSpPr>
-        <p:spPr>
-          <a:xfrm>
-            <a:off x="640080" y="1755648"/>
-            <a:ext cx="1463040" cy="420624"/>
+          <p:cNvPr id="18" name="Shape 16"/>
+          <p:cNvSpPr/>
+          <p:nvPr/>
+        </p:nvSpPr>
+        <p:spPr>
+          <a:xfrm>
+            <a:off x="3291840" y="1755648"/>
+            <a:ext cx="1645920" cy="420624"/>
+          </a:xfrm>
+          <a:prstGeom prst="rect">
+            <a:avLst/>
+          </a:prstGeom>
+          <a:solidFill>
+            <a:srgbClr val="CCFBF1"/>
+          </a:solidFill>
+          <a:ln w="12700">
+            <a:solidFill>
+              <a:srgbClr val="E5E7EB"/>
+            </a:solidFill>
+            <a:prstDash val="solid"/>
+          </a:ln>
+        </p:spPr>
+      </p:sp>
+      <p:sp>
+        <p:nvSpPr>
+          <p:cNvPr id="19" name="Text 17"/>
+          <p:cNvSpPr/>
+          <p:nvPr/>
+        </p:nvSpPr>
+        <p:spPr>
+          <a:xfrm>
+            <a:off x="3291840" y="1755648"/>
+            <a:ext cx="1645920" cy="420624"/>
           </a:xfrm>
           <a:prstGeom prst="rect">
             <a:avLst/>
@@ -38057,13 +36237,13 @@
             <a:r>
               <a:rPr lang="en-US" sz="1300" b="1" dirty="0">
                 <a:solidFill>
-                  <a:srgbClr val="4C1D95"/>
+                  <a:srgbClr val="0F766E"/>
                 </a:solidFill>
                 <a:latin typeface="Trebuchet MS" pitchFamily="34" charset="0"/>
                 <a:ea typeface="Trebuchet MS" pitchFamily="34" charset="-122"/>
                 <a:cs typeface="Trebuchet MS" pitchFamily="34" charset="-120"/>
               </a:rPr>
-              <a:t>un-</a:t>
+              <a:t>brisk</a:t>
             </a:r>
             <a:endParaRPr lang="en-US" sz="1300" dirty="0"/>
           </a:p>
@@ -38071,20 +36251,20 @@
       </p:sp>
       <p:sp>
         <p:nvSpPr>
-          <p:cNvPr id="19" name="Shape 17"/>
-          <p:cNvSpPr/>
-          <p:nvPr/>
-        </p:nvSpPr>
-        <p:spPr>
-          <a:xfrm>
-            <a:off x="3291840" y="1755648"/>
-            <a:ext cx="1645920" cy="420624"/>
-          </a:xfrm>
-          <a:prstGeom prst="rect">
-            <a:avLst/>
-          </a:prstGeom>
-          <a:solidFill>
-            <a:srgbClr val="CCFBF1"/>
+          <p:cNvPr id="20" name="Shape 18"/>
+          <p:cNvSpPr/>
+          <p:nvPr/>
+        </p:nvSpPr>
+        <p:spPr>
+          <a:xfrm>
+            <a:off x="5943600" y="1755648"/>
+            <a:ext cx="1463040" cy="420624"/>
+          </a:xfrm>
+          <a:prstGeom prst="rect">
+            <a:avLst/>
+          </a:prstGeom>
+          <a:solidFill>
+            <a:srgbClr val="FCE7F3"/>
           </a:solidFill>
           <a:ln w="12700">
             <a:solidFill>
@@ -38096,14 +36276,14 @@
       </p:sp>
       <p:sp>
         <p:nvSpPr>
-          <p:cNvPr id="20" name="Text 18"/>
-          <p:cNvSpPr/>
-          <p:nvPr/>
-        </p:nvSpPr>
-        <p:spPr>
-          <a:xfrm>
-            <a:off x="3291840" y="1755648"/>
-            <a:ext cx="1645920" cy="420624"/>
+          <p:cNvPr id="21" name="Text 19"/>
+          <p:cNvSpPr/>
+          <p:nvPr/>
+        </p:nvSpPr>
+        <p:spPr>
+          <a:xfrm>
+            <a:off x="5943600" y="1755648"/>
+            <a:ext cx="1463040" cy="420624"/>
           </a:xfrm>
           <a:prstGeom prst="rect">
             <a:avLst/>
@@ -38121,13 +36301,13 @@
             <a:r>
               <a:rPr lang="en-US" sz="1300" b="1" dirty="0">
                 <a:solidFill>
-                  <a:srgbClr val="0F766E"/>
+                  <a:srgbClr val="9D174D"/>
                 </a:solidFill>
                 <a:latin typeface="Trebuchet MS" pitchFamily="34" charset="0"/>
                 <a:ea typeface="Trebuchet MS" pitchFamily="34" charset="-122"/>
                 <a:cs typeface="Trebuchet MS" pitchFamily="34" charset="-120"/>
               </a:rPr>
-              <a:t>brisk</a:t>
+              <a:t>-er</a:t>
             </a:r>
             <a:endParaRPr lang="en-US" sz="1300" dirty="0"/>
           </a:p>
@@ -38135,19 +36315,69 @@
       </p:sp>
       <p:sp>
         <p:nvSpPr>
-          <p:cNvPr id="21" name="Shape 19"/>
-          <p:cNvSpPr/>
-          <p:nvPr/>
-        </p:nvSpPr>
-        <p:spPr>
-          <a:xfrm>
-            <a:off x="5943600" y="1755648"/>
+          <p:cNvPr id="22" name="Shape 20"/>
+          <p:cNvSpPr/>
+          <p:nvPr/>
+        </p:nvSpPr>
+        <p:spPr>
+          <a:xfrm>
+            <a:off x="640080" y="2212848"/>
             <a:ext cx="1463040" cy="420624"/>
           </a:xfrm>
           <a:prstGeom prst="rect">
             <a:avLst/>
           </a:prstGeom>
           <a:solidFill>
+            <a:srgbClr val="F1F5F9"/>
+          </a:solidFill>
+          <a:ln w="12700">
+            <a:solidFill>
+              <a:srgbClr val="E5E7EB"/>
+            </a:solidFill>
+            <a:prstDash val="solid"/>
+          </a:ln>
+        </p:spPr>
+      </p:sp>
+      <p:sp>
+        <p:nvSpPr>
+          <p:cNvPr id="23" name="Shape 21"/>
+          <p:cNvSpPr/>
+          <p:nvPr/>
+        </p:nvSpPr>
+        <p:spPr>
+          <a:xfrm>
+            <a:off x="3291840" y="2212848"/>
+            <a:ext cx="1645920" cy="420624"/>
+          </a:xfrm>
+          <a:prstGeom prst="rect">
+            <a:avLst/>
+          </a:prstGeom>
+          <a:solidFill>
+            <a:srgbClr val="F1F5F9"/>
+          </a:solidFill>
+          <a:ln w="12700">
+            <a:solidFill>
+              <a:srgbClr val="E5E7EB"/>
+            </a:solidFill>
+            <a:prstDash val="solid"/>
+          </a:ln>
+        </p:spPr>
+      </p:sp>
+      <p:sp>
+        <p:nvSpPr>
+          <p:cNvPr id="24" name="Shape 22"/>
+          <p:cNvSpPr/>
+          <p:nvPr/>
+        </p:nvSpPr>
+        <p:spPr>
+          <a:xfrm>
+            <a:off x="5943600" y="2212848"/>
+            <a:ext cx="1463040" cy="420624"/>
+          </a:xfrm>
+          <a:prstGeom prst="rect">
+            <a:avLst/>
+          </a:prstGeom>
+          <a:solidFill>
             <a:srgbClr val="FCE7F3"/>
           </a:solidFill>
           <a:ln w="12700">
@@ -38160,13 +36390,13 @@
       </p:sp>
       <p:sp>
         <p:nvSpPr>
-          <p:cNvPr id="22" name="Text 20"/>
-          <p:cNvSpPr/>
-          <p:nvPr/>
-        </p:nvSpPr>
-        <p:spPr>
-          <a:xfrm>
-            <a:off x="5943600" y="1755648"/>
+          <p:cNvPr id="25" name="Text 23"/>
+          <p:cNvSpPr/>
+          <p:nvPr/>
+        </p:nvSpPr>
+        <p:spPr>
+          <a:xfrm>
+            <a:off x="5943600" y="2212848"/>
             <a:ext cx="1463040" cy="420624"/>
           </a:xfrm>
           <a:prstGeom prst="rect">
@@ -38191,7 +36421,7 @@
                 <a:ea typeface="Trebuchet MS" pitchFamily="34" charset="-122"/>
                 <a:cs typeface="Trebuchet MS" pitchFamily="34" charset="-120"/>
               </a:rPr>
-              <a:t>-ly</a:t>
+              <a:t>-est</a:t>
             </a:r>
             <a:endParaRPr lang="en-US" sz="1300" dirty="0"/>
           </a:p>
@@ -38199,20 +36429,20 @@
       </p:sp>
       <p:sp>
         <p:nvSpPr>
-          <p:cNvPr id="23" name="Shape 21"/>
-          <p:cNvSpPr/>
-          <p:nvPr/>
-        </p:nvSpPr>
-        <p:spPr>
-          <a:xfrm>
-            <a:off x="640080" y="2212848"/>
+          <p:cNvPr id="26" name="Shape 24"/>
+          <p:cNvSpPr/>
+          <p:nvPr/>
+        </p:nvSpPr>
+        <p:spPr>
+          <a:xfrm>
+            <a:off x="640080" y="2670048"/>
             <a:ext cx="1463040" cy="420624"/>
           </a:xfrm>
           <a:prstGeom prst="rect">
             <a:avLst/>
           </a:prstGeom>
           <a:solidFill>
-            <a:srgbClr val="DDD6FE"/>
+            <a:srgbClr val="F8FAFC"/>
           </a:solidFill>
           <a:ln w="12700">
             <a:solidFill>
@@ -38224,18 +36454,68 @@
       </p:sp>
       <p:sp>
         <p:nvSpPr>
-          <p:cNvPr id="24" name="Text 22"/>
-          <p:cNvSpPr/>
-          <p:nvPr/>
-        </p:nvSpPr>
-        <p:spPr>
-          <a:xfrm>
-            <a:off x="640080" y="2212848"/>
+          <p:cNvPr id="27" name="Shape 25"/>
+          <p:cNvSpPr/>
+          <p:nvPr/>
+        </p:nvSpPr>
+        <p:spPr>
+          <a:xfrm>
+            <a:off x="3291840" y="2670048"/>
+            <a:ext cx="1645920" cy="420624"/>
+          </a:xfrm>
+          <a:prstGeom prst="rect">
+            <a:avLst/>
+          </a:prstGeom>
+          <a:solidFill>
+            <a:srgbClr val="F8FAFC"/>
+          </a:solidFill>
+          <a:ln w="12700">
+            <a:solidFill>
+              <a:srgbClr val="E5E7EB"/>
+            </a:solidFill>
+            <a:prstDash val="solid"/>
+          </a:ln>
+        </p:spPr>
+      </p:sp>
+      <p:sp>
+        <p:nvSpPr>
+          <p:cNvPr id="28" name="Shape 26"/>
+          <p:cNvSpPr/>
+          <p:nvPr/>
+        </p:nvSpPr>
+        <p:spPr>
+          <a:xfrm>
+            <a:off x="5943600" y="2670048"/>
             <a:ext cx="1463040" cy="420624"/>
           </a:xfrm>
           <a:prstGeom prst="rect">
             <a:avLst/>
           </a:prstGeom>
+          <a:solidFill>
+            <a:srgbClr val="FCE7F3"/>
+          </a:solidFill>
+          <a:ln w="12700">
+            <a:solidFill>
+              <a:srgbClr val="E5E7EB"/>
+            </a:solidFill>
+            <a:prstDash val="solid"/>
+          </a:ln>
+        </p:spPr>
+      </p:sp>
+      <p:sp>
+        <p:nvSpPr>
+          <p:cNvPr id="29" name="Text 27"/>
+          <p:cNvSpPr/>
+          <p:nvPr/>
+        </p:nvSpPr>
+        <p:spPr>
+          <a:xfrm>
+            <a:off x="5943600" y="2670048"/>
+            <a:ext cx="1463040" cy="420624"/>
+          </a:xfrm>
+          <a:prstGeom prst="rect">
+            <a:avLst/>
+          </a:prstGeom>
           <a:noFill/>
           <a:ln/>
         </p:spPr>
@@ -38249,13 +36529,13 @@
             <a:r>
               <a:rPr lang="en-US" sz="1300" b="1" dirty="0">
                 <a:solidFill>
-                  <a:srgbClr val="4C1D95"/>
+                  <a:srgbClr val="9D174D"/>
                 </a:solidFill>
                 <a:latin typeface="Trebuchet MS" pitchFamily="34" charset="0"/>
                 <a:ea typeface="Trebuchet MS" pitchFamily="34" charset="-122"/>
                 <a:cs typeface="Trebuchet MS" pitchFamily="34" charset="-120"/>
               </a:rPr>
-              <a:t>non-</a:t>
+              <a:t>-ly</a:t>
             </a:r>
             <a:endParaRPr lang="en-US" sz="1300" dirty="0"/>
           </a:p>
@@ -38263,13 +36543,38 @@
       </p:sp>
       <p:sp>
         <p:nvSpPr>
-          <p:cNvPr id="25" name="Shape 23"/>
-          <p:cNvSpPr/>
-          <p:nvPr/>
-        </p:nvSpPr>
-        <p:spPr>
-          <a:xfrm>
-            <a:off x="3291840" y="2212848"/>
+          <p:cNvPr id="30" name="Shape 28"/>
+          <p:cNvSpPr/>
+          <p:nvPr/>
+        </p:nvSpPr>
+        <p:spPr>
+          <a:xfrm>
+            <a:off x="640080" y="3127248"/>
+            <a:ext cx="1463040" cy="420624"/>
+          </a:xfrm>
+          <a:prstGeom prst="rect">
+            <a:avLst/>
+          </a:prstGeom>
+          <a:solidFill>
+            <a:srgbClr val="F1F5F9"/>
+          </a:solidFill>
+          <a:ln w="12700">
+            <a:solidFill>
+              <a:srgbClr val="E5E7EB"/>
+            </a:solidFill>
+            <a:prstDash val="solid"/>
+          </a:ln>
+        </p:spPr>
+      </p:sp>
+      <p:sp>
+        <p:nvSpPr>
+          <p:cNvPr id="31" name="Shape 29"/>
+          <p:cNvSpPr/>
+          <p:nvPr/>
+        </p:nvSpPr>
+        <p:spPr>
+          <a:xfrm>
+            <a:off x="3291840" y="3127248"/>
             <a:ext cx="1645920" cy="420624"/>
           </a:xfrm>
           <a:prstGeom prst="rect">
@@ -38288,13 +36593,13 @@
       </p:sp>
       <p:sp>
         <p:nvSpPr>
-          <p:cNvPr id="26" name="Shape 24"/>
-          <p:cNvSpPr/>
-          <p:nvPr/>
-        </p:nvSpPr>
-        <p:spPr>
-          <a:xfrm>
-            <a:off x="5943600" y="2212848"/>
+          <p:cNvPr id="32" name="Shape 30"/>
+          <p:cNvSpPr/>
+          <p:nvPr/>
+        </p:nvSpPr>
+        <p:spPr>
+          <a:xfrm>
+            <a:off x="5943600" y="3127248"/>
             <a:ext cx="1463040" cy="420624"/>
           </a:xfrm>
           <a:prstGeom prst="rect">
@@ -38313,13 +36618,13 @@
       </p:sp>
       <p:sp>
         <p:nvSpPr>
-          <p:cNvPr id="27" name="Text 25"/>
-          <p:cNvSpPr/>
-          <p:nvPr/>
-        </p:nvSpPr>
-        <p:spPr>
-          <a:xfrm>
-            <a:off x="5943600" y="2212848"/>
+          <p:cNvPr id="33" name="Text 31"/>
+          <p:cNvSpPr/>
+          <p:nvPr/>
+        </p:nvSpPr>
+        <p:spPr>
+          <a:xfrm>
+            <a:off x="5943600" y="3127248"/>
             <a:ext cx="1463040" cy="420624"/>
           </a:xfrm>
           <a:prstGeom prst="rect">
@@ -38352,472 +36657,13 @@
       </p:sp>
       <p:sp>
         <p:nvSpPr>
-          <p:cNvPr id="28" name="Shape 26"/>
-          <p:cNvSpPr/>
-          <p:nvPr/>
-        </p:nvSpPr>
-        <p:spPr>
-          <a:xfrm>
-            <a:off x="640080" y="2670048"/>
-            <a:ext cx="1463040" cy="420624"/>
-          </a:xfrm>
-          <a:prstGeom prst="rect">
-            <a:avLst/>
-          </a:prstGeom>
-          <a:solidFill>
-            <a:srgbClr val="DDD6FE"/>
-          </a:solidFill>
-          <a:ln w="12700">
-            <a:solidFill>
-              <a:srgbClr val="E5E7EB"/>
-            </a:solidFill>
-            <a:prstDash val="solid"/>
-          </a:ln>
-        </p:spPr>
-      </p:sp>
-      <p:sp>
-        <p:nvSpPr>
-          <p:cNvPr id="29" name="Text 27"/>
-          <p:cNvSpPr/>
-          <p:nvPr/>
-        </p:nvSpPr>
-        <p:spPr>
-          <a:xfrm>
-            <a:off x="640080" y="2670048"/>
-            <a:ext cx="1463040" cy="420624"/>
-          </a:xfrm>
-          <a:prstGeom prst="rect">
-            <a:avLst/>
-          </a:prstGeom>
-          <a:noFill/>
-          <a:ln/>
-        </p:spPr>
-        <p:txBody>
-          <a:bodyPr wrap="square" lIns="0" tIns="0" rIns="0" bIns="0" rtlCol="0" anchor="ctr"/>
-          <a:lstStyle/>
-          <a:p>
-            <a:pPr algn="ctr" indent="0" marL="0">
-              <a:buNone/>
-            </a:pPr>
-            <a:r>
-              <a:rPr lang="en-US" sz="1300" b="1" dirty="0">
-                <a:solidFill>
-                  <a:srgbClr val="4C1D95"/>
-                </a:solidFill>
-                <a:latin typeface="Trebuchet MS" pitchFamily="34" charset="0"/>
-                <a:ea typeface="Trebuchet MS" pitchFamily="34" charset="-122"/>
-                <a:cs typeface="Trebuchet MS" pitchFamily="34" charset="-120"/>
-              </a:rPr>
-              <a:t>semi-</a:t>
-            </a:r>
-            <a:endParaRPr lang="en-US" sz="1300" dirty="0"/>
-          </a:p>
-        </p:txBody>
-      </p:sp>
-      <p:sp>
-        <p:nvSpPr>
-          <p:cNvPr id="30" name="Shape 28"/>
-          <p:cNvSpPr/>
-          <p:nvPr/>
-        </p:nvSpPr>
-        <p:spPr>
-          <a:xfrm>
-            <a:off x="3291840" y="2670048"/>
-            <a:ext cx="1645920" cy="420624"/>
-          </a:xfrm>
-          <a:prstGeom prst="rect">
-            <a:avLst/>
-          </a:prstGeom>
-          <a:solidFill>
-            <a:srgbClr val="F8FAFC"/>
-          </a:solidFill>
-          <a:ln w="12700">
-            <a:solidFill>
-              <a:srgbClr val="E5E7EB"/>
-            </a:solidFill>
-            <a:prstDash val="solid"/>
-          </a:ln>
-        </p:spPr>
-      </p:sp>
-      <p:sp>
-        <p:nvSpPr>
-          <p:cNvPr id="31" name="Shape 29"/>
-          <p:cNvSpPr/>
-          <p:nvPr/>
-        </p:nvSpPr>
-        <p:spPr>
-          <a:xfrm>
-            <a:off x="5943600" y="2670048"/>
-            <a:ext cx="1463040" cy="420624"/>
-          </a:xfrm>
-          <a:prstGeom prst="rect">
-            <a:avLst/>
-          </a:prstGeom>
-          <a:solidFill>
-            <a:srgbClr val="FCE7F3"/>
-          </a:solidFill>
-          <a:ln w="12700">
-            <a:solidFill>
-              <a:srgbClr val="E5E7EB"/>
-            </a:solidFill>
-            <a:prstDash val="solid"/>
-          </a:ln>
-        </p:spPr>
-      </p:sp>
-      <p:sp>
-        <p:nvSpPr>
-          <p:cNvPr id="32" name="Text 30"/>
-          <p:cNvSpPr/>
-          <p:nvPr/>
-        </p:nvSpPr>
-        <p:spPr>
-          <a:xfrm>
-            <a:off x="5943600" y="2670048"/>
-            <a:ext cx="1463040" cy="420624"/>
-          </a:xfrm>
-          <a:prstGeom prst="rect">
-            <a:avLst/>
-          </a:prstGeom>
-          <a:noFill/>
-          <a:ln/>
-        </p:spPr>
-        <p:txBody>
-          <a:bodyPr wrap="square" lIns="0" tIns="0" rIns="0" bIns="0" rtlCol="0" anchor="ctr"/>
-          <a:lstStyle/>
-          <a:p>
-            <a:pPr algn="ctr" indent="0" marL="0">
-              <a:buNone/>
-            </a:pPr>
-            <a:r>
-              <a:rPr lang="en-US" sz="1300" b="1" dirty="0">
-                <a:solidFill>
-                  <a:srgbClr val="9D174D"/>
-                </a:solidFill>
-                <a:latin typeface="Trebuchet MS" pitchFamily="34" charset="0"/>
-                <a:ea typeface="Trebuchet MS" pitchFamily="34" charset="-122"/>
-                <a:cs typeface="Trebuchet MS" pitchFamily="34" charset="-120"/>
-              </a:rPr>
-              <a:t>-er</a:t>
-            </a:r>
-            <a:endParaRPr lang="en-US" sz="1300" dirty="0"/>
-          </a:p>
-        </p:txBody>
-      </p:sp>
-      <p:sp>
-        <p:nvSpPr>
-          <p:cNvPr id="33" name="Shape 31"/>
-          <p:cNvSpPr/>
-          <p:nvPr/>
-        </p:nvSpPr>
-        <p:spPr>
-          <a:xfrm>
-            <a:off x="640080" y="3127248"/>
-            <a:ext cx="1463040" cy="420624"/>
-          </a:xfrm>
-          <a:prstGeom prst="rect">
-            <a:avLst/>
-          </a:prstGeom>
-          <a:solidFill>
-            <a:srgbClr val="DDD6FE"/>
-          </a:solidFill>
-          <a:ln w="12700">
-            <a:solidFill>
-              <a:srgbClr val="E5E7EB"/>
-            </a:solidFill>
-            <a:prstDash val="solid"/>
-          </a:ln>
-        </p:spPr>
-      </p:sp>
-      <p:sp>
-        <p:nvSpPr>
           <p:cNvPr id="34" name="Text 32"/>
           <p:cNvSpPr/>
           <p:nvPr/>
         </p:nvSpPr>
         <p:spPr>
           <a:xfrm>
-            <a:off x="640080" y="3127248"/>
-            <a:ext cx="1463040" cy="420624"/>
-          </a:xfrm>
-          <a:prstGeom prst="rect">
-            <a:avLst/>
-          </a:prstGeom>
-          <a:noFill/>
-          <a:ln/>
-        </p:spPr>
-        <p:txBody>
-          <a:bodyPr wrap="square" lIns="0" tIns="0" rIns="0" bIns="0" rtlCol="0" anchor="ctr"/>
-          <a:lstStyle/>
-          <a:p>
-            <a:pPr algn="ctr" indent="0" marL="0">
-              <a:buNone/>
-            </a:pPr>
-            <a:r>
-              <a:rPr lang="en-US" sz="1300" b="1" dirty="0">
-                <a:solidFill>
-                  <a:srgbClr val="4C1D95"/>
-                </a:solidFill>
-                <a:latin typeface="Trebuchet MS" pitchFamily="34" charset="0"/>
-                <a:ea typeface="Trebuchet MS" pitchFamily="34" charset="-122"/>
-                <a:cs typeface="Trebuchet MS" pitchFamily="34" charset="-120"/>
-              </a:rPr>
-              <a:t>over-</a:t>
-            </a:r>
-            <a:endParaRPr lang="en-US" sz="1300" dirty="0"/>
-          </a:p>
-        </p:txBody>
-      </p:sp>
-      <p:sp>
-        <p:nvSpPr>
-          <p:cNvPr id="35" name="Shape 33"/>
-          <p:cNvSpPr/>
-          <p:nvPr/>
-        </p:nvSpPr>
-        <p:spPr>
-          <a:xfrm>
-            <a:off x="3291840" y="3127248"/>
-            <a:ext cx="1645920" cy="420624"/>
-          </a:xfrm>
-          <a:prstGeom prst="rect">
-            <a:avLst/>
-          </a:prstGeom>
-          <a:solidFill>
-            <a:srgbClr val="F1F5F9"/>
-          </a:solidFill>
-          <a:ln w="12700">
-            <a:solidFill>
-              <a:srgbClr val="E5E7EB"/>
-            </a:solidFill>
-            <a:prstDash val="solid"/>
-          </a:ln>
-        </p:spPr>
-      </p:sp>
-      <p:sp>
-        <p:nvSpPr>
-          <p:cNvPr id="36" name="Shape 34"/>
-          <p:cNvSpPr/>
-          <p:nvPr/>
-        </p:nvSpPr>
-        <p:spPr>
-          <a:xfrm>
-            <a:off x="5943600" y="3127248"/>
-            <a:ext cx="1463040" cy="420624"/>
-          </a:xfrm>
-          <a:prstGeom prst="rect">
-            <a:avLst/>
-          </a:prstGeom>
-          <a:solidFill>
-            <a:srgbClr val="FCE7F3"/>
-          </a:solidFill>
-          <a:ln w="12700">
-            <a:solidFill>
-              <a:srgbClr val="E5E7EB"/>
-            </a:solidFill>
-            <a:prstDash val="solid"/>
-          </a:ln>
-        </p:spPr>
-      </p:sp>
-      <p:sp>
-        <p:nvSpPr>
-          <p:cNvPr id="37" name="Text 35"/>
-          <p:cNvSpPr/>
-          <p:nvPr/>
-        </p:nvSpPr>
-        <p:spPr>
-          <a:xfrm>
-            <a:off x="5943600" y="3127248"/>
-            <a:ext cx="1463040" cy="420624"/>
-          </a:xfrm>
-          <a:prstGeom prst="rect">
-            <a:avLst/>
-          </a:prstGeom>
-          <a:noFill/>
-          <a:ln/>
-        </p:spPr>
-        <p:txBody>
-          <a:bodyPr wrap="square" lIns="0" tIns="0" rIns="0" bIns="0" rtlCol="0" anchor="ctr"/>
-          <a:lstStyle/>
-          <a:p>
-            <a:pPr algn="ctr" indent="0" marL="0">
-              <a:buNone/>
-            </a:pPr>
-            <a:r>
-              <a:rPr lang="en-US" sz="1300" b="1" dirty="0">
-                <a:solidFill>
-                  <a:srgbClr val="9D174D"/>
-                </a:solidFill>
-                <a:latin typeface="Trebuchet MS" pitchFamily="34" charset="0"/>
-                <a:ea typeface="Trebuchet MS" pitchFamily="34" charset="-122"/>
-                <a:cs typeface="Trebuchet MS" pitchFamily="34" charset="-120"/>
-              </a:rPr>
-              <a:t>-est</a:t>
-            </a:r>
-            <a:endParaRPr lang="en-US" sz="1300" dirty="0"/>
-          </a:p>
-        </p:txBody>
-      </p:sp>
-      <p:sp>
-        <p:nvSpPr>
-          <p:cNvPr id="38" name="Shape 36"/>
-          <p:cNvSpPr/>
-          <p:nvPr/>
-        </p:nvSpPr>
-        <p:spPr>
-          <a:xfrm>
-            <a:off x="640080" y="3584448"/>
-            <a:ext cx="1463040" cy="420624"/>
-          </a:xfrm>
-          <a:prstGeom prst="rect">
-            <a:avLst/>
-          </a:prstGeom>
-          <a:solidFill>
-            <a:srgbClr val="DDD6FE"/>
-          </a:solidFill>
-          <a:ln w="12700">
-            <a:solidFill>
-              <a:srgbClr val="E5E7EB"/>
-            </a:solidFill>
-            <a:prstDash val="solid"/>
-          </a:ln>
-        </p:spPr>
-      </p:sp>
-      <p:sp>
-        <p:nvSpPr>
-          <p:cNvPr id="39" name="Text 37"/>
-          <p:cNvSpPr/>
-          <p:nvPr/>
-        </p:nvSpPr>
-        <p:spPr>
-          <a:xfrm>
-            <a:off x="640080" y="3584448"/>
-            <a:ext cx="1463040" cy="420624"/>
-          </a:xfrm>
-          <a:prstGeom prst="rect">
-            <a:avLst/>
-          </a:prstGeom>
-          <a:noFill/>
-          <a:ln/>
-        </p:spPr>
-        <p:txBody>
-          <a:bodyPr wrap="square" lIns="0" tIns="0" rIns="0" bIns="0" rtlCol="0" anchor="ctr"/>
-          <a:lstStyle/>
-          <a:p>
-            <a:pPr algn="ctr" indent="0" marL="0">
-              <a:buNone/>
-            </a:pPr>
-            <a:r>
-              <a:rPr lang="en-US" sz="1300" b="1" dirty="0">
-                <a:solidFill>
-                  <a:srgbClr val="4C1D95"/>
-                </a:solidFill>
-                <a:latin typeface="Trebuchet MS" pitchFamily="34" charset="0"/>
-                <a:ea typeface="Trebuchet MS" pitchFamily="34" charset="-122"/>
-                <a:cs typeface="Trebuchet MS" pitchFamily="34" charset="-120"/>
-              </a:rPr>
-              <a:t>re-</a:t>
-            </a:r>
-            <a:endParaRPr lang="en-US" sz="1300" dirty="0"/>
-          </a:p>
-        </p:txBody>
-      </p:sp>
-      <p:sp>
-        <p:nvSpPr>
-          <p:cNvPr id="40" name="Shape 38"/>
-          <p:cNvSpPr/>
-          <p:nvPr/>
-        </p:nvSpPr>
-        <p:spPr>
-          <a:xfrm>
-            <a:off x="3291840" y="3584448"/>
-            <a:ext cx="1645920" cy="420624"/>
-          </a:xfrm>
-          <a:prstGeom prst="rect">
-            <a:avLst/>
-          </a:prstGeom>
-          <a:solidFill>
-            <a:srgbClr val="F8FAFC"/>
-          </a:solidFill>
-          <a:ln w="12700">
-            <a:solidFill>
-              <a:srgbClr val="E5E7EB"/>
-            </a:solidFill>
-            <a:prstDash val="solid"/>
-          </a:ln>
-        </p:spPr>
-      </p:sp>
-      <p:sp>
-        <p:nvSpPr>
-          <p:cNvPr id="41" name="Shape 39"/>
-          <p:cNvSpPr/>
-          <p:nvPr/>
-        </p:nvSpPr>
-        <p:spPr>
-          <a:xfrm>
-            <a:off x="5943600" y="3584448"/>
-            <a:ext cx="1463040" cy="420624"/>
-          </a:xfrm>
-          <a:prstGeom prst="rect">
-            <a:avLst/>
-          </a:prstGeom>
-          <a:solidFill>
-            <a:srgbClr val="FCE7F3"/>
-          </a:solidFill>
-          <a:ln w="12700">
-            <a:solidFill>
-              <a:srgbClr val="E5E7EB"/>
-            </a:solidFill>
-            <a:prstDash val="solid"/>
-          </a:ln>
-        </p:spPr>
-      </p:sp>
-      <p:sp>
-        <p:nvSpPr>
-          <p:cNvPr id="42" name="Text 40"/>
-          <p:cNvSpPr/>
-          <p:nvPr/>
-        </p:nvSpPr>
-        <p:spPr>
-          <a:xfrm>
-            <a:off x="5943600" y="3584448"/>
-            <a:ext cx="1463040" cy="420624"/>
-          </a:xfrm>
-          <a:prstGeom prst="rect">
-            <a:avLst/>
-          </a:prstGeom>
-          <a:noFill/>
-          <a:ln/>
-        </p:spPr>
-        <p:txBody>
-          <a:bodyPr wrap="square" lIns="0" tIns="0" rIns="0" bIns="0" rtlCol="0" anchor="ctr"/>
-          <a:lstStyle/>
-          <a:p>
-            <a:pPr algn="ctr" indent="0" marL="0">
-              <a:buNone/>
-            </a:pPr>
-            <a:r>
-              <a:rPr lang="en-US" sz="1300" b="1" dirty="0">
-                <a:solidFill>
-                  <a:srgbClr val="9D174D"/>
-                </a:solidFill>
-                <a:latin typeface="Trebuchet MS" pitchFamily="34" charset="0"/>
-                <a:ea typeface="Trebuchet MS" pitchFamily="34" charset="-122"/>
-                <a:cs typeface="Trebuchet MS" pitchFamily="34" charset="-120"/>
-              </a:rPr>
-              <a:t>-ed</a:t>
-            </a:r>
-            <a:endParaRPr lang="en-US" sz="1300" dirty="0"/>
-          </a:p>
-        </p:txBody>
-      </p:sp>
-      <p:sp>
-        <p:nvSpPr>
-          <p:cNvPr id="43" name="Text 41"/>
-          <p:cNvSpPr/>
-          <p:nvPr/>
-        </p:nvSpPr>
-        <p:spPr>
-          <a:xfrm>
-            <a:off x="365760" y="4178808"/>
+            <a:off x="365760" y="3721608"/>
             <a:ext cx="1097280" cy="420624"/>
           </a:xfrm>
           <a:prstGeom prst="rect">
@@ -38850,14 +36696,14 @@
       </p:sp>
       <p:sp>
         <p:nvSpPr>
-          <p:cNvPr id="44" name="Shape 42"/>
-          <p:cNvSpPr/>
-          <p:nvPr/>
-        </p:nvSpPr>
-        <p:spPr>
-          <a:xfrm>
-            <a:off x="1508760" y="4178808"/>
-            <a:ext cx="822960" cy="420624"/>
+          <p:cNvPr id="35" name="Shape 33"/>
+          <p:cNvSpPr/>
+          <p:nvPr/>
+        </p:nvSpPr>
+        <p:spPr>
+          <a:xfrm>
+            <a:off x="1508760" y="3721608"/>
+            <a:ext cx="1389888" cy="420624"/>
           </a:xfrm>
           <a:prstGeom prst="rect">
             <a:avLst>
@@ -38865,11 +36711,11 @@
             </a:avLst>
           </a:prstGeom>
           <a:solidFill>
-            <a:srgbClr val="DDD6FE"/>
+            <a:srgbClr val="CCFBF1"/>
           </a:solidFill>
           <a:ln w="19050">
             <a:solidFill>
-              <a:srgbClr val="7C3AED"/>
+              <a:srgbClr val="0D9488"/>
             </a:solidFill>
             <a:prstDash val="solid"/>
           </a:ln>
@@ -38884,14 +36730,14 @@
       </p:sp>
       <p:sp>
         <p:nvSpPr>
-          <p:cNvPr id="45" name="Text 43"/>
-          <p:cNvSpPr/>
-          <p:nvPr/>
-        </p:nvSpPr>
-        <p:spPr>
-          <a:xfrm>
-            <a:off x="1508760" y="4178808"/>
-            <a:ext cx="822960" cy="420624"/>
+          <p:cNvPr id="36" name="Text 34"/>
+          <p:cNvSpPr/>
+          <p:nvPr/>
+        </p:nvSpPr>
+        <p:spPr>
+          <a:xfrm>
+            <a:off x="1508760" y="3721608"/>
+            <a:ext cx="1389888" cy="420624"/>
           </a:xfrm>
           <a:prstGeom prst="rect">
             <a:avLst/>
@@ -38909,13 +36755,13 @@
             <a:r>
               <a:rPr lang="en-US" sz="1300" b="1" dirty="0">
                 <a:solidFill>
-                  <a:srgbClr val="4C1D95"/>
+                  <a:srgbClr val="0F766E"/>
                 </a:solidFill>
                 <a:latin typeface="Trebuchet MS" pitchFamily="34" charset="0"/>
                 <a:ea typeface="Trebuchet MS" pitchFamily="34" charset="-122"/>
                 <a:cs typeface="Trebuchet MS" pitchFamily="34" charset="-120"/>
               </a:rPr>
-              <a:t>un-</a:t>
+              <a:t>'brisk'</a:t>
             </a:r>
             <a:endParaRPr lang="en-US" sz="1300" dirty="0"/>
           </a:p>
@@ -38923,13 +36769,13 @@
       </p:sp>
       <p:sp>
         <p:nvSpPr>
-          <p:cNvPr id="46" name="Text 44"/>
-          <p:cNvSpPr/>
-          <p:nvPr/>
-        </p:nvSpPr>
-        <p:spPr>
-          <a:xfrm>
-            <a:off x="2359152" y="4178808"/>
+          <p:cNvPr id="37" name="Text 35"/>
+          <p:cNvSpPr/>
+          <p:nvPr/>
+        </p:nvSpPr>
+        <p:spPr>
+          <a:xfrm>
+            <a:off x="2926080" y="3721608"/>
             <a:ext cx="320040" cy="420624"/>
           </a:xfrm>
           <a:prstGeom prst="rect">
@@ -38962,14 +36808,14 @@
       </p:sp>
       <p:sp>
         <p:nvSpPr>
-          <p:cNvPr id="47" name="Shape 45"/>
-          <p:cNvSpPr/>
-          <p:nvPr/>
-        </p:nvSpPr>
-        <p:spPr>
-          <a:xfrm>
-            <a:off x="2706624" y="4178808"/>
-            <a:ext cx="1389888" cy="420624"/>
+          <p:cNvPr id="38" name="Shape 36"/>
+          <p:cNvSpPr/>
+          <p:nvPr/>
+        </p:nvSpPr>
+        <p:spPr>
+          <a:xfrm>
+            <a:off x="3273552" y="3721608"/>
+            <a:ext cx="822960" cy="420624"/>
           </a:xfrm>
           <a:prstGeom prst="rect">
             <a:avLst>
@@ -38977,11 +36823,11 @@
             </a:avLst>
           </a:prstGeom>
           <a:solidFill>
-            <a:srgbClr val="CCFBF1"/>
+            <a:srgbClr val="FCE7F3"/>
           </a:solidFill>
           <a:ln w="19050">
             <a:solidFill>
-              <a:srgbClr val="0D9488"/>
+              <a:srgbClr val="DB2777"/>
             </a:solidFill>
             <a:prstDash val="solid"/>
           </a:ln>
@@ -38996,14 +36842,14 @@
       </p:sp>
       <p:sp>
         <p:nvSpPr>
-          <p:cNvPr id="48" name="Text 46"/>
-          <p:cNvSpPr/>
-          <p:nvPr/>
-        </p:nvSpPr>
-        <p:spPr>
-          <a:xfrm>
-            <a:off x="2706624" y="4178808"/>
-            <a:ext cx="1389888" cy="420624"/>
+          <p:cNvPr id="39" name="Text 37"/>
+          <p:cNvSpPr/>
+          <p:nvPr/>
+        </p:nvSpPr>
+        <p:spPr>
+          <a:xfrm>
+            <a:off x="3273552" y="3721608"/>
+            <a:ext cx="822960" cy="420624"/>
           </a:xfrm>
           <a:prstGeom prst="rect">
             <a:avLst/>
@@ -39021,13 +36867,13 @@
             <a:r>
               <a:rPr lang="en-US" sz="1300" b="1" dirty="0">
                 <a:solidFill>
-                  <a:srgbClr val="0F766E"/>
+                  <a:srgbClr val="9D174D"/>
                 </a:solidFill>
                 <a:latin typeface="Trebuchet MS" pitchFamily="34" charset="0"/>
                 <a:ea typeface="Trebuchet MS" pitchFamily="34" charset="-122"/>
                 <a:cs typeface="Trebuchet MS" pitchFamily="34" charset="-120"/>
               </a:rPr>
-              <a:t>'brisk'</a:t>
+              <a:t>-er</a:t>
             </a:r>
             <a:endParaRPr lang="en-US" sz="1300" dirty="0"/>
           </a:p>
@@ -39035,14 +36881,14 @@
       </p:sp>
       <p:sp>
         <p:nvSpPr>
-          <p:cNvPr id="49" name="Text 47"/>
-          <p:cNvSpPr/>
-          <p:nvPr/>
-        </p:nvSpPr>
-        <p:spPr>
-          <a:xfrm>
-            <a:off x="4123944" y="4178808"/>
-            <a:ext cx="320040" cy="420624"/>
+          <p:cNvPr id="40" name="Text 38"/>
+          <p:cNvSpPr/>
+          <p:nvPr/>
+        </p:nvSpPr>
+        <p:spPr>
+          <a:xfrm>
+            <a:off x="4169664" y="3721608"/>
+            <a:ext cx="365760" cy="420624"/>
           </a:xfrm>
           <a:prstGeom prst="rect">
             <a:avLst/>
@@ -39058,30 +36904,30 @@
               <a:buNone/>
             </a:pPr>
             <a:r>
-              <a:rPr lang="en-US" sz="1400" dirty="0">
-                <a:solidFill>
-                  <a:srgbClr val="475569"/>
+              <a:rPr lang="en-US" sz="1800" b="1" dirty="0">
+                <a:solidFill>
+                  <a:srgbClr val="0D9488"/>
                 </a:solidFill>
                 <a:latin typeface="Trebuchet MS" pitchFamily="34" charset="0"/>
                 <a:ea typeface="Trebuchet MS" pitchFamily="34" charset="-122"/>
                 <a:cs typeface="Trebuchet MS" pitchFamily="34" charset="-120"/>
               </a:rPr>
-              <a:t>+</a:t>
-            </a:r>
-            <a:endParaRPr lang="en-US" sz="1400" dirty="0"/>
-          </a:p>
-        </p:txBody>
-      </p:sp>
-      <p:sp>
-        <p:nvSpPr>
-          <p:cNvPr id="50" name="Shape 48"/>
-          <p:cNvSpPr/>
-          <p:nvPr/>
-        </p:nvSpPr>
-        <p:spPr>
-          <a:xfrm>
-            <a:off x="4471416" y="4178808"/>
-            <a:ext cx="822960" cy="420624"/>
+              <a:t>=</a:t>
+            </a:r>
+            <a:endParaRPr lang="en-US" sz="1800" dirty="0"/>
+          </a:p>
+        </p:txBody>
+      </p:sp>
+      <p:sp>
+        <p:nvSpPr>
+          <p:cNvPr id="41" name="Shape 39"/>
+          <p:cNvSpPr/>
+          <p:nvPr/>
+        </p:nvSpPr>
+        <p:spPr>
+          <a:xfrm>
+            <a:off x="4581144" y="3721608"/>
+            <a:ext cx="2194560" cy="420624"/>
           </a:xfrm>
           <a:prstGeom prst="rect">
             <a:avLst>
@@ -39089,118 +36935,6 @@
             </a:avLst>
           </a:prstGeom>
           <a:solidFill>
-            <a:srgbClr val="FCE7F3"/>
-          </a:solidFill>
-          <a:ln w="19050">
-            <a:solidFill>
-              <a:srgbClr val="DB2777"/>
-            </a:solidFill>
-            <a:prstDash val="solid"/>
-          </a:ln>
-          <a:effectLst>
-            <a:outerShdw sx="100000" sy="100000" kx="0" ky="0" algn="bl" rotWithShape="0" blurRad="101600" dist="38100" dir="8100000">
-              <a:srgbClr val="000000">
-                <a:alpha val="12000"/>
-              </a:srgbClr>
-            </a:outerShdw>
-          </a:effectLst>
-        </p:spPr>
-      </p:sp>
-      <p:sp>
-        <p:nvSpPr>
-          <p:cNvPr id="51" name="Text 49"/>
-          <p:cNvSpPr/>
-          <p:nvPr/>
-        </p:nvSpPr>
-        <p:spPr>
-          <a:xfrm>
-            <a:off x="4471416" y="4178808"/>
-            <a:ext cx="822960" cy="420624"/>
-          </a:xfrm>
-          <a:prstGeom prst="rect">
-            <a:avLst/>
-          </a:prstGeom>
-          <a:noFill/>
-          <a:ln/>
-        </p:spPr>
-        <p:txBody>
-          <a:bodyPr wrap="square" lIns="0" tIns="0" rIns="0" bIns="0" rtlCol="0" anchor="ctr"/>
-          <a:lstStyle/>
-          <a:p>
-            <a:pPr algn="ctr" indent="0" marL="0">
-              <a:buNone/>
-            </a:pPr>
-            <a:r>
-              <a:rPr lang="en-US" sz="1300" b="1" dirty="0">
-                <a:solidFill>
-                  <a:srgbClr val="9D174D"/>
-                </a:solidFill>
-                <a:latin typeface="Trebuchet MS" pitchFamily="34" charset="0"/>
-                <a:ea typeface="Trebuchet MS" pitchFamily="34" charset="-122"/>
-                <a:cs typeface="Trebuchet MS" pitchFamily="34" charset="-120"/>
-              </a:rPr>
-              <a:t>-ly</a:t>
-            </a:r>
-            <a:endParaRPr lang="en-US" sz="1300" dirty="0"/>
-          </a:p>
-        </p:txBody>
-      </p:sp>
-      <p:sp>
-        <p:nvSpPr>
-          <p:cNvPr id="52" name="Text 50"/>
-          <p:cNvSpPr/>
-          <p:nvPr/>
-        </p:nvSpPr>
-        <p:spPr>
-          <a:xfrm>
-            <a:off x="5367528" y="4178808"/>
-            <a:ext cx="365760" cy="420624"/>
-          </a:xfrm>
-          <a:prstGeom prst="rect">
-            <a:avLst/>
-          </a:prstGeom>
-          <a:noFill/>
-          <a:ln/>
-        </p:spPr>
-        <p:txBody>
-          <a:bodyPr wrap="square" lIns="0" tIns="0" rIns="0" bIns="0" rtlCol="0" anchor="ctr"/>
-          <a:lstStyle/>
-          <a:p>
-            <a:pPr algn="ctr" indent="0" marL="0">
-              <a:buNone/>
-            </a:pPr>
-            <a:r>
-              <a:rPr lang="en-US" sz="1800" b="1" dirty="0">
-                <a:solidFill>
-                  <a:srgbClr val="0D9488"/>
-                </a:solidFill>
-                <a:latin typeface="Trebuchet MS" pitchFamily="34" charset="0"/>
-                <a:ea typeface="Trebuchet MS" pitchFamily="34" charset="-122"/>
-                <a:cs typeface="Trebuchet MS" pitchFamily="34" charset="-120"/>
-              </a:rPr>
-              <a:t>=</a:t>
-            </a:r>
-            <a:endParaRPr lang="en-US" sz="1800" dirty="0"/>
-          </a:p>
-        </p:txBody>
-      </p:sp>
-      <p:sp>
-        <p:nvSpPr>
-          <p:cNvPr id="53" name="Shape 51"/>
-          <p:cNvSpPr/>
-          <p:nvPr/>
-        </p:nvSpPr>
-        <p:spPr>
-          <a:xfrm>
-            <a:off x="5779008" y="4178808"/>
-            <a:ext cx="2194560" cy="420624"/>
-          </a:xfrm>
-          <a:prstGeom prst="rect">
-            <a:avLst>
-              <a:gd name="adj" fmla="val 17391"/>
-            </a:avLst>
-          </a:prstGeom>
-          <a:solidFill>
             <a:srgbClr val="0D9488"/>
           </a:solidFill>
           <a:ln w="12700">
@@ -39213,13 +36947,13 @@
       </p:sp>
       <p:sp>
         <p:nvSpPr>
-          <p:cNvPr id="54" name="Text 52"/>
-          <p:cNvSpPr/>
-          <p:nvPr/>
-        </p:nvSpPr>
-        <p:spPr>
-          <a:xfrm>
-            <a:off x="5779008" y="4178808"/>
+          <p:cNvPr id="42" name="Text 40"/>
+          <p:cNvSpPr/>
+          <p:nvPr/>
+        </p:nvSpPr>
+        <p:spPr>
+          <a:xfrm>
+            <a:off x="4581144" y="3721608"/>
             <a:ext cx="2194560" cy="420624"/>
           </a:xfrm>
           <a:prstGeom prst="rect">
@@ -39536,7 +37270,7 @@
                 <a:ea typeface="Calibri" pitchFamily="34" charset="-122"/>
                 <a:cs typeface="Calibri" pitchFamily="34" charset="-120"/>
               </a:rPr>
-              <a:t>Word Labs  •  wordlabs.app  •  Root: 'brisk' = quick, lively, and energetic</a:t>
+              <a:t>Word Labs  •  wordlabs.app  •  Root: 'brisk' = quick and energetic</a:t>
             </a:r>
             <a:endParaRPr lang="en-US" sz="800" dirty="0"/>
           </a:p>
@@ -39578,979 +37312,6 @@
               <a:t>Match the word to its meaning:</a:t>
             </a:r>
             <a:endParaRPr lang="en-US" sz="1300" dirty="0"/>
-          </a:p>
-        </p:txBody>
-      </p:sp>
-      <p:sp>
-        <p:nvSpPr>
-          <p:cNvPr id="11" name="Shape 9"/>
-          <p:cNvSpPr/>
-          <p:nvPr/>
-        </p:nvSpPr>
-        <p:spPr>
-          <a:xfrm>
-            <a:off x="365760" y="1188720"/>
-            <a:ext cx="2011680" cy="457200"/>
-          </a:xfrm>
-          <a:prstGeom prst="rect">
-            <a:avLst>
-              <a:gd name="adj" fmla="val 12000"/>
-            </a:avLst>
-          </a:prstGeom>
-          <a:solidFill>
-            <a:srgbClr val="EEF2FF"/>
-          </a:solidFill>
-          <a:ln w="12700">
-            <a:solidFill>
-              <a:srgbClr val="6366F1"/>
-            </a:solidFill>
-            <a:prstDash val="solid"/>
-          </a:ln>
-          <a:effectLst>
-            <a:outerShdw sx="100000" sy="100000" kx="0" ky="0" algn="bl" rotWithShape="0" blurRad="101600" dist="38100" dir="8100000">
-              <a:srgbClr val="000000">
-                <a:alpha val="12000"/>
-              </a:srgbClr>
-            </a:outerShdw>
-          </a:effectLst>
-        </p:spPr>
-      </p:sp>
-      <p:sp>
-        <p:nvSpPr>
-          <p:cNvPr id="12" name="Text 10"/>
-          <p:cNvSpPr/>
-          <p:nvPr/>
-        </p:nvSpPr>
-        <p:spPr>
-          <a:xfrm>
-            <a:off x="365760" y="1188720"/>
-            <a:ext cx="2011680" cy="457200"/>
-          </a:xfrm>
-          <a:prstGeom prst="rect">
-            <a:avLst/>
-          </a:prstGeom>
-          <a:noFill/>
-          <a:ln/>
-        </p:spPr>
-        <p:txBody>
-          <a:bodyPr wrap="square" lIns="0" tIns="0" rIns="0" bIns="0" rtlCol="0" anchor="ctr"/>
-          <a:lstStyle/>
-          <a:p>
-            <a:pPr algn="ctr" indent="0" marL="0">
-              <a:buNone/>
-            </a:pPr>
-            <a:r>
-              <a:rPr lang="en-US" sz="1200" b="1" dirty="0">
-                <a:solidFill>
-                  <a:srgbClr val="4338CA"/>
-                </a:solidFill>
-                <a:latin typeface="Trebuchet MS" pitchFamily="34" charset="0"/>
-                <a:ea typeface="Trebuchet MS" pitchFamily="34" charset="-122"/>
-                <a:cs typeface="Trebuchet MS" pitchFamily="34" charset="-120"/>
-              </a:rPr>
-              <a:t>brisk</a:t>
-            </a:r>
-            <a:endParaRPr lang="en-US" sz="1200" dirty="0"/>
-          </a:p>
-        </p:txBody>
-      </p:sp>
-      <p:sp>
-        <p:nvSpPr>
-          <p:cNvPr id="13" name="Shape 11"/>
-          <p:cNvSpPr/>
-          <p:nvPr/>
-        </p:nvSpPr>
-        <p:spPr>
-          <a:xfrm>
-            <a:off x="2514600" y="1188720"/>
-            <a:ext cx="6263640" cy="457200"/>
-          </a:xfrm>
-          <a:prstGeom prst="rect">
-            <a:avLst>
-              <a:gd name="adj" fmla="val 12000"/>
-            </a:avLst>
-          </a:prstGeom>
-          <a:solidFill>
-            <a:srgbClr val="F8FAFC"/>
-          </a:solidFill>
-          <a:ln w="12700">
-            <a:solidFill>
-              <a:srgbClr val="E2E8F0"/>
-            </a:solidFill>
-            <a:prstDash val="solid"/>
-          </a:ln>
-        </p:spPr>
-      </p:sp>
-      <p:sp>
-        <p:nvSpPr>
-          <p:cNvPr id="14" name="Text 12"/>
-          <p:cNvSpPr/>
-          <p:nvPr/>
-        </p:nvSpPr>
-        <p:spPr>
-          <a:xfrm>
-            <a:off x="2651760" y="1188720"/>
-            <a:ext cx="6035040" cy="457200"/>
-          </a:xfrm>
-          <a:prstGeom prst="rect">
-            <a:avLst/>
-          </a:prstGeom>
-          <a:noFill/>
-          <a:ln/>
-        </p:spPr>
-        <p:txBody>
-          <a:bodyPr wrap="square" rtlCol="0" anchor="ctr"/>
-          <a:lstStyle/>
-          <a:p>
-            <a:pPr algn="l" indent="0" marL="0">
-              <a:buNone/>
-            </a:pPr>
-            <a:r>
-              <a:rPr lang="en-US" sz="1200" dirty="0">
-                <a:solidFill>
-                  <a:srgbClr val="0F172A"/>
-                </a:solidFill>
-                <a:latin typeface="Calibri" pitchFamily="34" charset="0"/>
-                <a:ea typeface="Calibri" pitchFamily="34" charset="-122"/>
-                <a:cs typeface="Calibri" pitchFamily="34" charset="-120"/>
-              </a:rPr>
-              <a:t>Moving or doing something quickly and with lots of energy.</a:t>
-            </a:r>
-            <a:endParaRPr lang="en-US" sz="1200" dirty="0"/>
-          </a:p>
-        </p:txBody>
-      </p:sp>
-      <p:sp>
-        <p:nvSpPr>
-          <p:cNvPr id="15" name="Shape 13"/>
-          <p:cNvSpPr/>
-          <p:nvPr/>
-        </p:nvSpPr>
-        <p:spPr>
-          <a:xfrm>
-            <a:off x="365760" y="1719072"/>
-            <a:ext cx="2011680" cy="457200"/>
-          </a:xfrm>
-          <a:prstGeom prst="rect">
-            <a:avLst>
-              <a:gd name="adj" fmla="val 12000"/>
-            </a:avLst>
-          </a:prstGeom>
-          <a:solidFill>
-            <a:srgbClr val="EEF2FF"/>
-          </a:solidFill>
-          <a:ln w="12700">
-            <a:solidFill>
-              <a:srgbClr val="6366F1"/>
-            </a:solidFill>
-            <a:prstDash val="solid"/>
-          </a:ln>
-          <a:effectLst>
-            <a:outerShdw sx="100000" sy="100000" kx="0" ky="0" algn="bl" rotWithShape="0" blurRad="101600" dist="38100" dir="8100000">
-              <a:srgbClr val="000000">
-                <a:alpha val="12000"/>
-              </a:srgbClr>
-            </a:outerShdw>
-          </a:effectLst>
-        </p:spPr>
-      </p:sp>
-      <p:sp>
-        <p:nvSpPr>
-          <p:cNvPr id="16" name="Text 14"/>
-          <p:cNvSpPr/>
-          <p:nvPr/>
-        </p:nvSpPr>
-        <p:spPr>
-          <a:xfrm>
-            <a:off x="365760" y="1719072"/>
-            <a:ext cx="2011680" cy="457200"/>
-          </a:xfrm>
-          <a:prstGeom prst="rect">
-            <a:avLst/>
-          </a:prstGeom>
-          <a:noFill/>
-          <a:ln/>
-        </p:spPr>
-        <p:txBody>
-          <a:bodyPr wrap="square" lIns="0" tIns="0" rIns="0" bIns="0" rtlCol="0" anchor="ctr"/>
-          <a:lstStyle/>
-          <a:p>
-            <a:pPr algn="ctr" indent="0" marL="0">
-              <a:buNone/>
-            </a:pPr>
-            <a:r>
-              <a:rPr lang="en-US" sz="1200" b="1" dirty="0">
-                <a:solidFill>
-                  <a:srgbClr val="4338CA"/>
-                </a:solidFill>
-                <a:latin typeface="Trebuchet MS" pitchFamily="34" charset="0"/>
-                <a:ea typeface="Trebuchet MS" pitchFamily="34" charset="-122"/>
-                <a:cs typeface="Trebuchet MS" pitchFamily="34" charset="-120"/>
-              </a:rPr>
-              <a:t>briskly</a:t>
-            </a:r>
-            <a:endParaRPr lang="en-US" sz="1200" dirty="0"/>
-          </a:p>
-        </p:txBody>
-      </p:sp>
-      <p:sp>
-        <p:nvSpPr>
-          <p:cNvPr id="17" name="Shape 15"/>
-          <p:cNvSpPr/>
-          <p:nvPr/>
-        </p:nvSpPr>
-        <p:spPr>
-          <a:xfrm>
-            <a:off x="2514600" y="1719072"/>
-            <a:ext cx="6263640" cy="457200"/>
-          </a:xfrm>
-          <a:prstGeom prst="rect">
-            <a:avLst>
-              <a:gd name="adj" fmla="val 12000"/>
-            </a:avLst>
-          </a:prstGeom>
-          <a:solidFill>
-            <a:srgbClr val="F8FAFC"/>
-          </a:solidFill>
-          <a:ln w="12700">
-            <a:solidFill>
-              <a:srgbClr val="E2E8F0"/>
-            </a:solidFill>
-            <a:prstDash val="solid"/>
-          </a:ln>
-        </p:spPr>
-      </p:sp>
-      <p:sp>
-        <p:nvSpPr>
-          <p:cNvPr id="18" name="Text 16"/>
-          <p:cNvSpPr/>
-          <p:nvPr/>
-        </p:nvSpPr>
-        <p:spPr>
-          <a:xfrm>
-            <a:off x="2651760" y="1719072"/>
-            <a:ext cx="6035040" cy="457200"/>
-          </a:xfrm>
-          <a:prstGeom prst="rect">
-            <a:avLst/>
-          </a:prstGeom>
-          <a:noFill/>
-          <a:ln/>
-        </p:spPr>
-        <p:txBody>
-          <a:bodyPr wrap="square" rtlCol="0" anchor="ctr"/>
-          <a:lstStyle/>
-          <a:p>
-            <a:pPr algn="l" indent="0" marL="0">
-              <a:buNone/>
-            </a:pPr>
-            <a:r>
-              <a:rPr lang="en-US" sz="1200" dirty="0">
-                <a:solidFill>
-                  <a:srgbClr val="0F172A"/>
-                </a:solidFill>
-                <a:latin typeface="Calibri" pitchFamily="34" charset="0"/>
-                <a:ea typeface="Calibri" pitchFamily="34" charset="-122"/>
-                <a:cs typeface="Calibri" pitchFamily="34" charset="-120"/>
-              </a:rPr>
-              <a:t>The quality of being quick, lively, and full of energy.</a:t>
-            </a:r>
-            <a:endParaRPr lang="en-US" sz="1200" dirty="0"/>
-          </a:p>
-        </p:txBody>
-      </p:sp>
-      <p:sp>
-        <p:nvSpPr>
-          <p:cNvPr id="19" name="Shape 17"/>
-          <p:cNvSpPr/>
-          <p:nvPr/>
-        </p:nvSpPr>
-        <p:spPr>
-          <a:xfrm>
-            <a:off x="365760" y="2249424"/>
-            <a:ext cx="2011680" cy="457200"/>
-          </a:xfrm>
-          <a:prstGeom prst="rect">
-            <a:avLst>
-              <a:gd name="adj" fmla="val 12000"/>
-            </a:avLst>
-          </a:prstGeom>
-          <a:solidFill>
-            <a:srgbClr val="EEF2FF"/>
-          </a:solidFill>
-          <a:ln w="12700">
-            <a:solidFill>
-              <a:srgbClr val="6366F1"/>
-            </a:solidFill>
-            <a:prstDash val="solid"/>
-          </a:ln>
-          <a:effectLst>
-            <a:outerShdw sx="100000" sy="100000" kx="0" ky="0" algn="bl" rotWithShape="0" blurRad="101600" dist="38100" dir="8100000">
-              <a:srgbClr val="000000">
-                <a:alpha val="12000"/>
-              </a:srgbClr>
-            </a:outerShdw>
-          </a:effectLst>
-        </p:spPr>
-      </p:sp>
-      <p:sp>
-        <p:nvSpPr>
-          <p:cNvPr id="20" name="Text 18"/>
-          <p:cNvSpPr/>
-          <p:nvPr/>
-        </p:nvSpPr>
-        <p:spPr>
-          <a:xfrm>
-            <a:off x="365760" y="2249424"/>
-            <a:ext cx="2011680" cy="457200"/>
-          </a:xfrm>
-          <a:prstGeom prst="rect">
-            <a:avLst/>
-          </a:prstGeom>
-          <a:noFill/>
-          <a:ln/>
-        </p:spPr>
-        <p:txBody>
-          <a:bodyPr wrap="square" lIns="0" tIns="0" rIns="0" bIns="0" rtlCol="0" anchor="ctr"/>
-          <a:lstStyle/>
-          <a:p>
-            <a:pPr algn="ctr" indent="0" marL="0">
-              <a:buNone/>
-            </a:pPr>
-            <a:r>
-              <a:rPr lang="en-US" sz="1200" b="1" dirty="0">
-                <a:solidFill>
-                  <a:srgbClr val="4338CA"/>
-                </a:solidFill>
-                <a:latin typeface="Trebuchet MS" pitchFamily="34" charset="0"/>
-                <a:ea typeface="Trebuchet MS" pitchFamily="34" charset="-122"/>
-                <a:cs typeface="Trebuchet MS" pitchFamily="34" charset="-120"/>
-              </a:rPr>
-              <a:t>briskness</a:t>
-            </a:r>
-            <a:endParaRPr lang="en-US" sz="1200" dirty="0"/>
-          </a:p>
-        </p:txBody>
-      </p:sp>
-      <p:sp>
-        <p:nvSpPr>
-          <p:cNvPr id="21" name="Shape 19"/>
-          <p:cNvSpPr/>
-          <p:nvPr/>
-        </p:nvSpPr>
-        <p:spPr>
-          <a:xfrm>
-            <a:off x="2514600" y="2249424"/>
-            <a:ext cx="6263640" cy="457200"/>
-          </a:xfrm>
-          <a:prstGeom prst="rect">
-            <a:avLst>
-              <a:gd name="adj" fmla="val 12000"/>
-            </a:avLst>
-          </a:prstGeom>
-          <a:solidFill>
-            <a:srgbClr val="F8FAFC"/>
-          </a:solidFill>
-          <a:ln w="12700">
-            <a:solidFill>
-              <a:srgbClr val="E2E8F0"/>
-            </a:solidFill>
-            <a:prstDash val="solid"/>
-          </a:ln>
-        </p:spPr>
-      </p:sp>
-      <p:sp>
-        <p:nvSpPr>
-          <p:cNvPr id="22" name="Text 20"/>
-          <p:cNvSpPr/>
-          <p:nvPr/>
-        </p:nvSpPr>
-        <p:spPr>
-          <a:xfrm>
-            <a:off x="2651760" y="2249424"/>
-            <a:ext cx="6035040" cy="457200"/>
-          </a:xfrm>
-          <a:prstGeom prst="rect">
-            <a:avLst/>
-          </a:prstGeom>
-          <a:noFill/>
-          <a:ln/>
-        </p:spPr>
-        <p:txBody>
-          <a:bodyPr wrap="square" rtlCol="0" anchor="ctr"/>
-          <a:lstStyle/>
-          <a:p>
-            <a:pPr algn="l" indent="0" marL="0">
-              <a:buNone/>
-            </a:pPr>
-            <a:r>
-              <a:rPr lang="en-US" sz="1200" dirty="0">
-                <a:solidFill>
-                  <a:srgbClr val="0F172A"/>
-                </a:solidFill>
-                <a:latin typeface="Calibri" pitchFamily="34" charset="0"/>
-                <a:ea typeface="Calibri" pitchFamily="34" charset="-122"/>
-                <a:cs typeface="Calibri" pitchFamily="34" charset="-120"/>
-              </a:rPr>
-              <a:t>The most quick and lively of all.</a:t>
-            </a:r>
-            <a:endParaRPr lang="en-US" sz="1200" dirty="0"/>
-          </a:p>
-        </p:txBody>
-      </p:sp>
-      <p:sp>
-        <p:nvSpPr>
-          <p:cNvPr id="23" name="Shape 21"/>
-          <p:cNvSpPr/>
-          <p:nvPr/>
-        </p:nvSpPr>
-        <p:spPr>
-          <a:xfrm>
-            <a:off x="365760" y="2779776"/>
-            <a:ext cx="2011680" cy="457200"/>
-          </a:xfrm>
-          <a:prstGeom prst="rect">
-            <a:avLst>
-              <a:gd name="adj" fmla="val 12000"/>
-            </a:avLst>
-          </a:prstGeom>
-          <a:solidFill>
-            <a:srgbClr val="EEF2FF"/>
-          </a:solidFill>
-          <a:ln w="12700">
-            <a:solidFill>
-              <a:srgbClr val="6366F1"/>
-            </a:solidFill>
-            <a:prstDash val="solid"/>
-          </a:ln>
-          <a:effectLst>
-            <a:outerShdw sx="100000" sy="100000" kx="0" ky="0" algn="bl" rotWithShape="0" blurRad="101600" dist="38100" dir="8100000">
-              <a:srgbClr val="000000">
-                <a:alpha val="12000"/>
-              </a:srgbClr>
-            </a:outerShdw>
-          </a:effectLst>
-        </p:spPr>
-      </p:sp>
-      <p:sp>
-        <p:nvSpPr>
-          <p:cNvPr id="24" name="Text 22"/>
-          <p:cNvSpPr/>
-          <p:nvPr/>
-        </p:nvSpPr>
-        <p:spPr>
-          <a:xfrm>
-            <a:off x="365760" y="2779776"/>
-            <a:ext cx="2011680" cy="457200"/>
-          </a:xfrm>
-          <a:prstGeom prst="rect">
-            <a:avLst/>
-          </a:prstGeom>
-          <a:noFill/>
-          <a:ln/>
-        </p:spPr>
-        <p:txBody>
-          <a:bodyPr wrap="square" lIns="0" tIns="0" rIns="0" bIns="0" rtlCol="0" anchor="ctr"/>
-          <a:lstStyle/>
-          <a:p>
-            <a:pPr algn="ctr" indent="0" marL="0">
-              <a:buNone/>
-            </a:pPr>
-            <a:r>
-              <a:rPr lang="en-US" sz="1200" b="1" dirty="0">
-                <a:solidFill>
-                  <a:srgbClr val="4338CA"/>
-                </a:solidFill>
-                <a:latin typeface="Trebuchet MS" pitchFamily="34" charset="0"/>
-                <a:ea typeface="Trebuchet MS" pitchFamily="34" charset="-122"/>
-                <a:cs typeface="Trebuchet MS" pitchFamily="34" charset="-120"/>
-              </a:rPr>
-              <a:t>brisker</a:t>
-            </a:r>
-            <a:endParaRPr lang="en-US" sz="1200" dirty="0"/>
-          </a:p>
-        </p:txBody>
-      </p:sp>
-      <p:sp>
-        <p:nvSpPr>
-          <p:cNvPr id="25" name="Shape 23"/>
-          <p:cNvSpPr/>
-          <p:nvPr/>
-        </p:nvSpPr>
-        <p:spPr>
-          <a:xfrm>
-            <a:off x="2514600" y="2779776"/>
-            <a:ext cx="6263640" cy="457200"/>
-          </a:xfrm>
-          <a:prstGeom prst="rect">
-            <a:avLst>
-              <a:gd name="adj" fmla="val 12000"/>
-            </a:avLst>
-          </a:prstGeom>
-          <a:solidFill>
-            <a:srgbClr val="F8FAFC"/>
-          </a:solidFill>
-          <a:ln w="12700">
-            <a:solidFill>
-              <a:srgbClr val="E2E8F0"/>
-            </a:solidFill>
-            <a:prstDash val="solid"/>
-          </a:ln>
-        </p:spPr>
-      </p:sp>
-      <p:sp>
-        <p:nvSpPr>
-          <p:cNvPr id="26" name="Text 24"/>
-          <p:cNvSpPr/>
-          <p:nvPr/>
-        </p:nvSpPr>
-        <p:spPr>
-          <a:xfrm>
-            <a:off x="2651760" y="2779776"/>
-            <a:ext cx="6035040" cy="457200"/>
-          </a:xfrm>
-          <a:prstGeom prst="rect">
-            <a:avLst/>
-          </a:prstGeom>
-          <a:noFill/>
-          <a:ln/>
-        </p:spPr>
-        <p:txBody>
-          <a:bodyPr wrap="square" rtlCol="0" anchor="ctr"/>
-          <a:lstStyle/>
-          <a:p>
-            <a:pPr algn="l" indent="0" marL="0">
-              <a:buNone/>
-            </a:pPr>
-            <a:r>
-              <a:rPr lang="en-US" sz="1200" dirty="0">
-                <a:solidFill>
-                  <a:srgbClr val="0F172A"/>
-                </a:solidFill>
-                <a:latin typeface="Calibri" pitchFamily="34" charset="0"/>
-                <a:ea typeface="Calibri" pitchFamily="34" charset="-122"/>
-                <a:cs typeface="Calibri" pitchFamily="34" charset="-120"/>
-              </a:rPr>
-              <a:t>Made something move or happen more quickly and energetically.</a:t>
-            </a:r>
-            <a:endParaRPr lang="en-US" sz="1200" dirty="0"/>
-          </a:p>
-        </p:txBody>
-      </p:sp>
-      <p:sp>
-        <p:nvSpPr>
-          <p:cNvPr id="27" name="Shape 25"/>
-          <p:cNvSpPr/>
-          <p:nvPr/>
-        </p:nvSpPr>
-        <p:spPr>
-          <a:xfrm>
-            <a:off x="365760" y="3310128"/>
-            <a:ext cx="2011680" cy="457200"/>
-          </a:xfrm>
-          <a:prstGeom prst="rect">
-            <a:avLst>
-              <a:gd name="adj" fmla="val 12000"/>
-            </a:avLst>
-          </a:prstGeom>
-          <a:solidFill>
-            <a:srgbClr val="EEF2FF"/>
-          </a:solidFill>
-          <a:ln w="12700">
-            <a:solidFill>
-              <a:srgbClr val="6366F1"/>
-            </a:solidFill>
-            <a:prstDash val="solid"/>
-          </a:ln>
-          <a:effectLst>
-            <a:outerShdw sx="100000" sy="100000" kx="0" ky="0" algn="bl" rotWithShape="0" blurRad="101600" dist="38100" dir="8100000">
-              <a:srgbClr val="000000">
-                <a:alpha val="12000"/>
-              </a:srgbClr>
-            </a:outerShdw>
-          </a:effectLst>
-        </p:spPr>
-      </p:sp>
-      <p:sp>
-        <p:nvSpPr>
-          <p:cNvPr id="28" name="Text 26"/>
-          <p:cNvSpPr/>
-          <p:nvPr/>
-        </p:nvSpPr>
-        <p:spPr>
-          <a:xfrm>
-            <a:off x="365760" y="3310128"/>
-            <a:ext cx="2011680" cy="457200"/>
-          </a:xfrm>
-          <a:prstGeom prst="rect">
-            <a:avLst/>
-          </a:prstGeom>
-          <a:noFill/>
-          <a:ln/>
-        </p:spPr>
-        <p:txBody>
-          <a:bodyPr wrap="square" lIns="0" tIns="0" rIns="0" bIns="0" rtlCol="0" anchor="ctr"/>
-          <a:lstStyle/>
-          <a:p>
-            <a:pPr algn="ctr" indent="0" marL="0">
-              <a:buNone/>
-            </a:pPr>
-            <a:r>
-              <a:rPr lang="en-US" sz="1200" b="1" dirty="0">
-                <a:solidFill>
-                  <a:srgbClr val="4338CA"/>
-                </a:solidFill>
-                <a:latin typeface="Trebuchet MS" pitchFamily="34" charset="0"/>
-                <a:ea typeface="Trebuchet MS" pitchFamily="34" charset="-122"/>
-                <a:cs typeface="Trebuchet MS" pitchFamily="34" charset="-120"/>
-              </a:rPr>
-              <a:t>briskest</a:t>
-            </a:r>
-            <a:endParaRPr lang="en-US" sz="1200" dirty="0"/>
-          </a:p>
-        </p:txBody>
-      </p:sp>
-      <p:sp>
-        <p:nvSpPr>
-          <p:cNvPr id="29" name="Shape 27"/>
-          <p:cNvSpPr/>
-          <p:nvPr/>
-        </p:nvSpPr>
-        <p:spPr>
-          <a:xfrm>
-            <a:off x="2514600" y="3310128"/>
-            <a:ext cx="6263640" cy="457200"/>
-          </a:xfrm>
-          <a:prstGeom prst="rect">
-            <a:avLst>
-              <a:gd name="adj" fmla="val 12000"/>
-            </a:avLst>
-          </a:prstGeom>
-          <a:solidFill>
-            <a:srgbClr val="F8FAFC"/>
-          </a:solidFill>
-          <a:ln w="12700">
-            <a:solidFill>
-              <a:srgbClr val="E2E8F0"/>
-            </a:solidFill>
-            <a:prstDash val="solid"/>
-          </a:ln>
-        </p:spPr>
-      </p:sp>
-      <p:sp>
-        <p:nvSpPr>
-          <p:cNvPr id="30" name="Text 28"/>
-          <p:cNvSpPr/>
-          <p:nvPr/>
-        </p:nvSpPr>
-        <p:spPr>
-          <a:xfrm>
-            <a:off x="2651760" y="3310128"/>
-            <a:ext cx="6035040" cy="457200"/>
-          </a:xfrm>
-          <a:prstGeom prst="rect">
-            <a:avLst/>
-          </a:prstGeom>
-          <a:noFill/>
-          <a:ln/>
-        </p:spPr>
-        <p:txBody>
-          <a:bodyPr wrap="square" rtlCol="0" anchor="ctr"/>
-          <a:lstStyle/>
-          <a:p>
-            <a:pPr algn="l" indent="0" marL="0">
-              <a:buNone/>
-            </a:pPr>
-            <a:r>
-              <a:rPr lang="en-US" sz="1200" dirty="0">
-                <a:solidFill>
-                  <a:srgbClr val="0F172A"/>
-                </a:solidFill>
-                <a:latin typeface="Calibri" pitchFamily="34" charset="0"/>
-                <a:ea typeface="Calibri" pitchFamily="34" charset="-122"/>
-                <a:cs typeface="Calibri" pitchFamily="34" charset="-120"/>
-              </a:rPr>
-              <a:t>More quick and lively than something else.</a:t>
-            </a:r>
-            <a:endParaRPr lang="en-US" sz="1200" dirty="0"/>
-          </a:p>
-        </p:txBody>
-      </p:sp>
-      <p:sp>
-        <p:nvSpPr>
-          <p:cNvPr id="31" name="Shape 29"/>
-          <p:cNvSpPr/>
-          <p:nvPr/>
-        </p:nvSpPr>
-        <p:spPr>
-          <a:xfrm>
-            <a:off x="365760" y="3840480"/>
-            <a:ext cx="2011680" cy="457200"/>
-          </a:xfrm>
-          <a:prstGeom prst="rect">
-            <a:avLst>
-              <a:gd name="adj" fmla="val 12000"/>
-            </a:avLst>
-          </a:prstGeom>
-          <a:solidFill>
-            <a:srgbClr val="EEF2FF"/>
-          </a:solidFill>
-          <a:ln w="12700">
-            <a:solidFill>
-              <a:srgbClr val="6366F1"/>
-            </a:solidFill>
-            <a:prstDash val="solid"/>
-          </a:ln>
-          <a:effectLst>
-            <a:outerShdw sx="100000" sy="100000" kx="0" ky="0" algn="bl" rotWithShape="0" blurRad="101600" dist="38100" dir="8100000">
-              <a:srgbClr val="000000">
-                <a:alpha val="12000"/>
-              </a:srgbClr>
-            </a:outerShdw>
-          </a:effectLst>
-        </p:spPr>
-      </p:sp>
-      <p:sp>
-        <p:nvSpPr>
-          <p:cNvPr id="32" name="Text 30"/>
-          <p:cNvSpPr/>
-          <p:nvPr/>
-        </p:nvSpPr>
-        <p:spPr>
-          <a:xfrm>
-            <a:off x="365760" y="3840480"/>
-            <a:ext cx="2011680" cy="457200"/>
-          </a:xfrm>
-          <a:prstGeom prst="rect">
-            <a:avLst/>
-          </a:prstGeom>
-          <a:noFill/>
-          <a:ln/>
-        </p:spPr>
-        <p:txBody>
-          <a:bodyPr wrap="square" lIns="0" tIns="0" rIns="0" bIns="0" rtlCol="0" anchor="ctr"/>
-          <a:lstStyle/>
-          <a:p>
-            <a:pPr algn="ctr" indent="0" marL="0">
-              <a:buNone/>
-            </a:pPr>
-            <a:r>
-              <a:rPr lang="en-US" sz="1200" b="1" dirty="0">
-                <a:solidFill>
-                  <a:srgbClr val="4338CA"/>
-                </a:solidFill>
-                <a:latin typeface="Trebuchet MS" pitchFamily="34" charset="0"/>
-                <a:ea typeface="Trebuchet MS" pitchFamily="34" charset="-122"/>
-                <a:cs typeface="Trebuchet MS" pitchFamily="34" charset="-120"/>
-              </a:rPr>
-              <a:t>brisked</a:t>
-            </a:r>
-            <a:endParaRPr lang="en-US" sz="1200" dirty="0"/>
-          </a:p>
-        </p:txBody>
-      </p:sp>
-      <p:sp>
-        <p:nvSpPr>
-          <p:cNvPr id="33" name="Shape 31"/>
-          <p:cNvSpPr/>
-          <p:nvPr/>
-        </p:nvSpPr>
-        <p:spPr>
-          <a:xfrm>
-            <a:off x="2514600" y="3840480"/>
-            <a:ext cx="6263640" cy="457200"/>
-          </a:xfrm>
-          <a:prstGeom prst="rect">
-            <a:avLst>
-              <a:gd name="adj" fmla="val 12000"/>
-            </a:avLst>
-          </a:prstGeom>
-          <a:solidFill>
-            <a:srgbClr val="F8FAFC"/>
-          </a:solidFill>
-          <a:ln w="12700">
-            <a:solidFill>
-              <a:srgbClr val="E2E8F0"/>
-            </a:solidFill>
-            <a:prstDash val="solid"/>
-          </a:ln>
-        </p:spPr>
-      </p:sp>
-      <p:sp>
-        <p:nvSpPr>
-          <p:cNvPr id="34" name="Text 32"/>
-          <p:cNvSpPr/>
-          <p:nvPr/>
-        </p:nvSpPr>
-        <p:spPr>
-          <a:xfrm>
-            <a:off x="2651760" y="3840480"/>
-            <a:ext cx="6035040" cy="457200"/>
-          </a:xfrm>
-          <a:prstGeom prst="rect">
-            <a:avLst/>
-          </a:prstGeom>
-          <a:noFill/>
-          <a:ln/>
-        </p:spPr>
-        <p:txBody>
-          <a:bodyPr wrap="square" rtlCol="0" anchor="ctr"/>
-          <a:lstStyle/>
-          <a:p>
-            <a:pPr algn="l" indent="0" marL="0">
-              <a:buNone/>
-            </a:pPr>
-            <a:r>
-              <a:rPr lang="en-US" sz="1200" dirty="0">
-                <a:solidFill>
-                  <a:srgbClr val="0F172A"/>
-                </a:solidFill>
-                <a:latin typeface="Calibri" pitchFamily="34" charset="0"/>
-                <a:ea typeface="Calibri" pitchFamily="34" charset="-122"/>
-                <a:cs typeface="Calibri" pitchFamily="34" charset="-120"/>
-              </a:rPr>
-              <a:t>Not quick or lively; slow and without much energy.</a:t>
-            </a:r>
-            <a:endParaRPr lang="en-US" sz="1200" dirty="0"/>
-          </a:p>
-        </p:txBody>
-      </p:sp>
-      <p:sp>
-        <p:nvSpPr>
-          <p:cNvPr id="35" name="Shape 33"/>
-          <p:cNvSpPr/>
-          <p:nvPr/>
-        </p:nvSpPr>
-        <p:spPr>
-          <a:xfrm>
-            <a:off x="365760" y="4370832"/>
-            <a:ext cx="2011680" cy="457200"/>
-          </a:xfrm>
-          <a:prstGeom prst="rect">
-            <a:avLst>
-              <a:gd name="adj" fmla="val 12000"/>
-            </a:avLst>
-          </a:prstGeom>
-          <a:solidFill>
-            <a:srgbClr val="EEF2FF"/>
-          </a:solidFill>
-          <a:ln w="12700">
-            <a:solidFill>
-              <a:srgbClr val="6366F1"/>
-            </a:solidFill>
-            <a:prstDash val="solid"/>
-          </a:ln>
-          <a:effectLst>
-            <a:outerShdw sx="100000" sy="100000" kx="0" ky="0" algn="bl" rotWithShape="0" blurRad="101600" dist="38100" dir="8100000">
-              <a:srgbClr val="000000">
-                <a:alpha val="12000"/>
-              </a:srgbClr>
-            </a:outerShdw>
-          </a:effectLst>
-        </p:spPr>
-      </p:sp>
-      <p:sp>
-        <p:nvSpPr>
-          <p:cNvPr id="36" name="Text 34"/>
-          <p:cNvSpPr/>
-          <p:nvPr/>
-        </p:nvSpPr>
-        <p:spPr>
-          <a:xfrm>
-            <a:off x="365760" y="4370832"/>
-            <a:ext cx="2011680" cy="457200"/>
-          </a:xfrm>
-          <a:prstGeom prst="rect">
-            <a:avLst/>
-          </a:prstGeom>
-          <a:noFill/>
-          <a:ln/>
-        </p:spPr>
-        <p:txBody>
-          <a:bodyPr wrap="square" lIns="0" tIns="0" rIns="0" bIns="0" rtlCol="0" anchor="ctr"/>
-          <a:lstStyle/>
-          <a:p>
-            <a:pPr algn="ctr" indent="0" marL="0">
-              <a:buNone/>
-            </a:pPr>
-            <a:r>
-              <a:rPr lang="en-US" sz="1200" b="1" dirty="0">
-                <a:solidFill>
-                  <a:srgbClr val="4338CA"/>
-                </a:solidFill>
-                <a:latin typeface="Trebuchet MS" pitchFamily="34" charset="0"/>
-                <a:ea typeface="Trebuchet MS" pitchFamily="34" charset="-122"/>
-                <a:cs typeface="Trebuchet MS" pitchFamily="34" charset="-120"/>
-              </a:rPr>
-              <a:t>unbrisk</a:t>
-            </a:r>
-            <a:endParaRPr lang="en-US" sz="1200" dirty="0"/>
-          </a:p>
-        </p:txBody>
-      </p:sp>
-      <p:sp>
-        <p:nvSpPr>
-          <p:cNvPr id="37" name="Shape 35"/>
-          <p:cNvSpPr/>
-          <p:nvPr/>
-        </p:nvSpPr>
-        <p:spPr>
-          <a:xfrm>
-            <a:off x="2514600" y="4370832"/>
-            <a:ext cx="6263640" cy="457200"/>
-          </a:xfrm>
-          <a:prstGeom prst="rect">
-            <a:avLst>
-              <a:gd name="adj" fmla="val 12000"/>
-            </a:avLst>
-          </a:prstGeom>
-          <a:solidFill>
-            <a:srgbClr val="F8FAFC"/>
-          </a:solidFill>
-          <a:ln w="12700">
-            <a:solidFill>
-              <a:srgbClr val="E2E8F0"/>
-            </a:solidFill>
-            <a:prstDash val="solid"/>
-          </a:ln>
-        </p:spPr>
-      </p:sp>
-      <p:sp>
-        <p:nvSpPr>
-          <p:cNvPr id="38" name="Text 36"/>
-          <p:cNvSpPr/>
-          <p:nvPr/>
-        </p:nvSpPr>
-        <p:spPr>
-          <a:xfrm>
-            <a:off x="2651760" y="4370832"/>
-            <a:ext cx="6035040" cy="457200"/>
-          </a:xfrm>
-          <a:prstGeom prst="rect">
-            <a:avLst/>
-          </a:prstGeom>
-          <a:noFill/>
-          <a:ln/>
-        </p:spPr>
-        <p:txBody>
-          <a:bodyPr wrap="square" rtlCol="0" anchor="ctr"/>
-          <a:lstStyle/>
-          <a:p>
-            <a:pPr algn="l" indent="0" marL="0">
-              <a:buNone/>
-            </a:pPr>
-            <a:r>
-              <a:rPr lang="en-US" sz="1200" dirty="0">
-                <a:solidFill>
-                  <a:srgbClr val="0F172A"/>
-                </a:solidFill>
-                <a:latin typeface="Calibri" pitchFamily="34" charset="0"/>
-                <a:ea typeface="Calibri" pitchFamily="34" charset="-122"/>
-                <a:cs typeface="Calibri" pitchFamily="34" charset="-120"/>
-              </a:rPr>
-              <a:t>Doing something in a quick, lively way — like walking briskly to school.</a:t>
-            </a:r>
-            <a:endParaRPr lang="en-US" sz="1200" dirty="0"/>
           </a:p>
         </p:txBody>
       </p:sp>
@@ -40840,7 +37601,7 @@
                 <a:ea typeface="Calibri" pitchFamily="34" charset="-122"/>
                 <a:cs typeface="Calibri" pitchFamily="34" charset="-120"/>
               </a:rPr>
-              <a:t>Word Labs  •  wordlabs.app  •  Root: 'brisk' = quick, lively, and energetic</a:t>
+              <a:t>Word Labs  •  wordlabs.app  •  Root: 'brisk' = quick and energetic</a:t>
             </a:r>
             <a:endParaRPr lang="en-US" sz="800" dirty="0"/>
           </a:p>
@@ -41043,7 +37804,7 @@
                 <a:ea typeface="Calibri" pitchFamily="34" charset="-122"/>
                 <a:cs typeface="Calibri" pitchFamily="34" charset="-120"/>
               </a:rPr>
-              <a:t>The coach asked us to walk briskly around the oval to warm up before the game.</a:t>
+              <a:t>They went for a brisk walk before breakfast.</a:t>
             </a:r>
             <a:endParaRPr lang="en-US" sz="1500" dirty="0"/>
           </a:p>
@@ -41207,7 +37968,7 @@
                 <a:ea typeface="Calibri" pitchFamily="34" charset="-122"/>
                 <a:cs typeface="Calibri" pitchFamily="34" charset="-120"/>
               </a:rPr>
-              <a:t>There was a briskness in the winter air that made everyone pull their jackets tighter.</a:t>
+              <a:t>Today's walk was brisker than yesterday's stroll.</a:t>
             </a:r>
             <a:endParaRPr lang="en-US" sz="1500" dirty="0"/>
           </a:p>
@@ -41371,7 +38132,7 @@
                 <a:ea typeface="Calibri" pitchFamily="34" charset="-122"/>
                 <a:cs typeface="Calibri" pitchFamily="34" charset="-120"/>
               </a:rPr>
-              <a:t>She was the briskest walker in the whole class, always arriving at the next spot first.</a:t>
+              <a:t>She walked briskly to catch the bus on time.</a:t>
             </a:r>
             <a:endParaRPr lang="en-US" sz="1500" dirty="0"/>
           </a:p>
